--- a/07_fMRI_Connectivity/07_02-03_fMRI_connectivity.pptx
+++ b/07_fMRI_Connectivity/07_02-03_fMRI_connectivity.pptx
@@ -297,7 +297,7 @@
               <a:pPr>
                 <a:defRPr/>
               </a:pPr>
-              <a:t>10/07/2026</a:t>
+              <a:t>26/07/2026</a:t>
             </a:fld>
             <a:endParaRPr lang="en-GB"/>
           </a:p>
@@ -7776,7 +7776,7 @@
               <a:pPr>
                 <a:defRPr/>
               </a:pPr>
-              <a:t>10/07/2026</a:t>
+              <a:t>26/07/2026</a:t>
             </a:fld>
             <a:endParaRPr lang="en-GB"/>
           </a:p>
@@ -8006,7 +8006,7 @@
               <a:pPr>
                 <a:defRPr/>
               </a:pPr>
-              <a:t>10/07/2026</a:t>
+              <a:t>26/07/2026</a:t>
             </a:fld>
             <a:endParaRPr lang="en-GB"/>
           </a:p>
@@ -8236,7 +8236,7 @@
               <a:pPr>
                 <a:defRPr/>
               </a:pPr>
-              <a:t>10/07/2026</a:t>
+              <a:t>26/07/2026</a:t>
             </a:fld>
             <a:endParaRPr lang="en-GB"/>
           </a:p>
@@ -8653,7 +8653,7 @@
               <a:pPr>
                 <a:defRPr/>
               </a:pPr>
-              <a:t>10/07/2026</a:t>
+              <a:t>26/07/2026</a:t>
             </a:fld>
             <a:endParaRPr lang="en-GB"/>
           </a:p>
@@ -8949,7 +8949,7 @@
               <a:pPr>
                 <a:defRPr/>
               </a:pPr>
-              <a:t>10/07/2026</a:t>
+              <a:t>26/07/2026</a:t>
             </a:fld>
             <a:endParaRPr lang="en-GB"/>
           </a:p>
@@ -9295,7 +9295,7 @@
               <a:pPr>
                 <a:defRPr/>
               </a:pPr>
-              <a:t>10/07/2026</a:t>
+              <a:t>26/07/2026</a:t>
             </a:fld>
             <a:endParaRPr lang="en-GB"/>
           </a:p>
@@ -9781,7 +9781,7 @@
               <a:pPr>
                 <a:defRPr/>
               </a:pPr>
-              <a:t>10/07/2026</a:t>
+              <a:t>26/07/2026</a:t>
             </a:fld>
             <a:endParaRPr lang="en-GB"/>
           </a:p>
@@ -9951,7 +9951,7 @@
               <a:pPr>
                 <a:defRPr/>
               </a:pPr>
-              <a:t>10/07/2026</a:t>
+              <a:t>26/07/2026</a:t>
             </a:fld>
             <a:endParaRPr lang="en-GB"/>
           </a:p>
@@ -10090,7 +10090,7 @@
               <a:pPr>
                 <a:defRPr/>
               </a:pPr>
-              <a:t>10/07/2026</a:t>
+              <a:t>26/07/2026</a:t>
             </a:fld>
             <a:endParaRPr lang="en-GB"/>
           </a:p>
@@ -10384,7 +10384,7 @@
               <a:pPr>
                 <a:defRPr/>
               </a:pPr>
-              <a:t>10/07/2026</a:t>
+              <a:t>26/07/2026</a:t>
             </a:fld>
             <a:endParaRPr lang="en-GB"/>
           </a:p>
@@ -10698,7 +10698,7 @@
               <a:pPr>
                 <a:defRPr/>
               </a:pPr>
-              <a:t>10/07/2026</a:t>
+              <a:t>26/07/2026</a:t>
             </a:fld>
             <a:endParaRPr lang="en-GB"/>
           </a:p>
@@ -10864,7 +10864,7 @@
               <a:pPr>
                 <a:defRPr/>
               </a:pPr>
-              <a:t>10/07/2026</a:t>
+              <a:t>26/07/2026</a:t>
             </a:fld>
             <a:endParaRPr lang="en-GB"/>
           </a:p>
@@ -36932,7 +36932,25 @@
               <a:rPr lang="de-CH" altLang="en-US" sz="1600" dirty="0">
                 <a:latin typeface="Arial Unicode MS" pitchFamily="34" charset="-128"/>
               </a:rPr>
-              <a:t>(whole-brain) decomposition, eg </a:t>
+              <a:t>(</a:t>
+            </a:r>
+            <a:r>
+              <a:rPr lang="de-CH" altLang="en-US" sz="1600" dirty="0" smtClean="0">
+                <a:latin typeface="Arial Unicode MS" pitchFamily="34" charset="-128"/>
+              </a:rPr>
+              <a:t>whole-brain, voxel-wise) </a:t>
+            </a:r>
+            <a:r>
+              <a:rPr lang="de-CH" altLang="en-US" sz="1600" dirty="0">
+                <a:latin typeface="Arial Unicode MS" pitchFamily="34" charset="-128"/>
+              </a:rPr>
+              <a:t>decomposition, </a:t>
+            </a:r>
+            <a:r>
+              <a:rPr lang="de-CH" altLang="en-US" sz="1600" dirty="0" smtClean="0">
+                <a:latin typeface="Arial Unicode MS" pitchFamily="34" charset="-128"/>
+              </a:rPr>
+              <a:t>eg PCA, </a:t>
             </a:r>
             <a:r>
               <a:rPr lang="de-CH" altLang="en-US" sz="1600" dirty="0" smtClean="0">
@@ -36951,10 +36969,16 @@
               </a:spcBef>
             </a:pPr>
             <a:r>
+              <a:rPr lang="de-CH" altLang="en-US" sz="1600" dirty="0" smtClean="0">
+                <a:latin typeface="Arial Unicode MS" pitchFamily="34" charset="-128"/>
+              </a:rPr>
+              <a:t>ROI(parcel)-based</a:t>
+            </a:r>
+            <a:r>
               <a:rPr lang="de-CH" altLang="en-US" sz="1600" dirty="0">
                 <a:latin typeface="Arial Unicode MS" pitchFamily="34" charset="-128"/>
               </a:rPr>
-              <a:t>ROI-based, pairwise connectivity </a:t>
+              <a:t>, pairwise connectivity </a:t>
             </a:r>
             <a:endParaRPr lang="de-CH" altLang="en-US" sz="1600" dirty="0" smtClean="0">
               <a:latin typeface="Arial Unicode MS" pitchFamily="34" charset="-128"/>
@@ -37008,7 +37032,13 @@
               <a:rPr lang="de-CH" altLang="en-US" sz="2000" dirty="0" smtClean="0">
                 <a:latin typeface="Arial Unicode MS" pitchFamily="34" charset="-128"/>
               </a:rPr>
-              <a:t>Network-based models</a:t>
+              <a:t>Network-based </a:t>
+            </a:r>
+            <a:r>
+              <a:rPr lang="de-CH" altLang="en-US" sz="2000" dirty="0" smtClean="0">
+                <a:latin typeface="Arial Unicode MS" pitchFamily="34" charset="-128"/>
+              </a:rPr>
+              <a:t>models</a:t>
             </a:r>
             <a:endParaRPr lang="de-CH" altLang="en-US" sz="2000" dirty="0">
               <a:latin typeface="Arial Unicode MS" pitchFamily="34" charset="-128"/>
@@ -37027,8 +37057,17 @@
               <a:rPr lang="de-CH" altLang="en-US" sz="1600" dirty="0" smtClean="0">
                 <a:latin typeface="Arial Unicode MS" pitchFamily="34" charset="-128"/>
               </a:rPr>
-              <a:t>Dynamic Causal Modelling (DCM) (Not covered in Notebooks)</a:t>
-            </a:r>
+              <a:t>Dynamic Causal Modelling (DCM) </a:t>
+            </a:r>
+            <a:r>
+              <a:rPr lang="de-CH" altLang="en-US" sz="1600" dirty="0" smtClean="0">
+                <a:latin typeface="Arial Unicode MS" pitchFamily="34" charset="-128"/>
+              </a:rPr>
+              <a:t>(effective connectivity; not covered in notebooks)</a:t>
+            </a:r>
+            <a:endParaRPr lang="de-CH" altLang="en-US" sz="1600" dirty="0" smtClean="0">
+              <a:latin typeface="Arial Unicode MS" pitchFamily="34" charset="-128"/>
+            </a:endParaRPr>
           </a:p>
           <a:p>
             <a:pPr lvl="1" eaLnBrk="1" hangingPunct="1">
@@ -37049,13 +37088,13 @@
               <a:rPr lang="de-CH" altLang="en-US" sz="1600" dirty="0">
                 <a:latin typeface="Arial Unicode MS" pitchFamily="34" charset="-128"/>
               </a:rPr>
-              <a:t>summaries of functional networks (see nb10 slides</a:t>
+              <a:t>summaries of functional </a:t>
             </a:r>
             <a:r>
               <a:rPr lang="de-CH" altLang="en-US" sz="1600" dirty="0" smtClean="0">
                 <a:latin typeface="Arial Unicode MS" pitchFamily="34" charset="-128"/>
               </a:rPr>
-              <a:t>)</a:t>
+              <a:t>networks</a:t>
             </a:r>
             <a:endParaRPr lang="de-CH" altLang="en-US" sz="1600" dirty="0">
               <a:latin typeface="Arial Unicode MS" pitchFamily="34" charset="-128"/>
@@ -37168,15 +37207,33 @@
                                   </p:childTnLst>
                                 </p:cTn>
                               </p:par>
+                            </p:childTnLst>
+                          </p:cTn>
+                        </p:par>
+                      </p:childTnLst>
+                    </p:cTn>
+                  </p:par>
+                  <p:par>
+                    <p:cTn id="7" fill="hold">
+                      <p:stCondLst>
+                        <p:cond delay="indefinite"/>
+                      </p:stCondLst>
+                      <p:childTnLst>
+                        <p:par>
+                          <p:cTn id="8" fill="hold">
+                            <p:stCondLst>
+                              <p:cond delay="0"/>
+                            </p:stCondLst>
+                            <p:childTnLst>
                               <p:par>
-                                <p:cTn id="7" presetID="1" presetClass="entr" presetSubtype="0" fill="hold" grpId="0" nodeType="withEffect">
+                                <p:cTn id="9" presetID="1" presetClass="entr" presetSubtype="0" fill="hold" grpId="0" nodeType="clickEffect">
                                   <p:stCondLst>
                                     <p:cond delay="0"/>
                                   </p:stCondLst>
                                   <p:childTnLst>
                                     <p:set>
                                       <p:cBhvr>
-                                        <p:cTn id="8" dur="1" fill="hold">
+                                        <p:cTn id="10" dur="1" fill="hold">
                                           <p:stCondLst>
                                             <p:cond delay="0"/>
                                           </p:stCondLst>
@@ -37199,15 +37256,33 @@
                                   </p:childTnLst>
                                 </p:cTn>
                               </p:par>
+                            </p:childTnLst>
+                          </p:cTn>
+                        </p:par>
+                      </p:childTnLst>
+                    </p:cTn>
+                  </p:par>
+                  <p:par>
+                    <p:cTn id="11" fill="hold">
+                      <p:stCondLst>
+                        <p:cond delay="indefinite"/>
+                      </p:stCondLst>
+                      <p:childTnLst>
+                        <p:par>
+                          <p:cTn id="12" fill="hold">
+                            <p:stCondLst>
+                              <p:cond delay="0"/>
+                            </p:stCondLst>
+                            <p:childTnLst>
                               <p:par>
-                                <p:cTn id="9" presetID="1" presetClass="entr" presetSubtype="0" fill="hold" grpId="0" nodeType="withEffect">
+                                <p:cTn id="13" presetID="1" presetClass="entr" presetSubtype="0" fill="hold" grpId="0" nodeType="clickEffect">
                                   <p:stCondLst>
                                     <p:cond delay="0"/>
                                   </p:stCondLst>
                                   <p:childTnLst>
                                     <p:set>
                                       <p:cBhvr>
-                                        <p:cTn id="10" dur="1" fill="hold">
+                                        <p:cTn id="14" dur="1" fill="hold">
                                           <p:stCondLst>
                                             <p:cond delay="0"/>
                                           </p:stCondLst>
@@ -37230,37 +37305,6 @@
                                   </p:childTnLst>
                                 </p:cTn>
                               </p:par>
-                              <p:par>
-                                <p:cTn id="11" presetID="1" presetClass="entr" presetSubtype="0" fill="hold" grpId="0" nodeType="withEffect">
-                                  <p:stCondLst>
-                                    <p:cond delay="0"/>
-                                  </p:stCondLst>
-                                  <p:childTnLst>
-                                    <p:set>
-                                      <p:cBhvr>
-                                        <p:cTn id="12" dur="1" fill="hold">
-                                          <p:stCondLst>
-                                            <p:cond delay="0"/>
-                                          </p:stCondLst>
-                                        </p:cTn>
-                                        <p:tgtEl>
-                                          <p:spTgt spid="175106">
-                                            <p:txEl>
-                                              <p:pRg st="3" end="3"/>
-                                            </p:txEl>
-                                          </p:spTgt>
-                                        </p:tgtEl>
-                                        <p:attrNameLst>
-                                          <p:attrName>style.visibility</p:attrName>
-                                        </p:attrNameLst>
-                                      </p:cBhvr>
-                                      <p:to>
-                                        <p:strVal val="visible"/>
-                                      </p:to>
-                                    </p:set>
-                                  </p:childTnLst>
-                                </p:cTn>
-                              </p:par>
                             </p:childTnLst>
                           </p:cTn>
                         </p:par>
@@ -37268,50 +37312,19 @@
                     </p:cTn>
                   </p:par>
                   <p:par>
-                    <p:cTn id="13" fill="hold">
+                    <p:cTn id="15" fill="hold">
                       <p:stCondLst>
                         <p:cond delay="indefinite"/>
                       </p:stCondLst>
                       <p:childTnLst>
                         <p:par>
-                          <p:cTn id="14" fill="hold">
+                          <p:cTn id="16" fill="hold">
                             <p:stCondLst>
                               <p:cond delay="0"/>
                             </p:stCondLst>
                             <p:childTnLst>
                               <p:par>
-                                <p:cTn id="15" presetID="1" presetClass="entr" presetSubtype="0" fill="hold" grpId="0" nodeType="clickEffect">
-                                  <p:stCondLst>
-                                    <p:cond delay="0"/>
-                                  </p:stCondLst>
-                                  <p:childTnLst>
-                                    <p:set>
-                                      <p:cBhvr>
-                                        <p:cTn id="16" dur="1" fill="hold">
-                                          <p:stCondLst>
-                                            <p:cond delay="0"/>
-                                          </p:stCondLst>
-                                        </p:cTn>
-                                        <p:tgtEl>
-                                          <p:spTgt spid="175106">
-                                            <p:txEl>
-                                              <p:pRg st="4" end="4"/>
-                                            </p:txEl>
-                                          </p:spTgt>
-                                        </p:tgtEl>
-                                        <p:attrNameLst>
-                                          <p:attrName>style.visibility</p:attrName>
-                                        </p:attrNameLst>
-                                      </p:cBhvr>
-                                      <p:to>
-                                        <p:strVal val="visible"/>
-                                      </p:to>
-                                    </p:set>
-                                  </p:childTnLst>
-                                </p:cTn>
-                              </p:par>
-                              <p:par>
-                                <p:cTn id="17" presetID="1" presetClass="entr" presetSubtype="0" fill="hold" grpId="0" nodeType="withEffect">
+                                <p:cTn id="17" presetID="1" presetClass="entr" presetSubtype="0" fill="hold" grpId="0" nodeType="clickEffect">
                                   <p:stCondLst>
                                     <p:cond delay="0"/>
                                   </p:stCondLst>
@@ -37326,7 +37339,7 @@
                                         <p:tgtEl>
                                           <p:spTgt spid="175106">
                                             <p:txEl>
-                                              <p:pRg st="5" end="5"/>
+                                              <p:pRg st="3" end="3"/>
                                             </p:txEl>
                                           </p:spTgt>
                                         </p:tgtEl>
@@ -37375,7 +37388,7 @@
                                         <p:tgtEl>
                                           <p:spTgt spid="175106">
                                             <p:txEl>
-                                              <p:pRg st="6" end="6"/>
+                                              <p:pRg st="4" end="4"/>
                                             </p:txEl>
                                           </p:spTgt>
                                         </p:tgtEl>
@@ -37424,7 +37437,7 @@
                                         <p:tgtEl>
                                           <p:spTgt spid="175106">
                                             <p:txEl>
-                                              <p:pRg st="7" end="7"/>
+                                              <p:pRg st="5" end="5"/>
                                             </p:txEl>
                                           </p:spTgt>
                                         </p:tgtEl>
@@ -37466,6 +37479,104 @@
                                     <p:set>
                                       <p:cBhvr>
                                         <p:cTn id="30" dur="1" fill="hold">
+                                          <p:stCondLst>
+                                            <p:cond delay="0"/>
+                                          </p:stCondLst>
+                                        </p:cTn>
+                                        <p:tgtEl>
+                                          <p:spTgt spid="175106">
+                                            <p:txEl>
+                                              <p:pRg st="6" end="6"/>
+                                            </p:txEl>
+                                          </p:spTgt>
+                                        </p:tgtEl>
+                                        <p:attrNameLst>
+                                          <p:attrName>style.visibility</p:attrName>
+                                        </p:attrNameLst>
+                                      </p:cBhvr>
+                                      <p:to>
+                                        <p:strVal val="visible"/>
+                                      </p:to>
+                                    </p:set>
+                                  </p:childTnLst>
+                                </p:cTn>
+                              </p:par>
+                            </p:childTnLst>
+                          </p:cTn>
+                        </p:par>
+                      </p:childTnLst>
+                    </p:cTn>
+                  </p:par>
+                  <p:par>
+                    <p:cTn id="31" fill="hold">
+                      <p:stCondLst>
+                        <p:cond delay="indefinite"/>
+                      </p:stCondLst>
+                      <p:childTnLst>
+                        <p:par>
+                          <p:cTn id="32" fill="hold">
+                            <p:stCondLst>
+                              <p:cond delay="0"/>
+                            </p:stCondLst>
+                            <p:childTnLst>
+                              <p:par>
+                                <p:cTn id="33" presetID="1" presetClass="entr" presetSubtype="0" fill="hold" grpId="0" nodeType="clickEffect">
+                                  <p:stCondLst>
+                                    <p:cond delay="0"/>
+                                  </p:stCondLst>
+                                  <p:childTnLst>
+                                    <p:set>
+                                      <p:cBhvr>
+                                        <p:cTn id="34" dur="1" fill="hold">
+                                          <p:stCondLst>
+                                            <p:cond delay="0"/>
+                                          </p:stCondLst>
+                                        </p:cTn>
+                                        <p:tgtEl>
+                                          <p:spTgt spid="175106">
+                                            <p:txEl>
+                                              <p:pRg st="7" end="7"/>
+                                            </p:txEl>
+                                          </p:spTgt>
+                                        </p:tgtEl>
+                                        <p:attrNameLst>
+                                          <p:attrName>style.visibility</p:attrName>
+                                        </p:attrNameLst>
+                                      </p:cBhvr>
+                                      <p:to>
+                                        <p:strVal val="visible"/>
+                                      </p:to>
+                                    </p:set>
+                                  </p:childTnLst>
+                                </p:cTn>
+                              </p:par>
+                            </p:childTnLst>
+                          </p:cTn>
+                        </p:par>
+                      </p:childTnLst>
+                    </p:cTn>
+                  </p:par>
+                  <p:par>
+                    <p:cTn id="35" fill="hold">
+                      <p:stCondLst>
+                        <p:cond delay="indefinite"/>
+                      </p:stCondLst>
+                      <p:childTnLst>
+                        <p:par>
+                          <p:cTn id="36" fill="hold">
+                            <p:stCondLst>
+                              <p:cond delay="0"/>
+                            </p:stCondLst>
+                            <p:childTnLst>
+                              <p:par>
+                                <p:cTn id="37" presetID="1" presetClass="entr" presetSubtype="0" fill="hold" grpId="0" nodeType="clickEffect">
+                                  <p:stCondLst>
+                                    <p:cond delay="0"/>
+                                  </p:stCondLst>
+                                  <p:childTnLst>
+                                    <p:set>
+                                      <p:cBhvr>
+                                        <p:cTn id="38" dur="1" fill="hold">
                                           <p:stCondLst>
                                             <p:cond delay="0"/>
                                           </p:stCondLst>

--- a/07_fMRI_Connectivity/07_02-03_fMRI_connectivity.pptx
+++ b/07_fMRI_Connectivity/07_02-03_fMRI_connectivity.pptx
@@ -5,42 +5,43 @@
     <p:sldMasterId id="2147483648" r:id="rId1"/>
   </p:sldMasterIdLst>
   <p:notesMasterIdLst>
-    <p:notesMasterId r:id="rId35"/>
+    <p:notesMasterId r:id="rId36"/>
   </p:notesMasterIdLst>
   <p:sldIdLst>
     <p:sldId id="397" r:id="rId2"/>
     <p:sldId id="383" r:id="rId3"/>
     <p:sldId id="384" r:id="rId4"/>
-    <p:sldId id="458" r:id="rId5"/>
-    <p:sldId id="468" r:id="rId6"/>
-    <p:sldId id="469" r:id="rId7"/>
-    <p:sldId id="470" r:id="rId8"/>
-    <p:sldId id="471" r:id="rId9"/>
-    <p:sldId id="475" r:id="rId10"/>
-    <p:sldId id="472" r:id="rId11"/>
-    <p:sldId id="473" r:id="rId12"/>
-    <p:sldId id="474" r:id="rId13"/>
-    <p:sldId id="481" r:id="rId14"/>
-    <p:sldId id="486" r:id="rId15"/>
-    <p:sldId id="485" r:id="rId16"/>
-    <p:sldId id="447" r:id="rId17"/>
-    <p:sldId id="452" r:id="rId18"/>
-    <p:sldId id="449" r:id="rId19"/>
-    <p:sldId id="476" r:id="rId20"/>
-    <p:sldId id="477" r:id="rId21"/>
-    <p:sldId id="478" r:id="rId22"/>
-    <p:sldId id="479" r:id="rId23"/>
-    <p:sldId id="480" r:id="rId24"/>
-    <p:sldId id="462" r:id="rId25"/>
-    <p:sldId id="429" r:id="rId26"/>
-    <p:sldId id="457" r:id="rId27"/>
-    <p:sldId id="398" r:id="rId28"/>
-    <p:sldId id="430" r:id="rId29"/>
-    <p:sldId id="388" r:id="rId30"/>
-    <p:sldId id="389" r:id="rId31"/>
-    <p:sldId id="394" r:id="rId32"/>
-    <p:sldId id="395" r:id="rId33"/>
-    <p:sldId id="453" r:id="rId34"/>
+    <p:sldId id="487" r:id="rId5"/>
+    <p:sldId id="458" r:id="rId6"/>
+    <p:sldId id="468" r:id="rId7"/>
+    <p:sldId id="469" r:id="rId8"/>
+    <p:sldId id="470" r:id="rId9"/>
+    <p:sldId id="471" r:id="rId10"/>
+    <p:sldId id="475" r:id="rId11"/>
+    <p:sldId id="472" r:id="rId12"/>
+    <p:sldId id="473" r:id="rId13"/>
+    <p:sldId id="474" r:id="rId14"/>
+    <p:sldId id="481" r:id="rId15"/>
+    <p:sldId id="486" r:id="rId16"/>
+    <p:sldId id="485" r:id="rId17"/>
+    <p:sldId id="447" r:id="rId18"/>
+    <p:sldId id="452" r:id="rId19"/>
+    <p:sldId id="449" r:id="rId20"/>
+    <p:sldId id="476" r:id="rId21"/>
+    <p:sldId id="477" r:id="rId22"/>
+    <p:sldId id="478" r:id="rId23"/>
+    <p:sldId id="479" r:id="rId24"/>
+    <p:sldId id="480" r:id="rId25"/>
+    <p:sldId id="462" r:id="rId26"/>
+    <p:sldId id="429" r:id="rId27"/>
+    <p:sldId id="457" r:id="rId28"/>
+    <p:sldId id="398" r:id="rId29"/>
+    <p:sldId id="430" r:id="rId30"/>
+    <p:sldId id="388" r:id="rId31"/>
+    <p:sldId id="389" r:id="rId32"/>
+    <p:sldId id="394" r:id="rId33"/>
+    <p:sldId id="395" r:id="rId34"/>
+    <p:sldId id="453" r:id="rId35"/>
   </p:sldIdLst>
   <p:sldSz cx="9144000" cy="6858000" type="screen4x3"/>
   <p:notesSz cx="6858000" cy="9144000"/>
@@ -297,7 +298,7 @@
               <a:pPr>
                 <a:defRPr/>
               </a:pPr>
-              <a:t>26/07/2026</a:t>
+              <a:t>28/07/2026</a:t>
             </a:fld>
             <a:endParaRPr lang="en-GB"/>
           </a:p>
@@ -1125,7 +1126,7 @@
             <a:fld id="{AFF26464-037E-4544-B04A-3770F6C1C55D}" type="slidenum">
               <a:rPr lang="en-GB" altLang="en-US" smtClean="0"/>
               <a:pPr eaLnBrk="1" hangingPunct="1"/>
-              <a:t>19</a:t>
+              <a:t>16</a:t>
             </a:fld>
             <a:endParaRPr lang="en-GB" altLang="en-US" smtClean="0"/>
           </a:p>
@@ -1294,7 +1295,7 @@
     </p:spTree>
     <p:extLst>
       <p:ext uri="{BB962C8B-B14F-4D97-AF65-F5344CB8AC3E}">
-        <p14:creationId xmlns:p14="http://schemas.microsoft.com/office/powerpoint/2010/main" val="2274813685"/>
+        <p14:creationId xmlns:p14="http://schemas.microsoft.com/office/powerpoint/2010/main" val="3514414303"/>
       </p:ext>
     </p:extLst>
   </p:cSld>
@@ -1637,7 +1638,7 @@
     </p:spTree>
     <p:extLst>
       <p:ext uri="{BB962C8B-B14F-4D97-AF65-F5344CB8AC3E}">
-        <p14:creationId xmlns:p14="http://schemas.microsoft.com/office/powerpoint/2010/main" val="1470948055"/>
+        <p14:creationId xmlns:p14="http://schemas.microsoft.com/office/powerpoint/2010/main" val="2274813685"/>
       </p:ext>
     </p:extLst>
   </p:cSld>
@@ -1666,7 +1667,7 @@
       </p:grpSpPr>
       <p:sp>
         <p:nvSpPr>
-          <p:cNvPr id="65538" name="Rectangle 7"/>
+          <p:cNvPr id="64514" name="Rectangle 7"/>
           <p:cNvSpPr>
             <a:spLocks noGrp="1" noChangeArrowheads="1"/>
           </p:cNvSpPr>
@@ -1808,10 +1809,10 @@
           </a:lstStyle>
           <a:p>
             <a:pPr eaLnBrk="1" hangingPunct="1"/>
-            <a:fld id="{0312ADED-879B-4476-B1FC-20A9C5FFD56F}" type="slidenum">
+            <a:fld id="{AFF26464-037E-4544-B04A-3770F6C1C55D}" type="slidenum">
               <a:rPr lang="en-GB" altLang="en-US" smtClean="0"/>
               <a:pPr eaLnBrk="1" hangingPunct="1"/>
-              <a:t>24</a:t>
+              <a:t>21</a:t>
             </a:fld>
             <a:endParaRPr lang="en-GB" altLang="en-US" smtClean="0"/>
           </a:p>
@@ -1819,7 +1820,7 @@
       </p:sp>
       <p:sp>
         <p:nvSpPr>
-          <p:cNvPr id="65539" name="Rectangle 2"/>
+          <p:cNvPr id="64515" name="Rectangle 2"/>
           <p:cNvSpPr>
             <a:spLocks noGrp="1" noRot="1" noChangeAspect="1" noChangeArrowheads="1" noTextEdit="1"/>
           </p:cNvSpPr>
@@ -1833,7 +1834,7 @@
       </p:sp>
       <p:sp>
         <p:nvSpPr>
-          <p:cNvPr id="65540" name="Notes Placeholder 4"/>
+          <p:cNvPr id="64516" name="Notes Placeholder 4"/>
           <p:cNvSpPr>
             <a:spLocks noGrp="1"/>
           </p:cNvSpPr>
@@ -1980,7 +1981,7 @@
     </p:spTree>
     <p:extLst>
       <p:ext uri="{BB962C8B-B14F-4D97-AF65-F5344CB8AC3E}">
-        <p14:creationId xmlns:p14="http://schemas.microsoft.com/office/powerpoint/2010/main" val="467500394"/>
+        <p14:creationId xmlns:p14="http://schemas.microsoft.com/office/powerpoint/2010/main" val="1470948055"/>
       </p:ext>
     </p:extLst>
   </p:cSld>
@@ -2321,6 +2322,11 @@
         </p:txBody>
       </p:sp>
     </p:spTree>
+    <p:extLst>
+      <p:ext uri="{BB962C8B-B14F-4D97-AF65-F5344CB8AC3E}">
+        <p14:creationId xmlns:p14="http://schemas.microsoft.com/office/powerpoint/2010/main" val="467500394"/>
+      </p:ext>
+    </p:extLst>
   </p:cSld>
   <p:clrMapOvr>
     <a:masterClrMapping/>
@@ -2329,6 +2335,344 @@
 </file>
 
 <file path=ppt/notesSlides/notesSlide14.xml><?xml version="1.0" encoding="utf-8"?>
+<p:notes xmlns:a="http://schemas.openxmlformats.org/drawingml/2006/main" xmlns:r="http://schemas.openxmlformats.org/officeDocument/2006/relationships" xmlns:p="http://schemas.openxmlformats.org/presentationml/2006/main">
+  <p:cSld>
+    <p:spTree>
+      <p:nvGrpSpPr>
+        <p:cNvPr id="1" name=""/>
+        <p:cNvGrpSpPr/>
+        <p:nvPr/>
+      </p:nvGrpSpPr>
+      <p:grpSpPr>
+        <a:xfrm>
+          <a:off x="0" y="0"/>
+          <a:ext cx="0" cy="0"/>
+          <a:chOff x="0" y="0"/>
+          <a:chExt cx="0" cy="0"/>
+        </a:xfrm>
+      </p:grpSpPr>
+      <p:sp>
+        <p:nvSpPr>
+          <p:cNvPr id="65538" name="Rectangle 7"/>
+          <p:cNvSpPr>
+            <a:spLocks noGrp="1" noChangeArrowheads="1"/>
+          </p:cNvSpPr>
+          <p:nvPr>
+            <p:ph type="sldNum" sz="quarter" idx="5"/>
+          </p:nvPr>
+        </p:nvSpPr>
+        <p:spPr>
+          <a:noFill/>
+          <a:ln/>
+          <a:extLst>
+            <a:ext uri="{909E8E84-426E-40DD-AFC4-6F175D3DCCD1}">
+              <a14:hiddenFill xmlns:a14="http://schemas.microsoft.com/office/drawing/2010/main">
+                <a:solidFill>
+                  <a:srgbClr val="FFFFFF"/>
+                </a:solidFill>
+              </a14:hiddenFill>
+            </a:ext>
+            <a:ext uri="{91240B29-F687-4F45-9708-019B960494DF}">
+              <a14:hiddenLine xmlns:a14="http://schemas.microsoft.com/office/drawing/2010/main" w="9525">
+                <a:solidFill>
+                  <a:srgbClr val="000000"/>
+                </a:solidFill>
+                <a:miter lim="800000"/>
+                <a:headEnd/>
+                <a:tailEnd/>
+              </a14:hiddenLine>
+            </a:ext>
+          </a:extLst>
+        </p:spPr>
+        <p:txBody>
+          <a:bodyPr/>
+          <a:lstStyle>
+            <a:lvl1pPr eaLnBrk="0" hangingPunct="0">
+              <a:defRPr>
+                <a:solidFill>
+                  <a:schemeClr val="tx1"/>
+                </a:solidFill>
+                <a:latin typeface="Arial" pitchFamily="34" charset="0"/>
+                <a:cs typeface="Arial" pitchFamily="34" charset="0"/>
+              </a:defRPr>
+            </a:lvl1pPr>
+            <a:lvl2pPr marL="742950" indent="-285750" eaLnBrk="0" hangingPunct="0">
+              <a:defRPr>
+                <a:solidFill>
+                  <a:schemeClr val="tx1"/>
+                </a:solidFill>
+                <a:latin typeface="Arial" pitchFamily="34" charset="0"/>
+                <a:cs typeface="Arial" pitchFamily="34" charset="0"/>
+              </a:defRPr>
+            </a:lvl2pPr>
+            <a:lvl3pPr marL="1143000" indent="-228600" eaLnBrk="0" hangingPunct="0">
+              <a:defRPr>
+                <a:solidFill>
+                  <a:schemeClr val="tx1"/>
+                </a:solidFill>
+                <a:latin typeface="Arial" pitchFamily="34" charset="0"/>
+                <a:cs typeface="Arial" pitchFamily="34" charset="0"/>
+              </a:defRPr>
+            </a:lvl3pPr>
+            <a:lvl4pPr marL="1600200" indent="-228600" eaLnBrk="0" hangingPunct="0">
+              <a:defRPr>
+                <a:solidFill>
+                  <a:schemeClr val="tx1"/>
+                </a:solidFill>
+                <a:latin typeface="Arial" pitchFamily="34" charset="0"/>
+                <a:cs typeface="Arial" pitchFamily="34" charset="0"/>
+              </a:defRPr>
+            </a:lvl4pPr>
+            <a:lvl5pPr marL="2057400" indent="-228600" eaLnBrk="0" hangingPunct="0">
+              <a:defRPr>
+                <a:solidFill>
+                  <a:schemeClr val="tx1"/>
+                </a:solidFill>
+                <a:latin typeface="Arial" pitchFamily="34" charset="0"/>
+                <a:cs typeface="Arial" pitchFamily="34" charset="0"/>
+              </a:defRPr>
+            </a:lvl5pPr>
+            <a:lvl6pPr marL="2514600" indent="-228600" eaLnBrk="0" fontAlgn="base" hangingPunct="0">
+              <a:spcBef>
+                <a:spcPct val="0"/>
+              </a:spcBef>
+              <a:spcAft>
+                <a:spcPct val="0"/>
+              </a:spcAft>
+              <a:defRPr>
+                <a:solidFill>
+                  <a:schemeClr val="tx1"/>
+                </a:solidFill>
+                <a:latin typeface="Arial" pitchFamily="34" charset="0"/>
+                <a:cs typeface="Arial" pitchFamily="34" charset="0"/>
+              </a:defRPr>
+            </a:lvl6pPr>
+            <a:lvl7pPr marL="2971800" indent="-228600" eaLnBrk="0" fontAlgn="base" hangingPunct="0">
+              <a:spcBef>
+                <a:spcPct val="0"/>
+              </a:spcBef>
+              <a:spcAft>
+                <a:spcPct val="0"/>
+              </a:spcAft>
+              <a:defRPr>
+                <a:solidFill>
+                  <a:schemeClr val="tx1"/>
+                </a:solidFill>
+                <a:latin typeface="Arial" pitchFamily="34" charset="0"/>
+                <a:cs typeface="Arial" pitchFamily="34" charset="0"/>
+              </a:defRPr>
+            </a:lvl7pPr>
+            <a:lvl8pPr marL="3429000" indent="-228600" eaLnBrk="0" fontAlgn="base" hangingPunct="0">
+              <a:spcBef>
+                <a:spcPct val="0"/>
+              </a:spcBef>
+              <a:spcAft>
+                <a:spcPct val="0"/>
+              </a:spcAft>
+              <a:defRPr>
+                <a:solidFill>
+                  <a:schemeClr val="tx1"/>
+                </a:solidFill>
+                <a:latin typeface="Arial" pitchFamily="34" charset="0"/>
+                <a:cs typeface="Arial" pitchFamily="34" charset="0"/>
+              </a:defRPr>
+            </a:lvl8pPr>
+            <a:lvl9pPr marL="3886200" indent="-228600" eaLnBrk="0" fontAlgn="base" hangingPunct="0">
+              <a:spcBef>
+                <a:spcPct val="0"/>
+              </a:spcBef>
+              <a:spcAft>
+                <a:spcPct val="0"/>
+              </a:spcAft>
+              <a:defRPr>
+                <a:solidFill>
+                  <a:schemeClr val="tx1"/>
+                </a:solidFill>
+                <a:latin typeface="Arial" pitchFamily="34" charset="0"/>
+                <a:cs typeface="Arial" pitchFamily="34" charset="0"/>
+              </a:defRPr>
+            </a:lvl9pPr>
+          </a:lstStyle>
+          <a:p>
+            <a:pPr eaLnBrk="1" hangingPunct="1"/>
+            <a:fld id="{0312ADED-879B-4476-B1FC-20A9C5FFD56F}" type="slidenum">
+              <a:rPr lang="en-GB" altLang="en-US" smtClean="0"/>
+              <a:pPr eaLnBrk="1" hangingPunct="1"/>
+              <a:t>26</a:t>
+            </a:fld>
+            <a:endParaRPr lang="en-GB" altLang="en-US" smtClean="0"/>
+          </a:p>
+        </p:txBody>
+      </p:sp>
+      <p:sp>
+        <p:nvSpPr>
+          <p:cNvPr id="65539" name="Rectangle 2"/>
+          <p:cNvSpPr>
+            <a:spLocks noGrp="1" noRot="1" noChangeAspect="1" noChangeArrowheads="1" noTextEdit="1"/>
+          </p:cNvSpPr>
+          <p:nvPr>
+            <p:ph type="sldImg"/>
+          </p:nvPr>
+        </p:nvSpPr>
+        <p:spPr>
+          <a:ln/>
+        </p:spPr>
+      </p:sp>
+      <p:sp>
+        <p:nvSpPr>
+          <p:cNvPr id="65540" name="Notes Placeholder 4"/>
+          <p:cNvSpPr>
+            <a:spLocks noGrp="1"/>
+          </p:cNvSpPr>
+          <p:nvPr/>
+        </p:nvSpPr>
+        <p:spPr bwMode="auto">
+          <a:xfrm>
+            <a:off x="685800" y="4343400"/>
+            <a:ext cx="5486400" cy="4114800"/>
+          </a:xfrm>
+          <a:prstGeom prst="rect">
+            <a:avLst/>
+          </a:prstGeom>
+        </p:spPr>
+        <p:txBody>
+          <a:bodyPr/>
+          <a:lstStyle>
+            <a:lvl1pPr eaLnBrk="0" hangingPunct="0">
+              <a:spcBef>
+                <a:spcPct val="30000"/>
+              </a:spcBef>
+              <a:defRPr sz="1200">
+                <a:solidFill>
+                  <a:schemeClr val="tx1"/>
+                </a:solidFill>
+                <a:latin typeface="Arial" pitchFamily="34" charset="0"/>
+                <a:cs typeface="Arial" pitchFamily="34" charset="0"/>
+              </a:defRPr>
+            </a:lvl1pPr>
+            <a:lvl2pPr marL="742950" indent="-285750" eaLnBrk="0" hangingPunct="0">
+              <a:spcBef>
+                <a:spcPct val="30000"/>
+              </a:spcBef>
+              <a:defRPr sz="1200">
+                <a:solidFill>
+                  <a:schemeClr val="tx1"/>
+                </a:solidFill>
+                <a:latin typeface="Arial" pitchFamily="34" charset="0"/>
+                <a:cs typeface="Arial" pitchFamily="34" charset="0"/>
+              </a:defRPr>
+            </a:lvl2pPr>
+            <a:lvl3pPr marL="1143000" indent="-228600" eaLnBrk="0" hangingPunct="0">
+              <a:spcBef>
+                <a:spcPct val="30000"/>
+              </a:spcBef>
+              <a:defRPr sz="1200">
+                <a:solidFill>
+                  <a:schemeClr val="tx1"/>
+                </a:solidFill>
+                <a:latin typeface="Arial" pitchFamily="34" charset="0"/>
+                <a:cs typeface="Arial" pitchFamily="34" charset="0"/>
+              </a:defRPr>
+            </a:lvl3pPr>
+            <a:lvl4pPr marL="1600200" indent="-228600" eaLnBrk="0" hangingPunct="0">
+              <a:spcBef>
+                <a:spcPct val="30000"/>
+              </a:spcBef>
+              <a:defRPr sz="1200">
+                <a:solidFill>
+                  <a:schemeClr val="tx1"/>
+                </a:solidFill>
+                <a:latin typeface="Arial" pitchFamily="34" charset="0"/>
+                <a:cs typeface="Arial" pitchFamily="34" charset="0"/>
+              </a:defRPr>
+            </a:lvl4pPr>
+            <a:lvl5pPr marL="2057400" indent="-228600" eaLnBrk="0" hangingPunct="0">
+              <a:spcBef>
+                <a:spcPct val="30000"/>
+              </a:spcBef>
+              <a:defRPr sz="1200">
+                <a:solidFill>
+                  <a:schemeClr val="tx1"/>
+                </a:solidFill>
+                <a:latin typeface="Arial" pitchFamily="34" charset="0"/>
+                <a:cs typeface="Arial" pitchFamily="34" charset="0"/>
+              </a:defRPr>
+            </a:lvl5pPr>
+            <a:lvl6pPr marL="2514600" indent="-228600" eaLnBrk="0" fontAlgn="base" hangingPunct="0">
+              <a:spcBef>
+                <a:spcPct val="30000"/>
+              </a:spcBef>
+              <a:spcAft>
+                <a:spcPct val="0"/>
+              </a:spcAft>
+              <a:defRPr sz="1200">
+                <a:solidFill>
+                  <a:schemeClr val="tx1"/>
+                </a:solidFill>
+                <a:latin typeface="Arial" pitchFamily="34" charset="0"/>
+                <a:cs typeface="Arial" pitchFamily="34" charset="0"/>
+              </a:defRPr>
+            </a:lvl6pPr>
+            <a:lvl7pPr marL="2971800" indent="-228600" eaLnBrk="0" fontAlgn="base" hangingPunct="0">
+              <a:spcBef>
+                <a:spcPct val="30000"/>
+              </a:spcBef>
+              <a:spcAft>
+                <a:spcPct val="0"/>
+              </a:spcAft>
+              <a:defRPr sz="1200">
+                <a:solidFill>
+                  <a:schemeClr val="tx1"/>
+                </a:solidFill>
+                <a:latin typeface="Arial" pitchFamily="34" charset="0"/>
+                <a:cs typeface="Arial" pitchFamily="34" charset="0"/>
+              </a:defRPr>
+            </a:lvl7pPr>
+            <a:lvl8pPr marL="3429000" indent="-228600" eaLnBrk="0" fontAlgn="base" hangingPunct="0">
+              <a:spcBef>
+                <a:spcPct val="30000"/>
+              </a:spcBef>
+              <a:spcAft>
+                <a:spcPct val="0"/>
+              </a:spcAft>
+              <a:defRPr sz="1200">
+                <a:solidFill>
+                  <a:schemeClr val="tx1"/>
+                </a:solidFill>
+                <a:latin typeface="Arial" pitchFamily="34" charset="0"/>
+                <a:cs typeface="Arial" pitchFamily="34" charset="0"/>
+              </a:defRPr>
+            </a:lvl8pPr>
+            <a:lvl9pPr marL="3886200" indent="-228600" eaLnBrk="0" fontAlgn="base" hangingPunct="0">
+              <a:spcBef>
+                <a:spcPct val="30000"/>
+              </a:spcBef>
+              <a:spcAft>
+                <a:spcPct val="0"/>
+              </a:spcAft>
+              <a:defRPr sz="1200">
+                <a:solidFill>
+                  <a:schemeClr val="tx1"/>
+                </a:solidFill>
+                <a:latin typeface="Arial" pitchFamily="34" charset="0"/>
+                <a:cs typeface="Arial" pitchFamily="34" charset="0"/>
+              </a:defRPr>
+            </a:lvl9pPr>
+          </a:lstStyle>
+          <a:p>
+            <a:endParaRPr lang="en-US" altLang="en-US"/>
+          </a:p>
+        </p:txBody>
+      </p:sp>
+    </p:spTree>
+  </p:cSld>
+  <p:clrMapOvr>
+    <a:masterClrMapping/>
+  </p:clrMapOvr>
+</p:notes>
+</file>
+
+<file path=ppt/notesSlides/notesSlide15.xml><?xml version="1.0" encoding="utf-8"?>
 <p:notes xmlns:a="http://schemas.openxmlformats.org/drawingml/2006/main" xmlns:r="http://schemas.openxmlformats.org/officeDocument/2006/relationships" xmlns:p="http://schemas.openxmlformats.org/presentationml/2006/main">
   <p:cSld>
     <p:spTree>
@@ -2492,7 +2836,7 @@
             <a:fld id="{31149184-CD2B-4DE5-B73E-FCBCC6B47F4B}" type="slidenum">
               <a:rPr lang="en-GB" altLang="en-US" smtClean="0"/>
               <a:pPr eaLnBrk="1" hangingPunct="1"/>
-              <a:t>26</a:t>
+              <a:t>27</a:t>
             </a:fld>
             <a:endParaRPr lang="en-GB" altLang="en-US" smtClean="0"/>
           </a:p>
@@ -2570,7 +2914,7 @@
 </p:notes>
 </file>
 
-<file path=ppt/notesSlides/notesSlide15.xml><?xml version="1.0" encoding="utf-8"?>
+<file path=ppt/notesSlides/notesSlide16.xml><?xml version="1.0" encoding="utf-8"?>
 <p:notes xmlns:a="http://schemas.openxmlformats.org/drawingml/2006/main" xmlns:r="http://schemas.openxmlformats.org/officeDocument/2006/relationships" xmlns:p="http://schemas.openxmlformats.org/presentationml/2006/main">
   <p:cSld>
     <p:spTree>
@@ -2734,7 +3078,7 @@
             <a:fld id="{3CCA0625-AC95-4ED1-9906-B0154AD1C0F0}" type="slidenum">
               <a:rPr lang="en-GB" altLang="en-US" smtClean="0"/>
               <a:pPr eaLnBrk="1" hangingPunct="1"/>
-              <a:t>27</a:t>
+              <a:t>28</a:t>
             </a:fld>
             <a:endParaRPr lang="en-GB" altLang="en-US" smtClean="0"/>
           </a:p>
@@ -2908,7 +3252,7 @@
 </p:notes>
 </file>
 
-<file path=ppt/notesSlides/notesSlide16.xml><?xml version="1.0" encoding="utf-8"?>
+<file path=ppt/notesSlides/notesSlide17.xml><?xml version="1.0" encoding="utf-8"?>
 <p:notes xmlns:a="http://schemas.openxmlformats.org/drawingml/2006/main" xmlns:r="http://schemas.openxmlformats.org/officeDocument/2006/relationships" xmlns:p="http://schemas.openxmlformats.org/presentationml/2006/main">
   <p:cSld>
     <p:spTree>
@@ -3072,7 +3416,7 @@
             <a:fld id="{0312ADED-879B-4476-B1FC-20A9C5FFD56F}" type="slidenum">
               <a:rPr lang="en-GB" altLang="en-US" smtClean="0"/>
               <a:pPr eaLnBrk="1" hangingPunct="1"/>
-              <a:t>28</a:t>
+              <a:t>29</a:t>
             </a:fld>
             <a:endParaRPr lang="en-GB" altLang="en-US" smtClean="0"/>
           </a:p>
@@ -3246,7 +3590,7 @@
 </p:notes>
 </file>
 
-<file path=ppt/notesSlides/notesSlide17.xml><?xml version="1.0" encoding="utf-8"?>
+<file path=ppt/notesSlides/notesSlide18.xml><?xml version="1.0" encoding="utf-8"?>
 <p:notes xmlns:a="http://schemas.openxmlformats.org/drawingml/2006/main" xmlns:r="http://schemas.openxmlformats.org/officeDocument/2006/relationships" xmlns:p="http://schemas.openxmlformats.org/presentationml/2006/main">
   <p:cSld>
     <p:spTree>
@@ -3410,7 +3754,7 @@
             <a:fld id="{80AF43B1-B7BE-4705-AB75-75BBC59F2F66}" type="slidenum">
               <a:rPr lang="en-GB" altLang="en-US" smtClean="0"/>
               <a:pPr eaLnBrk="1" hangingPunct="1"/>
-              <a:t>29</a:t>
+              <a:t>30</a:t>
             </a:fld>
             <a:endParaRPr lang="en-GB" altLang="en-US" smtClean="0"/>
           </a:p>
@@ -3483,7 +3827,7 @@
 </p:notes>
 </file>
 
-<file path=ppt/notesSlides/notesSlide18.xml><?xml version="1.0" encoding="utf-8"?>
+<file path=ppt/notesSlides/notesSlide19.xml><?xml version="1.0" encoding="utf-8"?>
 <p:notes xmlns:a="http://schemas.openxmlformats.org/drawingml/2006/main" xmlns:r="http://schemas.openxmlformats.org/officeDocument/2006/relationships" xmlns:p="http://schemas.openxmlformats.org/presentationml/2006/main">
   <p:cSld>
     <p:spTree>
@@ -3647,7 +3991,7 @@
             <a:fld id="{5CFF87BB-BDAF-42B7-AF2E-347D023EDEB8}" type="slidenum">
               <a:rPr lang="en-GB" altLang="en-US" smtClean="0"/>
               <a:pPr eaLnBrk="1" hangingPunct="1"/>
-              <a:t>30</a:t>
+              <a:t>31</a:t>
             </a:fld>
             <a:endParaRPr lang="en-GB" altLang="en-US" smtClean="0"/>
           </a:p>
@@ -3670,344 +4014,6 @@
       <p:sp>
         <p:nvSpPr>
           <p:cNvPr id="67588" name="Notes Placeholder 4"/>
-          <p:cNvSpPr>
-            <a:spLocks noGrp="1"/>
-          </p:cNvSpPr>
-          <p:nvPr/>
-        </p:nvSpPr>
-        <p:spPr bwMode="auto">
-          <a:xfrm>
-            <a:off x="685800" y="4343400"/>
-            <a:ext cx="5486400" cy="4114800"/>
-          </a:xfrm>
-          <a:prstGeom prst="rect">
-            <a:avLst/>
-          </a:prstGeom>
-        </p:spPr>
-        <p:txBody>
-          <a:bodyPr/>
-          <a:lstStyle>
-            <a:lvl1pPr eaLnBrk="0" hangingPunct="0">
-              <a:spcBef>
-                <a:spcPct val="30000"/>
-              </a:spcBef>
-              <a:defRPr sz="1200">
-                <a:solidFill>
-                  <a:schemeClr val="tx1"/>
-                </a:solidFill>
-                <a:latin typeface="Arial" pitchFamily="34" charset="0"/>
-                <a:cs typeface="Arial" pitchFamily="34" charset="0"/>
-              </a:defRPr>
-            </a:lvl1pPr>
-            <a:lvl2pPr marL="742950" indent="-285750" eaLnBrk="0" hangingPunct="0">
-              <a:spcBef>
-                <a:spcPct val="30000"/>
-              </a:spcBef>
-              <a:defRPr sz="1200">
-                <a:solidFill>
-                  <a:schemeClr val="tx1"/>
-                </a:solidFill>
-                <a:latin typeface="Arial" pitchFamily="34" charset="0"/>
-                <a:cs typeface="Arial" pitchFamily="34" charset="0"/>
-              </a:defRPr>
-            </a:lvl2pPr>
-            <a:lvl3pPr marL="1143000" indent="-228600" eaLnBrk="0" hangingPunct="0">
-              <a:spcBef>
-                <a:spcPct val="30000"/>
-              </a:spcBef>
-              <a:defRPr sz="1200">
-                <a:solidFill>
-                  <a:schemeClr val="tx1"/>
-                </a:solidFill>
-                <a:latin typeface="Arial" pitchFamily="34" charset="0"/>
-                <a:cs typeface="Arial" pitchFamily="34" charset="0"/>
-              </a:defRPr>
-            </a:lvl3pPr>
-            <a:lvl4pPr marL="1600200" indent="-228600" eaLnBrk="0" hangingPunct="0">
-              <a:spcBef>
-                <a:spcPct val="30000"/>
-              </a:spcBef>
-              <a:defRPr sz="1200">
-                <a:solidFill>
-                  <a:schemeClr val="tx1"/>
-                </a:solidFill>
-                <a:latin typeface="Arial" pitchFamily="34" charset="0"/>
-                <a:cs typeface="Arial" pitchFamily="34" charset="0"/>
-              </a:defRPr>
-            </a:lvl4pPr>
-            <a:lvl5pPr marL="2057400" indent="-228600" eaLnBrk="0" hangingPunct="0">
-              <a:spcBef>
-                <a:spcPct val="30000"/>
-              </a:spcBef>
-              <a:defRPr sz="1200">
-                <a:solidFill>
-                  <a:schemeClr val="tx1"/>
-                </a:solidFill>
-                <a:latin typeface="Arial" pitchFamily="34" charset="0"/>
-                <a:cs typeface="Arial" pitchFamily="34" charset="0"/>
-              </a:defRPr>
-            </a:lvl5pPr>
-            <a:lvl6pPr marL="2514600" indent="-228600" eaLnBrk="0" fontAlgn="base" hangingPunct="0">
-              <a:spcBef>
-                <a:spcPct val="30000"/>
-              </a:spcBef>
-              <a:spcAft>
-                <a:spcPct val="0"/>
-              </a:spcAft>
-              <a:defRPr sz="1200">
-                <a:solidFill>
-                  <a:schemeClr val="tx1"/>
-                </a:solidFill>
-                <a:latin typeface="Arial" pitchFamily="34" charset="0"/>
-                <a:cs typeface="Arial" pitchFamily="34" charset="0"/>
-              </a:defRPr>
-            </a:lvl6pPr>
-            <a:lvl7pPr marL="2971800" indent="-228600" eaLnBrk="0" fontAlgn="base" hangingPunct="0">
-              <a:spcBef>
-                <a:spcPct val="30000"/>
-              </a:spcBef>
-              <a:spcAft>
-                <a:spcPct val="0"/>
-              </a:spcAft>
-              <a:defRPr sz="1200">
-                <a:solidFill>
-                  <a:schemeClr val="tx1"/>
-                </a:solidFill>
-                <a:latin typeface="Arial" pitchFamily="34" charset="0"/>
-                <a:cs typeface="Arial" pitchFamily="34" charset="0"/>
-              </a:defRPr>
-            </a:lvl7pPr>
-            <a:lvl8pPr marL="3429000" indent="-228600" eaLnBrk="0" fontAlgn="base" hangingPunct="0">
-              <a:spcBef>
-                <a:spcPct val="30000"/>
-              </a:spcBef>
-              <a:spcAft>
-                <a:spcPct val="0"/>
-              </a:spcAft>
-              <a:defRPr sz="1200">
-                <a:solidFill>
-                  <a:schemeClr val="tx1"/>
-                </a:solidFill>
-                <a:latin typeface="Arial" pitchFamily="34" charset="0"/>
-                <a:cs typeface="Arial" pitchFamily="34" charset="0"/>
-              </a:defRPr>
-            </a:lvl8pPr>
-            <a:lvl9pPr marL="3886200" indent="-228600" eaLnBrk="0" fontAlgn="base" hangingPunct="0">
-              <a:spcBef>
-                <a:spcPct val="30000"/>
-              </a:spcBef>
-              <a:spcAft>
-                <a:spcPct val="0"/>
-              </a:spcAft>
-              <a:defRPr sz="1200">
-                <a:solidFill>
-                  <a:schemeClr val="tx1"/>
-                </a:solidFill>
-                <a:latin typeface="Arial" pitchFamily="34" charset="0"/>
-                <a:cs typeface="Arial" pitchFamily="34" charset="0"/>
-              </a:defRPr>
-            </a:lvl9pPr>
-          </a:lstStyle>
-          <a:p>
-            <a:endParaRPr lang="en-US" altLang="en-US"/>
-          </a:p>
-        </p:txBody>
-      </p:sp>
-    </p:spTree>
-  </p:cSld>
-  <p:clrMapOvr>
-    <a:masterClrMapping/>
-  </p:clrMapOvr>
-</p:notes>
-</file>
-
-<file path=ppt/notesSlides/notesSlide19.xml><?xml version="1.0" encoding="utf-8"?>
-<p:notes xmlns:a="http://schemas.openxmlformats.org/drawingml/2006/main" xmlns:r="http://schemas.openxmlformats.org/officeDocument/2006/relationships" xmlns:p="http://schemas.openxmlformats.org/presentationml/2006/main">
-  <p:cSld>
-    <p:spTree>
-      <p:nvGrpSpPr>
-        <p:cNvPr id="1" name=""/>
-        <p:cNvGrpSpPr/>
-        <p:nvPr/>
-      </p:nvGrpSpPr>
-      <p:grpSpPr>
-        <a:xfrm>
-          <a:off x="0" y="0"/>
-          <a:ext cx="0" cy="0"/>
-          <a:chOff x="0" y="0"/>
-          <a:chExt cx="0" cy="0"/>
-        </a:xfrm>
-      </p:grpSpPr>
-      <p:sp>
-        <p:nvSpPr>
-          <p:cNvPr id="72706" name="Rectangle 7"/>
-          <p:cNvSpPr>
-            <a:spLocks noGrp="1" noChangeArrowheads="1"/>
-          </p:cNvSpPr>
-          <p:nvPr>
-            <p:ph type="sldNum" sz="quarter" idx="5"/>
-          </p:nvPr>
-        </p:nvSpPr>
-        <p:spPr>
-          <a:noFill/>
-          <a:ln/>
-          <a:extLst>
-            <a:ext uri="{909E8E84-426E-40DD-AFC4-6F175D3DCCD1}">
-              <a14:hiddenFill xmlns:a14="http://schemas.microsoft.com/office/drawing/2010/main">
-                <a:solidFill>
-                  <a:srgbClr val="FFFFFF"/>
-                </a:solidFill>
-              </a14:hiddenFill>
-            </a:ext>
-            <a:ext uri="{91240B29-F687-4F45-9708-019B960494DF}">
-              <a14:hiddenLine xmlns:a14="http://schemas.microsoft.com/office/drawing/2010/main" w="9525">
-                <a:solidFill>
-                  <a:srgbClr val="000000"/>
-                </a:solidFill>
-                <a:miter lim="800000"/>
-                <a:headEnd/>
-                <a:tailEnd/>
-              </a14:hiddenLine>
-            </a:ext>
-          </a:extLst>
-        </p:spPr>
-        <p:txBody>
-          <a:bodyPr/>
-          <a:lstStyle>
-            <a:lvl1pPr eaLnBrk="0" hangingPunct="0">
-              <a:defRPr>
-                <a:solidFill>
-                  <a:schemeClr val="tx1"/>
-                </a:solidFill>
-                <a:latin typeface="Arial" pitchFamily="34" charset="0"/>
-                <a:cs typeface="Arial" pitchFamily="34" charset="0"/>
-              </a:defRPr>
-            </a:lvl1pPr>
-            <a:lvl2pPr marL="742950" indent="-285750" eaLnBrk="0" hangingPunct="0">
-              <a:defRPr>
-                <a:solidFill>
-                  <a:schemeClr val="tx1"/>
-                </a:solidFill>
-                <a:latin typeface="Arial" pitchFamily="34" charset="0"/>
-                <a:cs typeface="Arial" pitchFamily="34" charset="0"/>
-              </a:defRPr>
-            </a:lvl2pPr>
-            <a:lvl3pPr marL="1143000" indent="-228600" eaLnBrk="0" hangingPunct="0">
-              <a:defRPr>
-                <a:solidFill>
-                  <a:schemeClr val="tx1"/>
-                </a:solidFill>
-                <a:latin typeface="Arial" pitchFamily="34" charset="0"/>
-                <a:cs typeface="Arial" pitchFamily="34" charset="0"/>
-              </a:defRPr>
-            </a:lvl3pPr>
-            <a:lvl4pPr marL="1600200" indent="-228600" eaLnBrk="0" hangingPunct="0">
-              <a:defRPr>
-                <a:solidFill>
-                  <a:schemeClr val="tx1"/>
-                </a:solidFill>
-                <a:latin typeface="Arial" pitchFamily="34" charset="0"/>
-                <a:cs typeface="Arial" pitchFamily="34" charset="0"/>
-              </a:defRPr>
-            </a:lvl4pPr>
-            <a:lvl5pPr marL="2057400" indent="-228600" eaLnBrk="0" hangingPunct="0">
-              <a:defRPr>
-                <a:solidFill>
-                  <a:schemeClr val="tx1"/>
-                </a:solidFill>
-                <a:latin typeface="Arial" pitchFamily="34" charset="0"/>
-                <a:cs typeface="Arial" pitchFamily="34" charset="0"/>
-              </a:defRPr>
-            </a:lvl5pPr>
-            <a:lvl6pPr marL="2514600" indent="-228600" eaLnBrk="0" fontAlgn="base" hangingPunct="0">
-              <a:spcBef>
-                <a:spcPct val="0"/>
-              </a:spcBef>
-              <a:spcAft>
-                <a:spcPct val="0"/>
-              </a:spcAft>
-              <a:defRPr>
-                <a:solidFill>
-                  <a:schemeClr val="tx1"/>
-                </a:solidFill>
-                <a:latin typeface="Arial" pitchFamily="34" charset="0"/>
-                <a:cs typeface="Arial" pitchFamily="34" charset="0"/>
-              </a:defRPr>
-            </a:lvl6pPr>
-            <a:lvl7pPr marL="2971800" indent="-228600" eaLnBrk="0" fontAlgn="base" hangingPunct="0">
-              <a:spcBef>
-                <a:spcPct val="0"/>
-              </a:spcBef>
-              <a:spcAft>
-                <a:spcPct val="0"/>
-              </a:spcAft>
-              <a:defRPr>
-                <a:solidFill>
-                  <a:schemeClr val="tx1"/>
-                </a:solidFill>
-                <a:latin typeface="Arial" pitchFamily="34" charset="0"/>
-                <a:cs typeface="Arial" pitchFamily="34" charset="0"/>
-              </a:defRPr>
-            </a:lvl7pPr>
-            <a:lvl8pPr marL="3429000" indent="-228600" eaLnBrk="0" fontAlgn="base" hangingPunct="0">
-              <a:spcBef>
-                <a:spcPct val="0"/>
-              </a:spcBef>
-              <a:spcAft>
-                <a:spcPct val="0"/>
-              </a:spcAft>
-              <a:defRPr>
-                <a:solidFill>
-                  <a:schemeClr val="tx1"/>
-                </a:solidFill>
-                <a:latin typeface="Arial" pitchFamily="34" charset="0"/>
-                <a:cs typeface="Arial" pitchFamily="34" charset="0"/>
-              </a:defRPr>
-            </a:lvl8pPr>
-            <a:lvl9pPr marL="3886200" indent="-228600" eaLnBrk="0" fontAlgn="base" hangingPunct="0">
-              <a:spcBef>
-                <a:spcPct val="0"/>
-              </a:spcBef>
-              <a:spcAft>
-                <a:spcPct val="0"/>
-              </a:spcAft>
-              <a:defRPr>
-                <a:solidFill>
-                  <a:schemeClr val="tx1"/>
-                </a:solidFill>
-                <a:latin typeface="Arial" pitchFamily="34" charset="0"/>
-                <a:cs typeface="Arial" pitchFamily="34" charset="0"/>
-              </a:defRPr>
-            </a:lvl9pPr>
-          </a:lstStyle>
-          <a:p>
-            <a:pPr eaLnBrk="1" hangingPunct="1"/>
-            <a:fld id="{350021A5-7CFF-4FA9-A53C-DA9F4D0FD2F6}" type="slidenum">
-              <a:rPr lang="en-GB" altLang="en-US" smtClean="0"/>
-              <a:pPr eaLnBrk="1" hangingPunct="1"/>
-              <a:t>31</a:t>
-            </a:fld>
-            <a:endParaRPr lang="en-GB" altLang="en-US" smtClean="0"/>
-          </a:p>
-        </p:txBody>
-      </p:sp>
-      <p:sp>
-        <p:nvSpPr>
-          <p:cNvPr id="72707" name="Rectangle 2"/>
-          <p:cNvSpPr>
-            <a:spLocks noGrp="1" noRot="1" noChangeAspect="1" noChangeArrowheads="1" noTextEdit="1"/>
-          </p:cNvSpPr>
-          <p:nvPr>
-            <p:ph type="sldImg"/>
-          </p:nvPr>
-        </p:nvSpPr>
-        <p:spPr>
-          <a:ln/>
-        </p:spPr>
-      </p:sp>
-      <p:sp>
-        <p:nvSpPr>
-          <p:cNvPr id="72708" name="Notes Placeholder 4"/>
           <p:cNvSpPr>
             <a:spLocks noGrp="1"/>
           </p:cNvSpPr>
@@ -4516,6 +4522,344 @@
       </p:grpSpPr>
       <p:sp>
         <p:nvSpPr>
+          <p:cNvPr id="72706" name="Rectangle 7"/>
+          <p:cNvSpPr>
+            <a:spLocks noGrp="1" noChangeArrowheads="1"/>
+          </p:cNvSpPr>
+          <p:nvPr>
+            <p:ph type="sldNum" sz="quarter" idx="5"/>
+          </p:nvPr>
+        </p:nvSpPr>
+        <p:spPr>
+          <a:noFill/>
+          <a:ln/>
+          <a:extLst>
+            <a:ext uri="{909E8E84-426E-40DD-AFC4-6F175D3DCCD1}">
+              <a14:hiddenFill xmlns:a14="http://schemas.microsoft.com/office/drawing/2010/main">
+                <a:solidFill>
+                  <a:srgbClr val="FFFFFF"/>
+                </a:solidFill>
+              </a14:hiddenFill>
+            </a:ext>
+            <a:ext uri="{91240B29-F687-4F45-9708-019B960494DF}">
+              <a14:hiddenLine xmlns:a14="http://schemas.microsoft.com/office/drawing/2010/main" w="9525">
+                <a:solidFill>
+                  <a:srgbClr val="000000"/>
+                </a:solidFill>
+                <a:miter lim="800000"/>
+                <a:headEnd/>
+                <a:tailEnd/>
+              </a14:hiddenLine>
+            </a:ext>
+          </a:extLst>
+        </p:spPr>
+        <p:txBody>
+          <a:bodyPr/>
+          <a:lstStyle>
+            <a:lvl1pPr eaLnBrk="0" hangingPunct="0">
+              <a:defRPr>
+                <a:solidFill>
+                  <a:schemeClr val="tx1"/>
+                </a:solidFill>
+                <a:latin typeface="Arial" pitchFamily="34" charset="0"/>
+                <a:cs typeface="Arial" pitchFamily="34" charset="0"/>
+              </a:defRPr>
+            </a:lvl1pPr>
+            <a:lvl2pPr marL="742950" indent="-285750" eaLnBrk="0" hangingPunct="0">
+              <a:defRPr>
+                <a:solidFill>
+                  <a:schemeClr val="tx1"/>
+                </a:solidFill>
+                <a:latin typeface="Arial" pitchFamily="34" charset="0"/>
+                <a:cs typeface="Arial" pitchFamily="34" charset="0"/>
+              </a:defRPr>
+            </a:lvl2pPr>
+            <a:lvl3pPr marL="1143000" indent="-228600" eaLnBrk="0" hangingPunct="0">
+              <a:defRPr>
+                <a:solidFill>
+                  <a:schemeClr val="tx1"/>
+                </a:solidFill>
+                <a:latin typeface="Arial" pitchFamily="34" charset="0"/>
+                <a:cs typeface="Arial" pitchFamily="34" charset="0"/>
+              </a:defRPr>
+            </a:lvl3pPr>
+            <a:lvl4pPr marL="1600200" indent="-228600" eaLnBrk="0" hangingPunct="0">
+              <a:defRPr>
+                <a:solidFill>
+                  <a:schemeClr val="tx1"/>
+                </a:solidFill>
+                <a:latin typeface="Arial" pitchFamily="34" charset="0"/>
+                <a:cs typeface="Arial" pitchFamily="34" charset="0"/>
+              </a:defRPr>
+            </a:lvl4pPr>
+            <a:lvl5pPr marL="2057400" indent="-228600" eaLnBrk="0" hangingPunct="0">
+              <a:defRPr>
+                <a:solidFill>
+                  <a:schemeClr val="tx1"/>
+                </a:solidFill>
+                <a:latin typeface="Arial" pitchFamily="34" charset="0"/>
+                <a:cs typeface="Arial" pitchFamily="34" charset="0"/>
+              </a:defRPr>
+            </a:lvl5pPr>
+            <a:lvl6pPr marL="2514600" indent="-228600" eaLnBrk="0" fontAlgn="base" hangingPunct="0">
+              <a:spcBef>
+                <a:spcPct val="0"/>
+              </a:spcBef>
+              <a:spcAft>
+                <a:spcPct val="0"/>
+              </a:spcAft>
+              <a:defRPr>
+                <a:solidFill>
+                  <a:schemeClr val="tx1"/>
+                </a:solidFill>
+                <a:latin typeface="Arial" pitchFamily="34" charset="0"/>
+                <a:cs typeface="Arial" pitchFamily="34" charset="0"/>
+              </a:defRPr>
+            </a:lvl6pPr>
+            <a:lvl7pPr marL="2971800" indent="-228600" eaLnBrk="0" fontAlgn="base" hangingPunct="0">
+              <a:spcBef>
+                <a:spcPct val="0"/>
+              </a:spcBef>
+              <a:spcAft>
+                <a:spcPct val="0"/>
+              </a:spcAft>
+              <a:defRPr>
+                <a:solidFill>
+                  <a:schemeClr val="tx1"/>
+                </a:solidFill>
+                <a:latin typeface="Arial" pitchFamily="34" charset="0"/>
+                <a:cs typeface="Arial" pitchFamily="34" charset="0"/>
+              </a:defRPr>
+            </a:lvl7pPr>
+            <a:lvl8pPr marL="3429000" indent="-228600" eaLnBrk="0" fontAlgn="base" hangingPunct="0">
+              <a:spcBef>
+                <a:spcPct val="0"/>
+              </a:spcBef>
+              <a:spcAft>
+                <a:spcPct val="0"/>
+              </a:spcAft>
+              <a:defRPr>
+                <a:solidFill>
+                  <a:schemeClr val="tx1"/>
+                </a:solidFill>
+                <a:latin typeface="Arial" pitchFamily="34" charset="0"/>
+                <a:cs typeface="Arial" pitchFamily="34" charset="0"/>
+              </a:defRPr>
+            </a:lvl8pPr>
+            <a:lvl9pPr marL="3886200" indent="-228600" eaLnBrk="0" fontAlgn="base" hangingPunct="0">
+              <a:spcBef>
+                <a:spcPct val="0"/>
+              </a:spcBef>
+              <a:spcAft>
+                <a:spcPct val="0"/>
+              </a:spcAft>
+              <a:defRPr>
+                <a:solidFill>
+                  <a:schemeClr val="tx1"/>
+                </a:solidFill>
+                <a:latin typeface="Arial" pitchFamily="34" charset="0"/>
+                <a:cs typeface="Arial" pitchFamily="34" charset="0"/>
+              </a:defRPr>
+            </a:lvl9pPr>
+          </a:lstStyle>
+          <a:p>
+            <a:pPr eaLnBrk="1" hangingPunct="1"/>
+            <a:fld id="{350021A5-7CFF-4FA9-A53C-DA9F4D0FD2F6}" type="slidenum">
+              <a:rPr lang="en-GB" altLang="en-US" smtClean="0"/>
+              <a:pPr eaLnBrk="1" hangingPunct="1"/>
+              <a:t>32</a:t>
+            </a:fld>
+            <a:endParaRPr lang="en-GB" altLang="en-US" smtClean="0"/>
+          </a:p>
+        </p:txBody>
+      </p:sp>
+      <p:sp>
+        <p:nvSpPr>
+          <p:cNvPr id="72707" name="Rectangle 2"/>
+          <p:cNvSpPr>
+            <a:spLocks noGrp="1" noRot="1" noChangeAspect="1" noChangeArrowheads="1" noTextEdit="1"/>
+          </p:cNvSpPr>
+          <p:nvPr>
+            <p:ph type="sldImg"/>
+          </p:nvPr>
+        </p:nvSpPr>
+        <p:spPr>
+          <a:ln/>
+        </p:spPr>
+      </p:sp>
+      <p:sp>
+        <p:nvSpPr>
+          <p:cNvPr id="72708" name="Notes Placeholder 4"/>
+          <p:cNvSpPr>
+            <a:spLocks noGrp="1"/>
+          </p:cNvSpPr>
+          <p:nvPr/>
+        </p:nvSpPr>
+        <p:spPr bwMode="auto">
+          <a:xfrm>
+            <a:off x="685800" y="4343400"/>
+            <a:ext cx="5486400" cy="4114800"/>
+          </a:xfrm>
+          <a:prstGeom prst="rect">
+            <a:avLst/>
+          </a:prstGeom>
+        </p:spPr>
+        <p:txBody>
+          <a:bodyPr/>
+          <a:lstStyle>
+            <a:lvl1pPr eaLnBrk="0" hangingPunct="0">
+              <a:spcBef>
+                <a:spcPct val="30000"/>
+              </a:spcBef>
+              <a:defRPr sz="1200">
+                <a:solidFill>
+                  <a:schemeClr val="tx1"/>
+                </a:solidFill>
+                <a:latin typeface="Arial" pitchFamily="34" charset="0"/>
+                <a:cs typeface="Arial" pitchFamily="34" charset="0"/>
+              </a:defRPr>
+            </a:lvl1pPr>
+            <a:lvl2pPr marL="742950" indent="-285750" eaLnBrk="0" hangingPunct="0">
+              <a:spcBef>
+                <a:spcPct val="30000"/>
+              </a:spcBef>
+              <a:defRPr sz="1200">
+                <a:solidFill>
+                  <a:schemeClr val="tx1"/>
+                </a:solidFill>
+                <a:latin typeface="Arial" pitchFamily="34" charset="0"/>
+                <a:cs typeface="Arial" pitchFamily="34" charset="0"/>
+              </a:defRPr>
+            </a:lvl2pPr>
+            <a:lvl3pPr marL="1143000" indent="-228600" eaLnBrk="0" hangingPunct="0">
+              <a:spcBef>
+                <a:spcPct val="30000"/>
+              </a:spcBef>
+              <a:defRPr sz="1200">
+                <a:solidFill>
+                  <a:schemeClr val="tx1"/>
+                </a:solidFill>
+                <a:latin typeface="Arial" pitchFamily="34" charset="0"/>
+                <a:cs typeface="Arial" pitchFamily="34" charset="0"/>
+              </a:defRPr>
+            </a:lvl3pPr>
+            <a:lvl4pPr marL="1600200" indent="-228600" eaLnBrk="0" hangingPunct="0">
+              <a:spcBef>
+                <a:spcPct val="30000"/>
+              </a:spcBef>
+              <a:defRPr sz="1200">
+                <a:solidFill>
+                  <a:schemeClr val="tx1"/>
+                </a:solidFill>
+                <a:latin typeface="Arial" pitchFamily="34" charset="0"/>
+                <a:cs typeface="Arial" pitchFamily="34" charset="0"/>
+              </a:defRPr>
+            </a:lvl4pPr>
+            <a:lvl5pPr marL="2057400" indent="-228600" eaLnBrk="0" hangingPunct="0">
+              <a:spcBef>
+                <a:spcPct val="30000"/>
+              </a:spcBef>
+              <a:defRPr sz="1200">
+                <a:solidFill>
+                  <a:schemeClr val="tx1"/>
+                </a:solidFill>
+                <a:latin typeface="Arial" pitchFamily="34" charset="0"/>
+                <a:cs typeface="Arial" pitchFamily="34" charset="0"/>
+              </a:defRPr>
+            </a:lvl5pPr>
+            <a:lvl6pPr marL="2514600" indent="-228600" eaLnBrk="0" fontAlgn="base" hangingPunct="0">
+              <a:spcBef>
+                <a:spcPct val="30000"/>
+              </a:spcBef>
+              <a:spcAft>
+                <a:spcPct val="0"/>
+              </a:spcAft>
+              <a:defRPr sz="1200">
+                <a:solidFill>
+                  <a:schemeClr val="tx1"/>
+                </a:solidFill>
+                <a:latin typeface="Arial" pitchFamily="34" charset="0"/>
+                <a:cs typeface="Arial" pitchFamily="34" charset="0"/>
+              </a:defRPr>
+            </a:lvl6pPr>
+            <a:lvl7pPr marL="2971800" indent="-228600" eaLnBrk="0" fontAlgn="base" hangingPunct="0">
+              <a:spcBef>
+                <a:spcPct val="30000"/>
+              </a:spcBef>
+              <a:spcAft>
+                <a:spcPct val="0"/>
+              </a:spcAft>
+              <a:defRPr sz="1200">
+                <a:solidFill>
+                  <a:schemeClr val="tx1"/>
+                </a:solidFill>
+                <a:latin typeface="Arial" pitchFamily="34" charset="0"/>
+                <a:cs typeface="Arial" pitchFamily="34" charset="0"/>
+              </a:defRPr>
+            </a:lvl7pPr>
+            <a:lvl8pPr marL="3429000" indent="-228600" eaLnBrk="0" fontAlgn="base" hangingPunct="0">
+              <a:spcBef>
+                <a:spcPct val="30000"/>
+              </a:spcBef>
+              <a:spcAft>
+                <a:spcPct val="0"/>
+              </a:spcAft>
+              <a:defRPr sz="1200">
+                <a:solidFill>
+                  <a:schemeClr val="tx1"/>
+                </a:solidFill>
+                <a:latin typeface="Arial" pitchFamily="34" charset="0"/>
+                <a:cs typeface="Arial" pitchFamily="34" charset="0"/>
+              </a:defRPr>
+            </a:lvl8pPr>
+            <a:lvl9pPr marL="3886200" indent="-228600" eaLnBrk="0" fontAlgn="base" hangingPunct="0">
+              <a:spcBef>
+                <a:spcPct val="30000"/>
+              </a:spcBef>
+              <a:spcAft>
+                <a:spcPct val="0"/>
+              </a:spcAft>
+              <a:defRPr sz="1200">
+                <a:solidFill>
+                  <a:schemeClr val="tx1"/>
+                </a:solidFill>
+                <a:latin typeface="Arial" pitchFamily="34" charset="0"/>
+                <a:cs typeface="Arial" pitchFamily="34" charset="0"/>
+              </a:defRPr>
+            </a:lvl9pPr>
+          </a:lstStyle>
+          <a:p>
+            <a:endParaRPr lang="en-US" altLang="en-US"/>
+          </a:p>
+        </p:txBody>
+      </p:sp>
+    </p:spTree>
+  </p:cSld>
+  <p:clrMapOvr>
+    <a:masterClrMapping/>
+  </p:clrMapOvr>
+</p:notes>
+</file>
+
+<file path=ppt/notesSlides/notesSlide21.xml><?xml version="1.0" encoding="utf-8"?>
+<p:notes xmlns:a="http://schemas.openxmlformats.org/drawingml/2006/main" xmlns:r="http://schemas.openxmlformats.org/officeDocument/2006/relationships" xmlns:p="http://schemas.openxmlformats.org/presentationml/2006/main">
+  <p:cSld>
+    <p:spTree>
+      <p:nvGrpSpPr>
+        <p:cNvPr id="1" name=""/>
+        <p:cNvGrpSpPr/>
+        <p:nvPr/>
+      </p:nvGrpSpPr>
+      <p:grpSpPr>
+        <a:xfrm>
+          <a:off x="0" y="0"/>
+          <a:ext cx="0" cy="0"/>
+          <a:chOff x="0" y="0"/>
+          <a:chExt cx="0" cy="0"/>
+        </a:xfrm>
+      </p:grpSpPr>
+      <p:sp>
+        <p:nvSpPr>
           <p:cNvPr id="73730" name="Rectangle 7"/>
           <p:cNvSpPr>
             <a:spLocks noGrp="1" noChangeArrowheads="1"/>
@@ -4661,7 +5005,7 @@
             <a:fld id="{49DB22AE-3006-48EF-A323-CE7130C2482A}" type="slidenum">
               <a:rPr lang="en-GB" altLang="en-US" smtClean="0"/>
               <a:pPr eaLnBrk="1" hangingPunct="1"/>
-              <a:t>32</a:t>
+              <a:t>33</a:t>
             </a:fld>
             <a:endParaRPr lang="en-GB" altLang="en-US" smtClean="0"/>
           </a:p>
@@ -4835,7 +5179,7 @@
 </p:notes>
 </file>
 
-<file path=ppt/notesSlides/notesSlide21.xml><?xml version="1.0" encoding="utf-8"?>
+<file path=ppt/notesSlides/notesSlide22.xml><?xml version="1.0" encoding="utf-8"?>
 <p:notes xmlns:a="http://schemas.openxmlformats.org/drawingml/2006/main" xmlns:r="http://schemas.openxmlformats.org/officeDocument/2006/relationships" xmlns:p="http://schemas.openxmlformats.org/presentationml/2006/main">
   <p:cSld>
     <p:spTree>
@@ -4999,7 +5343,7 @@
             <a:fld id="{AFF26464-037E-4544-B04A-3770F6C1C55D}" type="slidenum">
               <a:rPr lang="en-GB" altLang="en-US" smtClean="0"/>
               <a:pPr eaLnBrk="1" hangingPunct="1"/>
-              <a:t>33</a:t>
+              <a:t>34</a:t>
             </a:fld>
             <a:endParaRPr lang="en-GB" altLang="en-US" smtClean="0"/>
           </a:p>
@@ -5197,7 +5541,7 @@
       </p:grpSpPr>
       <p:sp>
         <p:nvSpPr>
-          <p:cNvPr id="64514" name="Rectangle 7"/>
+          <p:cNvPr id="63490" name="Rectangle 7"/>
           <p:cNvSpPr>
             <a:spLocks noGrp="1" noChangeArrowheads="1"/>
           </p:cNvSpPr>
@@ -5339,7 +5683,7 @@
           </a:lstStyle>
           <a:p>
             <a:pPr eaLnBrk="1" hangingPunct="1"/>
-            <a:fld id="{AFF26464-037E-4544-B04A-3770F6C1C55D}" type="slidenum">
+            <a:fld id="{31149184-CD2B-4DE5-B73E-FCBCC6B47F4B}" type="slidenum">
               <a:rPr lang="en-GB" altLang="en-US" smtClean="0"/>
               <a:pPr eaLnBrk="1" hangingPunct="1"/>
               <a:t>4</a:t>
@@ -5350,7 +5694,7 @@
       </p:sp>
       <p:sp>
         <p:nvSpPr>
-          <p:cNvPr id="64515" name="Rectangle 2"/>
+          <p:cNvPr id="63491" name="Rectangle 2"/>
           <p:cNvSpPr>
             <a:spLocks noGrp="1" noRot="1" noChangeAspect="1" noChangeArrowheads="1" noTextEdit="1"/>
           </p:cNvSpPr>
@@ -5364,154 +5708,53 @@
       </p:sp>
       <p:sp>
         <p:nvSpPr>
-          <p:cNvPr id="64516" name="Notes Placeholder 4"/>
+          <p:cNvPr id="63492" name="Rectangle 3"/>
           <p:cNvSpPr>
-            <a:spLocks noGrp="1"/>
+            <a:spLocks noGrp="1" noChangeArrowheads="1"/>
           </p:cNvSpPr>
-          <p:nvPr/>
+          <p:nvPr>
+            <p:ph type="body" idx="1"/>
+          </p:nvPr>
         </p:nvSpPr>
-        <p:spPr bwMode="auto">
-          <a:xfrm>
-            <a:off x="685800" y="4343400"/>
-            <a:ext cx="5486400" cy="4114800"/>
-          </a:xfrm>
-          <a:prstGeom prst="rect">
-            <a:avLst/>
-          </a:prstGeom>
+        <p:spPr>
+          <a:noFill/>
+          <a:ln/>
+          <a:extLst>
+            <a:ext uri="{909E8E84-426E-40DD-AFC4-6F175D3DCCD1}">
+              <a14:hiddenFill xmlns:a14="http://schemas.microsoft.com/office/drawing/2010/main">
+                <a:solidFill>
+                  <a:srgbClr val="FFFFFF"/>
+                </a:solidFill>
+              </a14:hiddenFill>
+            </a:ext>
+            <a:ext uri="{91240B29-F687-4F45-9708-019B960494DF}">
+              <a14:hiddenLine xmlns:a14="http://schemas.microsoft.com/office/drawing/2010/main" w="9525">
+                <a:solidFill>
+                  <a:srgbClr val="000000"/>
+                </a:solidFill>
+                <a:miter lim="800000"/>
+                <a:headEnd/>
+                <a:tailEnd/>
+              </a14:hiddenLine>
+            </a:ext>
+          </a:extLst>
         </p:spPr>
         <p:txBody>
           <a:bodyPr/>
-          <a:lstStyle>
-            <a:lvl1pPr eaLnBrk="0" hangingPunct="0">
-              <a:spcBef>
-                <a:spcPct val="30000"/>
-              </a:spcBef>
-              <a:defRPr sz="1200">
-                <a:solidFill>
-                  <a:schemeClr val="tx1"/>
-                </a:solidFill>
-                <a:latin typeface="Arial" pitchFamily="34" charset="0"/>
-                <a:cs typeface="Arial" pitchFamily="34" charset="0"/>
-              </a:defRPr>
-            </a:lvl1pPr>
-            <a:lvl2pPr marL="742950" indent="-285750" eaLnBrk="0" hangingPunct="0">
-              <a:spcBef>
-                <a:spcPct val="30000"/>
-              </a:spcBef>
-              <a:defRPr sz="1200">
-                <a:solidFill>
-                  <a:schemeClr val="tx1"/>
-                </a:solidFill>
-                <a:latin typeface="Arial" pitchFamily="34" charset="0"/>
-                <a:cs typeface="Arial" pitchFamily="34" charset="0"/>
-              </a:defRPr>
-            </a:lvl2pPr>
-            <a:lvl3pPr marL="1143000" indent="-228600" eaLnBrk="0" hangingPunct="0">
-              <a:spcBef>
-                <a:spcPct val="30000"/>
-              </a:spcBef>
-              <a:defRPr sz="1200">
-                <a:solidFill>
-                  <a:schemeClr val="tx1"/>
-                </a:solidFill>
-                <a:latin typeface="Arial" pitchFamily="34" charset="0"/>
-                <a:cs typeface="Arial" pitchFamily="34" charset="0"/>
-              </a:defRPr>
-            </a:lvl3pPr>
-            <a:lvl4pPr marL="1600200" indent="-228600" eaLnBrk="0" hangingPunct="0">
-              <a:spcBef>
-                <a:spcPct val="30000"/>
-              </a:spcBef>
-              <a:defRPr sz="1200">
-                <a:solidFill>
-                  <a:schemeClr val="tx1"/>
-                </a:solidFill>
-                <a:latin typeface="Arial" pitchFamily="34" charset="0"/>
-                <a:cs typeface="Arial" pitchFamily="34" charset="0"/>
-              </a:defRPr>
-            </a:lvl4pPr>
-            <a:lvl5pPr marL="2057400" indent="-228600" eaLnBrk="0" hangingPunct="0">
-              <a:spcBef>
-                <a:spcPct val="30000"/>
-              </a:spcBef>
-              <a:defRPr sz="1200">
-                <a:solidFill>
-                  <a:schemeClr val="tx1"/>
-                </a:solidFill>
-                <a:latin typeface="Arial" pitchFamily="34" charset="0"/>
-                <a:cs typeface="Arial" pitchFamily="34" charset="0"/>
-              </a:defRPr>
-            </a:lvl5pPr>
-            <a:lvl6pPr marL="2514600" indent="-228600" eaLnBrk="0" fontAlgn="base" hangingPunct="0">
-              <a:spcBef>
-                <a:spcPct val="30000"/>
-              </a:spcBef>
-              <a:spcAft>
-                <a:spcPct val="0"/>
-              </a:spcAft>
-              <a:defRPr sz="1200">
-                <a:solidFill>
-                  <a:schemeClr val="tx1"/>
-                </a:solidFill>
-                <a:latin typeface="Arial" pitchFamily="34" charset="0"/>
-                <a:cs typeface="Arial" pitchFamily="34" charset="0"/>
-              </a:defRPr>
-            </a:lvl6pPr>
-            <a:lvl7pPr marL="2971800" indent="-228600" eaLnBrk="0" fontAlgn="base" hangingPunct="0">
-              <a:spcBef>
-                <a:spcPct val="30000"/>
-              </a:spcBef>
-              <a:spcAft>
-                <a:spcPct val="0"/>
-              </a:spcAft>
-              <a:defRPr sz="1200">
-                <a:solidFill>
-                  <a:schemeClr val="tx1"/>
-                </a:solidFill>
-                <a:latin typeface="Arial" pitchFamily="34" charset="0"/>
-                <a:cs typeface="Arial" pitchFamily="34" charset="0"/>
-              </a:defRPr>
-            </a:lvl7pPr>
-            <a:lvl8pPr marL="3429000" indent="-228600" eaLnBrk="0" fontAlgn="base" hangingPunct="0">
-              <a:spcBef>
-                <a:spcPct val="30000"/>
-              </a:spcBef>
-              <a:spcAft>
-                <a:spcPct val="0"/>
-              </a:spcAft>
-              <a:defRPr sz="1200">
-                <a:solidFill>
-                  <a:schemeClr val="tx1"/>
-                </a:solidFill>
-                <a:latin typeface="Arial" pitchFamily="34" charset="0"/>
-                <a:cs typeface="Arial" pitchFamily="34" charset="0"/>
-              </a:defRPr>
-            </a:lvl8pPr>
-            <a:lvl9pPr marL="3886200" indent="-228600" eaLnBrk="0" fontAlgn="base" hangingPunct="0">
-              <a:spcBef>
-                <a:spcPct val="30000"/>
-              </a:spcBef>
-              <a:spcAft>
-                <a:spcPct val="0"/>
-              </a:spcAft>
-              <a:defRPr sz="1200">
-                <a:solidFill>
-                  <a:schemeClr val="tx1"/>
-                </a:solidFill>
-                <a:latin typeface="Arial" pitchFamily="34" charset="0"/>
-                <a:cs typeface="Arial" pitchFamily="34" charset="0"/>
-              </a:defRPr>
-            </a:lvl9pPr>
-          </a:lstStyle>
+          <a:lstStyle/>
           <a:p>
-            <a:endParaRPr lang="en-US" altLang="en-US"/>
+            <a:pPr eaLnBrk="1" hangingPunct="1"/>
+            <a:endParaRPr lang="en-US" altLang="en-US" smtClean="0">
+              <a:latin typeface="Arial" pitchFamily="34" charset="0"/>
+              <a:cs typeface="Arial" pitchFamily="34" charset="0"/>
+            </a:endParaRPr>
           </a:p>
         </p:txBody>
       </p:sp>
     </p:spTree>
     <p:extLst>
       <p:ext uri="{BB962C8B-B14F-4D97-AF65-F5344CB8AC3E}">
-        <p14:creationId xmlns:p14="http://schemas.microsoft.com/office/powerpoint/2010/main" val="855552605"/>
+        <p14:creationId xmlns:p14="http://schemas.microsoft.com/office/powerpoint/2010/main" val="2841904944"/>
       </p:ext>
     </p:extLst>
   </p:cSld>
@@ -5685,7 +5928,7 @@
             <a:fld id="{AFF26464-037E-4544-B04A-3770F6C1C55D}" type="slidenum">
               <a:rPr lang="en-GB" altLang="en-US" smtClean="0"/>
               <a:pPr eaLnBrk="1" hangingPunct="1"/>
-              <a:t>7</a:t>
+              <a:t>5</a:t>
             </a:fld>
             <a:endParaRPr lang="en-GB" altLang="en-US" smtClean="0"/>
           </a:p>
@@ -5854,7 +6097,7 @@
     </p:spTree>
     <p:extLst>
       <p:ext uri="{BB962C8B-B14F-4D97-AF65-F5344CB8AC3E}">
-        <p14:creationId xmlns:p14="http://schemas.microsoft.com/office/powerpoint/2010/main" val="2809904180"/>
+        <p14:creationId xmlns:p14="http://schemas.microsoft.com/office/powerpoint/2010/main" val="855552605"/>
       </p:ext>
     </p:extLst>
   </p:cSld>
@@ -6028,7 +6271,7 @@
             <a:fld id="{AFF26464-037E-4544-B04A-3770F6C1C55D}" type="slidenum">
               <a:rPr lang="en-GB" altLang="en-US" smtClean="0"/>
               <a:pPr eaLnBrk="1" hangingPunct="1"/>
-              <a:t>9</a:t>
+              <a:t>8</a:t>
             </a:fld>
             <a:endParaRPr lang="en-GB" altLang="en-US" smtClean="0"/>
           </a:p>
@@ -6197,7 +6440,7 @@
     </p:spTree>
     <p:extLst>
       <p:ext uri="{BB962C8B-B14F-4D97-AF65-F5344CB8AC3E}">
-        <p14:creationId xmlns:p14="http://schemas.microsoft.com/office/powerpoint/2010/main" val="1301411337"/>
+        <p14:creationId xmlns:p14="http://schemas.microsoft.com/office/powerpoint/2010/main" val="2809904180"/>
       </p:ext>
     </p:extLst>
   </p:cSld>
@@ -6371,7 +6614,7 @@
             <a:fld id="{AFF26464-037E-4544-B04A-3770F6C1C55D}" type="slidenum">
               <a:rPr lang="en-GB" altLang="en-US" smtClean="0"/>
               <a:pPr eaLnBrk="1" hangingPunct="1"/>
-              <a:t>12</a:t>
+              <a:t>10</a:t>
             </a:fld>
             <a:endParaRPr lang="en-GB" altLang="en-US" smtClean="0"/>
           </a:p>
@@ -6540,7 +6783,7 @@
     </p:spTree>
     <p:extLst>
       <p:ext uri="{BB962C8B-B14F-4D97-AF65-F5344CB8AC3E}">
-        <p14:creationId xmlns:p14="http://schemas.microsoft.com/office/powerpoint/2010/main" val="3488993789"/>
+        <p14:creationId xmlns:p14="http://schemas.microsoft.com/office/powerpoint/2010/main" val="1301411337"/>
       </p:ext>
     </p:extLst>
   </p:cSld>
@@ -6883,7 +7126,7 @@
     </p:spTree>
     <p:extLst>
       <p:ext uri="{BB962C8B-B14F-4D97-AF65-F5344CB8AC3E}">
-        <p14:creationId xmlns:p14="http://schemas.microsoft.com/office/powerpoint/2010/main" val="55228699"/>
+        <p14:creationId xmlns:p14="http://schemas.microsoft.com/office/powerpoint/2010/main" val="3488993789"/>
       </p:ext>
     </p:extLst>
   </p:cSld>
@@ -7226,7 +7469,7 @@
     </p:spTree>
     <p:extLst>
       <p:ext uri="{BB962C8B-B14F-4D97-AF65-F5344CB8AC3E}">
-        <p14:creationId xmlns:p14="http://schemas.microsoft.com/office/powerpoint/2010/main" val="1672859911"/>
+        <p14:creationId xmlns:p14="http://schemas.microsoft.com/office/powerpoint/2010/main" val="55228699"/>
       </p:ext>
     </p:extLst>
   </p:cSld>
@@ -7569,7 +7812,7 @@
     </p:spTree>
     <p:extLst>
       <p:ext uri="{BB962C8B-B14F-4D97-AF65-F5344CB8AC3E}">
-        <p14:creationId xmlns:p14="http://schemas.microsoft.com/office/powerpoint/2010/main" val="3514414303"/>
+        <p14:creationId xmlns:p14="http://schemas.microsoft.com/office/powerpoint/2010/main" val="1672859911"/>
       </p:ext>
     </p:extLst>
   </p:cSld>
@@ -7776,7 +8019,7 @@
               <a:pPr>
                 <a:defRPr/>
               </a:pPr>
-              <a:t>26/07/2026</a:t>
+              <a:t>28/07/2026</a:t>
             </a:fld>
             <a:endParaRPr lang="en-GB"/>
           </a:p>
@@ -8006,7 +8249,7 @@
               <a:pPr>
                 <a:defRPr/>
               </a:pPr>
-              <a:t>26/07/2026</a:t>
+              <a:t>28/07/2026</a:t>
             </a:fld>
             <a:endParaRPr lang="en-GB"/>
           </a:p>
@@ -8236,7 +8479,7 @@
               <a:pPr>
                 <a:defRPr/>
               </a:pPr>
-              <a:t>26/07/2026</a:t>
+              <a:t>28/07/2026</a:t>
             </a:fld>
             <a:endParaRPr lang="en-GB"/>
           </a:p>
@@ -8653,7 +8896,7 @@
               <a:pPr>
                 <a:defRPr/>
               </a:pPr>
-              <a:t>26/07/2026</a:t>
+              <a:t>28/07/2026</a:t>
             </a:fld>
             <a:endParaRPr lang="en-GB"/>
           </a:p>
@@ -8949,7 +9192,7 @@
               <a:pPr>
                 <a:defRPr/>
               </a:pPr>
-              <a:t>26/07/2026</a:t>
+              <a:t>28/07/2026</a:t>
             </a:fld>
             <a:endParaRPr lang="en-GB"/>
           </a:p>
@@ -9295,7 +9538,7 @@
               <a:pPr>
                 <a:defRPr/>
               </a:pPr>
-              <a:t>26/07/2026</a:t>
+              <a:t>28/07/2026</a:t>
             </a:fld>
             <a:endParaRPr lang="en-GB"/>
           </a:p>
@@ -9781,7 +10024,7 @@
               <a:pPr>
                 <a:defRPr/>
               </a:pPr>
-              <a:t>26/07/2026</a:t>
+              <a:t>28/07/2026</a:t>
             </a:fld>
             <a:endParaRPr lang="en-GB"/>
           </a:p>
@@ -9951,7 +10194,7 @@
               <a:pPr>
                 <a:defRPr/>
               </a:pPr>
-              <a:t>26/07/2026</a:t>
+              <a:t>28/07/2026</a:t>
             </a:fld>
             <a:endParaRPr lang="en-GB"/>
           </a:p>
@@ -10090,7 +10333,7 @@
               <a:pPr>
                 <a:defRPr/>
               </a:pPr>
-              <a:t>26/07/2026</a:t>
+              <a:t>28/07/2026</a:t>
             </a:fld>
             <a:endParaRPr lang="en-GB"/>
           </a:p>
@@ -10384,7 +10627,7 @@
               <a:pPr>
                 <a:defRPr/>
               </a:pPr>
-              <a:t>26/07/2026</a:t>
+              <a:t>28/07/2026</a:t>
             </a:fld>
             <a:endParaRPr lang="en-GB"/>
           </a:p>
@@ -10698,7 +10941,7 @@
               <a:pPr>
                 <a:defRPr/>
               </a:pPr>
-              <a:t>26/07/2026</a:t>
+              <a:t>28/07/2026</a:t>
             </a:fld>
             <a:endParaRPr lang="en-GB"/>
           </a:p>
@@ -10864,7 +11107,7 @@
               <a:pPr>
                 <a:defRPr/>
               </a:pPr>
-              <a:t>26/07/2026</a:t>
+              <a:t>28/07/2026</a:t>
             </a:fld>
             <a:endParaRPr lang="en-GB"/>
           </a:p>
@@ -11726,6 +11969,351 @@
       </p:grpSpPr>
       <p:sp>
         <p:nvSpPr>
+          <p:cNvPr id="175106" name="Rectangle 2"/>
+          <p:cNvSpPr>
+            <a:spLocks noGrp="1" noChangeArrowheads="1"/>
+          </p:cNvSpPr>
+          <p:nvPr>
+            <p:ph type="body" idx="1"/>
+          </p:nvPr>
+        </p:nvSpPr>
+        <p:spPr>
+          <a:xfrm>
+            <a:off x="107950" y="1484784"/>
+            <a:ext cx="8856663" cy="4790604"/>
+          </a:xfrm>
+          <a:solidFill>
+            <a:schemeClr val="bg1"/>
+          </a:solidFill>
+        </p:spPr>
+        <p:txBody>
+          <a:bodyPr/>
+          <a:lstStyle/>
+          <a:p>
+            <a:pPr eaLnBrk="1" hangingPunct="1">
+              <a:lnSpc>
+                <a:spcPct val="120000"/>
+              </a:lnSpc>
+              <a:spcBef>
+                <a:spcPct val="80000"/>
+              </a:spcBef>
+            </a:pPr>
+            <a:r>
+              <a:rPr lang="en-GB" altLang="en-US" sz="2000" dirty="0" smtClean="0">
+                <a:latin typeface="Arial Unicode MS" pitchFamily="34" charset="-128"/>
+              </a:rPr>
+              <a:t>PCA is an SVD of a covariance matrix, assuming </a:t>
+            </a:r>
+            <a:r>
+              <a:rPr lang="en-GB" altLang="en-US" sz="2000" i="1" dirty="0" smtClean="0">
+                <a:latin typeface="Arial Unicode MS" pitchFamily="34" charset="-128"/>
+              </a:rPr>
+              <a:t>orthogonal</a:t>
+            </a:r>
+            <a:r>
+              <a:rPr lang="en-GB" altLang="en-US" sz="2000" dirty="0" smtClean="0">
+                <a:latin typeface="Arial Unicode MS" pitchFamily="34" charset="-128"/>
+              </a:rPr>
+              <a:t> components (</a:t>
+            </a:r>
+            <a:r>
+              <a:rPr lang="en-GB" altLang="en-US" sz="2000" dirty="0" err="1" smtClean="0">
+                <a:latin typeface="Arial Unicode MS" pitchFamily="34" charset="-128"/>
+              </a:rPr>
+              <a:t>e.g</a:t>
+            </a:r>
+            <a:r>
+              <a:rPr lang="en-GB" altLang="en-US" sz="2000" dirty="0" smtClean="0">
+                <a:latin typeface="Arial Unicode MS" pitchFamily="34" charset="-128"/>
+              </a:rPr>
+              <a:t>, spatial patterns across voxels)</a:t>
+            </a:r>
+          </a:p>
+          <a:p>
+            <a:pPr eaLnBrk="1" hangingPunct="1">
+              <a:lnSpc>
+                <a:spcPct val="120000"/>
+              </a:lnSpc>
+              <a:spcBef>
+                <a:spcPct val="80000"/>
+              </a:spcBef>
+            </a:pPr>
+            <a:r>
+              <a:rPr lang="en-GB" altLang="en-US" sz="2000" dirty="0" smtClean="0">
+                <a:latin typeface="Arial Unicode MS" pitchFamily="34" charset="-128"/>
+              </a:rPr>
+              <a:t>ICA assumes components are </a:t>
+            </a:r>
+            <a:r>
+              <a:rPr lang="en-GB" altLang="en-US" sz="2000" i="1" dirty="0" smtClean="0">
+                <a:latin typeface="Arial Unicode MS" pitchFamily="34" charset="-128"/>
+              </a:rPr>
+              <a:t>independent</a:t>
+            </a:r>
+            <a:r>
+              <a:rPr lang="en-GB" altLang="en-US" sz="2000" dirty="0" smtClean="0">
+                <a:latin typeface="Arial Unicode MS" pitchFamily="34" charset="-128"/>
+              </a:rPr>
+              <a:t> (usually across space with fMRI, but could be across time) and has been shown more effective in (re)producing characteristic resting-state networks (RSNs), and separating signal from noise</a:t>
+            </a:r>
+          </a:p>
+          <a:p>
+            <a:pPr eaLnBrk="1" hangingPunct="1">
+              <a:lnSpc>
+                <a:spcPct val="120000"/>
+              </a:lnSpc>
+              <a:spcBef>
+                <a:spcPct val="80000"/>
+              </a:spcBef>
+            </a:pPr>
+            <a:r>
+              <a:rPr lang="en-GB" altLang="en-US" sz="2000" dirty="0" smtClean="0">
+                <a:latin typeface="Arial Unicode MS" pitchFamily="34" charset="-128"/>
+              </a:rPr>
+              <a:t>There are other types of matrix factorisation (e.g., non-negative, tensor-based) that have been tried, as well as various clustering techniques</a:t>
+            </a:r>
+          </a:p>
+          <a:p>
+            <a:pPr eaLnBrk="1" hangingPunct="1">
+              <a:lnSpc>
+                <a:spcPct val="120000"/>
+              </a:lnSpc>
+              <a:spcBef>
+                <a:spcPct val="80000"/>
+              </a:spcBef>
+            </a:pPr>
+            <a:r>
+              <a:rPr lang="en-GB" altLang="en-US" sz="2000" dirty="0" smtClean="0">
+                <a:latin typeface="Arial Unicode MS" pitchFamily="34" charset="-128"/>
+              </a:rPr>
+              <a:t>Incidentally, while PCA is an SVD of the data covariance matrix (Y’Y), other techniques like CCA and PLS are SVDs of data-model covariance (Y’X)…</a:t>
+            </a:r>
+          </a:p>
+          <a:p>
+            <a:pPr marL="0" indent="0" eaLnBrk="1" hangingPunct="1">
+              <a:lnSpc>
+                <a:spcPct val="120000"/>
+              </a:lnSpc>
+              <a:spcBef>
+                <a:spcPct val="80000"/>
+              </a:spcBef>
+              <a:buNone/>
+            </a:pPr>
+            <a:endParaRPr lang="en-GB" altLang="en-US" sz="2000" dirty="0">
+              <a:latin typeface="Arial Unicode MS" pitchFamily="34" charset="-128"/>
+            </a:endParaRPr>
+          </a:p>
+          <a:p>
+            <a:pPr eaLnBrk="1" hangingPunct="1">
+              <a:lnSpc>
+                <a:spcPct val="120000"/>
+              </a:lnSpc>
+              <a:spcBef>
+                <a:spcPct val="80000"/>
+              </a:spcBef>
+            </a:pPr>
+            <a:endParaRPr lang="de-CH" altLang="en-US" sz="2000" dirty="0" smtClean="0">
+              <a:latin typeface="Arial Unicode MS" pitchFamily="34" charset="-128"/>
+            </a:endParaRPr>
+          </a:p>
+        </p:txBody>
+      </p:sp>
+      <p:sp>
+        <p:nvSpPr>
+          <p:cNvPr id="31747" name="Rectangle 3"/>
+          <p:cNvSpPr>
+            <a:spLocks noGrp="1" noChangeArrowheads="1"/>
+          </p:cNvSpPr>
+          <p:nvPr>
+            <p:ph type="title"/>
+          </p:nvPr>
+        </p:nvSpPr>
+        <p:spPr>
+          <a:xfrm>
+            <a:off x="457200" y="188640"/>
+            <a:ext cx="3646748" cy="954360"/>
+          </a:xfrm>
+        </p:spPr>
+        <p:txBody>
+          <a:bodyPr/>
+          <a:lstStyle/>
+          <a:p>
+            <a:pPr eaLnBrk="1" hangingPunct="1"/>
+            <a:r>
+              <a:rPr lang="de-CH" altLang="en-US" sz="3600" b="1" dirty="0" smtClean="0">
+                <a:latin typeface="Arial Unicode MS" pitchFamily="34" charset="-128"/>
+              </a:rPr>
+              <a:t>Multivariate fC</a:t>
+            </a:r>
+            <a:endParaRPr lang="en-US" altLang="en-US" sz="3600" b="1" dirty="0" smtClean="0">
+              <a:latin typeface="Arial Unicode MS" pitchFamily="34" charset="-128"/>
+            </a:endParaRPr>
+          </a:p>
+        </p:txBody>
+      </p:sp>
+    </p:spTree>
+    <p:extLst>
+      <p:ext uri="{BB962C8B-B14F-4D97-AF65-F5344CB8AC3E}">
+        <p14:creationId xmlns:p14="http://schemas.microsoft.com/office/powerpoint/2010/main" val="1725068671"/>
+      </p:ext>
+    </p:extLst>
+  </p:cSld>
+  <p:clrMapOvr>
+    <a:masterClrMapping/>
+  </p:clrMapOvr>
+  <p:timing>
+    <p:tnLst>
+      <p:par>
+        <p:cTn id="1" dur="indefinite" restart="never" nodeType="tmRoot">
+          <p:childTnLst>
+            <p:seq concurrent="1" nextAc="seek">
+              <p:cTn id="2" dur="indefinite" nodeType="mainSeq">
+                <p:childTnLst>
+                  <p:par>
+                    <p:cTn id="3" fill="hold">
+                      <p:stCondLst>
+                        <p:cond delay="indefinite"/>
+                      </p:stCondLst>
+                      <p:childTnLst>
+                        <p:par>
+                          <p:cTn id="4" fill="hold">
+                            <p:stCondLst>
+                              <p:cond delay="0"/>
+                            </p:stCondLst>
+                            <p:childTnLst>
+                              <p:par>
+                                <p:cTn id="5" presetID="1" presetClass="entr" presetSubtype="0" fill="hold" grpId="0" nodeType="clickEffect">
+                                  <p:stCondLst>
+                                    <p:cond delay="0"/>
+                                  </p:stCondLst>
+                                  <p:childTnLst>
+                                    <p:set>
+                                      <p:cBhvr>
+                                        <p:cTn id="6" dur="1" fill="hold">
+                                          <p:stCondLst>
+                                            <p:cond delay="0"/>
+                                          </p:stCondLst>
+                                        </p:cTn>
+                                        <p:tgtEl>
+                                          <p:spTgt spid="175106">
+                                            <p:txEl>
+                                              <p:pRg st="2" end="2"/>
+                                            </p:txEl>
+                                          </p:spTgt>
+                                        </p:tgtEl>
+                                        <p:attrNameLst>
+                                          <p:attrName>style.visibility</p:attrName>
+                                        </p:attrNameLst>
+                                      </p:cBhvr>
+                                      <p:to>
+                                        <p:strVal val="visible"/>
+                                      </p:to>
+                                    </p:set>
+                                  </p:childTnLst>
+                                </p:cTn>
+                              </p:par>
+                            </p:childTnLst>
+                          </p:cTn>
+                        </p:par>
+                      </p:childTnLst>
+                    </p:cTn>
+                  </p:par>
+                  <p:par>
+                    <p:cTn id="7" fill="hold">
+                      <p:stCondLst>
+                        <p:cond delay="indefinite"/>
+                      </p:stCondLst>
+                      <p:childTnLst>
+                        <p:par>
+                          <p:cTn id="8" fill="hold">
+                            <p:stCondLst>
+                              <p:cond delay="0"/>
+                            </p:stCondLst>
+                            <p:childTnLst>
+                              <p:par>
+                                <p:cTn id="9" presetID="1" presetClass="entr" presetSubtype="0" fill="hold" grpId="0" nodeType="clickEffect">
+                                  <p:stCondLst>
+                                    <p:cond delay="0"/>
+                                  </p:stCondLst>
+                                  <p:childTnLst>
+                                    <p:set>
+                                      <p:cBhvr>
+                                        <p:cTn id="10" dur="1" fill="hold">
+                                          <p:stCondLst>
+                                            <p:cond delay="0"/>
+                                          </p:stCondLst>
+                                        </p:cTn>
+                                        <p:tgtEl>
+                                          <p:spTgt spid="175106">
+                                            <p:txEl>
+                                              <p:pRg st="3" end="3"/>
+                                            </p:txEl>
+                                          </p:spTgt>
+                                        </p:tgtEl>
+                                        <p:attrNameLst>
+                                          <p:attrName>style.visibility</p:attrName>
+                                        </p:attrNameLst>
+                                      </p:cBhvr>
+                                      <p:to>
+                                        <p:strVal val="visible"/>
+                                      </p:to>
+                                    </p:set>
+                                  </p:childTnLst>
+                                </p:cTn>
+                              </p:par>
+                            </p:childTnLst>
+                          </p:cTn>
+                        </p:par>
+                      </p:childTnLst>
+                    </p:cTn>
+                  </p:par>
+                </p:childTnLst>
+              </p:cTn>
+              <p:prevCondLst>
+                <p:cond evt="onPrev" delay="0">
+                  <p:tgtEl>
+                    <p:sldTgt/>
+                  </p:tgtEl>
+                </p:cond>
+              </p:prevCondLst>
+              <p:nextCondLst>
+                <p:cond evt="onNext" delay="0">
+                  <p:tgtEl>
+                    <p:sldTgt/>
+                  </p:tgtEl>
+                </p:cond>
+              </p:nextCondLst>
+            </p:seq>
+          </p:childTnLst>
+        </p:cTn>
+      </p:par>
+    </p:tnLst>
+    <p:bldLst>
+      <p:bldP spid="175106" grpId="0" uiExpand="1" build="p" autoUpdateAnimBg="0"/>
+    </p:bldLst>
+  </p:timing>
+</p:sld>
+</file>
+
+<file path=ppt/slides/slide11.xml><?xml version="1.0" encoding="utf-8"?>
+<p:sld xmlns:a="http://schemas.openxmlformats.org/drawingml/2006/main" xmlns:r="http://schemas.openxmlformats.org/officeDocument/2006/relationships" xmlns:p="http://schemas.openxmlformats.org/presentationml/2006/main">
+  <p:cSld>
+    <p:spTree>
+      <p:nvGrpSpPr>
+        <p:cNvPr id="1" name=""/>
+        <p:cNvGrpSpPr/>
+        <p:nvPr/>
+      </p:nvGrpSpPr>
+      <p:grpSpPr>
+        <a:xfrm>
+          <a:off x="0" y="0"/>
+          <a:ext cx="0" cy="0"/>
+          <a:chOff x="0" y="0"/>
+          <a:chExt cx="0" cy="0"/>
+        </a:xfrm>
+      </p:grpSpPr>
+      <p:sp>
+        <p:nvSpPr>
           <p:cNvPr id="2" name="Title 1"/>
           <p:cNvSpPr>
             <a:spLocks noGrp="1"/>
@@ -11843,7 +12431,7 @@
 </p:sld>
 </file>
 
-<file path=ppt/slides/slide11.xml><?xml version="1.0" encoding="utf-8"?>
+<file path=ppt/slides/slide12.xml><?xml version="1.0" encoding="utf-8"?>
 <p:sld xmlns:a="http://schemas.openxmlformats.org/drawingml/2006/main" xmlns:r="http://schemas.openxmlformats.org/officeDocument/2006/relationships" xmlns:p="http://schemas.openxmlformats.org/presentationml/2006/main">
   <p:cSld>
     <p:spTree>
@@ -12270,7 +12858,7 @@
 </p:sld>
 </file>
 
-<file path=ppt/slides/slide12.xml><?xml version="1.0" encoding="utf-8"?>
+<file path=ppt/slides/slide13.xml><?xml version="1.0" encoding="utf-8"?>
 <p:sld xmlns:a="http://schemas.openxmlformats.org/drawingml/2006/main" xmlns:r="http://schemas.openxmlformats.org/officeDocument/2006/relationships" xmlns:p="http://schemas.openxmlformats.org/presentationml/2006/main">
   <p:cSld>
     <p:spTree>
@@ -12763,7 +13351,7 @@
 </p:sld>
 </file>
 
-<file path=ppt/slides/slide13.xml><?xml version="1.0" encoding="utf-8"?>
+<file path=ppt/slides/slide14.xml><?xml version="1.0" encoding="utf-8"?>
 <p:sld xmlns:a="http://schemas.openxmlformats.org/drawingml/2006/main" xmlns:r="http://schemas.openxmlformats.org/officeDocument/2006/relationships" xmlns:p="http://schemas.openxmlformats.org/presentationml/2006/main">
   <p:cSld>
     <p:spTree>
@@ -13114,7 +13702,7 @@
 </p:sld>
 </file>
 
-<file path=ppt/slides/slide14.xml><?xml version="1.0" encoding="utf-8"?>
+<file path=ppt/slides/slide15.xml><?xml version="1.0" encoding="utf-8"?>
 <p:sld xmlns:a="http://schemas.openxmlformats.org/drawingml/2006/main" xmlns:r="http://schemas.openxmlformats.org/officeDocument/2006/relationships" xmlns:p="http://schemas.openxmlformats.org/presentationml/2006/main">
   <p:cSld>
     <p:spTree>
@@ -13416,7 +14004,7 @@
 </p:sld>
 </file>
 
-<file path=ppt/slides/slide15.xml><?xml version="1.0" encoding="utf-8"?>
+<file path=ppt/slides/slide16.xml><?xml version="1.0" encoding="utf-8"?>
 <p:sld xmlns:a="http://schemas.openxmlformats.org/drawingml/2006/main" xmlns:r="http://schemas.openxmlformats.org/officeDocument/2006/relationships" xmlns:p="http://schemas.openxmlformats.org/presentationml/2006/main">
   <p:cSld>
     <p:spTree>
@@ -13783,7 +14371,7 @@
 </p:sld>
 </file>
 
-<file path=ppt/slides/slide16.xml><?xml version="1.0" encoding="utf-8"?>
+<file path=ppt/slides/slide17.xml><?xml version="1.0" encoding="utf-8"?>
 <p:sld xmlns:a="http://schemas.openxmlformats.org/drawingml/2006/main" xmlns:r="http://schemas.openxmlformats.org/officeDocument/2006/relationships" xmlns:p="http://schemas.openxmlformats.org/presentationml/2006/main">
   <p:cSld>
     <p:spTree>
@@ -15439,7 +16027,7 @@
 </p:sld>
 </file>
 
-<file path=ppt/slides/slide17.xml><?xml version="1.0" encoding="utf-8"?>
+<file path=ppt/slides/slide18.xml><?xml version="1.0" encoding="utf-8"?>
 <p:sld xmlns:a="http://schemas.openxmlformats.org/drawingml/2006/main" xmlns:r="http://schemas.openxmlformats.org/officeDocument/2006/relationships" xmlns:p="http://schemas.openxmlformats.org/presentationml/2006/main">
   <p:cSld>
     <p:spTree>
@@ -16027,7 +16615,7 @@
 </p:sld>
 </file>
 
-<file path=ppt/slides/slide18.xml><?xml version="1.0" encoding="utf-8"?>
+<file path=ppt/slides/slide19.xml><?xml version="1.0" encoding="utf-8"?>
 <p:sld xmlns:a="http://schemas.openxmlformats.org/drawingml/2006/main" xmlns:r="http://schemas.openxmlformats.org/officeDocument/2006/relationships" xmlns:p="http://schemas.openxmlformats.org/presentationml/2006/main">
   <p:cSld>
     <p:spTree>
@@ -16790,7 +17378,412 @@
 </p:sld>
 </file>
 
-<file path=ppt/slides/slide19.xml><?xml version="1.0" encoding="utf-8"?>
+<file path=ppt/slides/slide2.xml><?xml version="1.0" encoding="utf-8"?>
+<p:sld xmlns:a="http://schemas.openxmlformats.org/drawingml/2006/main" xmlns:r="http://schemas.openxmlformats.org/officeDocument/2006/relationships" xmlns:p="http://schemas.openxmlformats.org/presentationml/2006/main">
+  <p:cSld>
+    <p:spTree>
+      <p:nvGrpSpPr>
+        <p:cNvPr id="1" name=""/>
+        <p:cNvGrpSpPr/>
+        <p:nvPr/>
+      </p:nvGrpSpPr>
+      <p:grpSpPr>
+        <a:xfrm>
+          <a:off x="0" y="0"/>
+          <a:ext cx="0" cy="0"/>
+          <a:chOff x="0" y="0"/>
+          <a:chExt cx="0" cy="0"/>
+        </a:xfrm>
+      </p:grpSpPr>
+      <p:pic>
+        <p:nvPicPr>
+          <p:cNvPr id="28674" name="Picture 3" descr="600px-Fig_bc"/>
+          <p:cNvPicPr>
+            <a:picLocks noChangeAspect="1" noChangeArrowheads="1"/>
+          </p:cNvPicPr>
+          <p:nvPr/>
+        </p:nvPicPr>
+        <p:blipFill>
+          <a:blip r:embed="rId3">
+            <a:extLst>
+              <a:ext uri="{28A0092B-C50C-407E-A947-70E740481C1C}">
+                <a14:useLocalDpi xmlns:a14="http://schemas.microsoft.com/office/drawing/2010/main" val="0"/>
+              </a:ext>
+            </a:extLst>
+          </a:blip>
+          <a:srcRect b="56148"/>
+          <a:stretch>
+            <a:fillRect/>
+          </a:stretch>
+        </p:blipFill>
+        <p:spPr bwMode="auto">
+          <a:xfrm>
+            <a:off x="179388" y="937704"/>
+            <a:ext cx="8964612" cy="2527300"/>
+          </a:xfrm>
+          <a:prstGeom prst="rect">
+            <a:avLst/>
+          </a:prstGeom>
+          <a:noFill/>
+          <a:ln>
+            <a:noFill/>
+          </a:ln>
+          <a:extLst>
+            <a:ext uri="{909E8E84-426E-40DD-AFC4-6F175D3DCCD1}">
+              <a14:hiddenFill xmlns:a14="http://schemas.microsoft.com/office/drawing/2010/main">
+                <a:solidFill>
+                  <a:srgbClr val="FFFFFF"/>
+                </a:solidFill>
+              </a14:hiddenFill>
+            </a:ext>
+            <a:ext uri="{91240B29-F687-4F45-9708-019B960494DF}">
+              <a14:hiddenLine xmlns:a14="http://schemas.microsoft.com/office/drawing/2010/main" w="9525">
+                <a:solidFill>
+                  <a:srgbClr val="000000"/>
+                </a:solidFill>
+                <a:miter lim="800000"/>
+                <a:headEnd/>
+                <a:tailEnd/>
+              </a14:hiddenLine>
+            </a:ext>
+          </a:extLst>
+        </p:spPr>
+      </p:pic>
+      <p:sp>
+        <p:nvSpPr>
+          <p:cNvPr id="28675" name="Rectangle 2"/>
+          <p:cNvSpPr>
+            <a:spLocks noGrp="1" noChangeArrowheads="1"/>
+          </p:cNvSpPr>
+          <p:nvPr>
+            <p:ph type="title"/>
+          </p:nvPr>
+        </p:nvSpPr>
+        <p:spPr>
+          <a:xfrm>
+            <a:off x="-252536" y="80628"/>
+            <a:ext cx="4788532" cy="1143000"/>
+          </a:xfrm>
+        </p:spPr>
+        <p:txBody>
+          <a:bodyPr/>
+          <a:lstStyle/>
+          <a:p>
+            <a:pPr eaLnBrk="1" hangingPunct="1"/>
+            <a:r>
+              <a:rPr lang="de-CH" altLang="en-US" sz="2800" b="1" dirty="0" smtClean="0">
+                <a:latin typeface="Arial Unicode MS" pitchFamily="34" charset="-128"/>
+              </a:rPr>
+              <a:t>Structural, functional &amp; effective connectivity</a:t>
+            </a:r>
+            <a:endParaRPr lang="en-US" altLang="en-US" sz="2800" b="1" dirty="0" smtClean="0">
+              <a:latin typeface="Arial Unicode MS" pitchFamily="34" charset="-128"/>
+            </a:endParaRPr>
+          </a:p>
+        </p:txBody>
+      </p:sp>
+      <p:sp>
+        <p:nvSpPr>
+          <p:cNvPr id="17412" name="Rectangle 4"/>
+          <p:cNvSpPr>
+            <a:spLocks noGrp="1" noChangeArrowheads="1"/>
+          </p:cNvSpPr>
+          <p:nvPr>
+            <p:ph type="body" idx="1"/>
+          </p:nvPr>
+        </p:nvSpPr>
+        <p:spPr>
+          <a:xfrm>
+            <a:off x="457200" y="3426482"/>
+            <a:ext cx="8686800" cy="2990850"/>
+          </a:xfrm>
+          <a:solidFill>
+            <a:schemeClr val="bg1"/>
+          </a:solidFill>
+        </p:spPr>
+        <p:txBody>
+          <a:bodyPr/>
+          <a:lstStyle/>
+          <a:p>
+            <a:pPr eaLnBrk="1" hangingPunct="1">
+              <a:lnSpc>
+                <a:spcPct val="120000"/>
+              </a:lnSpc>
+              <a:spcBef>
+                <a:spcPct val="80000"/>
+              </a:spcBef>
+            </a:pPr>
+            <a:r>
+              <a:rPr lang="de-CH" altLang="en-US" sz="2000" b="1" dirty="0" smtClean="0">
+                <a:latin typeface="Arial Unicode MS" pitchFamily="34" charset="-128"/>
+              </a:rPr>
+              <a:t>Structural/anatomical connectivity</a:t>
+            </a:r>
+            <a:br>
+              <a:rPr lang="de-CH" altLang="en-US" sz="2000" b="1" dirty="0" smtClean="0">
+                <a:latin typeface="Arial Unicode MS" pitchFamily="34" charset="-128"/>
+              </a:rPr>
+            </a:br>
+            <a:r>
+              <a:rPr lang="de-CH" altLang="en-US" sz="2000" dirty="0" smtClean="0">
+                <a:latin typeface="Arial Unicode MS" pitchFamily="34" charset="-128"/>
+              </a:rPr>
+              <a:t>= presence of axonal connections / white matter tracks (eg, DWI)</a:t>
+            </a:r>
+          </a:p>
+          <a:p>
+            <a:pPr eaLnBrk="1" hangingPunct="1">
+              <a:lnSpc>
+                <a:spcPct val="120000"/>
+              </a:lnSpc>
+              <a:spcBef>
+                <a:spcPct val="80000"/>
+              </a:spcBef>
+            </a:pPr>
+            <a:r>
+              <a:rPr lang="de-CH" altLang="en-US" sz="2000" b="1" dirty="0" smtClean="0">
+                <a:latin typeface="Arial Unicode MS" pitchFamily="34" charset="-128"/>
+              </a:rPr>
+              <a:t>Functional connectivity </a:t>
+            </a:r>
+            <a:br>
+              <a:rPr lang="de-CH" altLang="en-US" sz="2000" b="1" dirty="0" smtClean="0">
+                <a:latin typeface="Arial Unicode MS" pitchFamily="34" charset="-128"/>
+              </a:rPr>
+            </a:br>
+            <a:r>
+              <a:rPr lang="de-CH" altLang="en-US" sz="2000" dirty="0" smtClean="0">
+                <a:latin typeface="Arial Unicode MS" pitchFamily="34" charset="-128"/>
+              </a:rPr>
+              <a:t>= statistical dependencies between regional time series (eg, ICA)</a:t>
+            </a:r>
+          </a:p>
+          <a:p>
+            <a:pPr eaLnBrk="1" hangingPunct="1">
+              <a:lnSpc>
+                <a:spcPct val="120000"/>
+              </a:lnSpc>
+              <a:spcBef>
+                <a:spcPct val="80000"/>
+              </a:spcBef>
+            </a:pPr>
+            <a:r>
+              <a:rPr lang="de-CH" altLang="en-US" sz="2000" b="1" dirty="0" smtClean="0">
+                <a:latin typeface="Arial Unicode MS" pitchFamily="34" charset="-128"/>
+              </a:rPr>
+              <a:t>Effective connectivity</a:t>
+            </a:r>
+            <a:br>
+              <a:rPr lang="de-CH" altLang="en-US" sz="2000" b="1" dirty="0" smtClean="0">
+                <a:latin typeface="Arial Unicode MS" pitchFamily="34" charset="-128"/>
+              </a:rPr>
+            </a:br>
+            <a:r>
+              <a:rPr lang="de-CH" altLang="en-US" sz="2000" dirty="0" smtClean="0">
+                <a:latin typeface="Arial Unicode MS" pitchFamily="34" charset="-128"/>
+              </a:rPr>
+              <a:t>= causal (direct/directed) interactions between populations (eg, DCM) 	(based on explicit network models)</a:t>
+            </a:r>
+            <a:endParaRPr lang="en-US" altLang="en-US" sz="2000" dirty="0" smtClean="0">
+              <a:latin typeface="Arial Unicode MS" pitchFamily="34" charset="-128"/>
+            </a:endParaRPr>
+          </a:p>
+        </p:txBody>
+      </p:sp>
+    </p:spTree>
+    <p:extLst>
+      <p:ext uri="{BB962C8B-B14F-4D97-AF65-F5344CB8AC3E}">
+        <p14:creationId xmlns:p14="http://schemas.microsoft.com/office/powerpoint/2010/main" val="2567646555"/>
+      </p:ext>
+    </p:extLst>
+  </p:cSld>
+  <p:clrMapOvr>
+    <a:masterClrMapping/>
+  </p:clrMapOvr>
+  <p:timing>
+    <p:tnLst>
+      <p:par>
+        <p:cTn id="1" dur="indefinite" restart="never" nodeType="tmRoot">
+          <p:childTnLst>
+            <p:seq concurrent="1" nextAc="seek">
+              <p:cTn id="2" dur="indefinite" nodeType="mainSeq">
+                <p:childTnLst>
+                  <p:par>
+                    <p:cTn id="3" fill="hold" nodeType="clickPar">
+                      <p:stCondLst>
+                        <p:cond delay="indefinite"/>
+                      </p:stCondLst>
+                      <p:childTnLst>
+                        <p:par>
+                          <p:cTn id="4" fill="hold" nodeType="withGroup">
+                            <p:stCondLst>
+                              <p:cond delay="0"/>
+                            </p:stCondLst>
+                            <p:childTnLst>
+                              <p:par>
+                                <p:cTn id="5" presetID="1" presetClass="entr" presetSubtype="0" fill="hold" grpId="0" nodeType="clickEffect">
+                                  <p:stCondLst>
+                                    <p:cond delay="0"/>
+                                  </p:stCondLst>
+                                  <p:childTnLst>
+                                    <p:set>
+                                      <p:cBhvr>
+                                        <p:cTn id="6" dur="1" fill="hold">
+                                          <p:stCondLst>
+                                            <p:cond delay="0"/>
+                                          </p:stCondLst>
+                                        </p:cTn>
+                                        <p:tgtEl>
+                                          <p:spTgt spid="17412">
+                                            <p:txEl>
+                                              <p:pRg st="0" end="0"/>
+                                            </p:txEl>
+                                          </p:spTgt>
+                                        </p:tgtEl>
+                                        <p:attrNameLst>
+                                          <p:attrName>style.visibility</p:attrName>
+                                        </p:attrNameLst>
+                                      </p:cBhvr>
+                                      <p:to>
+                                        <p:strVal val="visible"/>
+                                      </p:to>
+                                    </p:set>
+                                  </p:childTnLst>
+                                </p:cTn>
+                              </p:par>
+                            </p:childTnLst>
+                          </p:cTn>
+                        </p:par>
+                      </p:childTnLst>
+                    </p:cTn>
+                  </p:par>
+                  <p:par>
+                    <p:cTn id="7" fill="hold" nodeType="clickPar">
+                      <p:stCondLst>
+                        <p:cond delay="indefinite"/>
+                      </p:stCondLst>
+                      <p:childTnLst>
+                        <p:par>
+                          <p:cTn id="8" fill="hold" nodeType="withGroup">
+                            <p:stCondLst>
+                              <p:cond delay="0"/>
+                            </p:stCondLst>
+                            <p:childTnLst>
+                              <p:par>
+                                <p:cTn id="9" presetID="1" presetClass="entr" presetSubtype="0" fill="hold" grpId="0" nodeType="clickEffect">
+                                  <p:stCondLst>
+                                    <p:cond delay="0"/>
+                                  </p:stCondLst>
+                                  <p:childTnLst>
+                                    <p:set>
+                                      <p:cBhvr>
+                                        <p:cTn id="10" dur="1" fill="hold">
+                                          <p:stCondLst>
+                                            <p:cond delay="0"/>
+                                          </p:stCondLst>
+                                        </p:cTn>
+                                        <p:tgtEl>
+                                          <p:spTgt spid="17412">
+                                            <p:txEl>
+                                              <p:pRg st="1" end="1"/>
+                                            </p:txEl>
+                                          </p:spTgt>
+                                        </p:tgtEl>
+                                        <p:attrNameLst>
+                                          <p:attrName>style.visibility</p:attrName>
+                                        </p:attrNameLst>
+                                      </p:cBhvr>
+                                      <p:to>
+                                        <p:strVal val="visible"/>
+                                      </p:to>
+                                    </p:set>
+                                  </p:childTnLst>
+                                </p:cTn>
+                              </p:par>
+                            </p:childTnLst>
+                          </p:cTn>
+                        </p:par>
+                      </p:childTnLst>
+                    </p:cTn>
+                  </p:par>
+                  <p:par>
+                    <p:cTn id="11" fill="hold" nodeType="clickPar">
+                      <p:stCondLst>
+                        <p:cond delay="indefinite"/>
+                      </p:stCondLst>
+                      <p:childTnLst>
+                        <p:par>
+                          <p:cTn id="12" fill="hold" nodeType="withGroup">
+                            <p:stCondLst>
+                              <p:cond delay="0"/>
+                            </p:stCondLst>
+                            <p:childTnLst>
+                              <p:par>
+                                <p:cTn id="13" presetID="1" presetClass="entr" presetSubtype="0" fill="hold" grpId="0" nodeType="clickEffect">
+                                  <p:stCondLst>
+                                    <p:cond delay="0"/>
+                                  </p:stCondLst>
+                                  <p:childTnLst>
+                                    <p:set>
+                                      <p:cBhvr>
+                                        <p:cTn id="14" dur="1" fill="hold">
+                                          <p:stCondLst>
+                                            <p:cond delay="0"/>
+                                          </p:stCondLst>
+                                        </p:cTn>
+                                        <p:tgtEl>
+                                          <p:spTgt spid="17412">
+                                            <p:txEl>
+                                              <p:pRg st="2" end="2"/>
+                                            </p:txEl>
+                                          </p:spTgt>
+                                        </p:tgtEl>
+                                        <p:attrNameLst>
+                                          <p:attrName>style.visibility</p:attrName>
+                                        </p:attrNameLst>
+                                      </p:cBhvr>
+                                      <p:to>
+                                        <p:strVal val="visible"/>
+                                      </p:to>
+                                    </p:set>
+                                  </p:childTnLst>
+                                </p:cTn>
+                              </p:par>
+                            </p:childTnLst>
+                          </p:cTn>
+                        </p:par>
+                      </p:childTnLst>
+                    </p:cTn>
+                  </p:par>
+                </p:childTnLst>
+              </p:cTn>
+              <p:prevCondLst>
+                <p:cond evt="onPrev" delay="0">
+                  <p:tgtEl>
+                    <p:sldTgt/>
+                  </p:tgtEl>
+                </p:cond>
+              </p:prevCondLst>
+              <p:nextCondLst>
+                <p:cond evt="onNext" delay="0">
+                  <p:tgtEl>
+                    <p:sldTgt/>
+                  </p:tgtEl>
+                </p:cond>
+              </p:nextCondLst>
+            </p:seq>
+          </p:childTnLst>
+        </p:cTn>
+      </p:par>
+    </p:tnLst>
+    <p:bldLst>
+      <p:bldP spid="17412" grpId="0" build="p" autoUpdateAnimBg="0"/>
+    </p:bldLst>
+  </p:timing>
+</p:sld>
+</file>
+
+<file path=ppt/slides/slide20.xml><?xml version="1.0" encoding="utf-8"?>
 <p:sld xmlns:a="http://schemas.openxmlformats.org/drawingml/2006/main" xmlns:r="http://schemas.openxmlformats.org/officeDocument/2006/relationships" xmlns:p="http://schemas.openxmlformats.org/presentationml/2006/main">
   <p:cSld>
     <p:spTree>
@@ -17279,412 +18272,7 @@
 </p:sld>
 </file>
 
-<file path=ppt/slides/slide2.xml><?xml version="1.0" encoding="utf-8"?>
-<p:sld xmlns:a="http://schemas.openxmlformats.org/drawingml/2006/main" xmlns:r="http://schemas.openxmlformats.org/officeDocument/2006/relationships" xmlns:p="http://schemas.openxmlformats.org/presentationml/2006/main">
-  <p:cSld>
-    <p:spTree>
-      <p:nvGrpSpPr>
-        <p:cNvPr id="1" name=""/>
-        <p:cNvGrpSpPr/>
-        <p:nvPr/>
-      </p:nvGrpSpPr>
-      <p:grpSpPr>
-        <a:xfrm>
-          <a:off x="0" y="0"/>
-          <a:ext cx="0" cy="0"/>
-          <a:chOff x="0" y="0"/>
-          <a:chExt cx="0" cy="0"/>
-        </a:xfrm>
-      </p:grpSpPr>
-      <p:pic>
-        <p:nvPicPr>
-          <p:cNvPr id="28674" name="Picture 3" descr="600px-Fig_bc"/>
-          <p:cNvPicPr>
-            <a:picLocks noChangeAspect="1" noChangeArrowheads="1"/>
-          </p:cNvPicPr>
-          <p:nvPr/>
-        </p:nvPicPr>
-        <p:blipFill>
-          <a:blip r:embed="rId3">
-            <a:extLst>
-              <a:ext uri="{28A0092B-C50C-407E-A947-70E740481C1C}">
-                <a14:useLocalDpi xmlns:a14="http://schemas.microsoft.com/office/drawing/2010/main" val="0"/>
-              </a:ext>
-            </a:extLst>
-          </a:blip>
-          <a:srcRect b="56148"/>
-          <a:stretch>
-            <a:fillRect/>
-          </a:stretch>
-        </p:blipFill>
-        <p:spPr bwMode="auto">
-          <a:xfrm>
-            <a:off x="179388" y="937704"/>
-            <a:ext cx="8964612" cy="2527300"/>
-          </a:xfrm>
-          <a:prstGeom prst="rect">
-            <a:avLst/>
-          </a:prstGeom>
-          <a:noFill/>
-          <a:ln>
-            <a:noFill/>
-          </a:ln>
-          <a:extLst>
-            <a:ext uri="{909E8E84-426E-40DD-AFC4-6F175D3DCCD1}">
-              <a14:hiddenFill xmlns:a14="http://schemas.microsoft.com/office/drawing/2010/main">
-                <a:solidFill>
-                  <a:srgbClr val="FFFFFF"/>
-                </a:solidFill>
-              </a14:hiddenFill>
-            </a:ext>
-            <a:ext uri="{91240B29-F687-4F45-9708-019B960494DF}">
-              <a14:hiddenLine xmlns:a14="http://schemas.microsoft.com/office/drawing/2010/main" w="9525">
-                <a:solidFill>
-                  <a:srgbClr val="000000"/>
-                </a:solidFill>
-                <a:miter lim="800000"/>
-                <a:headEnd/>
-                <a:tailEnd/>
-              </a14:hiddenLine>
-            </a:ext>
-          </a:extLst>
-        </p:spPr>
-      </p:pic>
-      <p:sp>
-        <p:nvSpPr>
-          <p:cNvPr id="28675" name="Rectangle 2"/>
-          <p:cNvSpPr>
-            <a:spLocks noGrp="1" noChangeArrowheads="1"/>
-          </p:cNvSpPr>
-          <p:nvPr>
-            <p:ph type="title"/>
-          </p:nvPr>
-        </p:nvSpPr>
-        <p:spPr>
-          <a:xfrm>
-            <a:off x="-252536" y="80628"/>
-            <a:ext cx="4788532" cy="1143000"/>
-          </a:xfrm>
-        </p:spPr>
-        <p:txBody>
-          <a:bodyPr/>
-          <a:lstStyle/>
-          <a:p>
-            <a:pPr eaLnBrk="1" hangingPunct="1"/>
-            <a:r>
-              <a:rPr lang="de-CH" altLang="en-US" sz="2800" b="1" dirty="0" smtClean="0">
-                <a:latin typeface="Arial Unicode MS" pitchFamily="34" charset="-128"/>
-              </a:rPr>
-              <a:t>Structural, functional &amp; effective connectivity</a:t>
-            </a:r>
-            <a:endParaRPr lang="en-US" altLang="en-US" sz="2800" b="1" dirty="0" smtClean="0">
-              <a:latin typeface="Arial Unicode MS" pitchFamily="34" charset="-128"/>
-            </a:endParaRPr>
-          </a:p>
-        </p:txBody>
-      </p:sp>
-      <p:sp>
-        <p:nvSpPr>
-          <p:cNvPr id="17412" name="Rectangle 4"/>
-          <p:cNvSpPr>
-            <a:spLocks noGrp="1" noChangeArrowheads="1"/>
-          </p:cNvSpPr>
-          <p:nvPr>
-            <p:ph type="body" idx="1"/>
-          </p:nvPr>
-        </p:nvSpPr>
-        <p:spPr>
-          <a:xfrm>
-            <a:off x="457200" y="3426482"/>
-            <a:ext cx="8686800" cy="2990850"/>
-          </a:xfrm>
-          <a:solidFill>
-            <a:schemeClr val="bg1"/>
-          </a:solidFill>
-        </p:spPr>
-        <p:txBody>
-          <a:bodyPr/>
-          <a:lstStyle/>
-          <a:p>
-            <a:pPr eaLnBrk="1" hangingPunct="1">
-              <a:lnSpc>
-                <a:spcPct val="120000"/>
-              </a:lnSpc>
-              <a:spcBef>
-                <a:spcPct val="80000"/>
-              </a:spcBef>
-            </a:pPr>
-            <a:r>
-              <a:rPr lang="de-CH" altLang="en-US" sz="2000" b="1" dirty="0" smtClean="0">
-                <a:latin typeface="Arial Unicode MS" pitchFamily="34" charset="-128"/>
-              </a:rPr>
-              <a:t>Structural/anatomical connectivity</a:t>
-            </a:r>
-            <a:br>
-              <a:rPr lang="de-CH" altLang="en-US" sz="2000" b="1" dirty="0" smtClean="0">
-                <a:latin typeface="Arial Unicode MS" pitchFamily="34" charset="-128"/>
-              </a:rPr>
-            </a:br>
-            <a:r>
-              <a:rPr lang="de-CH" altLang="en-US" sz="2000" dirty="0" smtClean="0">
-                <a:latin typeface="Arial Unicode MS" pitchFamily="34" charset="-128"/>
-              </a:rPr>
-              <a:t>= presence of axonal connections / white matter tracks (eg, DWI)</a:t>
-            </a:r>
-          </a:p>
-          <a:p>
-            <a:pPr eaLnBrk="1" hangingPunct="1">
-              <a:lnSpc>
-                <a:spcPct val="120000"/>
-              </a:lnSpc>
-              <a:spcBef>
-                <a:spcPct val="80000"/>
-              </a:spcBef>
-            </a:pPr>
-            <a:r>
-              <a:rPr lang="de-CH" altLang="en-US" sz="2000" b="1" dirty="0" smtClean="0">
-                <a:latin typeface="Arial Unicode MS" pitchFamily="34" charset="-128"/>
-              </a:rPr>
-              <a:t>Functional connectivity </a:t>
-            </a:r>
-            <a:br>
-              <a:rPr lang="de-CH" altLang="en-US" sz="2000" b="1" dirty="0" smtClean="0">
-                <a:latin typeface="Arial Unicode MS" pitchFamily="34" charset="-128"/>
-              </a:rPr>
-            </a:br>
-            <a:r>
-              <a:rPr lang="de-CH" altLang="en-US" sz="2000" dirty="0" smtClean="0">
-                <a:latin typeface="Arial Unicode MS" pitchFamily="34" charset="-128"/>
-              </a:rPr>
-              <a:t>= statistical dependencies between regional time series (eg, ICA)</a:t>
-            </a:r>
-          </a:p>
-          <a:p>
-            <a:pPr eaLnBrk="1" hangingPunct="1">
-              <a:lnSpc>
-                <a:spcPct val="120000"/>
-              </a:lnSpc>
-              <a:spcBef>
-                <a:spcPct val="80000"/>
-              </a:spcBef>
-            </a:pPr>
-            <a:r>
-              <a:rPr lang="de-CH" altLang="en-US" sz="2000" b="1" dirty="0" smtClean="0">
-                <a:latin typeface="Arial Unicode MS" pitchFamily="34" charset="-128"/>
-              </a:rPr>
-              <a:t>Effective connectivity</a:t>
-            </a:r>
-            <a:br>
-              <a:rPr lang="de-CH" altLang="en-US" sz="2000" b="1" dirty="0" smtClean="0">
-                <a:latin typeface="Arial Unicode MS" pitchFamily="34" charset="-128"/>
-              </a:rPr>
-            </a:br>
-            <a:r>
-              <a:rPr lang="de-CH" altLang="en-US" sz="2000" dirty="0" smtClean="0">
-                <a:latin typeface="Arial Unicode MS" pitchFamily="34" charset="-128"/>
-              </a:rPr>
-              <a:t>= causal (direct/directed) interactions between populations (eg, DCM) 	(based on explicit network models)</a:t>
-            </a:r>
-            <a:endParaRPr lang="en-US" altLang="en-US" sz="2000" dirty="0" smtClean="0">
-              <a:latin typeface="Arial Unicode MS" pitchFamily="34" charset="-128"/>
-            </a:endParaRPr>
-          </a:p>
-        </p:txBody>
-      </p:sp>
-    </p:spTree>
-    <p:extLst>
-      <p:ext uri="{BB962C8B-B14F-4D97-AF65-F5344CB8AC3E}">
-        <p14:creationId xmlns:p14="http://schemas.microsoft.com/office/powerpoint/2010/main" val="2567646555"/>
-      </p:ext>
-    </p:extLst>
-  </p:cSld>
-  <p:clrMapOvr>
-    <a:masterClrMapping/>
-  </p:clrMapOvr>
-  <p:timing>
-    <p:tnLst>
-      <p:par>
-        <p:cTn id="1" dur="indefinite" restart="never" nodeType="tmRoot">
-          <p:childTnLst>
-            <p:seq concurrent="1" nextAc="seek">
-              <p:cTn id="2" dur="indefinite" nodeType="mainSeq">
-                <p:childTnLst>
-                  <p:par>
-                    <p:cTn id="3" fill="hold" nodeType="clickPar">
-                      <p:stCondLst>
-                        <p:cond delay="indefinite"/>
-                      </p:stCondLst>
-                      <p:childTnLst>
-                        <p:par>
-                          <p:cTn id="4" fill="hold" nodeType="withGroup">
-                            <p:stCondLst>
-                              <p:cond delay="0"/>
-                            </p:stCondLst>
-                            <p:childTnLst>
-                              <p:par>
-                                <p:cTn id="5" presetID="1" presetClass="entr" presetSubtype="0" fill="hold" grpId="0" nodeType="clickEffect">
-                                  <p:stCondLst>
-                                    <p:cond delay="0"/>
-                                  </p:stCondLst>
-                                  <p:childTnLst>
-                                    <p:set>
-                                      <p:cBhvr>
-                                        <p:cTn id="6" dur="1" fill="hold">
-                                          <p:stCondLst>
-                                            <p:cond delay="0"/>
-                                          </p:stCondLst>
-                                        </p:cTn>
-                                        <p:tgtEl>
-                                          <p:spTgt spid="17412">
-                                            <p:txEl>
-                                              <p:pRg st="0" end="0"/>
-                                            </p:txEl>
-                                          </p:spTgt>
-                                        </p:tgtEl>
-                                        <p:attrNameLst>
-                                          <p:attrName>style.visibility</p:attrName>
-                                        </p:attrNameLst>
-                                      </p:cBhvr>
-                                      <p:to>
-                                        <p:strVal val="visible"/>
-                                      </p:to>
-                                    </p:set>
-                                  </p:childTnLst>
-                                </p:cTn>
-                              </p:par>
-                            </p:childTnLst>
-                          </p:cTn>
-                        </p:par>
-                      </p:childTnLst>
-                    </p:cTn>
-                  </p:par>
-                  <p:par>
-                    <p:cTn id="7" fill="hold" nodeType="clickPar">
-                      <p:stCondLst>
-                        <p:cond delay="indefinite"/>
-                      </p:stCondLst>
-                      <p:childTnLst>
-                        <p:par>
-                          <p:cTn id="8" fill="hold" nodeType="withGroup">
-                            <p:stCondLst>
-                              <p:cond delay="0"/>
-                            </p:stCondLst>
-                            <p:childTnLst>
-                              <p:par>
-                                <p:cTn id="9" presetID="1" presetClass="entr" presetSubtype="0" fill="hold" grpId="0" nodeType="clickEffect">
-                                  <p:stCondLst>
-                                    <p:cond delay="0"/>
-                                  </p:stCondLst>
-                                  <p:childTnLst>
-                                    <p:set>
-                                      <p:cBhvr>
-                                        <p:cTn id="10" dur="1" fill="hold">
-                                          <p:stCondLst>
-                                            <p:cond delay="0"/>
-                                          </p:stCondLst>
-                                        </p:cTn>
-                                        <p:tgtEl>
-                                          <p:spTgt spid="17412">
-                                            <p:txEl>
-                                              <p:pRg st="1" end="1"/>
-                                            </p:txEl>
-                                          </p:spTgt>
-                                        </p:tgtEl>
-                                        <p:attrNameLst>
-                                          <p:attrName>style.visibility</p:attrName>
-                                        </p:attrNameLst>
-                                      </p:cBhvr>
-                                      <p:to>
-                                        <p:strVal val="visible"/>
-                                      </p:to>
-                                    </p:set>
-                                  </p:childTnLst>
-                                </p:cTn>
-                              </p:par>
-                            </p:childTnLst>
-                          </p:cTn>
-                        </p:par>
-                      </p:childTnLst>
-                    </p:cTn>
-                  </p:par>
-                  <p:par>
-                    <p:cTn id="11" fill="hold" nodeType="clickPar">
-                      <p:stCondLst>
-                        <p:cond delay="indefinite"/>
-                      </p:stCondLst>
-                      <p:childTnLst>
-                        <p:par>
-                          <p:cTn id="12" fill="hold" nodeType="withGroup">
-                            <p:stCondLst>
-                              <p:cond delay="0"/>
-                            </p:stCondLst>
-                            <p:childTnLst>
-                              <p:par>
-                                <p:cTn id="13" presetID="1" presetClass="entr" presetSubtype="0" fill="hold" grpId="0" nodeType="clickEffect">
-                                  <p:stCondLst>
-                                    <p:cond delay="0"/>
-                                  </p:stCondLst>
-                                  <p:childTnLst>
-                                    <p:set>
-                                      <p:cBhvr>
-                                        <p:cTn id="14" dur="1" fill="hold">
-                                          <p:stCondLst>
-                                            <p:cond delay="0"/>
-                                          </p:stCondLst>
-                                        </p:cTn>
-                                        <p:tgtEl>
-                                          <p:spTgt spid="17412">
-                                            <p:txEl>
-                                              <p:pRg st="2" end="2"/>
-                                            </p:txEl>
-                                          </p:spTgt>
-                                        </p:tgtEl>
-                                        <p:attrNameLst>
-                                          <p:attrName>style.visibility</p:attrName>
-                                        </p:attrNameLst>
-                                      </p:cBhvr>
-                                      <p:to>
-                                        <p:strVal val="visible"/>
-                                      </p:to>
-                                    </p:set>
-                                  </p:childTnLst>
-                                </p:cTn>
-                              </p:par>
-                            </p:childTnLst>
-                          </p:cTn>
-                        </p:par>
-                      </p:childTnLst>
-                    </p:cTn>
-                  </p:par>
-                </p:childTnLst>
-              </p:cTn>
-              <p:prevCondLst>
-                <p:cond evt="onPrev" delay="0">
-                  <p:tgtEl>
-                    <p:sldTgt/>
-                  </p:tgtEl>
-                </p:cond>
-              </p:prevCondLst>
-              <p:nextCondLst>
-                <p:cond evt="onNext" delay="0">
-                  <p:tgtEl>
-                    <p:sldTgt/>
-                  </p:tgtEl>
-                </p:cond>
-              </p:nextCondLst>
-            </p:seq>
-          </p:childTnLst>
-        </p:cTn>
-      </p:par>
-    </p:tnLst>
-    <p:bldLst>
-      <p:bldP spid="17412" grpId="0" build="p" autoUpdateAnimBg="0"/>
-    </p:bldLst>
-  </p:timing>
-</p:sld>
-</file>
-
-<file path=ppt/slides/slide20.xml><?xml version="1.0" encoding="utf-8"?>
+<file path=ppt/slides/slide21.xml><?xml version="1.0" encoding="utf-8"?>
 <p:sld xmlns:a="http://schemas.openxmlformats.org/drawingml/2006/main" xmlns:r="http://schemas.openxmlformats.org/officeDocument/2006/relationships" xmlns:p="http://schemas.openxmlformats.org/presentationml/2006/main">
   <p:cSld>
     <p:spTree>
@@ -18091,7 +18679,7 @@
 </p:sld>
 </file>
 
-<file path=ppt/slides/slide21.xml><?xml version="1.0" encoding="utf-8"?>
+<file path=ppt/slides/slide22.xml><?xml version="1.0" encoding="utf-8"?>
 <p:sld xmlns:a="http://schemas.openxmlformats.org/drawingml/2006/main" xmlns:r="http://schemas.openxmlformats.org/officeDocument/2006/relationships" xmlns:p="http://schemas.openxmlformats.org/presentationml/2006/main">
   <p:cSld>
     <p:spTree>
@@ -21347,7 +21935,7 @@
 </p:sld>
 </file>
 
-<file path=ppt/slides/slide22.xml><?xml version="1.0" encoding="utf-8"?>
+<file path=ppt/slides/slide23.xml><?xml version="1.0" encoding="utf-8"?>
 <p:sld xmlns:a="http://schemas.openxmlformats.org/drawingml/2006/main" xmlns:r="http://schemas.openxmlformats.org/officeDocument/2006/relationships" xmlns:p="http://schemas.openxmlformats.org/presentationml/2006/main">
   <p:cSld>
     <p:spTree>
@@ -24012,7 +24600,7 @@
 </p:sld>
 </file>
 
-<file path=ppt/slides/slide23.xml><?xml version="1.0" encoding="utf-8"?>
+<file path=ppt/slides/slide24.xml><?xml version="1.0" encoding="utf-8"?>
 <p:sld xmlns:a="http://schemas.openxmlformats.org/drawingml/2006/main" xmlns:r="http://schemas.openxmlformats.org/officeDocument/2006/relationships" xmlns:p="http://schemas.openxmlformats.org/presentationml/2006/main">
   <p:cSld>
     <p:spTree>
@@ -25924,7 +26512,7 @@
 </p:sld>
 </file>
 
-<file path=ppt/slides/slide24.xml><?xml version="1.0" encoding="utf-8"?>
+<file path=ppt/slides/slide25.xml><?xml version="1.0" encoding="utf-8"?>
 <p:sld xmlns:a="http://schemas.openxmlformats.org/drawingml/2006/main" xmlns:r="http://schemas.openxmlformats.org/officeDocument/2006/relationships" xmlns:p="http://schemas.openxmlformats.org/presentationml/2006/main">
   <p:cSld>
     <p:spTree>
@@ -26474,7 +27062,7 @@
 </p:sld>
 </file>
 
-<file path=ppt/slides/slide25.xml><?xml version="1.0" encoding="utf-8"?>
+<file path=ppt/slides/slide26.xml><?xml version="1.0" encoding="utf-8"?>
 <p:sld xmlns:a="http://schemas.openxmlformats.org/drawingml/2006/main" xmlns:r="http://schemas.openxmlformats.org/officeDocument/2006/relationships" xmlns:p="http://schemas.openxmlformats.org/presentationml/2006/main">
   <p:cSld>
     <p:spTree>
@@ -26782,7 +27370,7 @@
 </p:sld>
 </file>
 
-<file path=ppt/slides/slide26.xml><?xml version="1.0" encoding="utf-8"?>
+<file path=ppt/slides/slide27.xml><?xml version="1.0" encoding="utf-8"?>
 <p:sld xmlns:a="http://schemas.openxmlformats.org/drawingml/2006/main" xmlns:r="http://schemas.openxmlformats.org/officeDocument/2006/relationships" xmlns:p="http://schemas.openxmlformats.org/presentationml/2006/main">
   <p:cSld>
     <p:spTree>
@@ -29772,6 +30360,183 @@
           </a:p>
         </p:txBody>
       </p:sp>
+      <p:sp>
+        <p:nvSpPr>
+          <p:cNvPr id="33" name="Rectangle 5"/>
+          <p:cNvSpPr>
+            <a:spLocks noChangeArrowheads="1"/>
+          </p:cNvSpPr>
+          <p:nvPr/>
+        </p:nvSpPr>
+        <p:spPr bwMode="auto">
+          <a:xfrm>
+            <a:off x="6365875" y="6120735"/>
+            <a:ext cx="2707344" cy="705321"/>
+          </a:xfrm>
+          <a:prstGeom prst="rect">
+            <a:avLst/>
+          </a:prstGeom>
+          <a:noFill/>
+          <a:ln>
+            <a:noFill/>
+          </a:ln>
+          <a:extLst>
+            <a:ext uri="{909E8E84-426E-40DD-AFC4-6F175D3DCCD1}">
+              <a14:hiddenFill xmlns:a14="http://schemas.microsoft.com/office/drawing/2010/main">
+                <a:solidFill>
+                  <a:srgbClr val="FFFFFF"/>
+                </a:solidFill>
+              </a14:hiddenFill>
+            </a:ext>
+            <a:ext uri="{91240B29-F687-4F45-9708-019B960494DF}">
+              <a14:hiddenLine xmlns:a14="http://schemas.microsoft.com/office/drawing/2010/main" w="12700">
+                <a:solidFill>
+                  <a:srgbClr val="000000"/>
+                </a:solidFill>
+                <a:miter lim="800000"/>
+                <a:headEnd/>
+                <a:tailEnd/>
+              </a14:hiddenLine>
+            </a:ext>
+          </a:extLst>
+        </p:spPr>
+        <p:txBody>
+          <a:bodyPr wrap="square" lIns="90488" tIns="44450" rIns="90488" bIns="44450">
+            <a:spAutoFit/>
+          </a:bodyPr>
+          <a:lstStyle>
+            <a:lvl1pPr eaLnBrk="0" hangingPunct="0">
+              <a:defRPr>
+                <a:solidFill>
+                  <a:schemeClr val="tx1"/>
+                </a:solidFill>
+                <a:latin typeface="Arial" pitchFamily="34" charset="0"/>
+                <a:cs typeface="Arial" pitchFamily="34" charset="0"/>
+              </a:defRPr>
+            </a:lvl1pPr>
+            <a:lvl2pPr marL="742950" indent="-285750" eaLnBrk="0" hangingPunct="0">
+              <a:defRPr>
+                <a:solidFill>
+                  <a:schemeClr val="tx1"/>
+                </a:solidFill>
+                <a:latin typeface="Arial" pitchFamily="34" charset="0"/>
+                <a:cs typeface="Arial" pitchFamily="34" charset="0"/>
+              </a:defRPr>
+            </a:lvl2pPr>
+            <a:lvl3pPr marL="1143000" indent="-228600" eaLnBrk="0" hangingPunct="0">
+              <a:defRPr>
+                <a:solidFill>
+                  <a:schemeClr val="tx1"/>
+                </a:solidFill>
+                <a:latin typeface="Arial" pitchFamily="34" charset="0"/>
+                <a:cs typeface="Arial" pitchFamily="34" charset="0"/>
+              </a:defRPr>
+            </a:lvl3pPr>
+            <a:lvl4pPr marL="1600200" indent="-228600" eaLnBrk="0" hangingPunct="0">
+              <a:defRPr>
+                <a:solidFill>
+                  <a:schemeClr val="tx1"/>
+                </a:solidFill>
+                <a:latin typeface="Arial" pitchFamily="34" charset="0"/>
+                <a:cs typeface="Arial" pitchFamily="34" charset="0"/>
+              </a:defRPr>
+            </a:lvl4pPr>
+            <a:lvl5pPr marL="2057400" indent="-228600" eaLnBrk="0" hangingPunct="0">
+              <a:defRPr>
+                <a:solidFill>
+                  <a:schemeClr val="tx1"/>
+                </a:solidFill>
+                <a:latin typeface="Arial" pitchFamily="34" charset="0"/>
+                <a:cs typeface="Arial" pitchFamily="34" charset="0"/>
+              </a:defRPr>
+            </a:lvl5pPr>
+            <a:lvl6pPr marL="2514600" indent="-228600" eaLnBrk="0" fontAlgn="base" hangingPunct="0">
+              <a:spcBef>
+                <a:spcPct val="0"/>
+              </a:spcBef>
+              <a:spcAft>
+                <a:spcPct val="0"/>
+              </a:spcAft>
+              <a:defRPr>
+                <a:solidFill>
+                  <a:schemeClr val="tx1"/>
+                </a:solidFill>
+                <a:latin typeface="Arial" pitchFamily="34" charset="0"/>
+                <a:cs typeface="Arial" pitchFamily="34" charset="0"/>
+              </a:defRPr>
+            </a:lvl6pPr>
+            <a:lvl7pPr marL="2971800" indent="-228600" eaLnBrk="0" fontAlgn="base" hangingPunct="0">
+              <a:spcBef>
+                <a:spcPct val="0"/>
+              </a:spcBef>
+              <a:spcAft>
+                <a:spcPct val="0"/>
+              </a:spcAft>
+              <a:defRPr>
+                <a:solidFill>
+                  <a:schemeClr val="tx1"/>
+                </a:solidFill>
+                <a:latin typeface="Arial" pitchFamily="34" charset="0"/>
+                <a:cs typeface="Arial" pitchFamily="34" charset="0"/>
+              </a:defRPr>
+            </a:lvl7pPr>
+            <a:lvl8pPr marL="3429000" indent="-228600" eaLnBrk="0" fontAlgn="base" hangingPunct="0">
+              <a:spcBef>
+                <a:spcPct val="0"/>
+              </a:spcBef>
+              <a:spcAft>
+                <a:spcPct val="0"/>
+              </a:spcAft>
+              <a:defRPr>
+                <a:solidFill>
+                  <a:schemeClr val="tx1"/>
+                </a:solidFill>
+                <a:latin typeface="Arial" pitchFamily="34" charset="0"/>
+                <a:cs typeface="Arial" pitchFamily="34" charset="0"/>
+              </a:defRPr>
+            </a:lvl8pPr>
+            <a:lvl9pPr marL="3886200" indent="-228600" eaLnBrk="0" fontAlgn="base" hangingPunct="0">
+              <a:spcBef>
+                <a:spcPct val="0"/>
+              </a:spcBef>
+              <a:spcAft>
+                <a:spcPct val="0"/>
+              </a:spcAft>
+              <a:defRPr>
+                <a:solidFill>
+                  <a:schemeClr val="tx1"/>
+                </a:solidFill>
+                <a:latin typeface="Arial" pitchFamily="34" charset="0"/>
+                <a:cs typeface="Arial" pitchFamily="34" charset="0"/>
+              </a:defRPr>
+            </a:lvl9pPr>
+          </a:lstStyle>
+          <a:p>
+            <a:pPr algn="ctr"/>
+            <a:r>
+              <a:rPr lang="en-GB" altLang="en-US" sz="2000" i="1" dirty="0" smtClean="0">
+                <a:solidFill>
+                  <a:srgbClr val="FF0000"/>
+                </a:solidFill>
+              </a:rPr>
+              <a:t>Partial</a:t>
+            </a:r>
+            <a:r>
+              <a:rPr lang="en-GB" altLang="en-US" sz="2000" dirty="0" smtClean="0">
+                <a:solidFill>
+                  <a:srgbClr val="FF0000"/>
+                </a:solidFill>
+              </a:rPr>
+              <a:t> Correlation is approximate way</a:t>
+            </a:r>
+            <a:endParaRPr lang="en-US" altLang="en-US" dirty="0">
+              <a:solidFill>
+                <a:srgbClr val="FF0000"/>
+              </a:solidFill>
+            </a:endParaRPr>
+          </a:p>
+        </p:txBody>
+      </p:sp>
     </p:spTree>
     <p:extLst>
       <p:ext uri="{BB962C8B-B14F-4D97-AF65-F5344CB8AC3E}">
@@ -29785,311 +30550,14 @@
   <p:timing>
     <p:tnLst>
       <p:par>
-        <p:cTn id="1" dur="indefinite" restart="never" nodeType="tmRoot">
-          <p:childTnLst>
-            <p:seq concurrent="1" nextAc="seek">
-              <p:cTn id="2" dur="indefinite" nodeType="mainSeq">
-                <p:childTnLst>
-                  <p:par>
-                    <p:cTn id="3" fill="hold" nodeType="clickPar">
-                      <p:stCondLst>
-                        <p:cond delay="indefinite"/>
-                      </p:stCondLst>
-                      <p:childTnLst>
-                        <p:par>
-                          <p:cTn id="4" fill="hold" nodeType="withGroup">
-                            <p:stCondLst>
-                              <p:cond delay="0"/>
-                            </p:stCondLst>
-                            <p:childTnLst>
-                              <p:par>
-                                <p:cTn id="5" presetID="1" presetClass="entr" presetSubtype="0" fill="hold" grpId="0" nodeType="clickEffect">
-                                  <p:stCondLst>
-                                    <p:cond delay="0"/>
-                                  </p:stCondLst>
-                                  <p:childTnLst>
-                                    <p:set>
-                                      <p:cBhvr>
-                                        <p:cTn id="6" dur="1" fill="hold">
-                                          <p:stCondLst>
-                                            <p:cond delay="499"/>
-                                          </p:stCondLst>
-                                        </p:cTn>
-                                        <p:tgtEl>
-                                          <p:spTgt spid="149509"/>
-                                        </p:tgtEl>
-                                        <p:attrNameLst>
-                                          <p:attrName>style.visibility</p:attrName>
-                                        </p:attrNameLst>
-                                      </p:cBhvr>
-                                      <p:to>
-                                        <p:strVal val="visible"/>
-                                      </p:to>
-                                    </p:set>
-                                  </p:childTnLst>
-                                </p:cTn>
-                              </p:par>
-                            </p:childTnLst>
-                          </p:cTn>
-                        </p:par>
-                      </p:childTnLst>
-                    </p:cTn>
-                  </p:par>
-                  <p:par>
-                    <p:cTn id="7" fill="hold" nodeType="clickPar">
-                      <p:stCondLst>
-                        <p:cond delay="indefinite"/>
-                      </p:stCondLst>
-                      <p:childTnLst>
-                        <p:par>
-                          <p:cTn id="8" fill="hold" nodeType="withGroup">
-                            <p:stCondLst>
-                              <p:cond delay="0"/>
-                            </p:stCondLst>
-                            <p:childTnLst>
-                              <p:par>
-                                <p:cTn id="9" presetID="1" presetClass="entr" presetSubtype="0" fill="hold" grpId="0" nodeType="clickEffect">
-                                  <p:stCondLst>
-                                    <p:cond delay="0"/>
-                                  </p:stCondLst>
-                                  <p:childTnLst>
-                                    <p:set>
-                                      <p:cBhvr>
-                                        <p:cTn id="10" dur="1" fill="hold">
-                                          <p:stCondLst>
-                                            <p:cond delay="499"/>
-                                          </p:stCondLst>
-                                        </p:cTn>
-                                        <p:tgtEl>
-                                          <p:spTgt spid="149510"/>
-                                        </p:tgtEl>
-                                        <p:attrNameLst>
-                                          <p:attrName>style.visibility</p:attrName>
-                                        </p:attrNameLst>
-                                      </p:cBhvr>
-                                      <p:to>
-                                        <p:strVal val="visible"/>
-                                      </p:to>
-                                    </p:set>
-                                  </p:childTnLst>
-                                </p:cTn>
-                              </p:par>
-                            </p:childTnLst>
-                          </p:cTn>
-                        </p:par>
-                      </p:childTnLst>
-                    </p:cTn>
-                  </p:par>
-                  <p:par>
-                    <p:cTn id="11" fill="hold" nodeType="clickPar">
-                      <p:stCondLst>
-                        <p:cond delay="indefinite"/>
-                      </p:stCondLst>
-                      <p:childTnLst>
-                        <p:par>
-                          <p:cTn id="12" fill="hold" nodeType="withGroup">
-                            <p:stCondLst>
-                              <p:cond delay="0"/>
-                            </p:stCondLst>
-                            <p:childTnLst>
-                              <p:par>
-                                <p:cTn id="13" presetID="1" presetClass="entr" presetSubtype="0" fill="hold" nodeType="clickEffect">
-                                  <p:stCondLst>
-                                    <p:cond delay="0"/>
-                                  </p:stCondLst>
-                                  <p:childTnLst>
-                                    <p:set>
-                                      <p:cBhvr>
-                                        <p:cTn id="14" dur="1" fill="hold">
-                                          <p:stCondLst>
-                                            <p:cond delay="499"/>
-                                          </p:stCondLst>
-                                        </p:cTn>
-                                        <p:tgtEl>
-                                          <p:spTgt spid="2"/>
-                                        </p:tgtEl>
-                                        <p:attrNameLst>
-                                          <p:attrName>style.visibility</p:attrName>
-                                        </p:attrNameLst>
-                                      </p:cBhvr>
-                                      <p:to>
-                                        <p:strVal val="visible"/>
-                                      </p:to>
-                                    </p:set>
-                                  </p:childTnLst>
-                                </p:cTn>
-                              </p:par>
-                            </p:childTnLst>
-                          </p:cTn>
-                        </p:par>
-                      </p:childTnLst>
-                    </p:cTn>
-                  </p:par>
-                  <p:par>
-                    <p:cTn id="15" fill="hold" nodeType="clickPar">
-                      <p:stCondLst>
-                        <p:cond delay="indefinite"/>
-                      </p:stCondLst>
-                      <p:childTnLst>
-                        <p:par>
-                          <p:cTn id="16" fill="hold" nodeType="withGroup">
-                            <p:stCondLst>
-                              <p:cond delay="0"/>
-                            </p:stCondLst>
-                            <p:childTnLst>
-                              <p:par>
-                                <p:cTn id="17" presetID="1" presetClass="entr" presetSubtype="0" fill="hold" nodeType="clickEffect">
-                                  <p:stCondLst>
-                                    <p:cond delay="0"/>
-                                  </p:stCondLst>
-                                  <p:childTnLst>
-                                    <p:set>
-                                      <p:cBhvr>
-                                        <p:cTn id="18" dur="1" fill="hold">
-                                          <p:stCondLst>
-                                            <p:cond delay="499"/>
-                                          </p:stCondLst>
-                                        </p:cTn>
-                                        <p:tgtEl>
-                                          <p:spTgt spid="6"/>
-                                        </p:tgtEl>
-                                        <p:attrNameLst>
-                                          <p:attrName>style.visibility</p:attrName>
-                                        </p:attrNameLst>
-                                      </p:cBhvr>
-                                      <p:to>
-                                        <p:strVal val="visible"/>
-                                      </p:to>
-                                    </p:set>
-                                  </p:childTnLst>
-                                </p:cTn>
-                              </p:par>
-                            </p:childTnLst>
-                          </p:cTn>
-                        </p:par>
-                      </p:childTnLst>
-                    </p:cTn>
-                  </p:par>
-                  <p:par>
-                    <p:cTn id="19" fill="hold" nodeType="clickPar">
-                      <p:stCondLst>
-                        <p:cond delay="indefinite"/>
-                      </p:stCondLst>
-                      <p:childTnLst>
-                        <p:par>
-                          <p:cTn id="20" fill="hold" nodeType="withGroup">
-                            <p:stCondLst>
-                              <p:cond delay="0"/>
-                            </p:stCondLst>
-                            <p:childTnLst>
-                              <p:par>
-                                <p:cTn id="21" presetID="1" presetClass="entr" presetSubtype="0" fill="hold" nodeType="clickEffect">
-                                  <p:stCondLst>
-                                    <p:cond delay="0"/>
-                                  </p:stCondLst>
-                                  <p:childTnLst>
-                                    <p:set>
-                                      <p:cBhvr>
-                                        <p:cTn id="22" dur="1" fill="hold">
-                                          <p:stCondLst>
-                                            <p:cond delay="499"/>
-                                          </p:stCondLst>
-                                        </p:cTn>
-                                        <p:tgtEl>
-                                          <p:spTgt spid="7"/>
-                                        </p:tgtEl>
-                                        <p:attrNameLst>
-                                          <p:attrName>style.visibility</p:attrName>
-                                        </p:attrNameLst>
-                                      </p:cBhvr>
-                                      <p:to>
-                                        <p:strVal val="visible"/>
-                                      </p:to>
-                                    </p:set>
-                                  </p:childTnLst>
-                                </p:cTn>
-                              </p:par>
-                            </p:childTnLst>
-                          </p:cTn>
-                        </p:par>
-                      </p:childTnLst>
-                    </p:cTn>
-                  </p:par>
-                  <p:par>
-                    <p:cTn id="23" fill="hold" nodeType="clickPar">
-                      <p:stCondLst>
-                        <p:cond delay="indefinite"/>
-                      </p:stCondLst>
-                      <p:childTnLst>
-                        <p:par>
-                          <p:cTn id="24" fill="hold" nodeType="withGroup">
-                            <p:stCondLst>
-                              <p:cond delay="0"/>
-                            </p:stCondLst>
-                            <p:childTnLst>
-                              <p:par>
-                                <p:cTn id="25" presetID="1" presetClass="entr" presetSubtype="0" fill="hold" nodeType="clickEffect">
-                                  <p:stCondLst>
-                                    <p:cond delay="0"/>
-                                  </p:stCondLst>
-                                  <p:childTnLst>
-                                    <p:set>
-                                      <p:cBhvr>
-                                        <p:cTn id="26" dur="1" fill="hold">
-                                          <p:stCondLst>
-                                            <p:cond delay="499"/>
-                                          </p:stCondLst>
-                                        </p:cTn>
-                                        <p:tgtEl>
-                                          <p:spTgt spid="8"/>
-                                        </p:tgtEl>
-                                        <p:attrNameLst>
-                                          <p:attrName>style.visibility</p:attrName>
-                                        </p:attrNameLst>
-                                      </p:cBhvr>
-                                      <p:to>
-                                        <p:strVal val="visible"/>
-                                      </p:to>
-                                    </p:set>
-                                  </p:childTnLst>
-                                </p:cTn>
-                              </p:par>
-                            </p:childTnLst>
-                          </p:cTn>
-                        </p:par>
-                      </p:childTnLst>
-                    </p:cTn>
-                  </p:par>
-                </p:childTnLst>
-              </p:cTn>
-              <p:prevCondLst>
-                <p:cond evt="onPrev" delay="0">
-                  <p:tgtEl>
-                    <p:sldTgt/>
-                  </p:tgtEl>
-                </p:cond>
-              </p:prevCondLst>
-              <p:nextCondLst>
-                <p:cond evt="onNext" delay="0">
-                  <p:tgtEl>
-                    <p:sldTgt/>
-                  </p:tgtEl>
-                </p:cond>
-              </p:nextCondLst>
-            </p:seq>
-          </p:childTnLst>
-        </p:cTn>
+        <p:cTn id="1" dur="indefinite" restart="never" nodeType="tmRoot"/>
       </p:par>
     </p:tnLst>
-    <p:bldLst>
-      <p:bldP spid="149509" grpId="0" autoUpdateAnimBg="0"/>
-      <p:bldP spid="149510" grpId="0" autoUpdateAnimBg="0"/>
-    </p:bldLst>
   </p:timing>
 </p:sld>
 </file>
 
-<file path=ppt/slides/slide27.xml><?xml version="1.0" encoding="utf-8"?>
+<file path=ppt/slides/slide28.xml><?xml version="1.0" encoding="utf-8"?>
 <p:sld xmlns:a="http://schemas.openxmlformats.org/drawingml/2006/main" xmlns:r="http://schemas.openxmlformats.org/officeDocument/2006/relationships" xmlns:p="http://schemas.openxmlformats.org/presentationml/2006/main">
   <p:cSld>
     <p:spTree>
@@ -30719,7 +31187,7 @@
 </p:sld>
 </file>
 
-<file path=ppt/slides/slide28.xml><?xml version="1.0" encoding="utf-8"?>
+<file path=ppt/slides/slide29.xml><?xml version="1.0" encoding="utf-8"?>
 <p:sld xmlns:a="http://schemas.openxmlformats.org/drawingml/2006/main" xmlns:r="http://schemas.openxmlformats.org/officeDocument/2006/relationships" xmlns:p="http://schemas.openxmlformats.org/presentationml/2006/main">
   <p:cSld>
     <p:spTree>
@@ -31023,949 +31491,6 @@
         <p:cTn id="1" dur="indefinite" restart="never" nodeType="tmRoot"/>
       </p:par>
     </p:tnLst>
-  </p:timing>
-</p:sld>
-</file>
-
-<file path=ppt/slides/slide29.xml><?xml version="1.0" encoding="utf-8"?>
-<p:sld xmlns:a="http://schemas.openxmlformats.org/drawingml/2006/main" xmlns:r="http://schemas.openxmlformats.org/officeDocument/2006/relationships" xmlns:p="http://schemas.openxmlformats.org/presentationml/2006/main">
-  <p:cSld>
-    <p:spTree>
-      <p:nvGrpSpPr>
-        <p:cNvPr id="1" name=""/>
-        <p:cNvGrpSpPr/>
-        <p:nvPr/>
-      </p:nvGrpSpPr>
-      <p:grpSpPr>
-        <a:xfrm>
-          <a:off x="0" y="0"/>
-          <a:ext cx="0" cy="0"/>
-          <a:chOff x="0" y="0"/>
-          <a:chExt cx="0" cy="0"/>
-        </a:xfrm>
-      </p:grpSpPr>
-      <p:pic>
-        <p:nvPicPr>
-          <p:cNvPr id="33794" name="Picture 6"/>
-          <p:cNvPicPr>
-            <a:picLocks noChangeAspect="1" noChangeArrowheads="1"/>
-          </p:cNvPicPr>
-          <p:nvPr/>
-        </p:nvPicPr>
-        <p:blipFill>
-          <a:blip r:embed="rId3">
-            <a:extLst>
-              <a:ext uri="{28A0092B-C50C-407E-A947-70E740481C1C}">
-                <a14:useLocalDpi xmlns:a14="http://schemas.microsoft.com/office/drawing/2010/main" val="0"/>
-              </a:ext>
-            </a:extLst>
-          </a:blip>
-          <a:srcRect/>
-          <a:stretch>
-            <a:fillRect/>
-          </a:stretch>
-        </p:blipFill>
-        <p:spPr bwMode="auto">
-          <a:xfrm>
-            <a:off x="1258888" y="2205038"/>
-            <a:ext cx="2857500" cy="3819525"/>
-          </a:xfrm>
-          <a:prstGeom prst="rect">
-            <a:avLst/>
-          </a:prstGeom>
-          <a:noFill/>
-          <a:ln>
-            <a:noFill/>
-          </a:ln>
-          <a:extLst>
-            <a:ext uri="{909E8E84-426E-40DD-AFC4-6F175D3DCCD1}">
-              <a14:hiddenFill xmlns:a14="http://schemas.microsoft.com/office/drawing/2010/main">
-                <a:solidFill>
-                  <a:srgbClr val="FFFFFF"/>
-                </a:solidFill>
-              </a14:hiddenFill>
-            </a:ext>
-            <a:ext uri="{91240B29-F687-4F45-9708-019B960494DF}">
-              <a14:hiddenLine xmlns:a14="http://schemas.microsoft.com/office/drawing/2010/main" w="9525">
-                <a:solidFill>
-                  <a:srgbClr val="000000"/>
-                </a:solidFill>
-                <a:miter lim="800000"/>
-                <a:headEnd/>
-                <a:tailEnd/>
-              </a14:hiddenLine>
-            </a:ext>
-          </a:extLst>
-        </p:spPr>
-      </p:pic>
-      <p:pic>
-        <p:nvPicPr>
-          <p:cNvPr id="151559" name="Picture 7"/>
-          <p:cNvPicPr>
-            <a:picLocks noChangeAspect="1" noChangeArrowheads="1"/>
-          </p:cNvPicPr>
-          <p:nvPr/>
-        </p:nvPicPr>
-        <p:blipFill>
-          <a:blip r:embed="rId4">
-            <a:extLst>
-              <a:ext uri="{28A0092B-C50C-407E-A947-70E740481C1C}">
-                <a14:useLocalDpi xmlns:a14="http://schemas.microsoft.com/office/drawing/2010/main" val="0"/>
-              </a:ext>
-            </a:extLst>
-          </a:blip>
-          <a:srcRect/>
-          <a:stretch>
-            <a:fillRect/>
-          </a:stretch>
-        </p:blipFill>
-        <p:spPr bwMode="auto">
-          <a:xfrm>
-            <a:off x="4979988" y="2205038"/>
-            <a:ext cx="3552825" cy="3800475"/>
-          </a:xfrm>
-          <a:prstGeom prst="rect">
-            <a:avLst/>
-          </a:prstGeom>
-          <a:noFill/>
-          <a:ln>
-            <a:noFill/>
-          </a:ln>
-          <a:extLst>
-            <a:ext uri="{909E8E84-426E-40DD-AFC4-6F175D3DCCD1}">
-              <a14:hiddenFill xmlns:a14="http://schemas.microsoft.com/office/drawing/2010/main">
-                <a:solidFill>
-                  <a:srgbClr val="FFFFFF"/>
-                </a:solidFill>
-              </a14:hiddenFill>
-            </a:ext>
-            <a:ext uri="{91240B29-F687-4F45-9708-019B960494DF}">
-              <a14:hiddenLine xmlns:a14="http://schemas.microsoft.com/office/drawing/2010/main" w="9525">
-                <a:solidFill>
-                  <a:srgbClr val="000000"/>
-                </a:solidFill>
-                <a:miter lim="800000"/>
-                <a:headEnd/>
-                <a:tailEnd/>
-              </a14:hiddenLine>
-            </a:ext>
-          </a:extLst>
-        </p:spPr>
-      </p:pic>
-      <p:sp>
-        <p:nvSpPr>
-          <p:cNvPr id="33796" name="Rectangle 8"/>
-          <p:cNvSpPr>
-            <a:spLocks noGrp="1" noChangeArrowheads="1"/>
-          </p:cNvSpPr>
-          <p:nvPr>
-            <p:ph type="title"/>
-          </p:nvPr>
-        </p:nvSpPr>
-        <p:spPr>
-          <a:xfrm>
-            <a:off x="359532" y="18256"/>
-            <a:ext cx="3923928" cy="1143000"/>
-          </a:xfrm>
-          <a:noFill/>
-        </p:spPr>
-        <p:txBody>
-          <a:bodyPr/>
-          <a:lstStyle/>
-          <a:p>
-            <a:pPr eaLnBrk="1" hangingPunct="1"/>
-            <a:r>
-              <a:rPr lang="de-CH" altLang="en-US" sz="2800" b="1" dirty="0" smtClean="0">
-                <a:latin typeface="Arial" panose="020B0604020202020204" pitchFamily="34" charset="0"/>
-                <a:cs typeface="Arial" panose="020B0604020202020204" pitchFamily="34" charset="0"/>
-              </a:rPr>
-              <a:t>4. Temporal definition of Causality</a:t>
-            </a:r>
-            <a:endParaRPr lang="en-US" altLang="en-US" sz="2800" b="1" dirty="0" smtClean="0">
-              <a:latin typeface="Arial" panose="020B0604020202020204" pitchFamily="34" charset="0"/>
-              <a:cs typeface="Arial" panose="020B0604020202020204" pitchFamily="34" charset="0"/>
-            </a:endParaRPr>
-          </a:p>
-        </p:txBody>
-      </p:sp>
-      <p:sp>
-        <p:nvSpPr>
-          <p:cNvPr id="33797" name="Rectangle 9"/>
-          <p:cNvSpPr>
-            <a:spLocks noGrp="1" noChangeArrowheads="1"/>
-          </p:cNvSpPr>
-          <p:nvPr>
-            <p:ph type="body" idx="1"/>
-          </p:nvPr>
-        </p:nvSpPr>
-        <p:spPr>
-          <a:xfrm>
-            <a:off x="1187450" y="1196975"/>
-            <a:ext cx="2808288" cy="936625"/>
-          </a:xfrm>
-          <a:solidFill>
-            <a:schemeClr val="bg1"/>
-          </a:solidFill>
-        </p:spPr>
-        <p:txBody>
-          <a:bodyPr/>
-          <a:lstStyle/>
-          <a:p>
-            <a:pPr algn="ctr" eaLnBrk="1" hangingPunct="1">
-              <a:buFontTx/>
-              <a:buNone/>
-            </a:pPr>
-            <a:r>
-              <a:rPr lang="en-US" altLang="en-US" sz="2000" smtClean="0"/>
-              <a:t>Stationary</a:t>
-            </a:r>
-          </a:p>
-          <a:p>
-            <a:pPr algn="ctr" eaLnBrk="1" hangingPunct="1">
-              <a:buFontTx/>
-              <a:buNone/>
-            </a:pPr>
-            <a:r>
-              <a:rPr lang="en-US" altLang="en-US" sz="2000" smtClean="0"/>
-              <a:t>(correlations, SEM)</a:t>
-            </a:r>
-          </a:p>
-        </p:txBody>
-      </p:sp>
-      <p:sp>
-        <p:nvSpPr>
-          <p:cNvPr id="151562" name="Rectangle 10"/>
-          <p:cNvSpPr>
-            <a:spLocks noChangeArrowheads="1"/>
-          </p:cNvSpPr>
-          <p:nvPr/>
-        </p:nvSpPr>
-        <p:spPr bwMode="auto">
-          <a:xfrm>
-            <a:off x="5484813" y="1196975"/>
-            <a:ext cx="2808287" cy="936625"/>
-          </a:xfrm>
-          <a:prstGeom prst="rect">
-            <a:avLst/>
-          </a:prstGeom>
-          <a:solidFill>
-            <a:schemeClr val="bg1"/>
-          </a:solidFill>
-          <a:ln>
-            <a:noFill/>
-          </a:ln>
-          <a:extLst>
-            <a:ext uri="{91240B29-F687-4F45-9708-019B960494DF}">
-              <a14:hiddenLine xmlns:a14="http://schemas.microsoft.com/office/drawing/2010/main" w="9525">
-                <a:solidFill>
-                  <a:srgbClr val="000000"/>
-                </a:solidFill>
-                <a:miter lim="800000"/>
-                <a:headEnd/>
-                <a:tailEnd/>
-              </a14:hiddenLine>
-            </a:ext>
-          </a:extLst>
-        </p:spPr>
-        <p:txBody>
-          <a:bodyPr/>
-          <a:lstStyle>
-            <a:lvl1pPr marL="342900" indent="-342900" eaLnBrk="0" hangingPunct="0">
-              <a:defRPr>
-                <a:solidFill>
-                  <a:schemeClr val="tx1"/>
-                </a:solidFill>
-                <a:latin typeface="Arial" pitchFamily="34" charset="0"/>
-                <a:cs typeface="Arial" pitchFamily="34" charset="0"/>
-              </a:defRPr>
-            </a:lvl1pPr>
-            <a:lvl2pPr marL="742950" indent="-285750" eaLnBrk="0" hangingPunct="0">
-              <a:defRPr>
-                <a:solidFill>
-                  <a:schemeClr val="tx1"/>
-                </a:solidFill>
-                <a:latin typeface="Arial" pitchFamily="34" charset="0"/>
-                <a:cs typeface="Arial" pitchFamily="34" charset="0"/>
-              </a:defRPr>
-            </a:lvl2pPr>
-            <a:lvl3pPr marL="1143000" indent="-228600" eaLnBrk="0" hangingPunct="0">
-              <a:defRPr>
-                <a:solidFill>
-                  <a:schemeClr val="tx1"/>
-                </a:solidFill>
-                <a:latin typeface="Arial" pitchFamily="34" charset="0"/>
-                <a:cs typeface="Arial" pitchFamily="34" charset="0"/>
-              </a:defRPr>
-            </a:lvl3pPr>
-            <a:lvl4pPr marL="1600200" indent="-228600" eaLnBrk="0" hangingPunct="0">
-              <a:defRPr>
-                <a:solidFill>
-                  <a:schemeClr val="tx1"/>
-                </a:solidFill>
-                <a:latin typeface="Arial" pitchFamily="34" charset="0"/>
-                <a:cs typeface="Arial" pitchFamily="34" charset="0"/>
-              </a:defRPr>
-            </a:lvl4pPr>
-            <a:lvl5pPr marL="2057400" indent="-228600" eaLnBrk="0" hangingPunct="0">
-              <a:defRPr>
-                <a:solidFill>
-                  <a:schemeClr val="tx1"/>
-                </a:solidFill>
-                <a:latin typeface="Arial" pitchFamily="34" charset="0"/>
-                <a:cs typeface="Arial" pitchFamily="34" charset="0"/>
-              </a:defRPr>
-            </a:lvl5pPr>
-            <a:lvl6pPr marL="2514600" indent="-228600" eaLnBrk="0" fontAlgn="base" hangingPunct="0">
-              <a:spcBef>
-                <a:spcPct val="0"/>
-              </a:spcBef>
-              <a:spcAft>
-                <a:spcPct val="0"/>
-              </a:spcAft>
-              <a:defRPr>
-                <a:solidFill>
-                  <a:schemeClr val="tx1"/>
-                </a:solidFill>
-                <a:latin typeface="Arial" pitchFamily="34" charset="0"/>
-                <a:cs typeface="Arial" pitchFamily="34" charset="0"/>
-              </a:defRPr>
-            </a:lvl6pPr>
-            <a:lvl7pPr marL="2971800" indent="-228600" eaLnBrk="0" fontAlgn="base" hangingPunct="0">
-              <a:spcBef>
-                <a:spcPct val="0"/>
-              </a:spcBef>
-              <a:spcAft>
-                <a:spcPct val="0"/>
-              </a:spcAft>
-              <a:defRPr>
-                <a:solidFill>
-                  <a:schemeClr val="tx1"/>
-                </a:solidFill>
-                <a:latin typeface="Arial" pitchFamily="34" charset="0"/>
-                <a:cs typeface="Arial" pitchFamily="34" charset="0"/>
-              </a:defRPr>
-            </a:lvl7pPr>
-            <a:lvl8pPr marL="3429000" indent="-228600" eaLnBrk="0" fontAlgn="base" hangingPunct="0">
-              <a:spcBef>
-                <a:spcPct val="0"/>
-              </a:spcBef>
-              <a:spcAft>
-                <a:spcPct val="0"/>
-              </a:spcAft>
-              <a:defRPr>
-                <a:solidFill>
-                  <a:schemeClr val="tx1"/>
-                </a:solidFill>
-                <a:latin typeface="Arial" pitchFamily="34" charset="0"/>
-                <a:cs typeface="Arial" pitchFamily="34" charset="0"/>
-              </a:defRPr>
-            </a:lvl8pPr>
-            <a:lvl9pPr marL="3886200" indent="-228600" eaLnBrk="0" fontAlgn="base" hangingPunct="0">
-              <a:spcBef>
-                <a:spcPct val="0"/>
-              </a:spcBef>
-              <a:spcAft>
-                <a:spcPct val="0"/>
-              </a:spcAft>
-              <a:defRPr>
-                <a:solidFill>
-                  <a:schemeClr val="tx1"/>
-                </a:solidFill>
-                <a:latin typeface="Arial" pitchFamily="34" charset="0"/>
-                <a:cs typeface="Arial" pitchFamily="34" charset="0"/>
-              </a:defRPr>
-            </a:lvl9pPr>
-          </a:lstStyle>
-          <a:p>
-            <a:pPr algn="ctr" eaLnBrk="1" hangingPunct="1">
-              <a:spcBef>
-                <a:spcPct val="20000"/>
-              </a:spcBef>
-            </a:pPr>
-            <a:r>
-              <a:rPr lang="en-US" altLang="en-US" sz="2000"/>
-              <a:t>Dynamic</a:t>
-            </a:r>
-          </a:p>
-          <a:p>
-            <a:pPr algn="ctr" eaLnBrk="1" hangingPunct="1">
-              <a:spcBef>
-                <a:spcPct val="20000"/>
-              </a:spcBef>
-            </a:pPr>
-            <a:r>
-              <a:rPr lang="en-US" altLang="en-US" sz="2000"/>
-              <a:t>(Granger, DCM)</a:t>
-            </a:r>
-          </a:p>
-        </p:txBody>
-      </p:sp>
-      <p:sp>
-        <p:nvSpPr>
-          <p:cNvPr id="33799" name="Line 11"/>
-          <p:cNvSpPr>
-            <a:spLocks noChangeShapeType="1"/>
-          </p:cNvSpPr>
-          <p:nvPr/>
-        </p:nvSpPr>
-        <p:spPr bwMode="auto">
-          <a:xfrm>
-            <a:off x="539750" y="2492375"/>
-            <a:ext cx="0" cy="3384550"/>
-          </a:xfrm>
-          <a:prstGeom prst="line">
-            <a:avLst/>
-          </a:prstGeom>
-          <a:noFill/>
-          <a:ln w="50800">
-            <a:solidFill>
-              <a:schemeClr val="tx1"/>
-            </a:solidFill>
-            <a:round/>
-            <a:headEnd/>
-            <a:tailEnd type="triangle" w="lg" len="med"/>
-          </a:ln>
-          <a:extLst>
-            <a:ext uri="{909E8E84-426E-40DD-AFC4-6F175D3DCCD1}">
-              <a14:hiddenFill xmlns:a14="http://schemas.microsoft.com/office/drawing/2010/main">
-                <a:noFill/>
-              </a14:hiddenFill>
-            </a:ext>
-          </a:extLst>
-        </p:spPr>
-        <p:txBody>
-          <a:bodyPr/>
-          <a:lstStyle/>
-          <a:p>
-            <a:endParaRPr lang="en-GB"/>
-          </a:p>
-        </p:txBody>
-      </p:sp>
-      <p:sp>
-        <p:nvSpPr>
-          <p:cNvPr id="33800" name="Text Box 12"/>
-          <p:cNvSpPr txBox="1">
-            <a:spLocks noChangeArrowheads="1"/>
-          </p:cNvSpPr>
-          <p:nvPr/>
-        </p:nvSpPr>
-        <p:spPr bwMode="auto">
-          <a:xfrm rot="-5400000">
-            <a:off x="-54768" y="3952081"/>
-            <a:ext cx="692150" cy="366713"/>
-          </a:xfrm>
-          <a:prstGeom prst="rect">
-            <a:avLst/>
-          </a:prstGeom>
-          <a:noFill/>
-          <a:ln>
-            <a:noFill/>
-          </a:ln>
-          <a:extLst>
-            <a:ext uri="{909E8E84-426E-40DD-AFC4-6F175D3DCCD1}">
-              <a14:hiddenFill xmlns:a14="http://schemas.microsoft.com/office/drawing/2010/main">
-                <a:solidFill>
-                  <a:srgbClr val="FFFFFF"/>
-                </a:solidFill>
-              </a14:hiddenFill>
-            </a:ext>
-            <a:ext uri="{91240B29-F687-4F45-9708-019B960494DF}">
-              <a14:hiddenLine xmlns:a14="http://schemas.microsoft.com/office/drawing/2010/main" w="9525">
-                <a:solidFill>
-                  <a:srgbClr val="000000"/>
-                </a:solidFill>
-                <a:miter lim="800000"/>
-                <a:headEnd/>
-                <a:tailEnd/>
-              </a14:hiddenLine>
-            </a:ext>
-          </a:extLst>
-        </p:spPr>
-        <p:txBody>
-          <a:bodyPr wrap="none">
-            <a:spAutoFit/>
-          </a:bodyPr>
-          <a:lstStyle>
-            <a:lvl1pPr eaLnBrk="0" hangingPunct="0">
-              <a:defRPr>
-                <a:solidFill>
-                  <a:schemeClr val="tx1"/>
-                </a:solidFill>
-                <a:latin typeface="Arial" pitchFamily="34" charset="0"/>
-                <a:cs typeface="Arial" pitchFamily="34" charset="0"/>
-              </a:defRPr>
-            </a:lvl1pPr>
-            <a:lvl2pPr marL="742950" indent="-285750" eaLnBrk="0" hangingPunct="0">
-              <a:defRPr>
-                <a:solidFill>
-                  <a:schemeClr val="tx1"/>
-                </a:solidFill>
-                <a:latin typeface="Arial" pitchFamily="34" charset="0"/>
-                <a:cs typeface="Arial" pitchFamily="34" charset="0"/>
-              </a:defRPr>
-            </a:lvl2pPr>
-            <a:lvl3pPr marL="1143000" indent="-228600" eaLnBrk="0" hangingPunct="0">
-              <a:defRPr>
-                <a:solidFill>
-                  <a:schemeClr val="tx1"/>
-                </a:solidFill>
-                <a:latin typeface="Arial" pitchFamily="34" charset="0"/>
-                <a:cs typeface="Arial" pitchFamily="34" charset="0"/>
-              </a:defRPr>
-            </a:lvl3pPr>
-            <a:lvl4pPr marL="1600200" indent="-228600" eaLnBrk="0" hangingPunct="0">
-              <a:defRPr>
-                <a:solidFill>
-                  <a:schemeClr val="tx1"/>
-                </a:solidFill>
-                <a:latin typeface="Arial" pitchFamily="34" charset="0"/>
-                <a:cs typeface="Arial" pitchFamily="34" charset="0"/>
-              </a:defRPr>
-            </a:lvl4pPr>
-            <a:lvl5pPr marL="2057400" indent="-228600" eaLnBrk="0" hangingPunct="0">
-              <a:defRPr>
-                <a:solidFill>
-                  <a:schemeClr val="tx1"/>
-                </a:solidFill>
-                <a:latin typeface="Arial" pitchFamily="34" charset="0"/>
-                <a:cs typeface="Arial" pitchFamily="34" charset="0"/>
-              </a:defRPr>
-            </a:lvl5pPr>
-            <a:lvl6pPr marL="2514600" indent="-228600" eaLnBrk="0" fontAlgn="base" hangingPunct="0">
-              <a:spcBef>
-                <a:spcPct val="0"/>
-              </a:spcBef>
-              <a:spcAft>
-                <a:spcPct val="0"/>
-              </a:spcAft>
-              <a:defRPr>
-                <a:solidFill>
-                  <a:schemeClr val="tx1"/>
-                </a:solidFill>
-                <a:latin typeface="Arial" pitchFamily="34" charset="0"/>
-                <a:cs typeface="Arial" pitchFamily="34" charset="0"/>
-              </a:defRPr>
-            </a:lvl6pPr>
-            <a:lvl7pPr marL="2971800" indent="-228600" eaLnBrk="0" fontAlgn="base" hangingPunct="0">
-              <a:spcBef>
-                <a:spcPct val="0"/>
-              </a:spcBef>
-              <a:spcAft>
-                <a:spcPct val="0"/>
-              </a:spcAft>
-              <a:defRPr>
-                <a:solidFill>
-                  <a:schemeClr val="tx1"/>
-                </a:solidFill>
-                <a:latin typeface="Arial" pitchFamily="34" charset="0"/>
-                <a:cs typeface="Arial" pitchFamily="34" charset="0"/>
-              </a:defRPr>
-            </a:lvl7pPr>
-            <a:lvl8pPr marL="3429000" indent="-228600" eaLnBrk="0" fontAlgn="base" hangingPunct="0">
-              <a:spcBef>
-                <a:spcPct val="0"/>
-              </a:spcBef>
-              <a:spcAft>
-                <a:spcPct val="0"/>
-              </a:spcAft>
-              <a:defRPr>
-                <a:solidFill>
-                  <a:schemeClr val="tx1"/>
-                </a:solidFill>
-                <a:latin typeface="Arial" pitchFamily="34" charset="0"/>
-                <a:cs typeface="Arial" pitchFamily="34" charset="0"/>
-              </a:defRPr>
-            </a:lvl8pPr>
-            <a:lvl9pPr marL="3886200" indent="-228600" eaLnBrk="0" fontAlgn="base" hangingPunct="0">
-              <a:spcBef>
-                <a:spcPct val="0"/>
-              </a:spcBef>
-              <a:spcAft>
-                <a:spcPct val="0"/>
-              </a:spcAft>
-              <a:defRPr>
-                <a:solidFill>
-                  <a:schemeClr val="tx1"/>
-                </a:solidFill>
-                <a:latin typeface="Arial" pitchFamily="34" charset="0"/>
-                <a:cs typeface="Arial" pitchFamily="34" charset="0"/>
-              </a:defRPr>
-            </a:lvl9pPr>
-          </a:lstStyle>
-          <a:p>
-            <a:pPr eaLnBrk="1" hangingPunct="1"/>
-            <a:r>
-              <a:rPr lang="en-GB" altLang="en-US"/>
-              <a:t>Time</a:t>
-            </a:r>
-          </a:p>
-        </p:txBody>
-      </p:sp>
-      <p:sp>
-        <p:nvSpPr>
-          <p:cNvPr id="151565" name="Rectangle 13"/>
-          <p:cNvSpPr>
-            <a:spLocks noChangeArrowheads="1"/>
-          </p:cNvSpPr>
-          <p:nvPr/>
-        </p:nvSpPr>
-        <p:spPr bwMode="auto">
-          <a:xfrm>
-            <a:off x="1943100" y="6469950"/>
-            <a:ext cx="7200900" cy="404812"/>
-          </a:xfrm>
-          <a:prstGeom prst="rect">
-            <a:avLst/>
-          </a:prstGeom>
-          <a:noFill/>
-          <a:ln>
-            <a:noFill/>
-          </a:ln>
-          <a:extLst>
-            <a:ext uri="{909E8E84-426E-40DD-AFC4-6F175D3DCCD1}">
-              <a14:hiddenFill xmlns:a14="http://schemas.microsoft.com/office/drawing/2010/main">
-                <a:solidFill>
-                  <a:srgbClr val="FFFFFF"/>
-                </a:solidFill>
-              </a14:hiddenFill>
-            </a:ext>
-            <a:ext uri="{91240B29-F687-4F45-9708-019B960494DF}">
-              <a14:hiddenLine xmlns:a14="http://schemas.microsoft.com/office/drawing/2010/main" w="9525">
-                <a:solidFill>
-                  <a:srgbClr val="000000"/>
-                </a:solidFill>
-                <a:miter lim="800000"/>
-                <a:headEnd/>
-                <a:tailEnd/>
-              </a14:hiddenLine>
-            </a:ext>
-          </a:extLst>
-        </p:spPr>
-        <p:txBody>
-          <a:bodyPr/>
-          <a:lstStyle>
-            <a:lvl1pPr marL="377825" eaLnBrk="0" hangingPunct="0">
-              <a:defRPr>
-                <a:solidFill>
-                  <a:schemeClr val="tx1"/>
-                </a:solidFill>
-                <a:latin typeface="Arial" pitchFamily="34" charset="0"/>
-                <a:cs typeface="Arial" pitchFamily="34" charset="0"/>
-              </a:defRPr>
-            </a:lvl1pPr>
-            <a:lvl2pPr marL="742950" indent="-285750" eaLnBrk="0" hangingPunct="0">
-              <a:defRPr>
-                <a:solidFill>
-                  <a:schemeClr val="tx1"/>
-                </a:solidFill>
-                <a:latin typeface="Arial" pitchFamily="34" charset="0"/>
-                <a:cs typeface="Arial" pitchFamily="34" charset="0"/>
-              </a:defRPr>
-            </a:lvl2pPr>
-            <a:lvl3pPr marL="1143000" indent="-228600" eaLnBrk="0" hangingPunct="0">
-              <a:defRPr>
-                <a:solidFill>
-                  <a:schemeClr val="tx1"/>
-                </a:solidFill>
-                <a:latin typeface="Arial" pitchFamily="34" charset="0"/>
-                <a:cs typeface="Arial" pitchFamily="34" charset="0"/>
-              </a:defRPr>
-            </a:lvl3pPr>
-            <a:lvl4pPr marL="1600200" indent="-228600" eaLnBrk="0" hangingPunct="0">
-              <a:defRPr>
-                <a:solidFill>
-                  <a:schemeClr val="tx1"/>
-                </a:solidFill>
-                <a:latin typeface="Arial" pitchFamily="34" charset="0"/>
-                <a:cs typeface="Arial" pitchFamily="34" charset="0"/>
-              </a:defRPr>
-            </a:lvl4pPr>
-            <a:lvl5pPr marL="2057400" indent="-228600" eaLnBrk="0" hangingPunct="0">
-              <a:defRPr>
-                <a:solidFill>
-                  <a:schemeClr val="tx1"/>
-                </a:solidFill>
-                <a:latin typeface="Arial" pitchFamily="34" charset="0"/>
-                <a:cs typeface="Arial" pitchFamily="34" charset="0"/>
-              </a:defRPr>
-            </a:lvl5pPr>
-            <a:lvl6pPr marL="2514600" indent="-228600" eaLnBrk="0" fontAlgn="base" hangingPunct="0">
-              <a:spcBef>
-                <a:spcPct val="0"/>
-              </a:spcBef>
-              <a:spcAft>
-                <a:spcPct val="0"/>
-              </a:spcAft>
-              <a:defRPr>
-                <a:solidFill>
-                  <a:schemeClr val="tx1"/>
-                </a:solidFill>
-                <a:latin typeface="Arial" pitchFamily="34" charset="0"/>
-                <a:cs typeface="Arial" pitchFamily="34" charset="0"/>
-              </a:defRPr>
-            </a:lvl6pPr>
-            <a:lvl7pPr marL="2971800" indent="-228600" eaLnBrk="0" fontAlgn="base" hangingPunct="0">
-              <a:spcBef>
-                <a:spcPct val="0"/>
-              </a:spcBef>
-              <a:spcAft>
-                <a:spcPct val="0"/>
-              </a:spcAft>
-              <a:defRPr>
-                <a:solidFill>
-                  <a:schemeClr val="tx1"/>
-                </a:solidFill>
-                <a:latin typeface="Arial" pitchFamily="34" charset="0"/>
-                <a:cs typeface="Arial" pitchFamily="34" charset="0"/>
-              </a:defRPr>
-            </a:lvl7pPr>
-            <a:lvl8pPr marL="3429000" indent="-228600" eaLnBrk="0" fontAlgn="base" hangingPunct="0">
-              <a:spcBef>
-                <a:spcPct val="0"/>
-              </a:spcBef>
-              <a:spcAft>
-                <a:spcPct val="0"/>
-              </a:spcAft>
-              <a:defRPr>
-                <a:solidFill>
-                  <a:schemeClr val="tx1"/>
-                </a:solidFill>
-                <a:latin typeface="Arial" pitchFamily="34" charset="0"/>
-                <a:cs typeface="Arial" pitchFamily="34" charset="0"/>
-              </a:defRPr>
-            </a:lvl8pPr>
-            <a:lvl9pPr marL="3886200" indent="-228600" eaLnBrk="0" fontAlgn="base" hangingPunct="0">
-              <a:spcBef>
-                <a:spcPct val="0"/>
-              </a:spcBef>
-              <a:spcAft>
-                <a:spcPct val="0"/>
-              </a:spcAft>
-              <a:defRPr>
-                <a:solidFill>
-                  <a:schemeClr val="tx1"/>
-                </a:solidFill>
-                <a:latin typeface="Arial" pitchFamily="34" charset="0"/>
-                <a:cs typeface="Arial" pitchFamily="34" charset="0"/>
-              </a:defRPr>
-            </a:lvl9pPr>
-          </a:lstStyle>
-          <a:p>
-            <a:pPr eaLnBrk="1" hangingPunct="1">
-              <a:lnSpc>
-                <a:spcPct val="80000"/>
-              </a:lnSpc>
-              <a:spcBef>
-                <a:spcPct val="100000"/>
-              </a:spcBef>
-            </a:pPr>
-            <a:r>
-              <a:rPr lang="en-GB" altLang="en-US">
-                <a:solidFill>
-                  <a:srgbClr val="FF0000"/>
-                </a:solidFill>
-                <a:latin typeface="Arial Unicode MS" pitchFamily="34" charset="-128"/>
-              </a:rPr>
-              <a:t>(“unfolding” in time is one way to infer direction of connectivity)</a:t>
-            </a:r>
-          </a:p>
-        </p:txBody>
-      </p:sp>
-    </p:spTree>
-    <p:extLst>
-      <p:ext uri="{BB962C8B-B14F-4D97-AF65-F5344CB8AC3E}">
-        <p14:creationId xmlns:p14="http://schemas.microsoft.com/office/powerpoint/2010/main" val="3043990040"/>
-      </p:ext>
-    </p:extLst>
-  </p:cSld>
-  <p:clrMapOvr>
-    <a:masterClrMapping/>
-  </p:clrMapOvr>
-  <p:timing>
-    <p:tnLst>
-      <p:par>
-        <p:cTn id="1" dur="indefinite" restart="never" nodeType="tmRoot">
-          <p:childTnLst>
-            <p:seq concurrent="1" nextAc="seek">
-              <p:cTn id="2" dur="indefinite" nodeType="mainSeq">
-                <p:childTnLst>
-                  <p:par>
-                    <p:cTn id="3" fill="hold" nodeType="clickPar">
-                      <p:stCondLst>
-                        <p:cond delay="indefinite"/>
-                      </p:stCondLst>
-                      <p:childTnLst>
-                        <p:par>
-                          <p:cTn id="4" fill="hold" nodeType="withGroup">
-                            <p:stCondLst>
-                              <p:cond delay="0"/>
-                            </p:stCondLst>
-                            <p:childTnLst>
-                              <p:par>
-                                <p:cTn id="5" presetID="1" presetClass="entr" presetSubtype="0" fill="hold" nodeType="clickEffect">
-                                  <p:stCondLst>
-                                    <p:cond delay="0"/>
-                                  </p:stCondLst>
-                                  <p:childTnLst>
-                                    <p:set>
-                                      <p:cBhvr>
-                                        <p:cTn id="6" dur="1" fill="hold">
-                                          <p:stCondLst>
-                                            <p:cond delay="0"/>
-                                          </p:stCondLst>
-                                        </p:cTn>
-                                        <p:tgtEl>
-                                          <p:spTgt spid="151559"/>
-                                        </p:tgtEl>
-                                        <p:attrNameLst>
-                                          <p:attrName>style.visibility</p:attrName>
-                                        </p:attrNameLst>
-                                      </p:cBhvr>
-                                      <p:to>
-                                        <p:strVal val="visible"/>
-                                      </p:to>
-                                    </p:set>
-                                  </p:childTnLst>
-                                </p:cTn>
-                              </p:par>
-                              <p:par>
-                                <p:cTn id="7" presetID="1" presetClass="entr" presetSubtype="0" fill="hold" grpId="0" nodeType="withEffect">
-                                  <p:stCondLst>
-                                    <p:cond delay="0"/>
-                                  </p:stCondLst>
-                                  <p:childTnLst>
-                                    <p:set>
-                                      <p:cBhvr>
-                                        <p:cTn id="8" dur="1" fill="hold">
-                                          <p:stCondLst>
-                                            <p:cond delay="0"/>
-                                          </p:stCondLst>
-                                        </p:cTn>
-                                        <p:tgtEl>
-                                          <p:spTgt spid="151562">
-                                            <p:txEl>
-                                              <p:pRg st="0" end="0"/>
-                                            </p:txEl>
-                                          </p:spTgt>
-                                        </p:tgtEl>
-                                        <p:attrNameLst>
-                                          <p:attrName>style.visibility</p:attrName>
-                                        </p:attrNameLst>
-                                      </p:cBhvr>
-                                      <p:to>
-                                        <p:strVal val="visible"/>
-                                      </p:to>
-                                    </p:set>
-                                  </p:childTnLst>
-                                </p:cTn>
-                              </p:par>
-                              <p:par>
-                                <p:cTn id="9" presetID="1" presetClass="entr" presetSubtype="0" fill="hold" grpId="0" nodeType="withEffect">
-                                  <p:stCondLst>
-                                    <p:cond delay="0"/>
-                                  </p:stCondLst>
-                                  <p:childTnLst>
-                                    <p:set>
-                                      <p:cBhvr>
-                                        <p:cTn id="10" dur="1" fill="hold">
-                                          <p:stCondLst>
-                                            <p:cond delay="0"/>
-                                          </p:stCondLst>
-                                        </p:cTn>
-                                        <p:tgtEl>
-                                          <p:spTgt spid="151562">
-                                            <p:txEl>
-                                              <p:pRg st="1" end="1"/>
-                                            </p:txEl>
-                                          </p:spTgt>
-                                        </p:tgtEl>
-                                        <p:attrNameLst>
-                                          <p:attrName>style.visibility</p:attrName>
-                                        </p:attrNameLst>
-                                      </p:cBhvr>
-                                      <p:to>
-                                        <p:strVal val="visible"/>
-                                      </p:to>
-                                    </p:set>
-                                  </p:childTnLst>
-                                </p:cTn>
-                              </p:par>
-                            </p:childTnLst>
-                          </p:cTn>
-                        </p:par>
-                      </p:childTnLst>
-                    </p:cTn>
-                  </p:par>
-                  <p:par>
-                    <p:cTn id="11" fill="hold" nodeType="clickPar">
-                      <p:stCondLst>
-                        <p:cond delay="indefinite"/>
-                      </p:stCondLst>
-                      <p:childTnLst>
-                        <p:par>
-                          <p:cTn id="12" fill="hold" nodeType="withGroup">
-                            <p:stCondLst>
-                              <p:cond delay="0"/>
-                            </p:stCondLst>
-                            <p:childTnLst>
-                              <p:par>
-                                <p:cTn id="13" presetID="1" presetClass="entr" presetSubtype="0" fill="hold" grpId="0" nodeType="clickEffect">
-                                  <p:stCondLst>
-                                    <p:cond delay="0"/>
-                                  </p:stCondLst>
-                                  <p:childTnLst>
-                                    <p:set>
-                                      <p:cBhvr>
-                                        <p:cTn id="14" dur="1" fill="hold">
-                                          <p:stCondLst>
-                                            <p:cond delay="0"/>
-                                          </p:stCondLst>
-                                        </p:cTn>
-                                        <p:tgtEl>
-                                          <p:spTgt spid="151565"/>
-                                        </p:tgtEl>
-                                        <p:attrNameLst>
-                                          <p:attrName>style.visibility</p:attrName>
-                                        </p:attrNameLst>
-                                      </p:cBhvr>
-                                      <p:to>
-                                        <p:strVal val="visible"/>
-                                      </p:to>
-                                    </p:set>
-                                  </p:childTnLst>
-                                </p:cTn>
-                              </p:par>
-                            </p:childTnLst>
-                          </p:cTn>
-                        </p:par>
-                      </p:childTnLst>
-                    </p:cTn>
-                  </p:par>
-                </p:childTnLst>
-              </p:cTn>
-              <p:prevCondLst>
-                <p:cond evt="onPrev" delay="0">
-                  <p:tgtEl>
-                    <p:sldTgt/>
-                  </p:tgtEl>
-                </p:cond>
-              </p:prevCondLst>
-              <p:nextCondLst>
-                <p:cond evt="onNext" delay="0">
-                  <p:tgtEl>
-                    <p:sldTgt/>
-                  </p:tgtEl>
-                </p:cond>
-              </p:nextCondLst>
-            </p:seq>
-          </p:childTnLst>
-        </p:cTn>
-      </p:par>
-    </p:tnLst>
-    <p:bldLst>
-      <p:bldP spid="151562" grpId="0" build="p" autoUpdateAnimBg="0"/>
-      <p:bldP spid="151565" grpId="0"/>
-    </p:bldLst>
   </p:timing>
 </p:sld>
 </file>
@@ -32598,6 +32123,949 @@
           <a:chExt cx="0" cy="0"/>
         </a:xfrm>
       </p:grpSpPr>
+      <p:pic>
+        <p:nvPicPr>
+          <p:cNvPr id="33794" name="Picture 6"/>
+          <p:cNvPicPr>
+            <a:picLocks noChangeAspect="1" noChangeArrowheads="1"/>
+          </p:cNvPicPr>
+          <p:nvPr/>
+        </p:nvPicPr>
+        <p:blipFill>
+          <a:blip r:embed="rId3">
+            <a:extLst>
+              <a:ext uri="{28A0092B-C50C-407E-A947-70E740481C1C}">
+                <a14:useLocalDpi xmlns:a14="http://schemas.microsoft.com/office/drawing/2010/main" val="0"/>
+              </a:ext>
+            </a:extLst>
+          </a:blip>
+          <a:srcRect/>
+          <a:stretch>
+            <a:fillRect/>
+          </a:stretch>
+        </p:blipFill>
+        <p:spPr bwMode="auto">
+          <a:xfrm>
+            <a:off x="1258888" y="2205038"/>
+            <a:ext cx="2857500" cy="3819525"/>
+          </a:xfrm>
+          <a:prstGeom prst="rect">
+            <a:avLst/>
+          </a:prstGeom>
+          <a:noFill/>
+          <a:ln>
+            <a:noFill/>
+          </a:ln>
+          <a:extLst>
+            <a:ext uri="{909E8E84-426E-40DD-AFC4-6F175D3DCCD1}">
+              <a14:hiddenFill xmlns:a14="http://schemas.microsoft.com/office/drawing/2010/main">
+                <a:solidFill>
+                  <a:srgbClr val="FFFFFF"/>
+                </a:solidFill>
+              </a14:hiddenFill>
+            </a:ext>
+            <a:ext uri="{91240B29-F687-4F45-9708-019B960494DF}">
+              <a14:hiddenLine xmlns:a14="http://schemas.microsoft.com/office/drawing/2010/main" w="9525">
+                <a:solidFill>
+                  <a:srgbClr val="000000"/>
+                </a:solidFill>
+                <a:miter lim="800000"/>
+                <a:headEnd/>
+                <a:tailEnd/>
+              </a14:hiddenLine>
+            </a:ext>
+          </a:extLst>
+        </p:spPr>
+      </p:pic>
+      <p:pic>
+        <p:nvPicPr>
+          <p:cNvPr id="151559" name="Picture 7"/>
+          <p:cNvPicPr>
+            <a:picLocks noChangeAspect="1" noChangeArrowheads="1"/>
+          </p:cNvPicPr>
+          <p:nvPr/>
+        </p:nvPicPr>
+        <p:blipFill>
+          <a:blip r:embed="rId4">
+            <a:extLst>
+              <a:ext uri="{28A0092B-C50C-407E-A947-70E740481C1C}">
+                <a14:useLocalDpi xmlns:a14="http://schemas.microsoft.com/office/drawing/2010/main" val="0"/>
+              </a:ext>
+            </a:extLst>
+          </a:blip>
+          <a:srcRect/>
+          <a:stretch>
+            <a:fillRect/>
+          </a:stretch>
+        </p:blipFill>
+        <p:spPr bwMode="auto">
+          <a:xfrm>
+            <a:off x="4979988" y="2205038"/>
+            <a:ext cx="3552825" cy="3800475"/>
+          </a:xfrm>
+          <a:prstGeom prst="rect">
+            <a:avLst/>
+          </a:prstGeom>
+          <a:noFill/>
+          <a:ln>
+            <a:noFill/>
+          </a:ln>
+          <a:extLst>
+            <a:ext uri="{909E8E84-426E-40DD-AFC4-6F175D3DCCD1}">
+              <a14:hiddenFill xmlns:a14="http://schemas.microsoft.com/office/drawing/2010/main">
+                <a:solidFill>
+                  <a:srgbClr val="FFFFFF"/>
+                </a:solidFill>
+              </a14:hiddenFill>
+            </a:ext>
+            <a:ext uri="{91240B29-F687-4F45-9708-019B960494DF}">
+              <a14:hiddenLine xmlns:a14="http://schemas.microsoft.com/office/drawing/2010/main" w="9525">
+                <a:solidFill>
+                  <a:srgbClr val="000000"/>
+                </a:solidFill>
+                <a:miter lim="800000"/>
+                <a:headEnd/>
+                <a:tailEnd/>
+              </a14:hiddenLine>
+            </a:ext>
+          </a:extLst>
+        </p:spPr>
+      </p:pic>
+      <p:sp>
+        <p:nvSpPr>
+          <p:cNvPr id="33796" name="Rectangle 8"/>
+          <p:cNvSpPr>
+            <a:spLocks noGrp="1" noChangeArrowheads="1"/>
+          </p:cNvSpPr>
+          <p:nvPr>
+            <p:ph type="title"/>
+          </p:nvPr>
+        </p:nvSpPr>
+        <p:spPr>
+          <a:xfrm>
+            <a:off x="359532" y="18256"/>
+            <a:ext cx="3923928" cy="1143000"/>
+          </a:xfrm>
+          <a:noFill/>
+        </p:spPr>
+        <p:txBody>
+          <a:bodyPr/>
+          <a:lstStyle/>
+          <a:p>
+            <a:pPr eaLnBrk="1" hangingPunct="1"/>
+            <a:r>
+              <a:rPr lang="de-CH" altLang="en-US" sz="2800" b="1" dirty="0" smtClean="0">
+                <a:latin typeface="Arial" panose="020B0604020202020204" pitchFamily="34" charset="0"/>
+                <a:cs typeface="Arial" panose="020B0604020202020204" pitchFamily="34" charset="0"/>
+              </a:rPr>
+              <a:t>4. Temporal definition of Causality</a:t>
+            </a:r>
+            <a:endParaRPr lang="en-US" altLang="en-US" sz="2800" b="1" dirty="0" smtClean="0">
+              <a:latin typeface="Arial" panose="020B0604020202020204" pitchFamily="34" charset="0"/>
+              <a:cs typeface="Arial" panose="020B0604020202020204" pitchFamily="34" charset="0"/>
+            </a:endParaRPr>
+          </a:p>
+        </p:txBody>
+      </p:sp>
+      <p:sp>
+        <p:nvSpPr>
+          <p:cNvPr id="33797" name="Rectangle 9"/>
+          <p:cNvSpPr>
+            <a:spLocks noGrp="1" noChangeArrowheads="1"/>
+          </p:cNvSpPr>
+          <p:nvPr>
+            <p:ph type="body" idx="1"/>
+          </p:nvPr>
+        </p:nvSpPr>
+        <p:spPr>
+          <a:xfrm>
+            <a:off x="1187450" y="1196975"/>
+            <a:ext cx="2808288" cy="936625"/>
+          </a:xfrm>
+          <a:solidFill>
+            <a:schemeClr val="bg1"/>
+          </a:solidFill>
+        </p:spPr>
+        <p:txBody>
+          <a:bodyPr/>
+          <a:lstStyle/>
+          <a:p>
+            <a:pPr algn="ctr" eaLnBrk="1" hangingPunct="1">
+              <a:buFontTx/>
+              <a:buNone/>
+            </a:pPr>
+            <a:r>
+              <a:rPr lang="en-US" altLang="en-US" sz="2000" smtClean="0"/>
+              <a:t>Stationary</a:t>
+            </a:r>
+          </a:p>
+          <a:p>
+            <a:pPr algn="ctr" eaLnBrk="1" hangingPunct="1">
+              <a:buFontTx/>
+              <a:buNone/>
+            </a:pPr>
+            <a:r>
+              <a:rPr lang="en-US" altLang="en-US" sz="2000" smtClean="0"/>
+              <a:t>(correlations, SEM)</a:t>
+            </a:r>
+          </a:p>
+        </p:txBody>
+      </p:sp>
+      <p:sp>
+        <p:nvSpPr>
+          <p:cNvPr id="151562" name="Rectangle 10"/>
+          <p:cNvSpPr>
+            <a:spLocks noChangeArrowheads="1"/>
+          </p:cNvSpPr>
+          <p:nvPr/>
+        </p:nvSpPr>
+        <p:spPr bwMode="auto">
+          <a:xfrm>
+            <a:off x="5484813" y="1196975"/>
+            <a:ext cx="2808287" cy="936625"/>
+          </a:xfrm>
+          <a:prstGeom prst="rect">
+            <a:avLst/>
+          </a:prstGeom>
+          <a:solidFill>
+            <a:schemeClr val="bg1"/>
+          </a:solidFill>
+          <a:ln>
+            <a:noFill/>
+          </a:ln>
+          <a:extLst>
+            <a:ext uri="{91240B29-F687-4F45-9708-019B960494DF}">
+              <a14:hiddenLine xmlns:a14="http://schemas.microsoft.com/office/drawing/2010/main" w="9525">
+                <a:solidFill>
+                  <a:srgbClr val="000000"/>
+                </a:solidFill>
+                <a:miter lim="800000"/>
+                <a:headEnd/>
+                <a:tailEnd/>
+              </a14:hiddenLine>
+            </a:ext>
+          </a:extLst>
+        </p:spPr>
+        <p:txBody>
+          <a:bodyPr/>
+          <a:lstStyle>
+            <a:lvl1pPr marL="342900" indent="-342900" eaLnBrk="0" hangingPunct="0">
+              <a:defRPr>
+                <a:solidFill>
+                  <a:schemeClr val="tx1"/>
+                </a:solidFill>
+                <a:latin typeface="Arial" pitchFamily="34" charset="0"/>
+                <a:cs typeface="Arial" pitchFamily="34" charset="0"/>
+              </a:defRPr>
+            </a:lvl1pPr>
+            <a:lvl2pPr marL="742950" indent="-285750" eaLnBrk="0" hangingPunct="0">
+              <a:defRPr>
+                <a:solidFill>
+                  <a:schemeClr val="tx1"/>
+                </a:solidFill>
+                <a:latin typeface="Arial" pitchFamily="34" charset="0"/>
+                <a:cs typeface="Arial" pitchFamily="34" charset="0"/>
+              </a:defRPr>
+            </a:lvl2pPr>
+            <a:lvl3pPr marL="1143000" indent="-228600" eaLnBrk="0" hangingPunct="0">
+              <a:defRPr>
+                <a:solidFill>
+                  <a:schemeClr val="tx1"/>
+                </a:solidFill>
+                <a:latin typeface="Arial" pitchFamily="34" charset="0"/>
+                <a:cs typeface="Arial" pitchFamily="34" charset="0"/>
+              </a:defRPr>
+            </a:lvl3pPr>
+            <a:lvl4pPr marL="1600200" indent="-228600" eaLnBrk="0" hangingPunct="0">
+              <a:defRPr>
+                <a:solidFill>
+                  <a:schemeClr val="tx1"/>
+                </a:solidFill>
+                <a:latin typeface="Arial" pitchFamily="34" charset="0"/>
+                <a:cs typeface="Arial" pitchFamily="34" charset="0"/>
+              </a:defRPr>
+            </a:lvl4pPr>
+            <a:lvl5pPr marL="2057400" indent="-228600" eaLnBrk="0" hangingPunct="0">
+              <a:defRPr>
+                <a:solidFill>
+                  <a:schemeClr val="tx1"/>
+                </a:solidFill>
+                <a:latin typeface="Arial" pitchFamily="34" charset="0"/>
+                <a:cs typeface="Arial" pitchFamily="34" charset="0"/>
+              </a:defRPr>
+            </a:lvl5pPr>
+            <a:lvl6pPr marL="2514600" indent="-228600" eaLnBrk="0" fontAlgn="base" hangingPunct="0">
+              <a:spcBef>
+                <a:spcPct val="0"/>
+              </a:spcBef>
+              <a:spcAft>
+                <a:spcPct val="0"/>
+              </a:spcAft>
+              <a:defRPr>
+                <a:solidFill>
+                  <a:schemeClr val="tx1"/>
+                </a:solidFill>
+                <a:latin typeface="Arial" pitchFamily="34" charset="0"/>
+                <a:cs typeface="Arial" pitchFamily="34" charset="0"/>
+              </a:defRPr>
+            </a:lvl6pPr>
+            <a:lvl7pPr marL="2971800" indent="-228600" eaLnBrk="0" fontAlgn="base" hangingPunct="0">
+              <a:spcBef>
+                <a:spcPct val="0"/>
+              </a:spcBef>
+              <a:spcAft>
+                <a:spcPct val="0"/>
+              </a:spcAft>
+              <a:defRPr>
+                <a:solidFill>
+                  <a:schemeClr val="tx1"/>
+                </a:solidFill>
+                <a:latin typeface="Arial" pitchFamily="34" charset="0"/>
+                <a:cs typeface="Arial" pitchFamily="34" charset="0"/>
+              </a:defRPr>
+            </a:lvl7pPr>
+            <a:lvl8pPr marL="3429000" indent="-228600" eaLnBrk="0" fontAlgn="base" hangingPunct="0">
+              <a:spcBef>
+                <a:spcPct val="0"/>
+              </a:spcBef>
+              <a:spcAft>
+                <a:spcPct val="0"/>
+              </a:spcAft>
+              <a:defRPr>
+                <a:solidFill>
+                  <a:schemeClr val="tx1"/>
+                </a:solidFill>
+                <a:latin typeface="Arial" pitchFamily="34" charset="0"/>
+                <a:cs typeface="Arial" pitchFamily="34" charset="0"/>
+              </a:defRPr>
+            </a:lvl8pPr>
+            <a:lvl9pPr marL="3886200" indent="-228600" eaLnBrk="0" fontAlgn="base" hangingPunct="0">
+              <a:spcBef>
+                <a:spcPct val="0"/>
+              </a:spcBef>
+              <a:spcAft>
+                <a:spcPct val="0"/>
+              </a:spcAft>
+              <a:defRPr>
+                <a:solidFill>
+                  <a:schemeClr val="tx1"/>
+                </a:solidFill>
+                <a:latin typeface="Arial" pitchFamily="34" charset="0"/>
+                <a:cs typeface="Arial" pitchFamily="34" charset="0"/>
+              </a:defRPr>
+            </a:lvl9pPr>
+          </a:lstStyle>
+          <a:p>
+            <a:pPr algn="ctr" eaLnBrk="1" hangingPunct="1">
+              <a:spcBef>
+                <a:spcPct val="20000"/>
+              </a:spcBef>
+            </a:pPr>
+            <a:r>
+              <a:rPr lang="en-US" altLang="en-US" sz="2000"/>
+              <a:t>Dynamic</a:t>
+            </a:r>
+          </a:p>
+          <a:p>
+            <a:pPr algn="ctr" eaLnBrk="1" hangingPunct="1">
+              <a:spcBef>
+                <a:spcPct val="20000"/>
+              </a:spcBef>
+            </a:pPr>
+            <a:r>
+              <a:rPr lang="en-US" altLang="en-US" sz="2000"/>
+              <a:t>(Granger, DCM)</a:t>
+            </a:r>
+          </a:p>
+        </p:txBody>
+      </p:sp>
+      <p:sp>
+        <p:nvSpPr>
+          <p:cNvPr id="33799" name="Line 11"/>
+          <p:cNvSpPr>
+            <a:spLocks noChangeShapeType="1"/>
+          </p:cNvSpPr>
+          <p:nvPr/>
+        </p:nvSpPr>
+        <p:spPr bwMode="auto">
+          <a:xfrm>
+            <a:off x="539750" y="2492375"/>
+            <a:ext cx="0" cy="3384550"/>
+          </a:xfrm>
+          <a:prstGeom prst="line">
+            <a:avLst/>
+          </a:prstGeom>
+          <a:noFill/>
+          <a:ln w="50800">
+            <a:solidFill>
+              <a:schemeClr val="tx1"/>
+            </a:solidFill>
+            <a:round/>
+            <a:headEnd/>
+            <a:tailEnd type="triangle" w="lg" len="med"/>
+          </a:ln>
+          <a:extLst>
+            <a:ext uri="{909E8E84-426E-40DD-AFC4-6F175D3DCCD1}">
+              <a14:hiddenFill xmlns:a14="http://schemas.microsoft.com/office/drawing/2010/main">
+                <a:noFill/>
+              </a14:hiddenFill>
+            </a:ext>
+          </a:extLst>
+        </p:spPr>
+        <p:txBody>
+          <a:bodyPr/>
+          <a:lstStyle/>
+          <a:p>
+            <a:endParaRPr lang="en-GB"/>
+          </a:p>
+        </p:txBody>
+      </p:sp>
+      <p:sp>
+        <p:nvSpPr>
+          <p:cNvPr id="33800" name="Text Box 12"/>
+          <p:cNvSpPr txBox="1">
+            <a:spLocks noChangeArrowheads="1"/>
+          </p:cNvSpPr>
+          <p:nvPr/>
+        </p:nvSpPr>
+        <p:spPr bwMode="auto">
+          <a:xfrm rot="-5400000">
+            <a:off x="-54768" y="3952081"/>
+            <a:ext cx="692150" cy="366713"/>
+          </a:xfrm>
+          <a:prstGeom prst="rect">
+            <a:avLst/>
+          </a:prstGeom>
+          <a:noFill/>
+          <a:ln>
+            <a:noFill/>
+          </a:ln>
+          <a:extLst>
+            <a:ext uri="{909E8E84-426E-40DD-AFC4-6F175D3DCCD1}">
+              <a14:hiddenFill xmlns:a14="http://schemas.microsoft.com/office/drawing/2010/main">
+                <a:solidFill>
+                  <a:srgbClr val="FFFFFF"/>
+                </a:solidFill>
+              </a14:hiddenFill>
+            </a:ext>
+            <a:ext uri="{91240B29-F687-4F45-9708-019B960494DF}">
+              <a14:hiddenLine xmlns:a14="http://schemas.microsoft.com/office/drawing/2010/main" w="9525">
+                <a:solidFill>
+                  <a:srgbClr val="000000"/>
+                </a:solidFill>
+                <a:miter lim="800000"/>
+                <a:headEnd/>
+                <a:tailEnd/>
+              </a14:hiddenLine>
+            </a:ext>
+          </a:extLst>
+        </p:spPr>
+        <p:txBody>
+          <a:bodyPr wrap="none">
+            <a:spAutoFit/>
+          </a:bodyPr>
+          <a:lstStyle>
+            <a:lvl1pPr eaLnBrk="0" hangingPunct="0">
+              <a:defRPr>
+                <a:solidFill>
+                  <a:schemeClr val="tx1"/>
+                </a:solidFill>
+                <a:latin typeface="Arial" pitchFamily="34" charset="0"/>
+                <a:cs typeface="Arial" pitchFamily="34" charset="0"/>
+              </a:defRPr>
+            </a:lvl1pPr>
+            <a:lvl2pPr marL="742950" indent="-285750" eaLnBrk="0" hangingPunct="0">
+              <a:defRPr>
+                <a:solidFill>
+                  <a:schemeClr val="tx1"/>
+                </a:solidFill>
+                <a:latin typeface="Arial" pitchFamily="34" charset="0"/>
+                <a:cs typeface="Arial" pitchFamily="34" charset="0"/>
+              </a:defRPr>
+            </a:lvl2pPr>
+            <a:lvl3pPr marL="1143000" indent="-228600" eaLnBrk="0" hangingPunct="0">
+              <a:defRPr>
+                <a:solidFill>
+                  <a:schemeClr val="tx1"/>
+                </a:solidFill>
+                <a:latin typeface="Arial" pitchFamily="34" charset="0"/>
+                <a:cs typeface="Arial" pitchFamily="34" charset="0"/>
+              </a:defRPr>
+            </a:lvl3pPr>
+            <a:lvl4pPr marL="1600200" indent="-228600" eaLnBrk="0" hangingPunct="0">
+              <a:defRPr>
+                <a:solidFill>
+                  <a:schemeClr val="tx1"/>
+                </a:solidFill>
+                <a:latin typeface="Arial" pitchFamily="34" charset="0"/>
+                <a:cs typeface="Arial" pitchFamily="34" charset="0"/>
+              </a:defRPr>
+            </a:lvl4pPr>
+            <a:lvl5pPr marL="2057400" indent="-228600" eaLnBrk="0" hangingPunct="0">
+              <a:defRPr>
+                <a:solidFill>
+                  <a:schemeClr val="tx1"/>
+                </a:solidFill>
+                <a:latin typeface="Arial" pitchFamily="34" charset="0"/>
+                <a:cs typeface="Arial" pitchFamily="34" charset="0"/>
+              </a:defRPr>
+            </a:lvl5pPr>
+            <a:lvl6pPr marL="2514600" indent="-228600" eaLnBrk="0" fontAlgn="base" hangingPunct="0">
+              <a:spcBef>
+                <a:spcPct val="0"/>
+              </a:spcBef>
+              <a:spcAft>
+                <a:spcPct val="0"/>
+              </a:spcAft>
+              <a:defRPr>
+                <a:solidFill>
+                  <a:schemeClr val="tx1"/>
+                </a:solidFill>
+                <a:latin typeface="Arial" pitchFamily="34" charset="0"/>
+                <a:cs typeface="Arial" pitchFamily="34" charset="0"/>
+              </a:defRPr>
+            </a:lvl6pPr>
+            <a:lvl7pPr marL="2971800" indent="-228600" eaLnBrk="0" fontAlgn="base" hangingPunct="0">
+              <a:spcBef>
+                <a:spcPct val="0"/>
+              </a:spcBef>
+              <a:spcAft>
+                <a:spcPct val="0"/>
+              </a:spcAft>
+              <a:defRPr>
+                <a:solidFill>
+                  <a:schemeClr val="tx1"/>
+                </a:solidFill>
+                <a:latin typeface="Arial" pitchFamily="34" charset="0"/>
+                <a:cs typeface="Arial" pitchFamily="34" charset="0"/>
+              </a:defRPr>
+            </a:lvl7pPr>
+            <a:lvl8pPr marL="3429000" indent="-228600" eaLnBrk="0" fontAlgn="base" hangingPunct="0">
+              <a:spcBef>
+                <a:spcPct val="0"/>
+              </a:spcBef>
+              <a:spcAft>
+                <a:spcPct val="0"/>
+              </a:spcAft>
+              <a:defRPr>
+                <a:solidFill>
+                  <a:schemeClr val="tx1"/>
+                </a:solidFill>
+                <a:latin typeface="Arial" pitchFamily="34" charset="0"/>
+                <a:cs typeface="Arial" pitchFamily="34" charset="0"/>
+              </a:defRPr>
+            </a:lvl8pPr>
+            <a:lvl9pPr marL="3886200" indent="-228600" eaLnBrk="0" fontAlgn="base" hangingPunct="0">
+              <a:spcBef>
+                <a:spcPct val="0"/>
+              </a:spcBef>
+              <a:spcAft>
+                <a:spcPct val="0"/>
+              </a:spcAft>
+              <a:defRPr>
+                <a:solidFill>
+                  <a:schemeClr val="tx1"/>
+                </a:solidFill>
+                <a:latin typeface="Arial" pitchFamily="34" charset="0"/>
+                <a:cs typeface="Arial" pitchFamily="34" charset="0"/>
+              </a:defRPr>
+            </a:lvl9pPr>
+          </a:lstStyle>
+          <a:p>
+            <a:pPr eaLnBrk="1" hangingPunct="1"/>
+            <a:r>
+              <a:rPr lang="en-GB" altLang="en-US"/>
+              <a:t>Time</a:t>
+            </a:r>
+          </a:p>
+        </p:txBody>
+      </p:sp>
+      <p:sp>
+        <p:nvSpPr>
+          <p:cNvPr id="151565" name="Rectangle 13"/>
+          <p:cNvSpPr>
+            <a:spLocks noChangeArrowheads="1"/>
+          </p:cNvSpPr>
+          <p:nvPr/>
+        </p:nvSpPr>
+        <p:spPr bwMode="auto">
+          <a:xfrm>
+            <a:off x="1943100" y="6469950"/>
+            <a:ext cx="7200900" cy="404812"/>
+          </a:xfrm>
+          <a:prstGeom prst="rect">
+            <a:avLst/>
+          </a:prstGeom>
+          <a:noFill/>
+          <a:ln>
+            <a:noFill/>
+          </a:ln>
+          <a:extLst>
+            <a:ext uri="{909E8E84-426E-40DD-AFC4-6F175D3DCCD1}">
+              <a14:hiddenFill xmlns:a14="http://schemas.microsoft.com/office/drawing/2010/main">
+                <a:solidFill>
+                  <a:srgbClr val="FFFFFF"/>
+                </a:solidFill>
+              </a14:hiddenFill>
+            </a:ext>
+            <a:ext uri="{91240B29-F687-4F45-9708-019B960494DF}">
+              <a14:hiddenLine xmlns:a14="http://schemas.microsoft.com/office/drawing/2010/main" w="9525">
+                <a:solidFill>
+                  <a:srgbClr val="000000"/>
+                </a:solidFill>
+                <a:miter lim="800000"/>
+                <a:headEnd/>
+                <a:tailEnd/>
+              </a14:hiddenLine>
+            </a:ext>
+          </a:extLst>
+        </p:spPr>
+        <p:txBody>
+          <a:bodyPr/>
+          <a:lstStyle>
+            <a:lvl1pPr marL="377825" eaLnBrk="0" hangingPunct="0">
+              <a:defRPr>
+                <a:solidFill>
+                  <a:schemeClr val="tx1"/>
+                </a:solidFill>
+                <a:latin typeface="Arial" pitchFamily="34" charset="0"/>
+                <a:cs typeface="Arial" pitchFamily="34" charset="0"/>
+              </a:defRPr>
+            </a:lvl1pPr>
+            <a:lvl2pPr marL="742950" indent="-285750" eaLnBrk="0" hangingPunct="0">
+              <a:defRPr>
+                <a:solidFill>
+                  <a:schemeClr val="tx1"/>
+                </a:solidFill>
+                <a:latin typeface="Arial" pitchFamily="34" charset="0"/>
+                <a:cs typeface="Arial" pitchFamily="34" charset="0"/>
+              </a:defRPr>
+            </a:lvl2pPr>
+            <a:lvl3pPr marL="1143000" indent="-228600" eaLnBrk="0" hangingPunct="0">
+              <a:defRPr>
+                <a:solidFill>
+                  <a:schemeClr val="tx1"/>
+                </a:solidFill>
+                <a:latin typeface="Arial" pitchFamily="34" charset="0"/>
+                <a:cs typeface="Arial" pitchFamily="34" charset="0"/>
+              </a:defRPr>
+            </a:lvl3pPr>
+            <a:lvl4pPr marL="1600200" indent="-228600" eaLnBrk="0" hangingPunct="0">
+              <a:defRPr>
+                <a:solidFill>
+                  <a:schemeClr val="tx1"/>
+                </a:solidFill>
+                <a:latin typeface="Arial" pitchFamily="34" charset="0"/>
+                <a:cs typeface="Arial" pitchFamily="34" charset="0"/>
+              </a:defRPr>
+            </a:lvl4pPr>
+            <a:lvl5pPr marL="2057400" indent="-228600" eaLnBrk="0" hangingPunct="0">
+              <a:defRPr>
+                <a:solidFill>
+                  <a:schemeClr val="tx1"/>
+                </a:solidFill>
+                <a:latin typeface="Arial" pitchFamily="34" charset="0"/>
+                <a:cs typeface="Arial" pitchFamily="34" charset="0"/>
+              </a:defRPr>
+            </a:lvl5pPr>
+            <a:lvl6pPr marL="2514600" indent="-228600" eaLnBrk="0" fontAlgn="base" hangingPunct="0">
+              <a:spcBef>
+                <a:spcPct val="0"/>
+              </a:spcBef>
+              <a:spcAft>
+                <a:spcPct val="0"/>
+              </a:spcAft>
+              <a:defRPr>
+                <a:solidFill>
+                  <a:schemeClr val="tx1"/>
+                </a:solidFill>
+                <a:latin typeface="Arial" pitchFamily="34" charset="0"/>
+                <a:cs typeface="Arial" pitchFamily="34" charset="0"/>
+              </a:defRPr>
+            </a:lvl6pPr>
+            <a:lvl7pPr marL="2971800" indent="-228600" eaLnBrk="0" fontAlgn="base" hangingPunct="0">
+              <a:spcBef>
+                <a:spcPct val="0"/>
+              </a:spcBef>
+              <a:spcAft>
+                <a:spcPct val="0"/>
+              </a:spcAft>
+              <a:defRPr>
+                <a:solidFill>
+                  <a:schemeClr val="tx1"/>
+                </a:solidFill>
+                <a:latin typeface="Arial" pitchFamily="34" charset="0"/>
+                <a:cs typeface="Arial" pitchFamily="34" charset="0"/>
+              </a:defRPr>
+            </a:lvl7pPr>
+            <a:lvl8pPr marL="3429000" indent="-228600" eaLnBrk="0" fontAlgn="base" hangingPunct="0">
+              <a:spcBef>
+                <a:spcPct val="0"/>
+              </a:spcBef>
+              <a:spcAft>
+                <a:spcPct val="0"/>
+              </a:spcAft>
+              <a:defRPr>
+                <a:solidFill>
+                  <a:schemeClr val="tx1"/>
+                </a:solidFill>
+                <a:latin typeface="Arial" pitchFamily="34" charset="0"/>
+                <a:cs typeface="Arial" pitchFamily="34" charset="0"/>
+              </a:defRPr>
+            </a:lvl8pPr>
+            <a:lvl9pPr marL="3886200" indent="-228600" eaLnBrk="0" fontAlgn="base" hangingPunct="0">
+              <a:spcBef>
+                <a:spcPct val="0"/>
+              </a:spcBef>
+              <a:spcAft>
+                <a:spcPct val="0"/>
+              </a:spcAft>
+              <a:defRPr>
+                <a:solidFill>
+                  <a:schemeClr val="tx1"/>
+                </a:solidFill>
+                <a:latin typeface="Arial" pitchFamily="34" charset="0"/>
+                <a:cs typeface="Arial" pitchFamily="34" charset="0"/>
+              </a:defRPr>
+            </a:lvl9pPr>
+          </a:lstStyle>
+          <a:p>
+            <a:pPr eaLnBrk="1" hangingPunct="1">
+              <a:lnSpc>
+                <a:spcPct val="80000"/>
+              </a:lnSpc>
+              <a:spcBef>
+                <a:spcPct val="100000"/>
+              </a:spcBef>
+            </a:pPr>
+            <a:r>
+              <a:rPr lang="en-GB" altLang="en-US">
+                <a:solidFill>
+                  <a:srgbClr val="FF0000"/>
+                </a:solidFill>
+                <a:latin typeface="Arial Unicode MS" pitchFamily="34" charset="-128"/>
+              </a:rPr>
+              <a:t>(“unfolding” in time is one way to infer direction of connectivity)</a:t>
+            </a:r>
+          </a:p>
+        </p:txBody>
+      </p:sp>
+    </p:spTree>
+    <p:extLst>
+      <p:ext uri="{BB962C8B-B14F-4D97-AF65-F5344CB8AC3E}">
+        <p14:creationId xmlns:p14="http://schemas.microsoft.com/office/powerpoint/2010/main" val="3043990040"/>
+      </p:ext>
+    </p:extLst>
+  </p:cSld>
+  <p:clrMapOvr>
+    <a:masterClrMapping/>
+  </p:clrMapOvr>
+  <p:timing>
+    <p:tnLst>
+      <p:par>
+        <p:cTn id="1" dur="indefinite" restart="never" nodeType="tmRoot">
+          <p:childTnLst>
+            <p:seq concurrent="1" nextAc="seek">
+              <p:cTn id="2" dur="indefinite" nodeType="mainSeq">
+                <p:childTnLst>
+                  <p:par>
+                    <p:cTn id="3" fill="hold" nodeType="clickPar">
+                      <p:stCondLst>
+                        <p:cond delay="indefinite"/>
+                      </p:stCondLst>
+                      <p:childTnLst>
+                        <p:par>
+                          <p:cTn id="4" fill="hold" nodeType="withGroup">
+                            <p:stCondLst>
+                              <p:cond delay="0"/>
+                            </p:stCondLst>
+                            <p:childTnLst>
+                              <p:par>
+                                <p:cTn id="5" presetID="1" presetClass="entr" presetSubtype="0" fill="hold" nodeType="clickEffect">
+                                  <p:stCondLst>
+                                    <p:cond delay="0"/>
+                                  </p:stCondLst>
+                                  <p:childTnLst>
+                                    <p:set>
+                                      <p:cBhvr>
+                                        <p:cTn id="6" dur="1" fill="hold">
+                                          <p:stCondLst>
+                                            <p:cond delay="0"/>
+                                          </p:stCondLst>
+                                        </p:cTn>
+                                        <p:tgtEl>
+                                          <p:spTgt spid="151559"/>
+                                        </p:tgtEl>
+                                        <p:attrNameLst>
+                                          <p:attrName>style.visibility</p:attrName>
+                                        </p:attrNameLst>
+                                      </p:cBhvr>
+                                      <p:to>
+                                        <p:strVal val="visible"/>
+                                      </p:to>
+                                    </p:set>
+                                  </p:childTnLst>
+                                </p:cTn>
+                              </p:par>
+                              <p:par>
+                                <p:cTn id="7" presetID="1" presetClass="entr" presetSubtype="0" fill="hold" grpId="0" nodeType="withEffect">
+                                  <p:stCondLst>
+                                    <p:cond delay="0"/>
+                                  </p:stCondLst>
+                                  <p:childTnLst>
+                                    <p:set>
+                                      <p:cBhvr>
+                                        <p:cTn id="8" dur="1" fill="hold">
+                                          <p:stCondLst>
+                                            <p:cond delay="0"/>
+                                          </p:stCondLst>
+                                        </p:cTn>
+                                        <p:tgtEl>
+                                          <p:spTgt spid="151562">
+                                            <p:txEl>
+                                              <p:pRg st="0" end="0"/>
+                                            </p:txEl>
+                                          </p:spTgt>
+                                        </p:tgtEl>
+                                        <p:attrNameLst>
+                                          <p:attrName>style.visibility</p:attrName>
+                                        </p:attrNameLst>
+                                      </p:cBhvr>
+                                      <p:to>
+                                        <p:strVal val="visible"/>
+                                      </p:to>
+                                    </p:set>
+                                  </p:childTnLst>
+                                </p:cTn>
+                              </p:par>
+                              <p:par>
+                                <p:cTn id="9" presetID="1" presetClass="entr" presetSubtype="0" fill="hold" grpId="0" nodeType="withEffect">
+                                  <p:stCondLst>
+                                    <p:cond delay="0"/>
+                                  </p:stCondLst>
+                                  <p:childTnLst>
+                                    <p:set>
+                                      <p:cBhvr>
+                                        <p:cTn id="10" dur="1" fill="hold">
+                                          <p:stCondLst>
+                                            <p:cond delay="0"/>
+                                          </p:stCondLst>
+                                        </p:cTn>
+                                        <p:tgtEl>
+                                          <p:spTgt spid="151562">
+                                            <p:txEl>
+                                              <p:pRg st="1" end="1"/>
+                                            </p:txEl>
+                                          </p:spTgt>
+                                        </p:tgtEl>
+                                        <p:attrNameLst>
+                                          <p:attrName>style.visibility</p:attrName>
+                                        </p:attrNameLst>
+                                      </p:cBhvr>
+                                      <p:to>
+                                        <p:strVal val="visible"/>
+                                      </p:to>
+                                    </p:set>
+                                  </p:childTnLst>
+                                </p:cTn>
+                              </p:par>
+                            </p:childTnLst>
+                          </p:cTn>
+                        </p:par>
+                      </p:childTnLst>
+                    </p:cTn>
+                  </p:par>
+                  <p:par>
+                    <p:cTn id="11" fill="hold" nodeType="clickPar">
+                      <p:stCondLst>
+                        <p:cond delay="indefinite"/>
+                      </p:stCondLst>
+                      <p:childTnLst>
+                        <p:par>
+                          <p:cTn id="12" fill="hold" nodeType="withGroup">
+                            <p:stCondLst>
+                              <p:cond delay="0"/>
+                            </p:stCondLst>
+                            <p:childTnLst>
+                              <p:par>
+                                <p:cTn id="13" presetID="1" presetClass="entr" presetSubtype="0" fill="hold" grpId="0" nodeType="clickEffect">
+                                  <p:stCondLst>
+                                    <p:cond delay="0"/>
+                                  </p:stCondLst>
+                                  <p:childTnLst>
+                                    <p:set>
+                                      <p:cBhvr>
+                                        <p:cTn id="14" dur="1" fill="hold">
+                                          <p:stCondLst>
+                                            <p:cond delay="0"/>
+                                          </p:stCondLst>
+                                        </p:cTn>
+                                        <p:tgtEl>
+                                          <p:spTgt spid="151565"/>
+                                        </p:tgtEl>
+                                        <p:attrNameLst>
+                                          <p:attrName>style.visibility</p:attrName>
+                                        </p:attrNameLst>
+                                      </p:cBhvr>
+                                      <p:to>
+                                        <p:strVal val="visible"/>
+                                      </p:to>
+                                    </p:set>
+                                  </p:childTnLst>
+                                </p:cTn>
+                              </p:par>
+                            </p:childTnLst>
+                          </p:cTn>
+                        </p:par>
+                      </p:childTnLst>
+                    </p:cTn>
+                  </p:par>
+                </p:childTnLst>
+              </p:cTn>
+              <p:prevCondLst>
+                <p:cond evt="onPrev" delay="0">
+                  <p:tgtEl>
+                    <p:sldTgt/>
+                  </p:tgtEl>
+                </p:cond>
+              </p:prevCondLst>
+              <p:nextCondLst>
+                <p:cond evt="onNext" delay="0">
+                  <p:tgtEl>
+                    <p:sldTgt/>
+                  </p:tgtEl>
+                </p:cond>
+              </p:nextCondLst>
+            </p:seq>
+          </p:childTnLst>
+        </p:cTn>
+      </p:par>
+    </p:tnLst>
+    <p:bldLst>
+      <p:bldP spid="151562" grpId="0" build="p" autoUpdateAnimBg="0"/>
+      <p:bldP spid="151565" grpId="0"/>
+    </p:bldLst>
+  </p:timing>
+</p:sld>
+</file>
+
+<file path=ppt/slides/slide31.xml><?xml version="1.0" encoding="utf-8"?>
+<p:sld xmlns:a="http://schemas.openxmlformats.org/drawingml/2006/main" xmlns:r="http://schemas.openxmlformats.org/officeDocument/2006/relationships" xmlns:p="http://schemas.openxmlformats.org/presentationml/2006/main">
+  <p:cSld>
+    <p:spTree>
+      <p:nvGrpSpPr>
+        <p:cNvPr id="1" name=""/>
+        <p:cNvGrpSpPr/>
+        <p:nvPr/>
+      </p:nvGrpSpPr>
+      <p:grpSpPr>
+        <a:xfrm>
+          <a:off x="0" y="0"/>
+          <a:ext cx="0" cy="0"/>
+          <a:chOff x="0" y="0"/>
+          <a:chExt cx="0" cy="0"/>
+        </a:xfrm>
+      </p:grpSpPr>
       <p:sp>
         <p:nvSpPr>
           <p:cNvPr id="177154" name="Rectangle 2"/>
@@ -33023,7 +33491,7 @@
 </p:sld>
 </file>
 
-<file path=ppt/slides/slide31.xml><?xml version="1.0" encoding="utf-8"?>
+<file path=ppt/slides/slide32.xml><?xml version="1.0" encoding="utf-8"?>
 <p:sld xmlns:a="http://schemas.openxmlformats.org/drawingml/2006/main" xmlns:r="http://schemas.openxmlformats.org/officeDocument/2006/relationships" xmlns:p="http://schemas.openxmlformats.org/presentationml/2006/main">
   <p:cSld>
     <p:spTree>
@@ -33638,7 +34106,7 @@
 </p:sld>
 </file>
 
-<file path=ppt/slides/slide32.xml><?xml version="1.0" encoding="utf-8"?>
+<file path=ppt/slides/slide33.xml><?xml version="1.0" encoding="utf-8"?>
 <p:sld xmlns:a="http://schemas.openxmlformats.org/drawingml/2006/main" xmlns:r="http://schemas.openxmlformats.org/officeDocument/2006/relationships" xmlns:p="http://schemas.openxmlformats.org/presentationml/2006/main">
   <p:cSld>
     <p:spTree>
@@ -36390,7 +36858,7 @@
 </p:sld>
 </file>
 
-<file path=ppt/slides/slide33.xml><?xml version="1.0" encoding="utf-8"?>
+<file path=ppt/slides/slide34.xml><?xml version="1.0" encoding="utf-8"?>
 <p:sld xmlns:a="http://schemas.openxmlformats.org/drawingml/2006/main" xmlns:r="http://schemas.openxmlformats.org/officeDocument/2006/relationships" xmlns:p="http://schemas.openxmlformats.org/presentationml/2006/main">
   <p:cSld>
     <p:spTree>
@@ -36849,6 +37317,3536 @@
       </p:grpSpPr>
       <p:sp>
         <p:nvSpPr>
+          <p:cNvPr id="149509" name="Rectangle 5"/>
+          <p:cNvSpPr>
+            <a:spLocks noChangeArrowheads="1"/>
+          </p:cNvSpPr>
+          <p:nvPr/>
+        </p:nvSpPr>
+        <p:spPr bwMode="auto">
+          <a:xfrm>
+            <a:off x="427038" y="1587500"/>
+            <a:ext cx="4041774" cy="2151871"/>
+          </a:xfrm>
+          <a:prstGeom prst="rect">
+            <a:avLst/>
+          </a:prstGeom>
+          <a:noFill/>
+          <a:ln>
+            <a:noFill/>
+          </a:ln>
+          <a:extLst>
+            <a:ext uri="{909E8E84-426E-40DD-AFC4-6F175D3DCCD1}">
+              <a14:hiddenFill xmlns:a14="http://schemas.microsoft.com/office/drawing/2010/main">
+                <a:solidFill>
+                  <a:srgbClr val="FFFFFF"/>
+                </a:solidFill>
+              </a14:hiddenFill>
+            </a:ext>
+            <a:ext uri="{91240B29-F687-4F45-9708-019B960494DF}">
+              <a14:hiddenLine xmlns:a14="http://schemas.microsoft.com/office/drawing/2010/main" w="12700">
+                <a:solidFill>
+                  <a:srgbClr val="000000"/>
+                </a:solidFill>
+                <a:miter lim="800000"/>
+                <a:headEnd/>
+                <a:tailEnd/>
+              </a14:hiddenLine>
+            </a:ext>
+          </a:extLst>
+        </p:spPr>
+        <p:txBody>
+          <a:bodyPr wrap="square" lIns="90488" tIns="44450" rIns="90488" bIns="44450">
+            <a:spAutoFit/>
+          </a:bodyPr>
+          <a:lstStyle>
+            <a:lvl1pPr eaLnBrk="0" hangingPunct="0">
+              <a:defRPr>
+                <a:solidFill>
+                  <a:schemeClr val="tx1"/>
+                </a:solidFill>
+                <a:latin typeface="Arial" pitchFamily="34" charset="0"/>
+                <a:cs typeface="Arial" pitchFamily="34" charset="0"/>
+              </a:defRPr>
+            </a:lvl1pPr>
+            <a:lvl2pPr marL="742950" indent="-285750" eaLnBrk="0" hangingPunct="0">
+              <a:defRPr>
+                <a:solidFill>
+                  <a:schemeClr val="tx1"/>
+                </a:solidFill>
+                <a:latin typeface="Arial" pitchFamily="34" charset="0"/>
+                <a:cs typeface="Arial" pitchFamily="34" charset="0"/>
+              </a:defRPr>
+            </a:lvl2pPr>
+            <a:lvl3pPr marL="1143000" indent="-228600" eaLnBrk="0" hangingPunct="0">
+              <a:defRPr>
+                <a:solidFill>
+                  <a:schemeClr val="tx1"/>
+                </a:solidFill>
+                <a:latin typeface="Arial" pitchFamily="34" charset="0"/>
+                <a:cs typeface="Arial" pitchFamily="34" charset="0"/>
+              </a:defRPr>
+            </a:lvl3pPr>
+            <a:lvl4pPr marL="1600200" indent="-228600" eaLnBrk="0" hangingPunct="0">
+              <a:defRPr>
+                <a:solidFill>
+                  <a:schemeClr val="tx1"/>
+                </a:solidFill>
+                <a:latin typeface="Arial" pitchFamily="34" charset="0"/>
+                <a:cs typeface="Arial" pitchFamily="34" charset="0"/>
+              </a:defRPr>
+            </a:lvl4pPr>
+            <a:lvl5pPr marL="2057400" indent="-228600" eaLnBrk="0" hangingPunct="0">
+              <a:defRPr>
+                <a:solidFill>
+                  <a:schemeClr val="tx1"/>
+                </a:solidFill>
+                <a:latin typeface="Arial" pitchFamily="34" charset="0"/>
+                <a:cs typeface="Arial" pitchFamily="34" charset="0"/>
+              </a:defRPr>
+            </a:lvl5pPr>
+            <a:lvl6pPr marL="2514600" indent="-228600" eaLnBrk="0" fontAlgn="base" hangingPunct="0">
+              <a:spcBef>
+                <a:spcPct val="0"/>
+              </a:spcBef>
+              <a:spcAft>
+                <a:spcPct val="0"/>
+              </a:spcAft>
+              <a:defRPr>
+                <a:solidFill>
+                  <a:schemeClr val="tx1"/>
+                </a:solidFill>
+                <a:latin typeface="Arial" pitchFamily="34" charset="0"/>
+                <a:cs typeface="Arial" pitchFamily="34" charset="0"/>
+              </a:defRPr>
+            </a:lvl6pPr>
+            <a:lvl7pPr marL="2971800" indent="-228600" eaLnBrk="0" fontAlgn="base" hangingPunct="0">
+              <a:spcBef>
+                <a:spcPct val="0"/>
+              </a:spcBef>
+              <a:spcAft>
+                <a:spcPct val="0"/>
+              </a:spcAft>
+              <a:defRPr>
+                <a:solidFill>
+                  <a:schemeClr val="tx1"/>
+                </a:solidFill>
+                <a:latin typeface="Arial" pitchFamily="34" charset="0"/>
+                <a:cs typeface="Arial" pitchFamily="34" charset="0"/>
+              </a:defRPr>
+            </a:lvl7pPr>
+            <a:lvl8pPr marL="3429000" indent="-228600" eaLnBrk="0" fontAlgn="base" hangingPunct="0">
+              <a:spcBef>
+                <a:spcPct val="0"/>
+              </a:spcBef>
+              <a:spcAft>
+                <a:spcPct val="0"/>
+              </a:spcAft>
+              <a:defRPr>
+                <a:solidFill>
+                  <a:schemeClr val="tx1"/>
+                </a:solidFill>
+                <a:latin typeface="Arial" pitchFamily="34" charset="0"/>
+                <a:cs typeface="Arial" pitchFamily="34" charset="0"/>
+              </a:defRPr>
+            </a:lvl8pPr>
+            <a:lvl9pPr marL="3886200" indent="-228600" eaLnBrk="0" fontAlgn="base" hangingPunct="0">
+              <a:spcBef>
+                <a:spcPct val="0"/>
+              </a:spcBef>
+              <a:spcAft>
+                <a:spcPct val="0"/>
+              </a:spcAft>
+              <a:defRPr>
+                <a:solidFill>
+                  <a:schemeClr val="tx1"/>
+                </a:solidFill>
+                <a:latin typeface="Arial" pitchFamily="34" charset="0"/>
+                <a:cs typeface="Arial" pitchFamily="34" charset="0"/>
+              </a:defRPr>
+            </a:lvl9pPr>
+          </a:lstStyle>
+          <a:p>
+            <a:r>
+              <a:rPr lang="en-GB" altLang="en-US" sz="2000" dirty="0"/>
+              <a:t>No connection between B and C,</a:t>
+            </a:r>
+          </a:p>
+          <a:p>
+            <a:r>
+              <a:rPr lang="en-GB" altLang="en-US" sz="2000" dirty="0"/>
+              <a:t>yet B and C correlated because of common input from A, </a:t>
+            </a:r>
+            <a:r>
+              <a:rPr lang="en-GB" altLang="en-US" sz="2000" dirty="0" err="1"/>
+              <a:t>eg</a:t>
+            </a:r>
+            <a:r>
+              <a:rPr lang="en-GB" altLang="en-US" sz="2000" dirty="0"/>
+              <a:t>:</a:t>
+            </a:r>
+          </a:p>
+          <a:p>
+            <a:endParaRPr lang="en-GB" altLang="en-US" sz="2000" dirty="0"/>
+          </a:p>
+          <a:p>
+            <a:r>
+              <a:rPr lang="en-US" altLang="en-US" dirty="0"/>
+              <a:t>A = V1 fMRI time-series</a:t>
+            </a:r>
+          </a:p>
+          <a:p>
+            <a:r>
+              <a:rPr lang="en-US" altLang="en-US" dirty="0"/>
+              <a:t>B = 0.5 * A + e1</a:t>
+            </a:r>
+          </a:p>
+          <a:p>
+            <a:r>
+              <a:rPr lang="en-US" altLang="en-US" dirty="0"/>
+              <a:t>C = 0.3 * A + e2</a:t>
+            </a:r>
+          </a:p>
+        </p:txBody>
+      </p:sp>
+      <p:sp>
+        <p:nvSpPr>
+          <p:cNvPr id="149510" name="Rectangle 6"/>
+          <p:cNvSpPr>
+            <a:spLocks noChangeArrowheads="1"/>
+          </p:cNvSpPr>
+          <p:nvPr/>
+        </p:nvSpPr>
+        <p:spPr bwMode="auto">
+          <a:xfrm>
+            <a:off x="6873875" y="1514475"/>
+            <a:ext cx="2336800" cy="1917700"/>
+          </a:xfrm>
+          <a:prstGeom prst="rect">
+            <a:avLst/>
+          </a:prstGeom>
+          <a:noFill/>
+          <a:ln>
+            <a:noFill/>
+          </a:ln>
+          <a:extLst>
+            <a:ext uri="{909E8E84-426E-40DD-AFC4-6F175D3DCCD1}">
+              <a14:hiddenFill xmlns:a14="http://schemas.microsoft.com/office/drawing/2010/main">
+                <a:solidFill>
+                  <a:srgbClr val="FFFFFF"/>
+                </a:solidFill>
+              </a14:hiddenFill>
+            </a:ext>
+            <a:ext uri="{91240B29-F687-4F45-9708-019B960494DF}">
+              <a14:hiddenLine xmlns:a14="http://schemas.microsoft.com/office/drawing/2010/main" w="12700">
+                <a:solidFill>
+                  <a:srgbClr val="000000"/>
+                </a:solidFill>
+                <a:miter lim="800000"/>
+                <a:headEnd/>
+                <a:tailEnd/>
+              </a14:hiddenLine>
+            </a:ext>
+          </a:extLst>
+        </p:spPr>
+        <p:txBody>
+          <a:bodyPr lIns="90488" tIns="44450" rIns="90488" bIns="44450">
+            <a:spAutoFit/>
+          </a:bodyPr>
+          <a:lstStyle>
+            <a:lvl1pPr eaLnBrk="0" hangingPunct="0">
+              <a:defRPr>
+                <a:solidFill>
+                  <a:schemeClr val="tx1"/>
+                </a:solidFill>
+                <a:latin typeface="Arial" pitchFamily="34" charset="0"/>
+                <a:cs typeface="Arial" pitchFamily="34" charset="0"/>
+              </a:defRPr>
+            </a:lvl1pPr>
+            <a:lvl2pPr marL="742950" indent="-285750" eaLnBrk="0" hangingPunct="0">
+              <a:defRPr>
+                <a:solidFill>
+                  <a:schemeClr val="tx1"/>
+                </a:solidFill>
+                <a:latin typeface="Arial" pitchFamily="34" charset="0"/>
+                <a:cs typeface="Arial" pitchFamily="34" charset="0"/>
+              </a:defRPr>
+            </a:lvl2pPr>
+            <a:lvl3pPr marL="1143000" indent="-228600" eaLnBrk="0" hangingPunct="0">
+              <a:defRPr>
+                <a:solidFill>
+                  <a:schemeClr val="tx1"/>
+                </a:solidFill>
+                <a:latin typeface="Arial" pitchFamily="34" charset="0"/>
+                <a:cs typeface="Arial" pitchFamily="34" charset="0"/>
+              </a:defRPr>
+            </a:lvl3pPr>
+            <a:lvl4pPr marL="1600200" indent="-228600" eaLnBrk="0" hangingPunct="0">
+              <a:defRPr>
+                <a:solidFill>
+                  <a:schemeClr val="tx1"/>
+                </a:solidFill>
+                <a:latin typeface="Arial" pitchFamily="34" charset="0"/>
+                <a:cs typeface="Arial" pitchFamily="34" charset="0"/>
+              </a:defRPr>
+            </a:lvl4pPr>
+            <a:lvl5pPr marL="2057400" indent="-228600" eaLnBrk="0" hangingPunct="0">
+              <a:defRPr>
+                <a:solidFill>
+                  <a:schemeClr val="tx1"/>
+                </a:solidFill>
+                <a:latin typeface="Arial" pitchFamily="34" charset="0"/>
+                <a:cs typeface="Arial" pitchFamily="34" charset="0"/>
+              </a:defRPr>
+            </a:lvl5pPr>
+            <a:lvl6pPr marL="2514600" indent="-228600" eaLnBrk="0" fontAlgn="base" hangingPunct="0">
+              <a:spcBef>
+                <a:spcPct val="0"/>
+              </a:spcBef>
+              <a:spcAft>
+                <a:spcPct val="0"/>
+              </a:spcAft>
+              <a:defRPr>
+                <a:solidFill>
+                  <a:schemeClr val="tx1"/>
+                </a:solidFill>
+                <a:latin typeface="Arial" pitchFamily="34" charset="0"/>
+                <a:cs typeface="Arial" pitchFamily="34" charset="0"/>
+              </a:defRPr>
+            </a:lvl6pPr>
+            <a:lvl7pPr marL="2971800" indent="-228600" eaLnBrk="0" fontAlgn="base" hangingPunct="0">
+              <a:spcBef>
+                <a:spcPct val="0"/>
+              </a:spcBef>
+              <a:spcAft>
+                <a:spcPct val="0"/>
+              </a:spcAft>
+              <a:defRPr>
+                <a:solidFill>
+                  <a:schemeClr val="tx1"/>
+                </a:solidFill>
+                <a:latin typeface="Arial" pitchFamily="34" charset="0"/>
+                <a:cs typeface="Arial" pitchFamily="34" charset="0"/>
+              </a:defRPr>
+            </a:lvl7pPr>
+            <a:lvl8pPr marL="3429000" indent="-228600" eaLnBrk="0" fontAlgn="base" hangingPunct="0">
+              <a:spcBef>
+                <a:spcPct val="0"/>
+              </a:spcBef>
+              <a:spcAft>
+                <a:spcPct val="0"/>
+              </a:spcAft>
+              <a:defRPr>
+                <a:solidFill>
+                  <a:schemeClr val="tx1"/>
+                </a:solidFill>
+                <a:latin typeface="Arial" pitchFamily="34" charset="0"/>
+                <a:cs typeface="Arial" pitchFamily="34" charset="0"/>
+              </a:defRPr>
+            </a:lvl8pPr>
+            <a:lvl9pPr marL="3886200" indent="-228600" eaLnBrk="0" fontAlgn="base" hangingPunct="0">
+              <a:spcBef>
+                <a:spcPct val="0"/>
+              </a:spcBef>
+              <a:spcAft>
+                <a:spcPct val="0"/>
+              </a:spcAft>
+              <a:defRPr>
+                <a:solidFill>
+                  <a:schemeClr val="tx1"/>
+                </a:solidFill>
+                <a:latin typeface="Arial" pitchFamily="34" charset="0"/>
+                <a:cs typeface="Arial" pitchFamily="34" charset="0"/>
+              </a:defRPr>
+            </a:lvl9pPr>
+          </a:lstStyle>
+          <a:p>
+            <a:r>
+              <a:rPr lang="en-US" altLang="en-US" sz="2000">
+                <a:latin typeface="Arial Rounded MT Bold" pitchFamily="34" charset="0"/>
+              </a:rPr>
+              <a:t>Correlations: </a:t>
+            </a:r>
+          </a:p>
+          <a:p>
+            <a:endParaRPr lang="en-US" altLang="en-US" sz="2000">
+              <a:latin typeface="Arial Rounded MT Bold" pitchFamily="34" charset="0"/>
+            </a:endParaRPr>
+          </a:p>
+          <a:p>
+            <a:r>
+              <a:rPr lang="en-US" altLang="en-US" sz="2000">
+                <a:latin typeface="Arial Rounded MT Bold" pitchFamily="34" charset="0"/>
+              </a:rPr>
+              <a:t>A	B	C</a:t>
+            </a:r>
+          </a:p>
+          <a:p>
+            <a:r>
+              <a:rPr lang="en-US" altLang="en-US" sz="2000">
+                <a:latin typeface="Arial Rounded MT Bold" pitchFamily="34" charset="0"/>
+              </a:rPr>
+              <a:t>1	</a:t>
+            </a:r>
+          </a:p>
+          <a:p>
+            <a:r>
+              <a:rPr lang="en-US" altLang="en-US" sz="2000">
+                <a:latin typeface="Arial Rounded MT Bold" pitchFamily="34" charset="0"/>
+              </a:rPr>
+              <a:t>0.49	1</a:t>
+            </a:r>
+          </a:p>
+          <a:p>
+            <a:r>
+              <a:rPr lang="en-US" altLang="en-US" sz="2000">
+                <a:latin typeface="Arial Rounded MT Bold" pitchFamily="34" charset="0"/>
+              </a:rPr>
+              <a:t>0.30	0.12	1</a:t>
+            </a:r>
+          </a:p>
+        </p:txBody>
+      </p:sp>
+      <p:grpSp>
+        <p:nvGrpSpPr>
+          <p:cNvPr id="2" name="Group 7"/>
+          <p:cNvGrpSpPr>
+            <a:grpSpLocks/>
+          </p:cNvGrpSpPr>
+          <p:nvPr/>
+        </p:nvGrpSpPr>
+        <p:grpSpPr bwMode="auto">
+          <a:xfrm>
+            <a:off x="2562225" y="3124200"/>
+            <a:ext cx="3803650" cy="3111500"/>
+            <a:chOff x="1614" y="1968"/>
+            <a:chExt cx="2396" cy="1960"/>
+          </a:xfrm>
+        </p:grpSpPr>
+        <p:grpSp>
+          <p:nvGrpSpPr>
+            <p:cNvPr id="30740" name="Group 8"/>
+            <p:cNvGrpSpPr>
+              <a:grpSpLocks/>
+            </p:cNvGrpSpPr>
+            <p:nvPr/>
+          </p:nvGrpSpPr>
+          <p:grpSpPr bwMode="auto">
+            <a:xfrm>
+              <a:off x="1614" y="2528"/>
+              <a:ext cx="732" cy="560"/>
+              <a:chOff x="128" y="2744"/>
+              <a:chExt cx="760" cy="560"/>
+            </a:xfrm>
+          </p:grpSpPr>
+          <p:sp>
+            <p:nvSpPr>
+              <p:cNvPr id="30751" name="Oval 9"/>
+              <p:cNvSpPr>
+                <a:spLocks noChangeArrowheads="1"/>
+              </p:cNvSpPr>
+              <p:nvPr/>
+            </p:nvSpPr>
+            <p:spPr bwMode="auto">
+              <a:xfrm>
+                <a:off x="128" y="2744"/>
+                <a:ext cx="760" cy="560"/>
+              </a:xfrm>
+              <a:prstGeom prst="ellipse">
+                <a:avLst/>
+              </a:prstGeom>
+              <a:gradFill rotWithShape="0">
+                <a:gsLst>
+                  <a:gs pos="0">
+                    <a:srgbClr val="00DFCA"/>
+                  </a:gs>
+                  <a:gs pos="100000">
+                    <a:srgbClr val="002D28"/>
+                  </a:gs>
+                </a:gsLst>
+                <a:path path="shape">
+                  <a:fillToRect l="50000" t="50000" r="50000" b="50000"/>
+                </a:path>
+              </a:gradFill>
+              <a:ln>
+                <a:noFill/>
+              </a:ln>
+              <a:extLst>
+                <a:ext uri="{91240B29-F687-4F45-9708-019B960494DF}">
+                  <a14:hiddenLine xmlns:a14="http://schemas.microsoft.com/office/drawing/2010/main" w="12700">
+                    <a:solidFill>
+                      <a:srgbClr val="000000"/>
+                    </a:solidFill>
+                    <a:round/>
+                    <a:headEnd/>
+                    <a:tailEnd/>
+                  </a14:hiddenLine>
+                </a:ext>
+              </a:extLst>
+            </p:spPr>
+            <p:txBody>
+              <a:bodyPr wrap="none" anchor="ctr"/>
+              <a:lstStyle>
+                <a:lvl1pPr eaLnBrk="0" hangingPunct="0">
+                  <a:defRPr>
+                    <a:solidFill>
+                      <a:schemeClr val="tx1"/>
+                    </a:solidFill>
+                    <a:latin typeface="Arial" pitchFamily="34" charset="0"/>
+                    <a:cs typeface="Arial" pitchFamily="34" charset="0"/>
+                  </a:defRPr>
+                </a:lvl1pPr>
+                <a:lvl2pPr marL="742950" indent="-285750" eaLnBrk="0" hangingPunct="0">
+                  <a:defRPr>
+                    <a:solidFill>
+                      <a:schemeClr val="tx1"/>
+                    </a:solidFill>
+                    <a:latin typeface="Arial" pitchFamily="34" charset="0"/>
+                    <a:cs typeface="Arial" pitchFamily="34" charset="0"/>
+                  </a:defRPr>
+                </a:lvl2pPr>
+                <a:lvl3pPr marL="1143000" indent="-228600" eaLnBrk="0" hangingPunct="0">
+                  <a:defRPr>
+                    <a:solidFill>
+                      <a:schemeClr val="tx1"/>
+                    </a:solidFill>
+                    <a:latin typeface="Arial" pitchFamily="34" charset="0"/>
+                    <a:cs typeface="Arial" pitchFamily="34" charset="0"/>
+                  </a:defRPr>
+                </a:lvl3pPr>
+                <a:lvl4pPr marL="1600200" indent="-228600" eaLnBrk="0" hangingPunct="0">
+                  <a:defRPr>
+                    <a:solidFill>
+                      <a:schemeClr val="tx1"/>
+                    </a:solidFill>
+                    <a:latin typeface="Arial" pitchFamily="34" charset="0"/>
+                    <a:cs typeface="Arial" pitchFamily="34" charset="0"/>
+                  </a:defRPr>
+                </a:lvl4pPr>
+                <a:lvl5pPr marL="2057400" indent="-228600" eaLnBrk="0" hangingPunct="0">
+                  <a:defRPr>
+                    <a:solidFill>
+                      <a:schemeClr val="tx1"/>
+                    </a:solidFill>
+                    <a:latin typeface="Arial" pitchFamily="34" charset="0"/>
+                    <a:cs typeface="Arial" pitchFamily="34" charset="0"/>
+                  </a:defRPr>
+                </a:lvl5pPr>
+                <a:lvl6pPr marL="2514600" indent="-228600" eaLnBrk="0" fontAlgn="base" hangingPunct="0">
+                  <a:spcBef>
+                    <a:spcPct val="0"/>
+                  </a:spcBef>
+                  <a:spcAft>
+                    <a:spcPct val="0"/>
+                  </a:spcAft>
+                  <a:defRPr>
+                    <a:solidFill>
+                      <a:schemeClr val="tx1"/>
+                    </a:solidFill>
+                    <a:latin typeface="Arial" pitchFamily="34" charset="0"/>
+                    <a:cs typeface="Arial" pitchFamily="34" charset="0"/>
+                  </a:defRPr>
+                </a:lvl6pPr>
+                <a:lvl7pPr marL="2971800" indent="-228600" eaLnBrk="0" fontAlgn="base" hangingPunct="0">
+                  <a:spcBef>
+                    <a:spcPct val="0"/>
+                  </a:spcBef>
+                  <a:spcAft>
+                    <a:spcPct val="0"/>
+                  </a:spcAft>
+                  <a:defRPr>
+                    <a:solidFill>
+                      <a:schemeClr val="tx1"/>
+                    </a:solidFill>
+                    <a:latin typeface="Arial" pitchFamily="34" charset="0"/>
+                    <a:cs typeface="Arial" pitchFamily="34" charset="0"/>
+                  </a:defRPr>
+                </a:lvl7pPr>
+                <a:lvl8pPr marL="3429000" indent="-228600" eaLnBrk="0" fontAlgn="base" hangingPunct="0">
+                  <a:spcBef>
+                    <a:spcPct val="0"/>
+                  </a:spcBef>
+                  <a:spcAft>
+                    <a:spcPct val="0"/>
+                  </a:spcAft>
+                  <a:defRPr>
+                    <a:solidFill>
+                      <a:schemeClr val="tx1"/>
+                    </a:solidFill>
+                    <a:latin typeface="Arial" pitchFamily="34" charset="0"/>
+                    <a:cs typeface="Arial" pitchFamily="34" charset="0"/>
+                  </a:defRPr>
+                </a:lvl8pPr>
+                <a:lvl9pPr marL="3886200" indent="-228600" eaLnBrk="0" fontAlgn="base" hangingPunct="0">
+                  <a:spcBef>
+                    <a:spcPct val="0"/>
+                  </a:spcBef>
+                  <a:spcAft>
+                    <a:spcPct val="0"/>
+                  </a:spcAft>
+                  <a:defRPr>
+                    <a:solidFill>
+                      <a:schemeClr val="tx1"/>
+                    </a:solidFill>
+                    <a:latin typeface="Arial" pitchFamily="34" charset="0"/>
+                    <a:cs typeface="Arial" pitchFamily="34" charset="0"/>
+                  </a:defRPr>
+                </a:lvl9pPr>
+              </a:lstStyle>
+              <a:p>
+                <a:pPr eaLnBrk="1" hangingPunct="1"/>
+                <a:endParaRPr lang="en-US" altLang="en-US"/>
+              </a:p>
+            </p:txBody>
+          </p:sp>
+          <p:sp>
+            <p:nvSpPr>
+              <p:cNvPr id="30752" name="Rectangle 10"/>
+              <p:cNvSpPr>
+                <a:spLocks noChangeArrowheads="1"/>
+              </p:cNvSpPr>
+              <p:nvPr/>
+            </p:nvSpPr>
+            <p:spPr bwMode="auto">
+              <a:xfrm>
+                <a:off x="344" y="2819"/>
+                <a:ext cx="318" cy="402"/>
+              </a:xfrm>
+              <a:prstGeom prst="rect">
+                <a:avLst/>
+              </a:prstGeom>
+              <a:noFill/>
+              <a:ln>
+                <a:noFill/>
+              </a:ln>
+              <a:extLst>
+                <a:ext uri="{909E8E84-426E-40DD-AFC4-6F175D3DCCD1}">
+                  <a14:hiddenFill xmlns:a14="http://schemas.microsoft.com/office/drawing/2010/main">
+                    <a:solidFill>
+                      <a:srgbClr val="FFFFFF"/>
+                    </a:solidFill>
+                  </a14:hiddenFill>
+                </a:ext>
+                <a:ext uri="{91240B29-F687-4F45-9708-019B960494DF}">
+                  <a14:hiddenLine xmlns:a14="http://schemas.microsoft.com/office/drawing/2010/main" w="12700">
+                    <a:solidFill>
+                      <a:srgbClr val="000000"/>
+                    </a:solidFill>
+                    <a:miter lim="800000"/>
+                    <a:headEnd/>
+                    <a:tailEnd/>
+                  </a14:hiddenLine>
+                </a:ext>
+              </a:extLst>
+            </p:spPr>
+            <p:txBody>
+              <a:bodyPr wrap="none" lIns="90488" tIns="44450" rIns="90488" bIns="44450">
+                <a:spAutoFit/>
+              </a:bodyPr>
+              <a:lstStyle>
+                <a:lvl1pPr eaLnBrk="0" hangingPunct="0">
+                  <a:defRPr>
+                    <a:solidFill>
+                      <a:schemeClr val="tx1"/>
+                    </a:solidFill>
+                    <a:latin typeface="Arial" pitchFamily="34" charset="0"/>
+                    <a:cs typeface="Arial" pitchFamily="34" charset="0"/>
+                  </a:defRPr>
+                </a:lvl1pPr>
+                <a:lvl2pPr marL="742950" indent="-285750" eaLnBrk="0" hangingPunct="0">
+                  <a:defRPr>
+                    <a:solidFill>
+                      <a:schemeClr val="tx1"/>
+                    </a:solidFill>
+                    <a:latin typeface="Arial" pitchFamily="34" charset="0"/>
+                    <a:cs typeface="Arial" pitchFamily="34" charset="0"/>
+                  </a:defRPr>
+                </a:lvl2pPr>
+                <a:lvl3pPr marL="1143000" indent="-228600" eaLnBrk="0" hangingPunct="0">
+                  <a:defRPr>
+                    <a:solidFill>
+                      <a:schemeClr val="tx1"/>
+                    </a:solidFill>
+                    <a:latin typeface="Arial" pitchFamily="34" charset="0"/>
+                    <a:cs typeface="Arial" pitchFamily="34" charset="0"/>
+                  </a:defRPr>
+                </a:lvl3pPr>
+                <a:lvl4pPr marL="1600200" indent="-228600" eaLnBrk="0" hangingPunct="0">
+                  <a:defRPr>
+                    <a:solidFill>
+                      <a:schemeClr val="tx1"/>
+                    </a:solidFill>
+                    <a:latin typeface="Arial" pitchFamily="34" charset="0"/>
+                    <a:cs typeface="Arial" pitchFamily="34" charset="0"/>
+                  </a:defRPr>
+                </a:lvl4pPr>
+                <a:lvl5pPr marL="2057400" indent="-228600" eaLnBrk="0" hangingPunct="0">
+                  <a:defRPr>
+                    <a:solidFill>
+                      <a:schemeClr val="tx1"/>
+                    </a:solidFill>
+                    <a:latin typeface="Arial" pitchFamily="34" charset="0"/>
+                    <a:cs typeface="Arial" pitchFamily="34" charset="0"/>
+                  </a:defRPr>
+                </a:lvl5pPr>
+                <a:lvl6pPr marL="2514600" indent="-228600" eaLnBrk="0" fontAlgn="base" hangingPunct="0">
+                  <a:spcBef>
+                    <a:spcPct val="0"/>
+                  </a:spcBef>
+                  <a:spcAft>
+                    <a:spcPct val="0"/>
+                  </a:spcAft>
+                  <a:defRPr>
+                    <a:solidFill>
+                      <a:schemeClr val="tx1"/>
+                    </a:solidFill>
+                    <a:latin typeface="Arial" pitchFamily="34" charset="0"/>
+                    <a:cs typeface="Arial" pitchFamily="34" charset="0"/>
+                  </a:defRPr>
+                </a:lvl6pPr>
+                <a:lvl7pPr marL="2971800" indent="-228600" eaLnBrk="0" fontAlgn="base" hangingPunct="0">
+                  <a:spcBef>
+                    <a:spcPct val="0"/>
+                  </a:spcBef>
+                  <a:spcAft>
+                    <a:spcPct val="0"/>
+                  </a:spcAft>
+                  <a:defRPr>
+                    <a:solidFill>
+                      <a:schemeClr val="tx1"/>
+                    </a:solidFill>
+                    <a:latin typeface="Arial" pitchFamily="34" charset="0"/>
+                    <a:cs typeface="Arial" pitchFamily="34" charset="0"/>
+                  </a:defRPr>
+                </a:lvl7pPr>
+                <a:lvl8pPr marL="3429000" indent="-228600" eaLnBrk="0" fontAlgn="base" hangingPunct="0">
+                  <a:spcBef>
+                    <a:spcPct val="0"/>
+                  </a:spcBef>
+                  <a:spcAft>
+                    <a:spcPct val="0"/>
+                  </a:spcAft>
+                  <a:defRPr>
+                    <a:solidFill>
+                      <a:schemeClr val="tx1"/>
+                    </a:solidFill>
+                    <a:latin typeface="Arial" pitchFamily="34" charset="0"/>
+                    <a:cs typeface="Arial" pitchFamily="34" charset="0"/>
+                  </a:defRPr>
+                </a:lvl8pPr>
+                <a:lvl9pPr marL="3886200" indent="-228600" eaLnBrk="0" fontAlgn="base" hangingPunct="0">
+                  <a:spcBef>
+                    <a:spcPct val="0"/>
+                  </a:spcBef>
+                  <a:spcAft>
+                    <a:spcPct val="0"/>
+                  </a:spcAft>
+                  <a:defRPr>
+                    <a:solidFill>
+                      <a:schemeClr val="tx1"/>
+                    </a:solidFill>
+                    <a:latin typeface="Arial" pitchFamily="34" charset="0"/>
+                    <a:cs typeface="Arial" pitchFamily="34" charset="0"/>
+                  </a:defRPr>
+                </a:lvl9pPr>
+              </a:lstStyle>
+              <a:p>
+                <a:r>
+                  <a:rPr lang="en-US" altLang="en-US" sz="3600">
+                    <a:solidFill>
+                      <a:srgbClr val="FAFD00"/>
+                    </a:solidFill>
+                  </a:rPr>
+                  <a:t>A</a:t>
+                </a:r>
+              </a:p>
+            </p:txBody>
+          </p:sp>
+        </p:grpSp>
+        <p:grpSp>
+          <p:nvGrpSpPr>
+            <p:cNvPr id="30741" name="Group 11"/>
+            <p:cNvGrpSpPr>
+              <a:grpSpLocks/>
+            </p:cNvGrpSpPr>
+            <p:nvPr/>
+          </p:nvGrpSpPr>
+          <p:grpSpPr bwMode="auto">
+            <a:xfrm>
+              <a:off x="3278" y="1968"/>
+              <a:ext cx="732" cy="560"/>
+              <a:chOff x="1856" y="2184"/>
+              <a:chExt cx="760" cy="560"/>
+            </a:xfrm>
+          </p:grpSpPr>
+          <p:sp>
+            <p:nvSpPr>
+              <p:cNvPr id="30749" name="Oval 12"/>
+              <p:cNvSpPr>
+                <a:spLocks noChangeArrowheads="1"/>
+              </p:cNvSpPr>
+              <p:nvPr/>
+            </p:nvSpPr>
+            <p:spPr bwMode="auto">
+              <a:xfrm>
+                <a:off x="1856" y="2184"/>
+                <a:ext cx="760" cy="560"/>
+              </a:xfrm>
+              <a:prstGeom prst="ellipse">
+                <a:avLst/>
+              </a:prstGeom>
+              <a:gradFill rotWithShape="0">
+                <a:gsLst>
+                  <a:gs pos="0">
+                    <a:srgbClr val="00DFCA"/>
+                  </a:gs>
+                  <a:gs pos="100000">
+                    <a:srgbClr val="002D28"/>
+                  </a:gs>
+                </a:gsLst>
+                <a:path path="shape">
+                  <a:fillToRect l="50000" t="50000" r="50000" b="50000"/>
+                </a:path>
+              </a:gradFill>
+              <a:ln>
+                <a:noFill/>
+              </a:ln>
+              <a:extLst>
+                <a:ext uri="{91240B29-F687-4F45-9708-019B960494DF}">
+                  <a14:hiddenLine xmlns:a14="http://schemas.microsoft.com/office/drawing/2010/main" w="12700">
+                    <a:solidFill>
+                      <a:srgbClr val="000000"/>
+                    </a:solidFill>
+                    <a:round/>
+                    <a:headEnd/>
+                    <a:tailEnd/>
+                  </a14:hiddenLine>
+                </a:ext>
+              </a:extLst>
+            </p:spPr>
+            <p:txBody>
+              <a:bodyPr wrap="none" anchor="ctr"/>
+              <a:lstStyle>
+                <a:lvl1pPr eaLnBrk="0" hangingPunct="0">
+                  <a:defRPr>
+                    <a:solidFill>
+                      <a:schemeClr val="tx1"/>
+                    </a:solidFill>
+                    <a:latin typeface="Arial" pitchFamily="34" charset="0"/>
+                    <a:cs typeface="Arial" pitchFamily="34" charset="0"/>
+                  </a:defRPr>
+                </a:lvl1pPr>
+                <a:lvl2pPr marL="742950" indent="-285750" eaLnBrk="0" hangingPunct="0">
+                  <a:defRPr>
+                    <a:solidFill>
+                      <a:schemeClr val="tx1"/>
+                    </a:solidFill>
+                    <a:latin typeface="Arial" pitchFamily="34" charset="0"/>
+                    <a:cs typeface="Arial" pitchFamily="34" charset="0"/>
+                  </a:defRPr>
+                </a:lvl2pPr>
+                <a:lvl3pPr marL="1143000" indent="-228600" eaLnBrk="0" hangingPunct="0">
+                  <a:defRPr>
+                    <a:solidFill>
+                      <a:schemeClr val="tx1"/>
+                    </a:solidFill>
+                    <a:latin typeface="Arial" pitchFamily="34" charset="0"/>
+                    <a:cs typeface="Arial" pitchFamily="34" charset="0"/>
+                  </a:defRPr>
+                </a:lvl3pPr>
+                <a:lvl4pPr marL="1600200" indent="-228600" eaLnBrk="0" hangingPunct="0">
+                  <a:defRPr>
+                    <a:solidFill>
+                      <a:schemeClr val="tx1"/>
+                    </a:solidFill>
+                    <a:latin typeface="Arial" pitchFamily="34" charset="0"/>
+                    <a:cs typeface="Arial" pitchFamily="34" charset="0"/>
+                  </a:defRPr>
+                </a:lvl4pPr>
+                <a:lvl5pPr marL="2057400" indent="-228600" eaLnBrk="0" hangingPunct="0">
+                  <a:defRPr>
+                    <a:solidFill>
+                      <a:schemeClr val="tx1"/>
+                    </a:solidFill>
+                    <a:latin typeface="Arial" pitchFamily="34" charset="0"/>
+                    <a:cs typeface="Arial" pitchFamily="34" charset="0"/>
+                  </a:defRPr>
+                </a:lvl5pPr>
+                <a:lvl6pPr marL="2514600" indent="-228600" eaLnBrk="0" fontAlgn="base" hangingPunct="0">
+                  <a:spcBef>
+                    <a:spcPct val="0"/>
+                  </a:spcBef>
+                  <a:spcAft>
+                    <a:spcPct val="0"/>
+                  </a:spcAft>
+                  <a:defRPr>
+                    <a:solidFill>
+                      <a:schemeClr val="tx1"/>
+                    </a:solidFill>
+                    <a:latin typeface="Arial" pitchFamily="34" charset="0"/>
+                    <a:cs typeface="Arial" pitchFamily="34" charset="0"/>
+                  </a:defRPr>
+                </a:lvl6pPr>
+                <a:lvl7pPr marL="2971800" indent="-228600" eaLnBrk="0" fontAlgn="base" hangingPunct="0">
+                  <a:spcBef>
+                    <a:spcPct val="0"/>
+                  </a:spcBef>
+                  <a:spcAft>
+                    <a:spcPct val="0"/>
+                  </a:spcAft>
+                  <a:defRPr>
+                    <a:solidFill>
+                      <a:schemeClr val="tx1"/>
+                    </a:solidFill>
+                    <a:latin typeface="Arial" pitchFamily="34" charset="0"/>
+                    <a:cs typeface="Arial" pitchFamily="34" charset="0"/>
+                  </a:defRPr>
+                </a:lvl7pPr>
+                <a:lvl8pPr marL="3429000" indent="-228600" eaLnBrk="0" fontAlgn="base" hangingPunct="0">
+                  <a:spcBef>
+                    <a:spcPct val="0"/>
+                  </a:spcBef>
+                  <a:spcAft>
+                    <a:spcPct val="0"/>
+                  </a:spcAft>
+                  <a:defRPr>
+                    <a:solidFill>
+                      <a:schemeClr val="tx1"/>
+                    </a:solidFill>
+                    <a:latin typeface="Arial" pitchFamily="34" charset="0"/>
+                    <a:cs typeface="Arial" pitchFamily="34" charset="0"/>
+                  </a:defRPr>
+                </a:lvl8pPr>
+                <a:lvl9pPr marL="3886200" indent="-228600" eaLnBrk="0" fontAlgn="base" hangingPunct="0">
+                  <a:spcBef>
+                    <a:spcPct val="0"/>
+                  </a:spcBef>
+                  <a:spcAft>
+                    <a:spcPct val="0"/>
+                  </a:spcAft>
+                  <a:defRPr>
+                    <a:solidFill>
+                      <a:schemeClr val="tx1"/>
+                    </a:solidFill>
+                    <a:latin typeface="Arial" pitchFamily="34" charset="0"/>
+                    <a:cs typeface="Arial" pitchFamily="34" charset="0"/>
+                  </a:defRPr>
+                </a:lvl9pPr>
+              </a:lstStyle>
+              <a:p>
+                <a:pPr eaLnBrk="1" hangingPunct="1"/>
+                <a:endParaRPr lang="en-US" altLang="en-US"/>
+              </a:p>
+            </p:txBody>
+          </p:sp>
+          <p:sp>
+            <p:nvSpPr>
+              <p:cNvPr id="30750" name="Rectangle 13"/>
+              <p:cNvSpPr>
+                <a:spLocks noChangeArrowheads="1"/>
+              </p:cNvSpPr>
+              <p:nvPr/>
+            </p:nvSpPr>
+            <p:spPr bwMode="auto">
+              <a:xfrm>
+                <a:off x="2072" y="2259"/>
+                <a:ext cx="318" cy="402"/>
+              </a:xfrm>
+              <a:prstGeom prst="rect">
+                <a:avLst/>
+              </a:prstGeom>
+              <a:noFill/>
+              <a:ln>
+                <a:noFill/>
+              </a:ln>
+              <a:extLst>
+                <a:ext uri="{909E8E84-426E-40DD-AFC4-6F175D3DCCD1}">
+                  <a14:hiddenFill xmlns:a14="http://schemas.microsoft.com/office/drawing/2010/main">
+                    <a:solidFill>
+                      <a:srgbClr val="FFFFFF"/>
+                    </a:solidFill>
+                  </a14:hiddenFill>
+                </a:ext>
+                <a:ext uri="{91240B29-F687-4F45-9708-019B960494DF}">
+                  <a14:hiddenLine xmlns:a14="http://schemas.microsoft.com/office/drawing/2010/main" w="12700">
+                    <a:solidFill>
+                      <a:srgbClr val="000000"/>
+                    </a:solidFill>
+                    <a:miter lim="800000"/>
+                    <a:headEnd/>
+                    <a:tailEnd/>
+                  </a14:hiddenLine>
+                </a:ext>
+              </a:extLst>
+            </p:spPr>
+            <p:txBody>
+              <a:bodyPr wrap="none" lIns="90488" tIns="44450" rIns="90488" bIns="44450">
+                <a:spAutoFit/>
+              </a:bodyPr>
+              <a:lstStyle>
+                <a:lvl1pPr eaLnBrk="0" hangingPunct="0">
+                  <a:defRPr>
+                    <a:solidFill>
+                      <a:schemeClr val="tx1"/>
+                    </a:solidFill>
+                    <a:latin typeface="Arial" pitchFamily="34" charset="0"/>
+                    <a:cs typeface="Arial" pitchFamily="34" charset="0"/>
+                  </a:defRPr>
+                </a:lvl1pPr>
+                <a:lvl2pPr marL="742950" indent="-285750" eaLnBrk="0" hangingPunct="0">
+                  <a:defRPr>
+                    <a:solidFill>
+                      <a:schemeClr val="tx1"/>
+                    </a:solidFill>
+                    <a:latin typeface="Arial" pitchFamily="34" charset="0"/>
+                    <a:cs typeface="Arial" pitchFamily="34" charset="0"/>
+                  </a:defRPr>
+                </a:lvl2pPr>
+                <a:lvl3pPr marL="1143000" indent="-228600" eaLnBrk="0" hangingPunct="0">
+                  <a:defRPr>
+                    <a:solidFill>
+                      <a:schemeClr val="tx1"/>
+                    </a:solidFill>
+                    <a:latin typeface="Arial" pitchFamily="34" charset="0"/>
+                    <a:cs typeface="Arial" pitchFamily="34" charset="0"/>
+                  </a:defRPr>
+                </a:lvl3pPr>
+                <a:lvl4pPr marL="1600200" indent="-228600" eaLnBrk="0" hangingPunct="0">
+                  <a:defRPr>
+                    <a:solidFill>
+                      <a:schemeClr val="tx1"/>
+                    </a:solidFill>
+                    <a:latin typeface="Arial" pitchFamily="34" charset="0"/>
+                    <a:cs typeface="Arial" pitchFamily="34" charset="0"/>
+                  </a:defRPr>
+                </a:lvl4pPr>
+                <a:lvl5pPr marL="2057400" indent="-228600" eaLnBrk="0" hangingPunct="0">
+                  <a:defRPr>
+                    <a:solidFill>
+                      <a:schemeClr val="tx1"/>
+                    </a:solidFill>
+                    <a:latin typeface="Arial" pitchFamily="34" charset="0"/>
+                    <a:cs typeface="Arial" pitchFamily="34" charset="0"/>
+                  </a:defRPr>
+                </a:lvl5pPr>
+                <a:lvl6pPr marL="2514600" indent="-228600" eaLnBrk="0" fontAlgn="base" hangingPunct="0">
+                  <a:spcBef>
+                    <a:spcPct val="0"/>
+                  </a:spcBef>
+                  <a:spcAft>
+                    <a:spcPct val="0"/>
+                  </a:spcAft>
+                  <a:defRPr>
+                    <a:solidFill>
+                      <a:schemeClr val="tx1"/>
+                    </a:solidFill>
+                    <a:latin typeface="Arial" pitchFamily="34" charset="0"/>
+                    <a:cs typeface="Arial" pitchFamily="34" charset="0"/>
+                  </a:defRPr>
+                </a:lvl6pPr>
+                <a:lvl7pPr marL="2971800" indent="-228600" eaLnBrk="0" fontAlgn="base" hangingPunct="0">
+                  <a:spcBef>
+                    <a:spcPct val="0"/>
+                  </a:spcBef>
+                  <a:spcAft>
+                    <a:spcPct val="0"/>
+                  </a:spcAft>
+                  <a:defRPr>
+                    <a:solidFill>
+                      <a:schemeClr val="tx1"/>
+                    </a:solidFill>
+                    <a:latin typeface="Arial" pitchFamily="34" charset="0"/>
+                    <a:cs typeface="Arial" pitchFamily="34" charset="0"/>
+                  </a:defRPr>
+                </a:lvl7pPr>
+                <a:lvl8pPr marL="3429000" indent="-228600" eaLnBrk="0" fontAlgn="base" hangingPunct="0">
+                  <a:spcBef>
+                    <a:spcPct val="0"/>
+                  </a:spcBef>
+                  <a:spcAft>
+                    <a:spcPct val="0"/>
+                  </a:spcAft>
+                  <a:defRPr>
+                    <a:solidFill>
+                      <a:schemeClr val="tx1"/>
+                    </a:solidFill>
+                    <a:latin typeface="Arial" pitchFamily="34" charset="0"/>
+                    <a:cs typeface="Arial" pitchFamily="34" charset="0"/>
+                  </a:defRPr>
+                </a:lvl8pPr>
+                <a:lvl9pPr marL="3886200" indent="-228600" eaLnBrk="0" fontAlgn="base" hangingPunct="0">
+                  <a:spcBef>
+                    <a:spcPct val="0"/>
+                  </a:spcBef>
+                  <a:spcAft>
+                    <a:spcPct val="0"/>
+                  </a:spcAft>
+                  <a:defRPr>
+                    <a:solidFill>
+                      <a:schemeClr val="tx1"/>
+                    </a:solidFill>
+                    <a:latin typeface="Arial" pitchFamily="34" charset="0"/>
+                    <a:cs typeface="Arial" pitchFamily="34" charset="0"/>
+                  </a:defRPr>
+                </a:lvl9pPr>
+              </a:lstStyle>
+              <a:p>
+                <a:r>
+                  <a:rPr lang="en-US" altLang="en-US" sz="3600">
+                    <a:solidFill>
+                      <a:srgbClr val="FAFD00"/>
+                    </a:solidFill>
+                  </a:rPr>
+                  <a:t>B</a:t>
+                </a:r>
+              </a:p>
+            </p:txBody>
+          </p:sp>
+        </p:grpSp>
+        <p:grpSp>
+          <p:nvGrpSpPr>
+            <p:cNvPr id="30742" name="Group 14"/>
+            <p:cNvGrpSpPr>
+              <a:grpSpLocks/>
+            </p:cNvGrpSpPr>
+            <p:nvPr/>
+          </p:nvGrpSpPr>
+          <p:grpSpPr bwMode="auto">
+            <a:xfrm>
+              <a:off x="2731" y="3368"/>
+              <a:ext cx="732" cy="560"/>
+              <a:chOff x="1288" y="3584"/>
+              <a:chExt cx="760" cy="560"/>
+            </a:xfrm>
+          </p:grpSpPr>
+          <p:sp>
+            <p:nvSpPr>
+              <p:cNvPr id="30747" name="Oval 15"/>
+              <p:cNvSpPr>
+                <a:spLocks noChangeArrowheads="1"/>
+              </p:cNvSpPr>
+              <p:nvPr/>
+            </p:nvSpPr>
+            <p:spPr bwMode="auto">
+              <a:xfrm>
+                <a:off x="1288" y="3584"/>
+                <a:ext cx="760" cy="560"/>
+              </a:xfrm>
+              <a:prstGeom prst="ellipse">
+                <a:avLst/>
+              </a:prstGeom>
+              <a:gradFill rotWithShape="0">
+                <a:gsLst>
+                  <a:gs pos="0">
+                    <a:srgbClr val="00DFCA"/>
+                  </a:gs>
+                  <a:gs pos="100000">
+                    <a:srgbClr val="002D28"/>
+                  </a:gs>
+                </a:gsLst>
+                <a:path path="shape">
+                  <a:fillToRect l="50000" t="50000" r="50000" b="50000"/>
+                </a:path>
+              </a:gradFill>
+              <a:ln>
+                <a:noFill/>
+              </a:ln>
+              <a:extLst>
+                <a:ext uri="{91240B29-F687-4F45-9708-019B960494DF}">
+                  <a14:hiddenLine xmlns:a14="http://schemas.microsoft.com/office/drawing/2010/main" w="12700">
+                    <a:solidFill>
+                      <a:srgbClr val="000000"/>
+                    </a:solidFill>
+                    <a:round/>
+                    <a:headEnd/>
+                    <a:tailEnd/>
+                  </a14:hiddenLine>
+                </a:ext>
+              </a:extLst>
+            </p:spPr>
+            <p:txBody>
+              <a:bodyPr wrap="none" anchor="ctr"/>
+              <a:lstStyle>
+                <a:lvl1pPr eaLnBrk="0" hangingPunct="0">
+                  <a:defRPr>
+                    <a:solidFill>
+                      <a:schemeClr val="tx1"/>
+                    </a:solidFill>
+                    <a:latin typeface="Arial" pitchFamily="34" charset="0"/>
+                    <a:cs typeface="Arial" pitchFamily="34" charset="0"/>
+                  </a:defRPr>
+                </a:lvl1pPr>
+                <a:lvl2pPr marL="742950" indent="-285750" eaLnBrk="0" hangingPunct="0">
+                  <a:defRPr>
+                    <a:solidFill>
+                      <a:schemeClr val="tx1"/>
+                    </a:solidFill>
+                    <a:latin typeface="Arial" pitchFamily="34" charset="0"/>
+                    <a:cs typeface="Arial" pitchFamily="34" charset="0"/>
+                  </a:defRPr>
+                </a:lvl2pPr>
+                <a:lvl3pPr marL="1143000" indent="-228600" eaLnBrk="0" hangingPunct="0">
+                  <a:defRPr>
+                    <a:solidFill>
+                      <a:schemeClr val="tx1"/>
+                    </a:solidFill>
+                    <a:latin typeface="Arial" pitchFamily="34" charset="0"/>
+                    <a:cs typeface="Arial" pitchFamily="34" charset="0"/>
+                  </a:defRPr>
+                </a:lvl3pPr>
+                <a:lvl4pPr marL="1600200" indent="-228600" eaLnBrk="0" hangingPunct="0">
+                  <a:defRPr>
+                    <a:solidFill>
+                      <a:schemeClr val="tx1"/>
+                    </a:solidFill>
+                    <a:latin typeface="Arial" pitchFamily="34" charset="0"/>
+                    <a:cs typeface="Arial" pitchFamily="34" charset="0"/>
+                  </a:defRPr>
+                </a:lvl4pPr>
+                <a:lvl5pPr marL="2057400" indent="-228600" eaLnBrk="0" hangingPunct="0">
+                  <a:defRPr>
+                    <a:solidFill>
+                      <a:schemeClr val="tx1"/>
+                    </a:solidFill>
+                    <a:latin typeface="Arial" pitchFamily="34" charset="0"/>
+                    <a:cs typeface="Arial" pitchFamily="34" charset="0"/>
+                  </a:defRPr>
+                </a:lvl5pPr>
+                <a:lvl6pPr marL="2514600" indent="-228600" eaLnBrk="0" fontAlgn="base" hangingPunct="0">
+                  <a:spcBef>
+                    <a:spcPct val="0"/>
+                  </a:spcBef>
+                  <a:spcAft>
+                    <a:spcPct val="0"/>
+                  </a:spcAft>
+                  <a:defRPr>
+                    <a:solidFill>
+                      <a:schemeClr val="tx1"/>
+                    </a:solidFill>
+                    <a:latin typeface="Arial" pitchFamily="34" charset="0"/>
+                    <a:cs typeface="Arial" pitchFamily="34" charset="0"/>
+                  </a:defRPr>
+                </a:lvl6pPr>
+                <a:lvl7pPr marL="2971800" indent="-228600" eaLnBrk="0" fontAlgn="base" hangingPunct="0">
+                  <a:spcBef>
+                    <a:spcPct val="0"/>
+                  </a:spcBef>
+                  <a:spcAft>
+                    <a:spcPct val="0"/>
+                  </a:spcAft>
+                  <a:defRPr>
+                    <a:solidFill>
+                      <a:schemeClr val="tx1"/>
+                    </a:solidFill>
+                    <a:latin typeface="Arial" pitchFamily="34" charset="0"/>
+                    <a:cs typeface="Arial" pitchFamily="34" charset="0"/>
+                  </a:defRPr>
+                </a:lvl7pPr>
+                <a:lvl8pPr marL="3429000" indent="-228600" eaLnBrk="0" fontAlgn="base" hangingPunct="0">
+                  <a:spcBef>
+                    <a:spcPct val="0"/>
+                  </a:spcBef>
+                  <a:spcAft>
+                    <a:spcPct val="0"/>
+                  </a:spcAft>
+                  <a:defRPr>
+                    <a:solidFill>
+                      <a:schemeClr val="tx1"/>
+                    </a:solidFill>
+                    <a:latin typeface="Arial" pitchFamily="34" charset="0"/>
+                    <a:cs typeface="Arial" pitchFamily="34" charset="0"/>
+                  </a:defRPr>
+                </a:lvl8pPr>
+                <a:lvl9pPr marL="3886200" indent="-228600" eaLnBrk="0" fontAlgn="base" hangingPunct="0">
+                  <a:spcBef>
+                    <a:spcPct val="0"/>
+                  </a:spcBef>
+                  <a:spcAft>
+                    <a:spcPct val="0"/>
+                  </a:spcAft>
+                  <a:defRPr>
+                    <a:solidFill>
+                      <a:schemeClr val="tx1"/>
+                    </a:solidFill>
+                    <a:latin typeface="Arial" pitchFamily="34" charset="0"/>
+                    <a:cs typeface="Arial" pitchFamily="34" charset="0"/>
+                  </a:defRPr>
+                </a:lvl9pPr>
+              </a:lstStyle>
+              <a:p>
+                <a:pPr eaLnBrk="1" hangingPunct="1"/>
+                <a:endParaRPr lang="en-US" altLang="en-US"/>
+              </a:p>
+            </p:txBody>
+          </p:sp>
+          <p:sp>
+            <p:nvSpPr>
+              <p:cNvPr id="30748" name="Rectangle 16"/>
+              <p:cNvSpPr>
+                <a:spLocks noChangeArrowheads="1"/>
+              </p:cNvSpPr>
+              <p:nvPr/>
+            </p:nvSpPr>
+            <p:spPr bwMode="auto">
+              <a:xfrm>
+                <a:off x="1504" y="3659"/>
+                <a:ext cx="338" cy="406"/>
+              </a:xfrm>
+              <a:prstGeom prst="rect">
+                <a:avLst/>
+              </a:prstGeom>
+              <a:noFill/>
+              <a:ln>
+                <a:noFill/>
+              </a:ln>
+              <a:extLst>
+                <a:ext uri="{909E8E84-426E-40DD-AFC4-6F175D3DCCD1}">
+                  <a14:hiddenFill xmlns:a14="http://schemas.microsoft.com/office/drawing/2010/main">
+                    <a:solidFill>
+                      <a:srgbClr val="FFFFFF"/>
+                    </a:solidFill>
+                  </a14:hiddenFill>
+                </a:ext>
+                <a:ext uri="{91240B29-F687-4F45-9708-019B960494DF}">
+                  <a14:hiddenLine xmlns:a14="http://schemas.microsoft.com/office/drawing/2010/main" w="12700">
+                    <a:solidFill>
+                      <a:srgbClr val="000000"/>
+                    </a:solidFill>
+                    <a:miter lim="800000"/>
+                    <a:headEnd/>
+                    <a:tailEnd/>
+                  </a14:hiddenLine>
+                </a:ext>
+              </a:extLst>
+            </p:spPr>
+            <p:txBody>
+              <a:bodyPr wrap="none" lIns="90488" tIns="44450" rIns="90488" bIns="44450">
+                <a:spAutoFit/>
+              </a:bodyPr>
+              <a:lstStyle>
+                <a:lvl1pPr eaLnBrk="0" hangingPunct="0">
+                  <a:defRPr>
+                    <a:solidFill>
+                      <a:schemeClr val="tx1"/>
+                    </a:solidFill>
+                    <a:latin typeface="Arial" pitchFamily="34" charset="0"/>
+                    <a:cs typeface="Arial" pitchFamily="34" charset="0"/>
+                  </a:defRPr>
+                </a:lvl1pPr>
+                <a:lvl2pPr marL="742950" indent="-285750" eaLnBrk="0" hangingPunct="0">
+                  <a:defRPr>
+                    <a:solidFill>
+                      <a:schemeClr val="tx1"/>
+                    </a:solidFill>
+                    <a:latin typeface="Arial" pitchFamily="34" charset="0"/>
+                    <a:cs typeface="Arial" pitchFamily="34" charset="0"/>
+                  </a:defRPr>
+                </a:lvl2pPr>
+                <a:lvl3pPr marL="1143000" indent="-228600" eaLnBrk="0" hangingPunct="0">
+                  <a:defRPr>
+                    <a:solidFill>
+                      <a:schemeClr val="tx1"/>
+                    </a:solidFill>
+                    <a:latin typeface="Arial" pitchFamily="34" charset="0"/>
+                    <a:cs typeface="Arial" pitchFamily="34" charset="0"/>
+                  </a:defRPr>
+                </a:lvl3pPr>
+                <a:lvl4pPr marL="1600200" indent="-228600" eaLnBrk="0" hangingPunct="0">
+                  <a:defRPr>
+                    <a:solidFill>
+                      <a:schemeClr val="tx1"/>
+                    </a:solidFill>
+                    <a:latin typeface="Arial" pitchFamily="34" charset="0"/>
+                    <a:cs typeface="Arial" pitchFamily="34" charset="0"/>
+                  </a:defRPr>
+                </a:lvl4pPr>
+                <a:lvl5pPr marL="2057400" indent="-228600" eaLnBrk="0" hangingPunct="0">
+                  <a:defRPr>
+                    <a:solidFill>
+                      <a:schemeClr val="tx1"/>
+                    </a:solidFill>
+                    <a:latin typeface="Arial" pitchFamily="34" charset="0"/>
+                    <a:cs typeface="Arial" pitchFamily="34" charset="0"/>
+                  </a:defRPr>
+                </a:lvl5pPr>
+                <a:lvl6pPr marL="2514600" indent="-228600" eaLnBrk="0" fontAlgn="base" hangingPunct="0">
+                  <a:spcBef>
+                    <a:spcPct val="0"/>
+                  </a:spcBef>
+                  <a:spcAft>
+                    <a:spcPct val="0"/>
+                  </a:spcAft>
+                  <a:defRPr>
+                    <a:solidFill>
+                      <a:schemeClr val="tx1"/>
+                    </a:solidFill>
+                    <a:latin typeface="Arial" pitchFamily="34" charset="0"/>
+                    <a:cs typeface="Arial" pitchFamily="34" charset="0"/>
+                  </a:defRPr>
+                </a:lvl6pPr>
+                <a:lvl7pPr marL="2971800" indent="-228600" eaLnBrk="0" fontAlgn="base" hangingPunct="0">
+                  <a:spcBef>
+                    <a:spcPct val="0"/>
+                  </a:spcBef>
+                  <a:spcAft>
+                    <a:spcPct val="0"/>
+                  </a:spcAft>
+                  <a:defRPr>
+                    <a:solidFill>
+                      <a:schemeClr val="tx1"/>
+                    </a:solidFill>
+                    <a:latin typeface="Arial" pitchFamily="34" charset="0"/>
+                    <a:cs typeface="Arial" pitchFamily="34" charset="0"/>
+                  </a:defRPr>
+                </a:lvl7pPr>
+                <a:lvl8pPr marL="3429000" indent="-228600" eaLnBrk="0" fontAlgn="base" hangingPunct="0">
+                  <a:spcBef>
+                    <a:spcPct val="0"/>
+                  </a:spcBef>
+                  <a:spcAft>
+                    <a:spcPct val="0"/>
+                  </a:spcAft>
+                  <a:defRPr>
+                    <a:solidFill>
+                      <a:schemeClr val="tx1"/>
+                    </a:solidFill>
+                    <a:latin typeface="Arial" pitchFamily="34" charset="0"/>
+                    <a:cs typeface="Arial" pitchFamily="34" charset="0"/>
+                  </a:defRPr>
+                </a:lvl8pPr>
+                <a:lvl9pPr marL="3886200" indent="-228600" eaLnBrk="0" fontAlgn="base" hangingPunct="0">
+                  <a:spcBef>
+                    <a:spcPct val="0"/>
+                  </a:spcBef>
+                  <a:spcAft>
+                    <a:spcPct val="0"/>
+                  </a:spcAft>
+                  <a:defRPr>
+                    <a:solidFill>
+                      <a:schemeClr val="tx1"/>
+                    </a:solidFill>
+                    <a:latin typeface="Arial" pitchFamily="34" charset="0"/>
+                    <a:cs typeface="Arial" pitchFamily="34" charset="0"/>
+                  </a:defRPr>
+                </a:lvl9pPr>
+              </a:lstStyle>
+              <a:p>
+                <a:r>
+                  <a:rPr lang="en-US" altLang="en-US" sz="3600">
+                    <a:solidFill>
+                      <a:srgbClr val="FAFD00"/>
+                    </a:solidFill>
+                  </a:rPr>
+                  <a:t>C</a:t>
+                </a:r>
+              </a:p>
+            </p:txBody>
+          </p:sp>
+        </p:grpSp>
+        <p:sp>
+          <p:nvSpPr>
+            <p:cNvPr id="30743" name="Line 17"/>
+            <p:cNvSpPr>
+              <a:spLocks noChangeShapeType="1"/>
+            </p:cNvSpPr>
+            <p:nvPr/>
+          </p:nvSpPr>
+          <p:spPr bwMode="auto">
+            <a:xfrm flipV="1">
+              <a:off x="2454" y="2352"/>
+              <a:ext cx="693" cy="296"/>
+            </a:xfrm>
+            <a:prstGeom prst="line">
+              <a:avLst/>
+            </a:prstGeom>
+            <a:noFill/>
+            <a:ln w="50800">
+              <a:solidFill>
+                <a:schemeClr val="hlink"/>
+              </a:solidFill>
+              <a:round/>
+              <a:headEnd/>
+              <a:tailEnd type="triangle" w="med" len="med"/>
+            </a:ln>
+            <a:extLst>
+              <a:ext uri="{909E8E84-426E-40DD-AFC4-6F175D3DCCD1}">
+                <a14:hiddenFill xmlns:a14="http://schemas.microsoft.com/office/drawing/2010/main">
+                  <a:noFill/>
+                </a14:hiddenFill>
+              </a:ext>
+            </a:extLst>
+          </p:spPr>
+          <p:txBody>
+            <a:bodyPr wrap="none" anchor="ctr"/>
+            <a:lstStyle/>
+            <a:p>
+              <a:endParaRPr lang="en-GB">
+                <a:latin typeface="Arial" panose="020B0604020202020204" pitchFamily="34" charset="0"/>
+                <a:cs typeface="Arial" panose="020B0604020202020204" pitchFamily="34" charset="0"/>
+              </a:endParaRPr>
+            </a:p>
+          </p:txBody>
+        </p:sp>
+        <p:sp>
+          <p:nvSpPr>
+            <p:cNvPr id="30744" name="Line 18"/>
+            <p:cNvSpPr>
+              <a:spLocks noChangeShapeType="1"/>
+            </p:cNvSpPr>
+            <p:nvPr/>
+          </p:nvSpPr>
+          <p:spPr bwMode="auto">
+            <a:xfrm>
+              <a:off x="2346" y="3048"/>
+              <a:ext cx="331" cy="376"/>
+            </a:xfrm>
+            <a:prstGeom prst="line">
+              <a:avLst/>
+            </a:prstGeom>
+            <a:noFill/>
+            <a:ln w="50800">
+              <a:solidFill>
+                <a:schemeClr val="hlink"/>
+              </a:solidFill>
+              <a:round/>
+              <a:headEnd/>
+              <a:tailEnd type="triangle" w="med" len="med"/>
+            </a:ln>
+            <a:extLst>
+              <a:ext uri="{909E8E84-426E-40DD-AFC4-6F175D3DCCD1}">
+                <a14:hiddenFill xmlns:a14="http://schemas.microsoft.com/office/drawing/2010/main">
+                  <a:noFill/>
+                </a14:hiddenFill>
+              </a:ext>
+            </a:extLst>
+          </p:spPr>
+          <p:txBody>
+            <a:bodyPr wrap="none" anchor="ctr"/>
+            <a:lstStyle/>
+            <a:p>
+              <a:endParaRPr lang="en-GB">
+                <a:latin typeface="Arial" panose="020B0604020202020204" pitchFamily="34" charset="0"/>
+                <a:cs typeface="Arial" panose="020B0604020202020204" pitchFamily="34" charset="0"/>
+              </a:endParaRPr>
+            </a:p>
+          </p:txBody>
+        </p:sp>
+        <p:sp>
+          <p:nvSpPr>
+            <p:cNvPr id="30745" name="Rectangle 19"/>
+            <p:cNvSpPr>
+              <a:spLocks noChangeArrowheads="1"/>
+            </p:cNvSpPr>
+            <p:nvPr/>
+          </p:nvSpPr>
+          <p:spPr bwMode="auto">
+            <a:xfrm>
+              <a:off x="2426" y="2200"/>
+              <a:ext cx="429" cy="250"/>
+            </a:xfrm>
+            <a:prstGeom prst="rect">
+              <a:avLst/>
+            </a:prstGeom>
+            <a:noFill/>
+            <a:ln>
+              <a:noFill/>
+            </a:ln>
+            <a:extLst>
+              <a:ext uri="{909E8E84-426E-40DD-AFC4-6F175D3DCCD1}">
+                <a14:hiddenFill xmlns:a14="http://schemas.microsoft.com/office/drawing/2010/main">
+                  <a:solidFill>
+                    <a:srgbClr val="FFFFFF"/>
+                  </a:solidFill>
+                </a14:hiddenFill>
+              </a:ext>
+              <a:ext uri="{91240B29-F687-4F45-9708-019B960494DF}">
+                <a14:hiddenLine xmlns:a14="http://schemas.microsoft.com/office/drawing/2010/main" w="12700">
+                  <a:solidFill>
+                    <a:srgbClr val="000000"/>
+                  </a:solidFill>
+                  <a:miter lim="800000"/>
+                  <a:headEnd/>
+                  <a:tailEnd/>
+                </a14:hiddenLine>
+              </a:ext>
+            </a:extLst>
+          </p:spPr>
+          <p:txBody>
+            <a:bodyPr wrap="none" lIns="90488" tIns="44450" rIns="90488" bIns="44450">
+              <a:spAutoFit/>
+            </a:bodyPr>
+            <a:lstStyle>
+              <a:lvl1pPr eaLnBrk="0" hangingPunct="0">
+                <a:defRPr>
+                  <a:solidFill>
+                    <a:schemeClr val="tx1"/>
+                  </a:solidFill>
+                  <a:latin typeface="Arial" pitchFamily="34" charset="0"/>
+                  <a:cs typeface="Arial" pitchFamily="34" charset="0"/>
+                </a:defRPr>
+              </a:lvl1pPr>
+              <a:lvl2pPr marL="742950" indent="-285750" eaLnBrk="0" hangingPunct="0">
+                <a:defRPr>
+                  <a:solidFill>
+                    <a:schemeClr val="tx1"/>
+                  </a:solidFill>
+                  <a:latin typeface="Arial" pitchFamily="34" charset="0"/>
+                  <a:cs typeface="Arial" pitchFamily="34" charset="0"/>
+                </a:defRPr>
+              </a:lvl2pPr>
+              <a:lvl3pPr marL="1143000" indent="-228600" eaLnBrk="0" hangingPunct="0">
+                <a:defRPr>
+                  <a:solidFill>
+                    <a:schemeClr val="tx1"/>
+                  </a:solidFill>
+                  <a:latin typeface="Arial" pitchFamily="34" charset="0"/>
+                  <a:cs typeface="Arial" pitchFamily="34" charset="0"/>
+                </a:defRPr>
+              </a:lvl3pPr>
+              <a:lvl4pPr marL="1600200" indent="-228600" eaLnBrk="0" hangingPunct="0">
+                <a:defRPr>
+                  <a:solidFill>
+                    <a:schemeClr val="tx1"/>
+                  </a:solidFill>
+                  <a:latin typeface="Arial" pitchFamily="34" charset="0"/>
+                  <a:cs typeface="Arial" pitchFamily="34" charset="0"/>
+                </a:defRPr>
+              </a:lvl4pPr>
+              <a:lvl5pPr marL="2057400" indent="-228600" eaLnBrk="0" hangingPunct="0">
+                <a:defRPr>
+                  <a:solidFill>
+                    <a:schemeClr val="tx1"/>
+                  </a:solidFill>
+                  <a:latin typeface="Arial" pitchFamily="34" charset="0"/>
+                  <a:cs typeface="Arial" pitchFamily="34" charset="0"/>
+                </a:defRPr>
+              </a:lvl5pPr>
+              <a:lvl6pPr marL="2514600" indent="-228600" eaLnBrk="0" fontAlgn="base" hangingPunct="0">
+                <a:spcBef>
+                  <a:spcPct val="0"/>
+                </a:spcBef>
+                <a:spcAft>
+                  <a:spcPct val="0"/>
+                </a:spcAft>
+                <a:defRPr>
+                  <a:solidFill>
+                    <a:schemeClr val="tx1"/>
+                  </a:solidFill>
+                  <a:latin typeface="Arial" pitchFamily="34" charset="0"/>
+                  <a:cs typeface="Arial" pitchFamily="34" charset="0"/>
+                </a:defRPr>
+              </a:lvl6pPr>
+              <a:lvl7pPr marL="2971800" indent="-228600" eaLnBrk="0" fontAlgn="base" hangingPunct="0">
+                <a:spcBef>
+                  <a:spcPct val="0"/>
+                </a:spcBef>
+                <a:spcAft>
+                  <a:spcPct val="0"/>
+                </a:spcAft>
+                <a:defRPr>
+                  <a:solidFill>
+                    <a:schemeClr val="tx1"/>
+                  </a:solidFill>
+                  <a:latin typeface="Arial" pitchFamily="34" charset="0"/>
+                  <a:cs typeface="Arial" pitchFamily="34" charset="0"/>
+                </a:defRPr>
+              </a:lvl7pPr>
+              <a:lvl8pPr marL="3429000" indent="-228600" eaLnBrk="0" fontAlgn="base" hangingPunct="0">
+                <a:spcBef>
+                  <a:spcPct val="0"/>
+                </a:spcBef>
+                <a:spcAft>
+                  <a:spcPct val="0"/>
+                </a:spcAft>
+                <a:defRPr>
+                  <a:solidFill>
+                    <a:schemeClr val="tx1"/>
+                  </a:solidFill>
+                  <a:latin typeface="Arial" pitchFamily="34" charset="0"/>
+                  <a:cs typeface="Arial" pitchFamily="34" charset="0"/>
+                </a:defRPr>
+              </a:lvl8pPr>
+              <a:lvl9pPr marL="3886200" indent="-228600" eaLnBrk="0" fontAlgn="base" hangingPunct="0">
+                <a:spcBef>
+                  <a:spcPct val="0"/>
+                </a:spcBef>
+                <a:spcAft>
+                  <a:spcPct val="0"/>
+                </a:spcAft>
+                <a:defRPr>
+                  <a:solidFill>
+                    <a:schemeClr val="tx1"/>
+                  </a:solidFill>
+                  <a:latin typeface="Arial" pitchFamily="34" charset="0"/>
+                  <a:cs typeface="Arial" pitchFamily="34" charset="0"/>
+                </a:defRPr>
+              </a:lvl9pPr>
+            </a:lstStyle>
+            <a:p>
+              <a:r>
+                <a:rPr lang="en-US" altLang="en-US" sz="2000"/>
+                <a:t>0.49</a:t>
+              </a:r>
+            </a:p>
+          </p:txBody>
+        </p:sp>
+        <p:sp>
+          <p:nvSpPr>
+            <p:cNvPr id="30746" name="Rectangle 20"/>
+            <p:cNvSpPr>
+              <a:spLocks noChangeArrowheads="1"/>
+            </p:cNvSpPr>
+            <p:nvPr/>
+          </p:nvSpPr>
+          <p:spPr bwMode="auto">
+            <a:xfrm>
+              <a:off x="2010" y="3312"/>
+              <a:ext cx="429" cy="250"/>
+            </a:xfrm>
+            <a:prstGeom prst="rect">
+              <a:avLst/>
+            </a:prstGeom>
+            <a:noFill/>
+            <a:ln>
+              <a:noFill/>
+            </a:ln>
+            <a:extLst>
+              <a:ext uri="{909E8E84-426E-40DD-AFC4-6F175D3DCCD1}">
+                <a14:hiddenFill xmlns:a14="http://schemas.microsoft.com/office/drawing/2010/main">
+                  <a:solidFill>
+                    <a:srgbClr val="FFFFFF"/>
+                  </a:solidFill>
+                </a14:hiddenFill>
+              </a:ext>
+              <a:ext uri="{91240B29-F687-4F45-9708-019B960494DF}">
+                <a14:hiddenLine xmlns:a14="http://schemas.microsoft.com/office/drawing/2010/main" w="12700">
+                  <a:solidFill>
+                    <a:srgbClr val="000000"/>
+                  </a:solidFill>
+                  <a:miter lim="800000"/>
+                  <a:headEnd/>
+                  <a:tailEnd/>
+                </a14:hiddenLine>
+              </a:ext>
+            </a:extLst>
+          </p:spPr>
+          <p:txBody>
+            <a:bodyPr wrap="none" lIns="90488" tIns="44450" rIns="90488" bIns="44450">
+              <a:spAutoFit/>
+            </a:bodyPr>
+            <a:lstStyle>
+              <a:lvl1pPr eaLnBrk="0" hangingPunct="0">
+                <a:defRPr>
+                  <a:solidFill>
+                    <a:schemeClr val="tx1"/>
+                  </a:solidFill>
+                  <a:latin typeface="Arial" pitchFamily="34" charset="0"/>
+                  <a:cs typeface="Arial" pitchFamily="34" charset="0"/>
+                </a:defRPr>
+              </a:lvl1pPr>
+              <a:lvl2pPr marL="742950" indent="-285750" eaLnBrk="0" hangingPunct="0">
+                <a:defRPr>
+                  <a:solidFill>
+                    <a:schemeClr val="tx1"/>
+                  </a:solidFill>
+                  <a:latin typeface="Arial" pitchFamily="34" charset="0"/>
+                  <a:cs typeface="Arial" pitchFamily="34" charset="0"/>
+                </a:defRPr>
+              </a:lvl2pPr>
+              <a:lvl3pPr marL="1143000" indent="-228600" eaLnBrk="0" hangingPunct="0">
+                <a:defRPr>
+                  <a:solidFill>
+                    <a:schemeClr val="tx1"/>
+                  </a:solidFill>
+                  <a:latin typeface="Arial" pitchFamily="34" charset="0"/>
+                  <a:cs typeface="Arial" pitchFamily="34" charset="0"/>
+                </a:defRPr>
+              </a:lvl3pPr>
+              <a:lvl4pPr marL="1600200" indent="-228600" eaLnBrk="0" hangingPunct="0">
+                <a:defRPr>
+                  <a:solidFill>
+                    <a:schemeClr val="tx1"/>
+                  </a:solidFill>
+                  <a:latin typeface="Arial" pitchFamily="34" charset="0"/>
+                  <a:cs typeface="Arial" pitchFamily="34" charset="0"/>
+                </a:defRPr>
+              </a:lvl4pPr>
+              <a:lvl5pPr marL="2057400" indent="-228600" eaLnBrk="0" hangingPunct="0">
+                <a:defRPr>
+                  <a:solidFill>
+                    <a:schemeClr val="tx1"/>
+                  </a:solidFill>
+                  <a:latin typeface="Arial" pitchFamily="34" charset="0"/>
+                  <a:cs typeface="Arial" pitchFamily="34" charset="0"/>
+                </a:defRPr>
+              </a:lvl5pPr>
+              <a:lvl6pPr marL="2514600" indent="-228600" eaLnBrk="0" fontAlgn="base" hangingPunct="0">
+                <a:spcBef>
+                  <a:spcPct val="0"/>
+                </a:spcBef>
+                <a:spcAft>
+                  <a:spcPct val="0"/>
+                </a:spcAft>
+                <a:defRPr>
+                  <a:solidFill>
+                    <a:schemeClr val="tx1"/>
+                  </a:solidFill>
+                  <a:latin typeface="Arial" pitchFamily="34" charset="0"/>
+                  <a:cs typeface="Arial" pitchFamily="34" charset="0"/>
+                </a:defRPr>
+              </a:lvl6pPr>
+              <a:lvl7pPr marL="2971800" indent="-228600" eaLnBrk="0" fontAlgn="base" hangingPunct="0">
+                <a:spcBef>
+                  <a:spcPct val="0"/>
+                </a:spcBef>
+                <a:spcAft>
+                  <a:spcPct val="0"/>
+                </a:spcAft>
+                <a:defRPr>
+                  <a:solidFill>
+                    <a:schemeClr val="tx1"/>
+                  </a:solidFill>
+                  <a:latin typeface="Arial" pitchFamily="34" charset="0"/>
+                  <a:cs typeface="Arial" pitchFamily="34" charset="0"/>
+                </a:defRPr>
+              </a:lvl7pPr>
+              <a:lvl8pPr marL="3429000" indent="-228600" eaLnBrk="0" fontAlgn="base" hangingPunct="0">
+                <a:spcBef>
+                  <a:spcPct val="0"/>
+                </a:spcBef>
+                <a:spcAft>
+                  <a:spcPct val="0"/>
+                </a:spcAft>
+                <a:defRPr>
+                  <a:solidFill>
+                    <a:schemeClr val="tx1"/>
+                  </a:solidFill>
+                  <a:latin typeface="Arial" pitchFamily="34" charset="0"/>
+                  <a:cs typeface="Arial" pitchFamily="34" charset="0"/>
+                </a:defRPr>
+              </a:lvl8pPr>
+              <a:lvl9pPr marL="3886200" indent="-228600" eaLnBrk="0" fontAlgn="base" hangingPunct="0">
+                <a:spcBef>
+                  <a:spcPct val="0"/>
+                </a:spcBef>
+                <a:spcAft>
+                  <a:spcPct val="0"/>
+                </a:spcAft>
+                <a:defRPr>
+                  <a:solidFill>
+                    <a:schemeClr val="tx1"/>
+                  </a:solidFill>
+                  <a:latin typeface="Arial" pitchFamily="34" charset="0"/>
+                  <a:cs typeface="Arial" pitchFamily="34" charset="0"/>
+                </a:defRPr>
+              </a:lvl9pPr>
+            </a:lstStyle>
+            <a:p>
+              <a:r>
+                <a:rPr lang="en-US" altLang="en-US" sz="2000"/>
+                <a:t>0.31</a:t>
+              </a:r>
+            </a:p>
+          </p:txBody>
+        </p:sp>
+      </p:grpSp>
+      <p:grpSp>
+        <p:nvGrpSpPr>
+          <p:cNvPr id="6" name="Group 21"/>
+          <p:cNvGrpSpPr>
+            <a:grpSpLocks/>
+          </p:cNvGrpSpPr>
+          <p:nvPr/>
+        </p:nvGrpSpPr>
+        <p:grpSpPr bwMode="auto">
+          <a:xfrm>
+            <a:off x="5276852" y="4292600"/>
+            <a:ext cx="1163638" cy="1039813"/>
+            <a:chOff x="3324" y="2704"/>
+            <a:chExt cx="733" cy="655"/>
+          </a:xfrm>
+        </p:grpSpPr>
+        <p:sp>
+          <p:nvSpPr>
+            <p:cNvPr id="30737" name="Line 22"/>
+            <p:cNvSpPr>
+              <a:spLocks noChangeShapeType="1"/>
+            </p:cNvSpPr>
+            <p:nvPr/>
+          </p:nvSpPr>
+          <p:spPr bwMode="auto">
+            <a:xfrm flipH="1">
+              <a:off x="3324" y="2704"/>
+              <a:ext cx="270" cy="520"/>
+            </a:xfrm>
+            <a:prstGeom prst="line">
+              <a:avLst/>
+            </a:prstGeom>
+            <a:noFill/>
+            <a:ln w="50800">
+              <a:solidFill>
+                <a:srgbClr val="C1CEFF"/>
+              </a:solidFill>
+              <a:round/>
+              <a:headEnd/>
+              <a:tailEnd type="triangle" w="med" len="med"/>
+            </a:ln>
+            <a:extLst>
+              <a:ext uri="{909E8E84-426E-40DD-AFC4-6F175D3DCCD1}">
+                <a14:hiddenFill xmlns:a14="http://schemas.microsoft.com/office/drawing/2010/main">
+                  <a:noFill/>
+                </a14:hiddenFill>
+              </a:ext>
+            </a:extLst>
+          </p:spPr>
+          <p:txBody>
+            <a:bodyPr wrap="none" anchor="ctr"/>
+            <a:lstStyle/>
+            <a:p>
+              <a:endParaRPr lang="en-GB">
+                <a:latin typeface="Arial" panose="020B0604020202020204" pitchFamily="34" charset="0"/>
+                <a:cs typeface="Arial" panose="020B0604020202020204" pitchFamily="34" charset="0"/>
+              </a:endParaRPr>
+            </a:p>
+          </p:txBody>
+        </p:sp>
+        <p:sp>
+          <p:nvSpPr>
+            <p:cNvPr id="30738" name="Rectangle 23"/>
+            <p:cNvSpPr>
+              <a:spLocks noChangeArrowheads="1"/>
+            </p:cNvSpPr>
+            <p:nvPr/>
+          </p:nvSpPr>
+          <p:spPr bwMode="auto">
+            <a:xfrm>
+              <a:off x="3443" y="2888"/>
+              <a:ext cx="483" cy="250"/>
+            </a:xfrm>
+            <a:prstGeom prst="rect">
+              <a:avLst/>
+            </a:prstGeom>
+            <a:noFill/>
+            <a:ln>
+              <a:noFill/>
+            </a:ln>
+            <a:extLst>
+              <a:ext uri="{909E8E84-426E-40DD-AFC4-6F175D3DCCD1}">
+                <a14:hiddenFill xmlns:a14="http://schemas.microsoft.com/office/drawing/2010/main">
+                  <a:solidFill>
+                    <a:srgbClr val="FFFFFF"/>
+                  </a:solidFill>
+                </a14:hiddenFill>
+              </a:ext>
+              <a:ext uri="{91240B29-F687-4F45-9708-019B960494DF}">
+                <a14:hiddenLine xmlns:a14="http://schemas.microsoft.com/office/drawing/2010/main" w="12700">
+                  <a:solidFill>
+                    <a:srgbClr val="000000"/>
+                  </a:solidFill>
+                  <a:miter lim="800000"/>
+                  <a:headEnd/>
+                  <a:tailEnd/>
+                </a14:hiddenLine>
+              </a:ext>
+            </a:extLst>
+          </p:spPr>
+          <p:txBody>
+            <a:bodyPr wrap="none" lIns="90488" tIns="44450" rIns="90488" bIns="44450">
+              <a:spAutoFit/>
+            </a:bodyPr>
+            <a:lstStyle>
+              <a:lvl1pPr eaLnBrk="0" hangingPunct="0">
+                <a:defRPr>
+                  <a:solidFill>
+                    <a:schemeClr val="tx1"/>
+                  </a:solidFill>
+                  <a:latin typeface="Arial" pitchFamily="34" charset="0"/>
+                  <a:cs typeface="Arial" pitchFamily="34" charset="0"/>
+                </a:defRPr>
+              </a:lvl1pPr>
+              <a:lvl2pPr marL="742950" indent="-285750" eaLnBrk="0" hangingPunct="0">
+                <a:defRPr>
+                  <a:solidFill>
+                    <a:schemeClr val="tx1"/>
+                  </a:solidFill>
+                  <a:latin typeface="Arial" pitchFamily="34" charset="0"/>
+                  <a:cs typeface="Arial" pitchFamily="34" charset="0"/>
+                </a:defRPr>
+              </a:lvl2pPr>
+              <a:lvl3pPr marL="1143000" indent="-228600" eaLnBrk="0" hangingPunct="0">
+                <a:defRPr>
+                  <a:solidFill>
+                    <a:schemeClr val="tx1"/>
+                  </a:solidFill>
+                  <a:latin typeface="Arial" pitchFamily="34" charset="0"/>
+                  <a:cs typeface="Arial" pitchFamily="34" charset="0"/>
+                </a:defRPr>
+              </a:lvl3pPr>
+              <a:lvl4pPr marL="1600200" indent="-228600" eaLnBrk="0" hangingPunct="0">
+                <a:defRPr>
+                  <a:solidFill>
+                    <a:schemeClr val="tx1"/>
+                  </a:solidFill>
+                  <a:latin typeface="Arial" pitchFamily="34" charset="0"/>
+                  <a:cs typeface="Arial" pitchFamily="34" charset="0"/>
+                </a:defRPr>
+              </a:lvl4pPr>
+              <a:lvl5pPr marL="2057400" indent="-228600" eaLnBrk="0" hangingPunct="0">
+                <a:defRPr>
+                  <a:solidFill>
+                    <a:schemeClr val="tx1"/>
+                  </a:solidFill>
+                  <a:latin typeface="Arial" pitchFamily="34" charset="0"/>
+                  <a:cs typeface="Arial" pitchFamily="34" charset="0"/>
+                </a:defRPr>
+              </a:lvl5pPr>
+              <a:lvl6pPr marL="2514600" indent="-228600" eaLnBrk="0" fontAlgn="base" hangingPunct="0">
+                <a:spcBef>
+                  <a:spcPct val="0"/>
+                </a:spcBef>
+                <a:spcAft>
+                  <a:spcPct val="0"/>
+                </a:spcAft>
+                <a:defRPr>
+                  <a:solidFill>
+                    <a:schemeClr val="tx1"/>
+                  </a:solidFill>
+                  <a:latin typeface="Arial" pitchFamily="34" charset="0"/>
+                  <a:cs typeface="Arial" pitchFamily="34" charset="0"/>
+                </a:defRPr>
+              </a:lvl6pPr>
+              <a:lvl7pPr marL="2971800" indent="-228600" eaLnBrk="0" fontAlgn="base" hangingPunct="0">
+                <a:spcBef>
+                  <a:spcPct val="0"/>
+                </a:spcBef>
+                <a:spcAft>
+                  <a:spcPct val="0"/>
+                </a:spcAft>
+                <a:defRPr>
+                  <a:solidFill>
+                    <a:schemeClr val="tx1"/>
+                  </a:solidFill>
+                  <a:latin typeface="Arial" pitchFamily="34" charset="0"/>
+                  <a:cs typeface="Arial" pitchFamily="34" charset="0"/>
+                </a:defRPr>
+              </a:lvl7pPr>
+              <a:lvl8pPr marL="3429000" indent="-228600" eaLnBrk="0" fontAlgn="base" hangingPunct="0">
+                <a:spcBef>
+                  <a:spcPct val="0"/>
+                </a:spcBef>
+                <a:spcAft>
+                  <a:spcPct val="0"/>
+                </a:spcAft>
+                <a:defRPr>
+                  <a:solidFill>
+                    <a:schemeClr val="tx1"/>
+                  </a:solidFill>
+                  <a:latin typeface="Arial" pitchFamily="34" charset="0"/>
+                  <a:cs typeface="Arial" pitchFamily="34" charset="0"/>
+                </a:defRPr>
+              </a:lvl8pPr>
+              <a:lvl9pPr marL="3886200" indent="-228600" eaLnBrk="0" fontAlgn="base" hangingPunct="0">
+                <a:spcBef>
+                  <a:spcPct val="0"/>
+                </a:spcBef>
+                <a:spcAft>
+                  <a:spcPct val="0"/>
+                </a:spcAft>
+                <a:defRPr>
+                  <a:solidFill>
+                    <a:schemeClr val="tx1"/>
+                  </a:solidFill>
+                  <a:latin typeface="Arial" pitchFamily="34" charset="0"/>
+                  <a:cs typeface="Arial" pitchFamily="34" charset="0"/>
+                </a:defRPr>
+              </a:lvl9pPr>
+            </a:lstStyle>
+            <a:p>
+              <a:r>
+                <a:rPr lang="en-US" altLang="en-US" sz="2000">
+                  <a:solidFill>
+                    <a:srgbClr val="C1CEFF"/>
+                  </a:solidFill>
+                </a:rPr>
+                <a:t>-0.02</a:t>
+              </a:r>
+            </a:p>
+          </p:txBody>
+        </p:sp>
+        <p:sp>
+          <p:nvSpPr>
+            <p:cNvPr id="30739" name="Rectangle 24"/>
+            <p:cNvSpPr>
+              <a:spLocks noChangeArrowheads="1"/>
+            </p:cNvSpPr>
+            <p:nvPr/>
+          </p:nvSpPr>
+          <p:spPr bwMode="auto">
+            <a:xfrm>
+              <a:off x="3458" y="3186"/>
+              <a:ext cx="599" cy="173"/>
+            </a:xfrm>
+            <a:prstGeom prst="rect">
+              <a:avLst/>
+            </a:prstGeom>
+            <a:noFill/>
+            <a:ln>
+              <a:noFill/>
+            </a:ln>
+            <a:extLst>
+              <a:ext uri="{909E8E84-426E-40DD-AFC4-6F175D3DCCD1}">
+                <a14:hiddenFill xmlns:a14="http://schemas.microsoft.com/office/drawing/2010/main">
+                  <a:solidFill>
+                    <a:srgbClr val="FFFFFF"/>
+                  </a:solidFill>
+                </a14:hiddenFill>
+              </a:ext>
+              <a:ext uri="{91240B29-F687-4F45-9708-019B960494DF}">
+                <a14:hiddenLine xmlns:a14="http://schemas.microsoft.com/office/drawing/2010/main" w="12700">
+                  <a:solidFill>
+                    <a:srgbClr val="000000"/>
+                  </a:solidFill>
+                  <a:miter lim="800000"/>
+                  <a:headEnd/>
+                  <a:tailEnd/>
+                </a14:hiddenLine>
+              </a:ext>
+            </a:extLst>
+          </p:spPr>
+          <p:txBody>
+            <a:bodyPr wrap="none" lIns="90488" tIns="44450" rIns="90488" bIns="44450">
+              <a:spAutoFit/>
+            </a:bodyPr>
+            <a:lstStyle>
+              <a:lvl1pPr eaLnBrk="0" hangingPunct="0">
+                <a:defRPr>
+                  <a:solidFill>
+                    <a:schemeClr val="tx1"/>
+                  </a:solidFill>
+                  <a:latin typeface="Arial" pitchFamily="34" charset="0"/>
+                  <a:cs typeface="Arial" pitchFamily="34" charset="0"/>
+                </a:defRPr>
+              </a:lvl1pPr>
+              <a:lvl2pPr marL="742950" indent="-285750" eaLnBrk="0" hangingPunct="0">
+                <a:defRPr>
+                  <a:solidFill>
+                    <a:schemeClr val="tx1"/>
+                  </a:solidFill>
+                  <a:latin typeface="Arial" pitchFamily="34" charset="0"/>
+                  <a:cs typeface="Arial" pitchFamily="34" charset="0"/>
+                </a:defRPr>
+              </a:lvl2pPr>
+              <a:lvl3pPr marL="1143000" indent="-228600" eaLnBrk="0" hangingPunct="0">
+                <a:defRPr>
+                  <a:solidFill>
+                    <a:schemeClr val="tx1"/>
+                  </a:solidFill>
+                  <a:latin typeface="Arial" pitchFamily="34" charset="0"/>
+                  <a:cs typeface="Arial" pitchFamily="34" charset="0"/>
+                </a:defRPr>
+              </a:lvl3pPr>
+              <a:lvl4pPr marL="1600200" indent="-228600" eaLnBrk="0" hangingPunct="0">
+                <a:defRPr>
+                  <a:solidFill>
+                    <a:schemeClr val="tx1"/>
+                  </a:solidFill>
+                  <a:latin typeface="Arial" pitchFamily="34" charset="0"/>
+                  <a:cs typeface="Arial" pitchFamily="34" charset="0"/>
+                </a:defRPr>
+              </a:lvl4pPr>
+              <a:lvl5pPr marL="2057400" indent="-228600" eaLnBrk="0" hangingPunct="0">
+                <a:defRPr>
+                  <a:solidFill>
+                    <a:schemeClr val="tx1"/>
+                  </a:solidFill>
+                  <a:latin typeface="Arial" pitchFamily="34" charset="0"/>
+                  <a:cs typeface="Arial" pitchFamily="34" charset="0"/>
+                </a:defRPr>
+              </a:lvl5pPr>
+              <a:lvl6pPr marL="2514600" indent="-228600" eaLnBrk="0" fontAlgn="base" hangingPunct="0">
+                <a:spcBef>
+                  <a:spcPct val="0"/>
+                </a:spcBef>
+                <a:spcAft>
+                  <a:spcPct val="0"/>
+                </a:spcAft>
+                <a:defRPr>
+                  <a:solidFill>
+                    <a:schemeClr val="tx1"/>
+                  </a:solidFill>
+                  <a:latin typeface="Arial" pitchFamily="34" charset="0"/>
+                  <a:cs typeface="Arial" pitchFamily="34" charset="0"/>
+                </a:defRPr>
+              </a:lvl6pPr>
+              <a:lvl7pPr marL="2971800" indent="-228600" eaLnBrk="0" fontAlgn="base" hangingPunct="0">
+                <a:spcBef>
+                  <a:spcPct val="0"/>
+                </a:spcBef>
+                <a:spcAft>
+                  <a:spcPct val="0"/>
+                </a:spcAft>
+                <a:defRPr>
+                  <a:solidFill>
+                    <a:schemeClr val="tx1"/>
+                  </a:solidFill>
+                  <a:latin typeface="Arial" pitchFamily="34" charset="0"/>
+                  <a:cs typeface="Arial" pitchFamily="34" charset="0"/>
+                </a:defRPr>
+              </a:lvl7pPr>
+              <a:lvl8pPr marL="3429000" indent="-228600" eaLnBrk="0" fontAlgn="base" hangingPunct="0">
+                <a:spcBef>
+                  <a:spcPct val="0"/>
+                </a:spcBef>
+                <a:spcAft>
+                  <a:spcPct val="0"/>
+                </a:spcAft>
+                <a:defRPr>
+                  <a:solidFill>
+                    <a:schemeClr val="tx1"/>
+                  </a:solidFill>
+                  <a:latin typeface="Arial" pitchFamily="34" charset="0"/>
+                  <a:cs typeface="Arial" pitchFamily="34" charset="0"/>
+                </a:defRPr>
+              </a:lvl8pPr>
+              <a:lvl9pPr marL="3886200" indent="-228600" eaLnBrk="0" fontAlgn="base" hangingPunct="0">
+                <a:spcBef>
+                  <a:spcPct val="0"/>
+                </a:spcBef>
+                <a:spcAft>
+                  <a:spcPct val="0"/>
+                </a:spcAft>
+                <a:defRPr>
+                  <a:solidFill>
+                    <a:schemeClr val="tx1"/>
+                  </a:solidFill>
+                  <a:latin typeface="Arial" pitchFamily="34" charset="0"/>
+                  <a:cs typeface="Arial" pitchFamily="34" charset="0"/>
+                </a:defRPr>
+              </a:lvl9pPr>
+            </a:lstStyle>
+            <a:p>
+              <a:r>
+                <a:rPr lang="en-US" altLang="en-US" sz="1200">
+                  <a:solidFill>
+                    <a:srgbClr val="C1CEFF"/>
+                  </a:solidFill>
+                </a:rPr>
+                <a:t></a:t>
+              </a:r>
+              <a:r>
+                <a:rPr lang="en-US" altLang="en-US" sz="1200" baseline="30000">
+                  <a:solidFill>
+                    <a:srgbClr val="C1CEFF"/>
+                  </a:solidFill>
+                </a:rPr>
+                <a:t>2</a:t>
+              </a:r>
+              <a:r>
+                <a:rPr lang="en-US" altLang="en-US" sz="1200">
+                  <a:solidFill>
+                    <a:srgbClr val="C1CEFF"/>
+                  </a:solidFill>
+                </a:rPr>
+                <a:t>=0.5, ns.</a:t>
+              </a:r>
+            </a:p>
+          </p:txBody>
+        </p:sp>
+      </p:grpSp>
+      <p:grpSp>
+        <p:nvGrpSpPr>
+          <p:cNvPr id="7" name="Group 25"/>
+          <p:cNvGrpSpPr>
+            <a:grpSpLocks/>
+          </p:cNvGrpSpPr>
+          <p:nvPr/>
+        </p:nvGrpSpPr>
+        <p:grpSpPr bwMode="auto">
+          <a:xfrm>
+            <a:off x="5481638" y="3025775"/>
+            <a:ext cx="3203575" cy="2759075"/>
+            <a:chOff x="3453" y="1906"/>
+            <a:chExt cx="2018" cy="1738"/>
+          </a:xfrm>
+        </p:grpSpPr>
+        <p:sp>
+          <p:nvSpPr>
+            <p:cNvPr id="30733" name="Oval 26"/>
+            <p:cNvSpPr>
+              <a:spLocks noChangeArrowheads="1"/>
+            </p:cNvSpPr>
+            <p:nvPr/>
+          </p:nvSpPr>
+          <p:spPr bwMode="auto">
+            <a:xfrm>
+              <a:off x="4881" y="1906"/>
+              <a:ext cx="478" cy="296"/>
+            </a:xfrm>
+            <a:prstGeom prst="ellipse">
+              <a:avLst/>
+            </a:prstGeom>
+            <a:noFill/>
+            <a:ln w="50800">
+              <a:solidFill>
+                <a:schemeClr val="hlink"/>
+              </a:solidFill>
+              <a:round/>
+              <a:headEnd/>
+              <a:tailEnd/>
+            </a:ln>
+            <a:extLst>
+              <a:ext uri="{909E8E84-426E-40DD-AFC4-6F175D3DCCD1}">
+                <a14:hiddenFill xmlns:a14="http://schemas.microsoft.com/office/drawing/2010/main">
+                  <a:solidFill>
+                    <a:srgbClr val="FFFFFF"/>
+                  </a:solidFill>
+                </a14:hiddenFill>
+              </a:ext>
+            </a:extLst>
+          </p:spPr>
+          <p:txBody>
+            <a:bodyPr wrap="none" anchor="ctr"/>
+            <a:lstStyle>
+              <a:lvl1pPr eaLnBrk="0" hangingPunct="0">
+                <a:defRPr>
+                  <a:solidFill>
+                    <a:schemeClr val="tx1"/>
+                  </a:solidFill>
+                  <a:latin typeface="Arial" pitchFamily="34" charset="0"/>
+                  <a:cs typeface="Arial" pitchFamily="34" charset="0"/>
+                </a:defRPr>
+              </a:lvl1pPr>
+              <a:lvl2pPr marL="742950" indent="-285750" eaLnBrk="0" hangingPunct="0">
+                <a:defRPr>
+                  <a:solidFill>
+                    <a:schemeClr val="tx1"/>
+                  </a:solidFill>
+                  <a:latin typeface="Arial" pitchFamily="34" charset="0"/>
+                  <a:cs typeface="Arial" pitchFamily="34" charset="0"/>
+                </a:defRPr>
+              </a:lvl2pPr>
+              <a:lvl3pPr marL="1143000" indent="-228600" eaLnBrk="0" hangingPunct="0">
+                <a:defRPr>
+                  <a:solidFill>
+                    <a:schemeClr val="tx1"/>
+                  </a:solidFill>
+                  <a:latin typeface="Arial" pitchFamily="34" charset="0"/>
+                  <a:cs typeface="Arial" pitchFamily="34" charset="0"/>
+                </a:defRPr>
+              </a:lvl3pPr>
+              <a:lvl4pPr marL="1600200" indent="-228600" eaLnBrk="0" hangingPunct="0">
+                <a:defRPr>
+                  <a:solidFill>
+                    <a:schemeClr val="tx1"/>
+                  </a:solidFill>
+                  <a:latin typeface="Arial" pitchFamily="34" charset="0"/>
+                  <a:cs typeface="Arial" pitchFamily="34" charset="0"/>
+                </a:defRPr>
+              </a:lvl4pPr>
+              <a:lvl5pPr marL="2057400" indent="-228600" eaLnBrk="0" hangingPunct="0">
+                <a:defRPr>
+                  <a:solidFill>
+                    <a:schemeClr val="tx1"/>
+                  </a:solidFill>
+                  <a:latin typeface="Arial" pitchFamily="34" charset="0"/>
+                  <a:cs typeface="Arial" pitchFamily="34" charset="0"/>
+                </a:defRPr>
+              </a:lvl5pPr>
+              <a:lvl6pPr marL="2514600" indent="-228600" eaLnBrk="0" fontAlgn="base" hangingPunct="0">
+                <a:spcBef>
+                  <a:spcPct val="0"/>
+                </a:spcBef>
+                <a:spcAft>
+                  <a:spcPct val="0"/>
+                </a:spcAft>
+                <a:defRPr>
+                  <a:solidFill>
+                    <a:schemeClr val="tx1"/>
+                  </a:solidFill>
+                  <a:latin typeface="Arial" pitchFamily="34" charset="0"/>
+                  <a:cs typeface="Arial" pitchFamily="34" charset="0"/>
+                </a:defRPr>
+              </a:lvl6pPr>
+              <a:lvl7pPr marL="2971800" indent="-228600" eaLnBrk="0" fontAlgn="base" hangingPunct="0">
+                <a:spcBef>
+                  <a:spcPct val="0"/>
+                </a:spcBef>
+                <a:spcAft>
+                  <a:spcPct val="0"/>
+                </a:spcAft>
+                <a:defRPr>
+                  <a:solidFill>
+                    <a:schemeClr val="tx1"/>
+                  </a:solidFill>
+                  <a:latin typeface="Arial" pitchFamily="34" charset="0"/>
+                  <a:cs typeface="Arial" pitchFamily="34" charset="0"/>
+                </a:defRPr>
+              </a:lvl7pPr>
+              <a:lvl8pPr marL="3429000" indent="-228600" eaLnBrk="0" fontAlgn="base" hangingPunct="0">
+                <a:spcBef>
+                  <a:spcPct val="0"/>
+                </a:spcBef>
+                <a:spcAft>
+                  <a:spcPct val="0"/>
+                </a:spcAft>
+                <a:defRPr>
+                  <a:solidFill>
+                    <a:schemeClr val="tx1"/>
+                  </a:solidFill>
+                  <a:latin typeface="Arial" pitchFamily="34" charset="0"/>
+                  <a:cs typeface="Arial" pitchFamily="34" charset="0"/>
+                </a:defRPr>
+              </a:lvl8pPr>
+              <a:lvl9pPr marL="3886200" indent="-228600" eaLnBrk="0" fontAlgn="base" hangingPunct="0">
+                <a:spcBef>
+                  <a:spcPct val="0"/>
+                </a:spcBef>
+                <a:spcAft>
+                  <a:spcPct val="0"/>
+                </a:spcAft>
+                <a:defRPr>
+                  <a:solidFill>
+                    <a:schemeClr val="tx1"/>
+                  </a:solidFill>
+                  <a:latin typeface="Arial" pitchFamily="34" charset="0"/>
+                  <a:cs typeface="Arial" pitchFamily="34" charset="0"/>
+                </a:defRPr>
+              </a:lvl9pPr>
+            </a:lstStyle>
+            <a:p>
+              <a:pPr eaLnBrk="1" hangingPunct="1"/>
+              <a:endParaRPr lang="en-US" altLang="en-US"/>
+            </a:p>
+          </p:txBody>
+        </p:sp>
+        <p:sp>
+          <p:nvSpPr>
+            <p:cNvPr id="30734" name="Arc 27"/>
+            <p:cNvSpPr>
+              <a:spLocks/>
+            </p:cNvSpPr>
+            <p:nvPr/>
+          </p:nvSpPr>
+          <p:spPr bwMode="auto">
+            <a:xfrm rot="-6660000">
+              <a:off x="3447" y="2734"/>
+              <a:ext cx="916" cy="904"/>
+            </a:xfrm>
+            <a:custGeom>
+              <a:avLst/>
+              <a:gdLst>
+                <a:gd name="T0" fmla="*/ 2 w 21600"/>
+                <a:gd name="T1" fmla="*/ 2 h 21600"/>
+                <a:gd name="T2" fmla="*/ 0 w 21600"/>
+                <a:gd name="T3" fmla="*/ 0 h 21600"/>
+                <a:gd name="T4" fmla="*/ 2 w 21600"/>
+                <a:gd name="T5" fmla="*/ 0 h 21600"/>
+                <a:gd name="T6" fmla="*/ 0 60000 65536"/>
+                <a:gd name="T7" fmla="*/ 0 60000 65536"/>
+                <a:gd name="T8" fmla="*/ 0 60000 65536"/>
+                <a:gd name="T9" fmla="*/ 0 w 21600"/>
+                <a:gd name="T10" fmla="*/ 0 h 21600"/>
+                <a:gd name="T11" fmla="*/ 21600 w 21600"/>
+                <a:gd name="T12" fmla="*/ 21600 h 21600"/>
+              </a:gdLst>
+              <a:ahLst/>
+              <a:cxnLst>
+                <a:cxn ang="T6">
+                  <a:pos x="T0" y="T1"/>
+                </a:cxn>
+                <a:cxn ang="T7">
+                  <a:pos x="T2" y="T3"/>
+                </a:cxn>
+                <a:cxn ang="T8">
+                  <a:pos x="T4" y="T5"/>
+                </a:cxn>
+              </a:cxnLst>
+              <a:rect l="T9" t="T10" r="T11" b="T12"/>
+              <a:pathLst>
+                <a:path w="21600" h="21600" fill="none" extrusionOk="0">
+                  <a:moveTo>
+                    <a:pt x="21600" y="21600"/>
+                  </a:moveTo>
+                  <a:cubicBezTo>
+                    <a:pt x="9670" y="21600"/>
+                    <a:pt x="0" y="11929"/>
+                    <a:pt x="0" y="0"/>
+                  </a:cubicBezTo>
+                </a:path>
+                <a:path w="21600" h="21600" stroke="0" extrusionOk="0">
+                  <a:moveTo>
+                    <a:pt x="21600" y="21600"/>
+                  </a:moveTo>
+                  <a:cubicBezTo>
+                    <a:pt x="9670" y="21600"/>
+                    <a:pt x="0" y="11929"/>
+                    <a:pt x="0" y="0"/>
+                  </a:cubicBezTo>
+                  <a:lnTo>
+                    <a:pt x="21600" y="0"/>
+                  </a:lnTo>
+                  <a:close/>
+                </a:path>
+              </a:pathLst>
+            </a:custGeom>
+            <a:noFill/>
+            <a:ln w="19050">
+              <a:solidFill>
+                <a:schemeClr val="hlink"/>
+              </a:solidFill>
+              <a:prstDash val="dash"/>
+              <a:round/>
+              <a:headEnd type="triangle" w="med" len="med"/>
+              <a:tailEnd type="triangle" w="med" len="med"/>
+            </a:ln>
+            <a:extLst>
+              <a:ext uri="{909E8E84-426E-40DD-AFC4-6F175D3DCCD1}">
+                <a14:hiddenFill xmlns:a14="http://schemas.microsoft.com/office/drawing/2010/main">
+                  <a:solidFill>
+                    <a:srgbClr val="FFFFFF"/>
+                  </a:solidFill>
+                </a14:hiddenFill>
+              </a:ext>
+            </a:extLst>
+          </p:spPr>
+          <p:txBody>
+            <a:bodyPr wrap="none" anchor="ctr"/>
+            <a:lstStyle/>
+            <a:p>
+              <a:endParaRPr lang="en-GB">
+                <a:latin typeface="Arial" panose="020B0604020202020204" pitchFamily="34" charset="0"/>
+                <a:cs typeface="Arial" panose="020B0604020202020204" pitchFamily="34" charset="0"/>
+              </a:endParaRPr>
+            </a:p>
+          </p:txBody>
+        </p:sp>
+        <p:sp>
+          <p:nvSpPr>
+            <p:cNvPr id="149532" name="Rectangle 28"/>
+            <p:cNvSpPr>
+              <a:spLocks noChangeArrowheads="1"/>
+            </p:cNvSpPr>
+            <p:nvPr/>
+          </p:nvSpPr>
+          <p:spPr bwMode="auto">
+            <a:xfrm>
+              <a:off x="4093" y="2979"/>
+              <a:ext cx="1378" cy="522"/>
+            </a:xfrm>
+            <a:prstGeom prst="rect">
+              <a:avLst/>
+            </a:prstGeom>
+            <a:noFill/>
+            <a:ln w="12700">
+              <a:noFill/>
+              <a:miter lim="800000"/>
+              <a:headEnd/>
+              <a:tailEnd/>
+            </a:ln>
+            <a:effectLst/>
+          </p:spPr>
+          <p:txBody>
+            <a:bodyPr lIns="90488" tIns="44450" rIns="90488" bIns="44450">
+              <a:spAutoFit/>
+            </a:bodyPr>
+            <a:lstStyle/>
+            <a:p>
+              <a:pPr algn="ctr" eaLnBrk="0" hangingPunct="0">
+                <a:defRPr/>
+              </a:pPr>
+              <a:r>
+                <a:rPr lang="en-US" sz="2400" i="1" dirty="0">
+                  <a:effectLst>
+                    <a:outerShdw blurRad="38100" dist="38100" dir="2700000" algn="tl">
+                      <a:srgbClr val="C0C0C0"/>
+                    </a:outerShdw>
+                  </a:effectLst>
+                  <a:latin typeface="Arial" panose="020B0604020202020204" pitchFamily="34" charset="0"/>
+                  <a:cs typeface="Arial" panose="020B0604020202020204" pitchFamily="34" charset="0"/>
+                </a:rPr>
+                <a:t>Functional connectivity</a:t>
+              </a:r>
+            </a:p>
+          </p:txBody>
+        </p:sp>
+        <p:sp>
+          <p:nvSpPr>
+            <p:cNvPr id="30736" name="Arc 29"/>
+            <p:cNvSpPr>
+              <a:spLocks/>
+            </p:cNvSpPr>
+            <p:nvPr/>
+          </p:nvSpPr>
+          <p:spPr bwMode="auto">
+            <a:xfrm rot="-6660000">
+              <a:off x="4593" y="2215"/>
+              <a:ext cx="585" cy="1105"/>
+            </a:xfrm>
+            <a:custGeom>
+              <a:avLst/>
+              <a:gdLst>
+                <a:gd name="T0" fmla="*/ 1 w 16088"/>
+                <a:gd name="T1" fmla="*/ 3 h 21600"/>
+                <a:gd name="T2" fmla="*/ 0 w 16088"/>
+                <a:gd name="T3" fmla="*/ 2 h 21600"/>
+                <a:gd name="T4" fmla="*/ 1 w 16088"/>
+                <a:gd name="T5" fmla="*/ 0 h 21600"/>
+                <a:gd name="T6" fmla="*/ 0 60000 65536"/>
+                <a:gd name="T7" fmla="*/ 0 60000 65536"/>
+                <a:gd name="T8" fmla="*/ 0 60000 65536"/>
+                <a:gd name="T9" fmla="*/ 0 w 16088"/>
+                <a:gd name="T10" fmla="*/ 0 h 21600"/>
+                <a:gd name="T11" fmla="*/ 16088 w 16088"/>
+                <a:gd name="T12" fmla="*/ 21600 h 21600"/>
+              </a:gdLst>
+              <a:ahLst/>
+              <a:cxnLst>
+                <a:cxn ang="T6">
+                  <a:pos x="T0" y="T1"/>
+                </a:cxn>
+                <a:cxn ang="T7">
+                  <a:pos x="T2" y="T3"/>
+                </a:cxn>
+                <a:cxn ang="T8">
+                  <a:pos x="T4" y="T5"/>
+                </a:cxn>
+              </a:cxnLst>
+              <a:rect l="T9" t="T10" r="T11" b="T12"/>
+              <a:pathLst>
+                <a:path w="16088" h="21600" fill="none" extrusionOk="0">
+                  <a:moveTo>
+                    <a:pt x="16088" y="21600"/>
+                  </a:moveTo>
+                  <a:cubicBezTo>
+                    <a:pt x="9947" y="21600"/>
+                    <a:pt x="4097" y="18986"/>
+                    <a:pt x="-1" y="14413"/>
+                  </a:cubicBezTo>
+                </a:path>
+                <a:path w="16088" h="21600" stroke="0" extrusionOk="0">
+                  <a:moveTo>
+                    <a:pt x="16088" y="21600"/>
+                  </a:moveTo>
+                  <a:cubicBezTo>
+                    <a:pt x="9947" y="21600"/>
+                    <a:pt x="4097" y="18986"/>
+                    <a:pt x="-1" y="14413"/>
+                  </a:cubicBezTo>
+                  <a:lnTo>
+                    <a:pt x="16088" y="0"/>
+                  </a:lnTo>
+                  <a:close/>
+                </a:path>
+              </a:pathLst>
+            </a:custGeom>
+            <a:noFill/>
+            <a:ln w="19050">
+              <a:solidFill>
+                <a:schemeClr val="hlink"/>
+              </a:solidFill>
+              <a:prstDash val="dash"/>
+              <a:round/>
+              <a:headEnd type="triangle" w="med" len="med"/>
+              <a:tailEnd/>
+            </a:ln>
+            <a:extLst>
+              <a:ext uri="{909E8E84-426E-40DD-AFC4-6F175D3DCCD1}">
+                <a14:hiddenFill xmlns:a14="http://schemas.microsoft.com/office/drawing/2010/main">
+                  <a:solidFill>
+                    <a:srgbClr val="FFFFFF"/>
+                  </a:solidFill>
+                </a14:hiddenFill>
+              </a:ext>
+            </a:extLst>
+          </p:spPr>
+          <p:txBody>
+            <a:bodyPr wrap="none" anchor="ctr"/>
+            <a:lstStyle/>
+            <a:p>
+              <a:endParaRPr lang="en-GB">
+                <a:latin typeface="Arial" panose="020B0604020202020204" pitchFamily="34" charset="0"/>
+                <a:cs typeface="Arial" panose="020B0604020202020204" pitchFamily="34" charset="0"/>
+              </a:endParaRPr>
+            </a:p>
+          </p:txBody>
+        </p:sp>
+      </p:grpSp>
+      <p:grpSp>
+        <p:nvGrpSpPr>
+          <p:cNvPr id="8" name="Group 30"/>
+          <p:cNvGrpSpPr>
+            <a:grpSpLocks/>
+          </p:cNvGrpSpPr>
+          <p:nvPr/>
+        </p:nvGrpSpPr>
+        <p:grpSpPr bwMode="auto">
+          <a:xfrm>
+            <a:off x="520700" y="4108451"/>
+            <a:ext cx="3705225" cy="2238376"/>
+            <a:chOff x="328" y="2588"/>
+            <a:chExt cx="2334" cy="1410"/>
+          </a:xfrm>
+        </p:grpSpPr>
+        <p:sp>
+          <p:nvSpPr>
+            <p:cNvPr id="149535" name="Rectangle 31"/>
+            <p:cNvSpPr>
+              <a:spLocks noChangeArrowheads="1"/>
+            </p:cNvSpPr>
+            <p:nvPr/>
+          </p:nvSpPr>
+          <p:spPr bwMode="auto">
+            <a:xfrm>
+              <a:off x="328" y="3709"/>
+              <a:ext cx="1926" cy="289"/>
+            </a:xfrm>
+            <a:prstGeom prst="rect">
+              <a:avLst/>
+            </a:prstGeom>
+            <a:noFill/>
+            <a:ln w="12700">
+              <a:noFill/>
+              <a:miter lim="800000"/>
+              <a:headEnd/>
+              <a:tailEnd/>
+            </a:ln>
+            <a:effectLst/>
+          </p:spPr>
+          <p:txBody>
+            <a:bodyPr wrap="none" lIns="90488" tIns="44450" rIns="90488" bIns="44450">
+              <a:spAutoFit/>
+            </a:bodyPr>
+            <a:lstStyle/>
+            <a:p>
+              <a:pPr eaLnBrk="0" hangingPunct="0">
+                <a:defRPr/>
+              </a:pPr>
+              <a:r>
+                <a:rPr lang="en-US" sz="2400" i="1">
+                  <a:effectLst>
+                    <a:outerShdw blurRad="38100" dist="38100" dir="2700000" algn="tl">
+                      <a:srgbClr val="C0C0C0"/>
+                    </a:outerShdw>
+                  </a:effectLst>
+                  <a:latin typeface="Arial" panose="020B0604020202020204" pitchFamily="34" charset="0"/>
+                  <a:cs typeface="Arial" panose="020B0604020202020204" pitchFamily="34" charset="0"/>
+                </a:rPr>
+                <a:t>Effective connectivity</a:t>
+              </a:r>
+            </a:p>
+          </p:txBody>
+        </p:sp>
+        <p:sp>
+          <p:nvSpPr>
+            <p:cNvPr id="30731" name="Line 32"/>
+            <p:cNvSpPr>
+              <a:spLocks noChangeShapeType="1"/>
+            </p:cNvSpPr>
+            <p:nvPr/>
+          </p:nvSpPr>
+          <p:spPr bwMode="auto">
+            <a:xfrm flipV="1">
+              <a:off x="1663" y="2588"/>
+              <a:ext cx="999" cy="1146"/>
+            </a:xfrm>
+            <a:prstGeom prst="line">
+              <a:avLst/>
+            </a:prstGeom>
+            <a:noFill/>
+            <a:ln w="12700">
+              <a:solidFill>
+                <a:schemeClr val="hlink"/>
+              </a:solidFill>
+              <a:round/>
+              <a:headEnd/>
+              <a:tailEnd/>
+            </a:ln>
+            <a:extLst>
+              <a:ext uri="{909E8E84-426E-40DD-AFC4-6F175D3DCCD1}">
+                <a14:hiddenFill xmlns:a14="http://schemas.microsoft.com/office/drawing/2010/main">
+                  <a:noFill/>
+                </a14:hiddenFill>
+              </a:ext>
+            </a:extLst>
+          </p:spPr>
+          <p:txBody>
+            <a:bodyPr wrap="none" anchor="ctr"/>
+            <a:lstStyle/>
+            <a:p>
+              <a:endParaRPr lang="en-GB">
+                <a:latin typeface="Arial" panose="020B0604020202020204" pitchFamily="34" charset="0"/>
+                <a:cs typeface="Arial" panose="020B0604020202020204" pitchFamily="34" charset="0"/>
+              </a:endParaRPr>
+            </a:p>
+          </p:txBody>
+        </p:sp>
+        <p:sp>
+          <p:nvSpPr>
+            <p:cNvPr id="30732" name="Line 33"/>
+            <p:cNvSpPr>
+              <a:spLocks noChangeShapeType="1"/>
+            </p:cNvSpPr>
+            <p:nvPr/>
+          </p:nvSpPr>
+          <p:spPr bwMode="auto">
+            <a:xfrm flipV="1">
+              <a:off x="1655" y="3236"/>
+              <a:ext cx="861" cy="506"/>
+            </a:xfrm>
+            <a:prstGeom prst="line">
+              <a:avLst/>
+            </a:prstGeom>
+            <a:noFill/>
+            <a:ln w="12700">
+              <a:solidFill>
+                <a:schemeClr val="hlink"/>
+              </a:solidFill>
+              <a:round/>
+              <a:headEnd/>
+              <a:tailEnd/>
+            </a:ln>
+            <a:extLst>
+              <a:ext uri="{909E8E84-426E-40DD-AFC4-6F175D3DCCD1}">
+                <a14:hiddenFill xmlns:a14="http://schemas.microsoft.com/office/drawing/2010/main">
+                  <a:noFill/>
+                </a14:hiddenFill>
+              </a:ext>
+            </a:extLst>
+          </p:spPr>
+          <p:txBody>
+            <a:bodyPr wrap="none" anchor="ctr"/>
+            <a:lstStyle/>
+            <a:p>
+              <a:endParaRPr lang="en-GB">
+                <a:latin typeface="Arial" panose="020B0604020202020204" pitchFamily="34" charset="0"/>
+                <a:cs typeface="Arial" panose="020B0604020202020204" pitchFamily="34" charset="0"/>
+              </a:endParaRPr>
+            </a:p>
+          </p:txBody>
+        </p:sp>
+      </p:grpSp>
+      <p:sp>
+        <p:nvSpPr>
+          <p:cNvPr id="32" name="Rectangle 3"/>
+          <p:cNvSpPr txBox="1">
+            <a:spLocks noChangeArrowheads="1"/>
+          </p:cNvSpPr>
+          <p:nvPr/>
+        </p:nvSpPr>
+        <p:spPr>
+          <a:xfrm>
+            <a:off x="107504" y="116632"/>
+            <a:ext cx="4284600" cy="1143000"/>
+          </a:xfrm>
+          <a:prstGeom prst="rect">
+            <a:avLst/>
+          </a:prstGeom>
+        </p:spPr>
+        <p:txBody>
+          <a:bodyPr/>
+          <a:lstStyle>
+            <a:lvl1pPr algn="ctr" rtl="0" eaLnBrk="0" fontAlgn="base" hangingPunct="0">
+              <a:spcBef>
+                <a:spcPct val="0"/>
+              </a:spcBef>
+              <a:spcAft>
+                <a:spcPct val="0"/>
+              </a:spcAft>
+              <a:defRPr sz="4400" kern="1200">
+                <a:solidFill>
+                  <a:schemeClr val="tx1"/>
+                </a:solidFill>
+                <a:latin typeface="+mj-lt"/>
+                <a:ea typeface="+mj-ea"/>
+                <a:cs typeface="+mj-cs"/>
+              </a:defRPr>
+            </a:lvl1pPr>
+            <a:lvl2pPr algn="ctr" rtl="0" eaLnBrk="0" fontAlgn="base" hangingPunct="0">
+              <a:spcBef>
+                <a:spcPct val="0"/>
+              </a:spcBef>
+              <a:spcAft>
+                <a:spcPct val="0"/>
+              </a:spcAft>
+              <a:defRPr sz="4400">
+                <a:solidFill>
+                  <a:schemeClr val="tx1"/>
+                </a:solidFill>
+                <a:latin typeface="Calibri" pitchFamily="34" charset="0"/>
+              </a:defRPr>
+            </a:lvl2pPr>
+            <a:lvl3pPr algn="ctr" rtl="0" eaLnBrk="0" fontAlgn="base" hangingPunct="0">
+              <a:spcBef>
+                <a:spcPct val="0"/>
+              </a:spcBef>
+              <a:spcAft>
+                <a:spcPct val="0"/>
+              </a:spcAft>
+              <a:defRPr sz="4400">
+                <a:solidFill>
+                  <a:schemeClr val="tx1"/>
+                </a:solidFill>
+                <a:latin typeface="Calibri" pitchFamily="34" charset="0"/>
+              </a:defRPr>
+            </a:lvl3pPr>
+            <a:lvl4pPr algn="ctr" rtl="0" eaLnBrk="0" fontAlgn="base" hangingPunct="0">
+              <a:spcBef>
+                <a:spcPct val="0"/>
+              </a:spcBef>
+              <a:spcAft>
+                <a:spcPct val="0"/>
+              </a:spcAft>
+              <a:defRPr sz="4400">
+                <a:solidFill>
+                  <a:schemeClr val="tx1"/>
+                </a:solidFill>
+                <a:latin typeface="Calibri" pitchFamily="34" charset="0"/>
+              </a:defRPr>
+            </a:lvl4pPr>
+            <a:lvl5pPr algn="ctr" rtl="0" eaLnBrk="0" fontAlgn="base" hangingPunct="0">
+              <a:spcBef>
+                <a:spcPct val="0"/>
+              </a:spcBef>
+              <a:spcAft>
+                <a:spcPct val="0"/>
+              </a:spcAft>
+              <a:defRPr sz="4400">
+                <a:solidFill>
+                  <a:schemeClr val="tx1"/>
+                </a:solidFill>
+                <a:latin typeface="Calibri" pitchFamily="34" charset="0"/>
+              </a:defRPr>
+            </a:lvl5pPr>
+            <a:lvl6pPr marL="457200" algn="ctr" rtl="0" fontAlgn="base">
+              <a:spcBef>
+                <a:spcPct val="0"/>
+              </a:spcBef>
+              <a:spcAft>
+                <a:spcPct val="0"/>
+              </a:spcAft>
+              <a:defRPr sz="4400">
+                <a:solidFill>
+                  <a:schemeClr val="tx1"/>
+                </a:solidFill>
+                <a:latin typeface="Calibri" pitchFamily="34" charset="0"/>
+              </a:defRPr>
+            </a:lvl6pPr>
+            <a:lvl7pPr marL="914400" algn="ctr" rtl="0" fontAlgn="base">
+              <a:spcBef>
+                <a:spcPct val="0"/>
+              </a:spcBef>
+              <a:spcAft>
+                <a:spcPct val="0"/>
+              </a:spcAft>
+              <a:defRPr sz="4400">
+                <a:solidFill>
+                  <a:schemeClr val="tx1"/>
+                </a:solidFill>
+                <a:latin typeface="Calibri" pitchFamily="34" charset="0"/>
+              </a:defRPr>
+            </a:lvl7pPr>
+            <a:lvl8pPr marL="1371600" algn="ctr" rtl="0" fontAlgn="base">
+              <a:spcBef>
+                <a:spcPct val="0"/>
+              </a:spcBef>
+              <a:spcAft>
+                <a:spcPct val="0"/>
+              </a:spcAft>
+              <a:defRPr sz="4400">
+                <a:solidFill>
+                  <a:schemeClr val="tx1"/>
+                </a:solidFill>
+                <a:latin typeface="Calibri" pitchFamily="34" charset="0"/>
+              </a:defRPr>
+            </a:lvl8pPr>
+            <a:lvl9pPr marL="1828800" algn="ctr" rtl="0" fontAlgn="base">
+              <a:spcBef>
+                <a:spcPct val="0"/>
+              </a:spcBef>
+              <a:spcAft>
+                <a:spcPct val="0"/>
+              </a:spcAft>
+              <a:defRPr sz="4400">
+                <a:solidFill>
+                  <a:schemeClr val="tx1"/>
+                </a:solidFill>
+                <a:latin typeface="Calibri" pitchFamily="34" charset="0"/>
+              </a:defRPr>
+            </a:lvl9pPr>
+          </a:lstStyle>
+          <a:p>
+            <a:pPr eaLnBrk="1" hangingPunct="1"/>
+            <a:r>
+              <a:rPr lang="de-CH" altLang="en-US" sz="2800" b="1" dirty="0" smtClean="0">
+                <a:latin typeface="Arial Unicode MS" pitchFamily="34" charset="-128"/>
+              </a:rPr>
+              <a:t>Functional vs Effective connectivity</a:t>
+            </a:r>
+            <a:endParaRPr lang="en-US" altLang="en-US" sz="2800" b="1" dirty="0" smtClean="0">
+              <a:latin typeface="Arial Unicode MS" pitchFamily="34" charset="-128"/>
+            </a:endParaRPr>
+          </a:p>
+        </p:txBody>
+      </p:sp>
+      <p:sp>
+        <p:nvSpPr>
+          <p:cNvPr id="33" name="Rectangle 5"/>
+          <p:cNvSpPr>
+            <a:spLocks noChangeArrowheads="1"/>
+          </p:cNvSpPr>
+          <p:nvPr/>
+        </p:nvSpPr>
+        <p:spPr bwMode="auto">
+          <a:xfrm>
+            <a:off x="6365875" y="6120735"/>
+            <a:ext cx="2707344" cy="705321"/>
+          </a:xfrm>
+          <a:prstGeom prst="rect">
+            <a:avLst/>
+          </a:prstGeom>
+          <a:noFill/>
+          <a:ln>
+            <a:noFill/>
+          </a:ln>
+          <a:extLst>
+            <a:ext uri="{909E8E84-426E-40DD-AFC4-6F175D3DCCD1}">
+              <a14:hiddenFill xmlns:a14="http://schemas.microsoft.com/office/drawing/2010/main">
+                <a:solidFill>
+                  <a:srgbClr val="FFFFFF"/>
+                </a:solidFill>
+              </a14:hiddenFill>
+            </a:ext>
+            <a:ext uri="{91240B29-F687-4F45-9708-019B960494DF}">
+              <a14:hiddenLine xmlns:a14="http://schemas.microsoft.com/office/drawing/2010/main" w="12700">
+                <a:solidFill>
+                  <a:srgbClr val="000000"/>
+                </a:solidFill>
+                <a:miter lim="800000"/>
+                <a:headEnd/>
+                <a:tailEnd/>
+              </a14:hiddenLine>
+            </a:ext>
+          </a:extLst>
+        </p:spPr>
+        <p:txBody>
+          <a:bodyPr wrap="square" lIns="90488" tIns="44450" rIns="90488" bIns="44450">
+            <a:spAutoFit/>
+          </a:bodyPr>
+          <a:lstStyle>
+            <a:lvl1pPr eaLnBrk="0" hangingPunct="0">
+              <a:defRPr>
+                <a:solidFill>
+                  <a:schemeClr val="tx1"/>
+                </a:solidFill>
+                <a:latin typeface="Arial" pitchFamily="34" charset="0"/>
+                <a:cs typeface="Arial" pitchFamily="34" charset="0"/>
+              </a:defRPr>
+            </a:lvl1pPr>
+            <a:lvl2pPr marL="742950" indent="-285750" eaLnBrk="0" hangingPunct="0">
+              <a:defRPr>
+                <a:solidFill>
+                  <a:schemeClr val="tx1"/>
+                </a:solidFill>
+                <a:latin typeface="Arial" pitchFamily="34" charset="0"/>
+                <a:cs typeface="Arial" pitchFamily="34" charset="0"/>
+              </a:defRPr>
+            </a:lvl2pPr>
+            <a:lvl3pPr marL="1143000" indent="-228600" eaLnBrk="0" hangingPunct="0">
+              <a:defRPr>
+                <a:solidFill>
+                  <a:schemeClr val="tx1"/>
+                </a:solidFill>
+                <a:latin typeface="Arial" pitchFamily="34" charset="0"/>
+                <a:cs typeface="Arial" pitchFamily="34" charset="0"/>
+              </a:defRPr>
+            </a:lvl3pPr>
+            <a:lvl4pPr marL="1600200" indent="-228600" eaLnBrk="0" hangingPunct="0">
+              <a:defRPr>
+                <a:solidFill>
+                  <a:schemeClr val="tx1"/>
+                </a:solidFill>
+                <a:latin typeface="Arial" pitchFamily="34" charset="0"/>
+                <a:cs typeface="Arial" pitchFamily="34" charset="0"/>
+              </a:defRPr>
+            </a:lvl4pPr>
+            <a:lvl5pPr marL="2057400" indent="-228600" eaLnBrk="0" hangingPunct="0">
+              <a:defRPr>
+                <a:solidFill>
+                  <a:schemeClr val="tx1"/>
+                </a:solidFill>
+                <a:latin typeface="Arial" pitchFamily="34" charset="0"/>
+                <a:cs typeface="Arial" pitchFamily="34" charset="0"/>
+              </a:defRPr>
+            </a:lvl5pPr>
+            <a:lvl6pPr marL="2514600" indent="-228600" eaLnBrk="0" fontAlgn="base" hangingPunct="0">
+              <a:spcBef>
+                <a:spcPct val="0"/>
+              </a:spcBef>
+              <a:spcAft>
+                <a:spcPct val="0"/>
+              </a:spcAft>
+              <a:defRPr>
+                <a:solidFill>
+                  <a:schemeClr val="tx1"/>
+                </a:solidFill>
+                <a:latin typeface="Arial" pitchFamily="34" charset="0"/>
+                <a:cs typeface="Arial" pitchFamily="34" charset="0"/>
+              </a:defRPr>
+            </a:lvl6pPr>
+            <a:lvl7pPr marL="2971800" indent="-228600" eaLnBrk="0" fontAlgn="base" hangingPunct="0">
+              <a:spcBef>
+                <a:spcPct val="0"/>
+              </a:spcBef>
+              <a:spcAft>
+                <a:spcPct val="0"/>
+              </a:spcAft>
+              <a:defRPr>
+                <a:solidFill>
+                  <a:schemeClr val="tx1"/>
+                </a:solidFill>
+                <a:latin typeface="Arial" pitchFamily="34" charset="0"/>
+                <a:cs typeface="Arial" pitchFamily="34" charset="0"/>
+              </a:defRPr>
+            </a:lvl7pPr>
+            <a:lvl8pPr marL="3429000" indent="-228600" eaLnBrk="0" fontAlgn="base" hangingPunct="0">
+              <a:spcBef>
+                <a:spcPct val="0"/>
+              </a:spcBef>
+              <a:spcAft>
+                <a:spcPct val="0"/>
+              </a:spcAft>
+              <a:defRPr>
+                <a:solidFill>
+                  <a:schemeClr val="tx1"/>
+                </a:solidFill>
+                <a:latin typeface="Arial" pitchFamily="34" charset="0"/>
+                <a:cs typeface="Arial" pitchFamily="34" charset="0"/>
+              </a:defRPr>
+            </a:lvl8pPr>
+            <a:lvl9pPr marL="3886200" indent="-228600" eaLnBrk="0" fontAlgn="base" hangingPunct="0">
+              <a:spcBef>
+                <a:spcPct val="0"/>
+              </a:spcBef>
+              <a:spcAft>
+                <a:spcPct val="0"/>
+              </a:spcAft>
+              <a:defRPr>
+                <a:solidFill>
+                  <a:schemeClr val="tx1"/>
+                </a:solidFill>
+                <a:latin typeface="Arial" pitchFamily="34" charset="0"/>
+                <a:cs typeface="Arial" pitchFamily="34" charset="0"/>
+              </a:defRPr>
+            </a:lvl9pPr>
+          </a:lstStyle>
+          <a:p>
+            <a:pPr algn="ctr"/>
+            <a:r>
+              <a:rPr lang="en-GB" altLang="en-US" sz="2000" i="1" dirty="0" smtClean="0">
+                <a:solidFill>
+                  <a:srgbClr val="FF0000"/>
+                </a:solidFill>
+              </a:rPr>
+              <a:t>Partial</a:t>
+            </a:r>
+            <a:r>
+              <a:rPr lang="en-GB" altLang="en-US" sz="2000" dirty="0" smtClean="0">
+                <a:solidFill>
+                  <a:srgbClr val="FF0000"/>
+                </a:solidFill>
+              </a:rPr>
+              <a:t> Correlation is approximate way</a:t>
+            </a:r>
+            <a:endParaRPr lang="en-US" altLang="en-US" dirty="0">
+              <a:solidFill>
+                <a:srgbClr val="FF0000"/>
+              </a:solidFill>
+            </a:endParaRPr>
+          </a:p>
+        </p:txBody>
+      </p:sp>
+    </p:spTree>
+    <p:extLst>
+      <p:ext uri="{BB962C8B-B14F-4D97-AF65-F5344CB8AC3E}">
+        <p14:creationId xmlns:p14="http://schemas.microsoft.com/office/powerpoint/2010/main" val="3197329584"/>
+      </p:ext>
+    </p:extLst>
+  </p:cSld>
+  <p:clrMapOvr>
+    <a:masterClrMapping/>
+  </p:clrMapOvr>
+  <p:timing>
+    <p:tnLst>
+      <p:par>
+        <p:cTn id="1" dur="indefinite" restart="never" nodeType="tmRoot">
+          <p:childTnLst>
+            <p:seq concurrent="1" nextAc="seek">
+              <p:cTn id="2" dur="indefinite" nodeType="mainSeq">
+                <p:childTnLst>
+                  <p:par>
+                    <p:cTn id="3" fill="hold" nodeType="clickPar">
+                      <p:stCondLst>
+                        <p:cond delay="indefinite"/>
+                      </p:stCondLst>
+                      <p:childTnLst>
+                        <p:par>
+                          <p:cTn id="4" fill="hold" nodeType="withGroup">
+                            <p:stCondLst>
+                              <p:cond delay="0"/>
+                            </p:stCondLst>
+                            <p:childTnLst>
+                              <p:par>
+                                <p:cTn id="5" presetID="1" presetClass="entr" presetSubtype="0" fill="hold" grpId="0" nodeType="clickEffect">
+                                  <p:stCondLst>
+                                    <p:cond delay="0"/>
+                                  </p:stCondLst>
+                                  <p:childTnLst>
+                                    <p:set>
+                                      <p:cBhvr>
+                                        <p:cTn id="6" dur="1" fill="hold">
+                                          <p:stCondLst>
+                                            <p:cond delay="499"/>
+                                          </p:stCondLst>
+                                        </p:cTn>
+                                        <p:tgtEl>
+                                          <p:spTgt spid="149509"/>
+                                        </p:tgtEl>
+                                        <p:attrNameLst>
+                                          <p:attrName>style.visibility</p:attrName>
+                                        </p:attrNameLst>
+                                      </p:cBhvr>
+                                      <p:to>
+                                        <p:strVal val="visible"/>
+                                      </p:to>
+                                    </p:set>
+                                  </p:childTnLst>
+                                </p:cTn>
+                              </p:par>
+                            </p:childTnLst>
+                          </p:cTn>
+                        </p:par>
+                      </p:childTnLst>
+                    </p:cTn>
+                  </p:par>
+                  <p:par>
+                    <p:cTn id="7" fill="hold" nodeType="clickPar">
+                      <p:stCondLst>
+                        <p:cond delay="indefinite"/>
+                      </p:stCondLst>
+                      <p:childTnLst>
+                        <p:par>
+                          <p:cTn id="8" fill="hold" nodeType="withGroup">
+                            <p:stCondLst>
+                              <p:cond delay="0"/>
+                            </p:stCondLst>
+                            <p:childTnLst>
+                              <p:par>
+                                <p:cTn id="9" presetID="1" presetClass="entr" presetSubtype="0" fill="hold" grpId="0" nodeType="clickEffect">
+                                  <p:stCondLst>
+                                    <p:cond delay="0"/>
+                                  </p:stCondLst>
+                                  <p:childTnLst>
+                                    <p:set>
+                                      <p:cBhvr>
+                                        <p:cTn id="10" dur="1" fill="hold">
+                                          <p:stCondLst>
+                                            <p:cond delay="499"/>
+                                          </p:stCondLst>
+                                        </p:cTn>
+                                        <p:tgtEl>
+                                          <p:spTgt spid="149510"/>
+                                        </p:tgtEl>
+                                        <p:attrNameLst>
+                                          <p:attrName>style.visibility</p:attrName>
+                                        </p:attrNameLst>
+                                      </p:cBhvr>
+                                      <p:to>
+                                        <p:strVal val="visible"/>
+                                      </p:to>
+                                    </p:set>
+                                  </p:childTnLst>
+                                </p:cTn>
+                              </p:par>
+                            </p:childTnLst>
+                          </p:cTn>
+                        </p:par>
+                      </p:childTnLst>
+                    </p:cTn>
+                  </p:par>
+                  <p:par>
+                    <p:cTn id="11" fill="hold" nodeType="clickPar">
+                      <p:stCondLst>
+                        <p:cond delay="indefinite"/>
+                      </p:stCondLst>
+                      <p:childTnLst>
+                        <p:par>
+                          <p:cTn id="12" fill="hold" nodeType="withGroup">
+                            <p:stCondLst>
+                              <p:cond delay="0"/>
+                            </p:stCondLst>
+                            <p:childTnLst>
+                              <p:par>
+                                <p:cTn id="13" presetID="1" presetClass="entr" presetSubtype="0" fill="hold" nodeType="clickEffect">
+                                  <p:stCondLst>
+                                    <p:cond delay="0"/>
+                                  </p:stCondLst>
+                                  <p:childTnLst>
+                                    <p:set>
+                                      <p:cBhvr>
+                                        <p:cTn id="14" dur="1" fill="hold">
+                                          <p:stCondLst>
+                                            <p:cond delay="499"/>
+                                          </p:stCondLst>
+                                        </p:cTn>
+                                        <p:tgtEl>
+                                          <p:spTgt spid="2"/>
+                                        </p:tgtEl>
+                                        <p:attrNameLst>
+                                          <p:attrName>style.visibility</p:attrName>
+                                        </p:attrNameLst>
+                                      </p:cBhvr>
+                                      <p:to>
+                                        <p:strVal val="visible"/>
+                                      </p:to>
+                                    </p:set>
+                                  </p:childTnLst>
+                                </p:cTn>
+                              </p:par>
+                            </p:childTnLst>
+                          </p:cTn>
+                        </p:par>
+                      </p:childTnLst>
+                    </p:cTn>
+                  </p:par>
+                  <p:par>
+                    <p:cTn id="15" fill="hold" nodeType="clickPar">
+                      <p:stCondLst>
+                        <p:cond delay="indefinite"/>
+                      </p:stCondLst>
+                      <p:childTnLst>
+                        <p:par>
+                          <p:cTn id="16" fill="hold" nodeType="withGroup">
+                            <p:stCondLst>
+                              <p:cond delay="0"/>
+                            </p:stCondLst>
+                            <p:childTnLst>
+                              <p:par>
+                                <p:cTn id="17" presetID="1" presetClass="entr" presetSubtype="0" fill="hold" nodeType="clickEffect">
+                                  <p:stCondLst>
+                                    <p:cond delay="0"/>
+                                  </p:stCondLst>
+                                  <p:childTnLst>
+                                    <p:set>
+                                      <p:cBhvr>
+                                        <p:cTn id="18" dur="1" fill="hold">
+                                          <p:stCondLst>
+                                            <p:cond delay="499"/>
+                                          </p:stCondLst>
+                                        </p:cTn>
+                                        <p:tgtEl>
+                                          <p:spTgt spid="6"/>
+                                        </p:tgtEl>
+                                        <p:attrNameLst>
+                                          <p:attrName>style.visibility</p:attrName>
+                                        </p:attrNameLst>
+                                      </p:cBhvr>
+                                      <p:to>
+                                        <p:strVal val="visible"/>
+                                      </p:to>
+                                    </p:set>
+                                  </p:childTnLst>
+                                </p:cTn>
+                              </p:par>
+                            </p:childTnLst>
+                          </p:cTn>
+                        </p:par>
+                      </p:childTnLst>
+                    </p:cTn>
+                  </p:par>
+                  <p:par>
+                    <p:cTn id="19" fill="hold" nodeType="clickPar">
+                      <p:stCondLst>
+                        <p:cond delay="indefinite"/>
+                      </p:stCondLst>
+                      <p:childTnLst>
+                        <p:par>
+                          <p:cTn id="20" fill="hold" nodeType="withGroup">
+                            <p:stCondLst>
+                              <p:cond delay="0"/>
+                            </p:stCondLst>
+                            <p:childTnLst>
+                              <p:par>
+                                <p:cTn id="21" presetID="1" presetClass="entr" presetSubtype="0" fill="hold" nodeType="clickEffect">
+                                  <p:stCondLst>
+                                    <p:cond delay="0"/>
+                                  </p:stCondLst>
+                                  <p:childTnLst>
+                                    <p:set>
+                                      <p:cBhvr>
+                                        <p:cTn id="22" dur="1" fill="hold">
+                                          <p:stCondLst>
+                                            <p:cond delay="499"/>
+                                          </p:stCondLst>
+                                        </p:cTn>
+                                        <p:tgtEl>
+                                          <p:spTgt spid="7"/>
+                                        </p:tgtEl>
+                                        <p:attrNameLst>
+                                          <p:attrName>style.visibility</p:attrName>
+                                        </p:attrNameLst>
+                                      </p:cBhvr>
+                                      <p:to>
+                                        <p:strVal val="visible"/>
+                                      </p:to>
+                                    </p:set>
+                                  </p:childTnLst>
+                                </p:cTn>
+                              </p:par>
+                            </p:childTnLst>
+                          </p:cTn>
+                        </p:par>
+                      </p:childTnLst>
+                    </p:cTn>
+                  </p:par>
+                  <p:par>
+                    <p:cTn id="23" fill="hold" nodeType="clickPar">
+                      <p:stCondLst>
+                        <p:cond delay="indefinite"/>
+                      </p:stCondLst>
+                      <p:childTnLst>
+                        <p:par>
+                          <p:cTn id="24" fill="hold" nodeType="withGroup">
+                            <p:stCondLst>
+                              <p:cond delay="0"/>
+                            </p:stCondLst>
+                            <p:childTnLst>
+                              <p:par>
+                                <p:cTn id="25" presetID="1" presetClass="entr" presetSubtype="0" fill="hold" nodeType="clickEffect">
+                                  <p:stCondLst>
+                                    <p:cond delay="0"/>
+                                  </p:stCondLst>
+                                  <p:childTnLst>
+                                    <p:set>
+                                      <p:cBhvr>
+                                        <p:cTn id="26" dur="1" fill="hold">
+                                          <p:stCondLst>
+                                            <p:cond delay="499"/>
+                                          </p:stCondLst>
+                                        </p:cTn>
+                                        <p:tgtEl>
+                                          <p:spTgt spid="8"/>
+                                        </p:tgtEl>
+                                        <p:attrNameLst>
+                                          <p:attrName>style.visibility</p:attrName>
+                                        </p:attrNameLst>
+                                      </p:cBhvr>
+                                      <p:to>
+                                        <p:strVal val="visible"/>
+                                      </p:to>
+                                    </p:set>
+                                  </p:childTnLst>
+                                </p:cTn>
+                              </p:par>
+                            </p:childTnLst>
+                          </p:cTn>
+                        </p:par>
+                      </p:childTnLst>
+                    </p:cTn>
+                  </p:par>
+                  <p:par>
+                    <p:cTn id="27" fill="hold">
+                      <p:stCondLst>
+                        <p:cond delay="indefinite"/>
+                      </p:stCondLst>
+                      <p:childTnLst>
+                        <p:par>
+                          <p:cTn id="28" fill="hold">
+                            <p:stCondLst>
+                              <p:cond delay="0"/>
+                            </p:stCondLst>
+                            <p:childTnLst>
+                              <p:par>
+                                <p:cTn id="29" presetID="1" presetClass="entr" presetSubtype="0" fill="hold" grpId="0" nodeType="clickEffect">
+                                  <p:stCondLst>
+                                    <p:cond delay="0"/>
+                                  </p:stCondLst>
+                                  <p:childTnLst>
+                                    <p:set>
+                                      <p:cBhvr>
+                                        <p:cTn id="30" dur="1" fill="hold">
+                                          <p:stCondLst>
+                                            <p:cond delay="499"/>
+                                          </p:stCondLst>
+                                        </p:cTn>
+                                        <p:tgtEl>
+                                          <p:spTgt spid="33"/>
+                                        </p:tgtEl>
+                                        <p:attrNameLst>
+                                          <p:attrName>style.visibility</p:attrName>
+                                        </p:attrNameLst>
+                                      </p:cBhvr>
+                                      <p:to>
+                                        <p:strVal val="visible"/>
+                                      </p:to>
+                                    </p:set>
+                                  </p:childTnLst>
+                                </p:cTn>
+                              </p:par>
+                            </p:childTnLst>
+                          </p:cTn>
+                        </p:par>
+                      </p:childTnLst>
+                    </p:cTn>
+                  </p:par>
+                </p:childTnLst>
+              </p:cTn>
+              <p:prevCondLst>
+                <p:cond evt="onPrev" delay="0">
+                  <p:tgtEl>
+                    <p:sldTgt/>
+                  </p:tgtEl>
+                </p:cond>
+              </p:prevCondLst>
+              <p:nextCondLst>
+                <p:cond evt="onNext" delay="0">
+                  <p:tgtEl>
+                    <p:sldTgt/>
+                  </p:tgtEl>
+                </p:cond>
+              </p:nextCondLst>
+            </p:seq>
+          </p:childTnLst>
+        </p:cTn>
+      </p:par>
+    </p:tnLst>
+    <p:bldLst>
+      <p:bldP spid="149509" grpId="0" autoUpdateAnimBg="0"/>
+      <p:bldP spid="149510" grpId="0" autoUpdateAnimBg="0"/>
+      <p:bldP spid="33" grpId="0" autoUpdateAnimBg="0"/>
+    </p:bldLst>
+  </p:timing>
+</p:sld>
+</file>
+
+<file path=ppt/slides/slide5.xml><?xml version="1.0" encoding="utf-8"?>
+<p:sld xmlns:a="http://schemas.openxmlformats.org/drawingml/2006/main" xmlns:r="http://schemas.openxmlformats.org/officeDocument/2006/relationships" xmlns:p="http://schemas.openxmlformats.org/presentationml/2006/main">
+  <p:cSld>
+    <p:spTree>
+      <p:nvGrpSpPr>
+        <p:cNvPr id="1" name=""/>
+        <p:cNvGrpSpPr/>
+        <p:nvPr/>
+      </p:nvGrpSpPr>
+      <p:grpSpPr>
+        <a:xfrm>
+          <a:off x="0" y="0"/>
+          <a:ext cx="0" cy="0"/>
+          <a:chOff x="0" y="0"/>
+          <a:chExt cx="0" cy="0"/>
+        </a:xfrm>
+      </p:grpSpPr>
+      <p:sp>
+        <p:nvSpPr>
           <p:cNvPr id="175106" name="Rectangle 2"/>
           <p:cNvSpPr>
             <a:spLocks noGrp="1" noChangeArrowheads="1"/>
@@ -36950,13 +40948,7 @@
               <a:rPr lang="de-CH" altLang="en-US" sz="1600" dirty="0" smtClean="0">
                 <a:latin typeface="Arial Unicode MS" pitchFamily="34" charset="-128"/>
               </a:rPr>
-              <a:t>eg PCA, </a:t>
-            </a:r>
-            <a:r>
-              <a:rPr lang="de-CH" altLang="en-US" sz="1600" dirty="0" smtClean="0">
-                <a:latin typeface="Arial Unicode MS" pitchFamily="34" charset="-128"/>
-              </a:rPr>
-              <a:t>ICA</a:t>
+              <a:t>eg PCA, ICA</a:t>
             </a:r>
           </a:p>
           <a:p>
@@ -37032,13 +41024,7 @@
               <a:rPr lang="de-CH" altLang="en-US" sz="2000" dirty="0" smtClean="0">
                 <a:latin typeface="Arial Unicode MS" pitchFamily="34" charset="-128"/>
               </a:rPr>
-              <a:t>Network-based </a:t>
-            </a:r>
-            <a:r>
-              <a:rPr lang="de-CH" altLang="en-US" sz="2000" dirty="0" smtClean="0">
-                <a:latin typeface="Arial Unicode MS" pitchFamily="34" charset="-128"/>
-              </a:rPr>
-              <a:t>models</a:t>
+              <a:t>Network-based models</a:t>
             </a:r>
             <a:endParaRPr lang="de-CH" altLang="en-US" sz="2000" dirty="0">
               <a:latin typeface="Arial Unicode MS" pitchFamily="34" charset="-128"/>
@@ -37057,17 +41043,8 @@
               <a:rPr lang="de-CH" altLang="en-US" sz="1600" dirty="0" smtClean="0">
                 <a:latin typeface="Arial Unicode MS" pitchFamily="34" charset="-128"/>
               </a:rPr>
-              <a:t>Dynamic Causal Modelling (DCM) </a:t>
-            </a:r>
-            <a:r>
-              <a:rPr lang="de-CH" altLang="en-US" sz="1600" dirty="0" smtClean="0">
-                <a:latin typeface="Arial Unicode MS" pitchFamily="34" charset="-128"/>
-              </a:rPr>
-              <a:t>(effective connectivity; not covered in notebooks)</a:t>
-            </a:r>
-            <a:endParaRPr lang="de-CH" altLang="en-US" sz="1600" dirty="0" smtClean="0">
-              <a:latin typeface="Arial Unicode MS" pitchFamily="34" charset="-128"/>
-            </a:endParaRPr>
+              <a:t>Dynamic Causal Modelling (DCM) (effective connectivity; not covered in notebooks)</a:t>
+            </a:r>
           </a:p>
           <a:p>
             <a:pPr lvl="1" eaLnBrk="1" hangingPunct="1">
@@ -37633,7 +41610,7 @@
 </p:sld>
 </file>
 
-<file path=ppt/slides/slide5.xml><?xml version="1.0" encoding="utf-8"?>
+<file path=ppt/slides/slide6.xml><?xml version="1.0" encoding="utf-8"?>
 <p:sld xmlns:a="http://schemas.openxmlformats.org/drawingml/2006/main" xmlns:r="http://schemas.openxmlformats.org/officeDocument/2006/relationships" xmlns:p="http://schemas.openxmlformats.org/presentationml/2006/main">
   <p:cSld>
     <p:spTree>
@@ -38595,7 +42572,7 @@
 </p:sld>
 </file>
 
-<file path=ppt/slides/slide6.xml><?xml version="1.0" encoding="utf-8"?>
+<file path=ppt/slides/slide7.xml><?xml version="1.0" encoding="utf-8"?>
 <p:sld xmlns:a="http://schemas.openxmlformats.org/drawingml/2006/main" xmlns:r="http://schemas.openxmlformats.org/officeDocument/2006/relationships" xmlns:p="http://schemas.openxmlformats.org/presentationml/2006/main">
   <p:cSld>
     <p:spTree>
@@ -39691,7 +43668,7 @@
 </p:sld>
 </file>
 
-<file path=ppt/slides/slide7.xml><?xml version="1.0" encoding="utf-8"?>
+<file path=ppt/slides/slide8.xml><?xml version="1.0" encoding="utf-8"?>
 <p:sld xmlns:a="http://schemas.openxmlformats.org/drawingml/2006/main" xmlns:r="http://schemas.openxmlformats.org/officeDocument/2006/relationships" xmlns:p="http://schemas.openxmlformats.org/presentationml/2006/main">
   <p:cSld>
     <p:spTree>
@@ -40004,7 +43981,7 @@
 </p:sld>
 </file>
 
-<file path=ppt/slides/slide8.xml><?xml version="1.0" encoding="utf-8"?>
+<file path=ppt/slides/slide9.xml><?xml version="1.0" encoding="utf-8"?>
 <p:sld xmlns:a="http://schemas.openxmlformats.org/drawingml/2006/main" xmlns:r="http://schemas.openxmlformats.org/officeDocument/2006/relationships" xmlns:p="http://schemas.openxmlformats.org/presentationml/2006/main">
   <p:cSld>
     <p:spTree>
@@ -40231,351 +44208,6 @@
         <p:cTn id="1" dur="indefinite" restart="never" nodeType="tmRoot"/>
       </p:par>
     </p:tnLst>
-  </p:timing>
-</p:sld>
-</file>
-
-<file path=ppt/slides/slide9.xml><?xml version="1.0" encoding="utf-8"?>
-<p:sld xmlns:a="http://schemas.openxmlformats.org/drawingml/2006/main" xmlns:r="http://schemas.openxmlformats.org/officeDocument/2006/relationships" xmlns:p="http://schemas.openxmlformats.org/presentationml/2006/main">
-  <p:cSld>
-    <p:spTree>
-      <p:nvGrpSpPr>
-        <p:cNvPr id="1" name=""/>
-        <p:cNvGrpSpPr/>
-        <p:nvPr/>
-      </p:nvGrpSpPr>
-      <p:grpSpPr>
-        <a:xfrm>
-          <a:off x="0" y="0"/>
-          <a:ext cx="0" cy="0"/>
-          <a:chOff x="0" y="0"/>
-          <a:chExt cx="0" cy="0"/>
-        </a:xfrm>
-      </p:grpSpPr>
-      <p:sp>
-        <p:nvSpPr>
-          <p:cNvPr id="175106" name="Rectangle 2"/>
-          <p:cNvSpPr>
-            <a:spLocks noGrp="1" noChangeArrowheads="1"/>
-          </p:cNvSpPr>
-          <p:nvPr>
-            <p:ph type="body" idx="1"/>
-          </p:nvPr>
-        </p:nvSpPr>
-        <p:spPr>
-          <a:xfrm>
-            <a:off x="107950" y="1484784"/>
-            <a:ext cx="8856663" cy="4790604"/>
-          </a:xfrm>
-          <a:solidFill>
-            <a:schemeClr val="bg1"/>
-          </a:solidFill>
-        </p:spPr>
-        <p:txBody>
-          <a:bodyPr/>
-          <a:lstStyle/>
-          <a:p>
-            <a:pPr eaLnBrk="1" hangingPunct="1">
-              <a:lnSpc>
-                <a:spcPct val="120000"/>
-              </a:lnSpc>
-              <a:spcBef>
-                <a:spcPct val="80000"/>
-              </a:spcBef>
-            </a:pPr>
-            <a:r>
-              <a:rPr lang="en-GB" altLang="en-US" sz="2000" dirty="0" smtClean="0">
-                <a:latin typeface="Arial Unicode MS" pitchFamily="34" charset="-128"/>
-              </a:rPr>
-              <a:t>PCA is an SVD of a covariance matrix, assuming </a:t>
-            </a:r>
-            <a:r>
-              <a:rPr lang="en-GB" altLang="en-US" sz="2000" i="1" dirty="0" smtClean="0">
-                <a:latin typeface="Arial Unicode MS" pitchFamily="34" charset="-128"/>
-              </a:rPr>
-              <a:t>orthogonal</a:t>
-            </a:r>
-            <a:r>
-              <a:rPr lang="en-GB" altLang="en-US" sz="2000" dirty="0" smtClean="0">
-                <a:latin typeface="Arial Unicode MS" pitchFamily="34" charset="-128"/>
-              </a:rPr>
-              <a:t> components (</a:t>
-            </a:r>
-            <a:r>
-              <a:rPr lang="en-GB" altLang="en-US" sz="2000" dirty="0" err="1" smtClean="0">
-                <a:latin typeface="Arial Unicode MS" pitchFamily="34" charset="-128"/>
-              </a:rPr>
-              <a:t>e.g</a:t>
-            </a:r>
-            <a:r>
-              <a:rPr lang="en-GB" altLang="en-US" sz="2000" dirty="0" smtClean="0">
-                <a:latin typeface="Arial Unicode MS" pitchFamily="34" charset="-128"/>
-              </a:rPr>
-              <a:t>, spatial patterns across voxels)</a:t>
-            </a:r>
-          </a:p>
-          <a:p>
-            <a:pPr eaLnBrk="1" hangingPunct="1">
-              <a:lnSpc>
-                <a:spcPct val="120000"/>
-              </a:lnSpc>
-              <a:spcBef>
-                <a:spcPct val="80000"/>
-              </a:spcBef>
-            </a:pPr>
-            <a:r>
-              <a:rPr lang="en-GB" altLang="en-US" sz="2000" dirty="0" smtClean="0">
-                <a:latin typeface="Arial Unicode MS" pitchFamily="34" charset="-128"/>
-              </a:rPr>
-              <a:t>ICA assumes components are </a:t>
-            </a:r>
-            <a:r>
-              <a:rPr lang="en-GB" altLang="en-US" sz="2000" i="1" dirty="0" smtClean="0">
-                <a:latin typeface="Arial Unicode MS" pitchFamily="34" charset="-128"/>
-              </a:rPr>
-              <a:t>independent</a:t>
-            </a:r>
-            <a:r>
-              <a:rPr lang="en-GB" altLang="en-US" sz="2000" dirty="0" smtClean="0">
-                <a:latin typeface="Arial Unicode MS" pitchFamily="34" charset="-128"/>
-              </a:rPr>
-              <a:t> (usually across space with fMRI, but could be across time) and has been shown more effective in (re)producing characteristic resting-state networks (RSNs), and separating signal from noise</a:t>
-            </a:r>
-          </a:p>
-          <a:p>
-            <a:pPr eaLnBrk="1" hangingPunct="1">
-              <a:lnSpc>
-                <a:spcPct val="120000"/>
-              </a:lnSpc>
-              <a:spcBef>
-                <a:spcPct val="80000"/>
-              </a:spcBef>
-            </a:pPr>
-            <a:r>
-              <a:rPr lang="en-GB" altLang="en-US" sz="2000" dirty="0" smtClean="0">
-                <a:latin typeface="Arial Unicode MS" pitchFamily="34" charset="-128"/>
-              </a:rPr>
-              <a:t>There are other types of matrix factorisation (e.g., non-negative, tensor-based) that have been tried, as well as various clustering techniques</a:t>
-            </a:r>
-          </a:p>
-          <a:p>
-            <a:pPr eaLnBrk="1" hangingPunct="1">
-              <a:lnSpc>
-                <a:spcPct val="120000"/>
-              </a:lnSpc>
-              <a:spcBef>
-                <a:spcPct val="80000"/>
-              </a:spcBef>
-            </a:pPr>
-            <a:r>
-              <a:rPr lang="en-GB" altLang="en-US" sz="2000" dirty="0" smtClean="0">
-                <a:latin typeface="Arial Unicode MS" pitchFamily="34" charset="-128"/>
-              </a:rPr>
-              <a:t>Incidentally, while PCA is an SVD of the data covariance matrix (Y’Y), other techniques like CCA and PLS are SVDs of data-model covariance (Y’X)…</a:t>
-            </a:r>
-          </a:p>
-          <a:p>
-            <a:pPr marL="0" indent="0" eaLnBrk="1" hangingPunct="1">
-              <a:lnSpc>
-                <a:spcPct val="120000"/>
-              </a:lnSpc>
-              <a:spcBef>
-                <a:spcPct val="80000"/>
-              </a:spcBef>
-              <a:buNone/>
-            </a:pPr>
-            <a:endParaRPr lang="en-GB" altLang="en-US" sz="2000" dirty="0">
-              <a:latin typeface="Arial Unicode MS" pitchFamily="34" charset="-128"/>
-            </a:endParaRPr>
-          </a:p>
-          <a:p>
-            <a:pPr eaLnBrk="1" hangingPunct="1">
-              <a:lnSpc>
-                <a:spcPct val="120000"/>
-              </a:lnSpc>
-              <a:spcBef>
-                <a:spcPct val="80000"/>
-              </a:spcBef>
-            </a:pPr>
-            <a:endParaRPr lang="de-CH" altLang="en-US" sz="2000" dirty="0" smtClean="0">
-              <a:latin typeface="Arial Unicode MS" pitchFamily="34" charset="-128"/>
-            </a:endParaRPr>
-          </a:p>
-        </p:txBody>
-      </p:sp>
-      <p:sp>
-        <p:nvSpPr>
-          <p:cNvPr id="31747" name="Rectangle 3"/>
-          <p:cNvSpPr>
-            <a:spLocks noGrp="1" noChangeArrowheads="1"/>
-          </p:cNvSpPr>
-          <p:nvPr>
-            <p:ph type="title"/>
-          </p:nvPr>
-        </p:nvSpPr>
-        <p:spPr>
-          <a:xfrm>
-            <a:off x="457200" y="188640"/>
-            <a:ext cx="3646748" cy="954360"/>
-          </a:xfrm>
-        </p:spPr>
-        <p:txBody>
-          <a:bodyPr/>
-          <a:lstStyle/>
-          <a:p>
-            <a:pPr eaLnBrk="1" hangingPunct="1"/>
-            <a:r>
-              <a:rPr lang="de-CH" altLang="en-US" sz="3600" b="1" dirty="0" smtClean="0">
-                <a:latin typeface="Arial Unicode MS" pitchFamily="34" charset="-128"/>
-              </a:rPr>
-              <a:t>Multivariate fC</a:t>
-            </a:r>
-            <a:endParaRPr lang="en-US" altLang="en-US" sz="3600" b="1" dirty="0" smtClean="0">
-              <a:latin typeface="Arial Unicode MS" pitchFamily="34" charset="-128"/>
-            </a:endParaRPr>
-          </a:p>
-        </p:txBody>
-      </p:sp>
-    </p:spTree>
-    <p:extLst>
-      <p:ext uri="{BB962C8B-B14F-4D97-AF65-F5344CB8AC3E}">
-        <p14:creationId xmlns:p14="http://schemas.microsoft.com/office/powerpoint/2010/main" val="1725068671"/>
-      </p:ext>
-    </p:extLst>
-  </p:cSld>
-  <p:clrMapOvr>
-    <a:masterClrMapping/>
-  </p:clrMapOvr>
-  <p:timing>
-    <p:tnLst>
-      <p:par>
-        <p:cTn id="1" dur="indefinite" restart="never" nodeType="tmRoot">
-          <p:childTnLst>
-            <p:seq concurrent="1" nextAc="seek">
-              <p:cTn id="2" dur="indefinite" nodeType="mainSeq">
-                <p:childTnLst>
-                  <p:par>
-                    <p:cTn id="3" fill="hold">
-                      <p:stCondLst>
-                        <p:cond delay="indefinite"/>
-                      </p:stCondLst>
-                      <p:childTnLst>
-                        <p:par>
-                          <p:cTn id="4" fill="hold">
-                            <p:stCondLst>
-                              <p:cond delay="0"/>
-                            </p:stCondLst>
-                            <p:childTnLst>
-                              <p:par>
-                                <p:cTn id="5" presetID="1" presetClass="entr" presetSubtype="0" fill="hold" grpId="0" nodeType="clickEffect">
-                                  <p:stCondLst>
-                                    <p:cond delay="0"/>
-                                  </p:stCondLst>
-                                  <p:childTnLst>
-                                    <p:set>
-                                      <p:cBhvr>
-                                        <p:cTn id="6" dur="1" fill="hold">
-                                          <p:stCondLst>
-                                            <p:cond delay="0"/>
-                                          </p:stCondLst>
-                                        </p:cTn>
-                                        <p:tgtEl>
-                                          <p:spTgt spid="175106">
-                                            <p:txEl>
-                                              <p:pRg st="2" end="2"/>
-                                            </p:txEl>
-                                          </p:spTgt>
-                                        </p:tgtEl>
-                                        <p:attrNameLst>
-                                          <p:attrName>style.visibility</p:attrName>
-                                        </p:attrNameLst>
-                                      </p:cBhvr>
-                                      <p:to>
-                                        <p:strVal val="visible"/>
-                                      </p:to>
-                                    </p:set>
-                                  </p:childTnLst>
-                                </p:cTn>
-                              </p:par>
-                            </p:childTnLst>
-                          </p:cTn>
-                        </p:par>
-                      </p:childTnLst>
-                    </p:cTn>
-                  </p:par>
-                  <p:par>
-                    <p:cTn id="7" fill="hold">
-                      <p:stCondLst>
-                        <p:cond delay="indefinite"/>
-                      </p:stCondLst>
-                      <p:childTnLst>
-                        <p:par>
-                          <p:cTn id="8" fill="hold">
-                            <p:stCondLst>
-                              <p:cond delay="0"/>
-                            </p:stCondLst>
-                            <p:childTnLst>
-                              <p:par>
-                                <p:cTn id="9" presetID="1" presetClass="entr" presetSubtype="0" fill="hold" grpId="0" nodeType="clickEffect">
-                                  <p:stCondLst>
-                                    <p:cond delay="0"/>
-                                  </p:stCondLst>
-                                  <p:childTnLst>
-                                    <p:set>
-                                      <p:cBhvr>
-                                        <p:cTn id="10" dur="1" fill="hold">
-                                          <p:stCondLst>
-                                            <p:cond delay="0"/>
-                                          </p:stCondLst>
-                                        </p:cTn>
-                                        <p:tgtEl>
-                                          <p:spTgt spid="175106">
-                                            <p:txEl>
-                                              <p:pRg st="3" end="3"/>
-                                            </p:txEl>
-                                          </p:spTgt>
-                                        </p:tgtEl>
-                                        <p:attrNameLst>
-                                          <p:attrName>style.visibility</p:attrName>
-                                        </p:attrNameLst>
-                                      </p:cBhvr>
-                                      <p:to>
-                                        <p:strVal val="visible"/>
-                                      </p:to>
-                                    </p:set>
-                                  </p:childTnLst>
-                                </p:cTn>
-                              </p:par>
-                            </p:childTnLst>
-                          </p:cTn>
-                        </p:par>
-                      </p:childTnLst>
-                    </p:cTn>
-                  </p:par>
-                </p:childTnLst>
-              </p:cTn>
-              <p:prevCondLst>
-                <p:cond evt="onPrev" delay="0">
-                  <p:tgtEl>
-                    <p:sldTgt/>
-                  </p:tgtEl>
-                </p:cond>
-              </p:prevCondLst>
-              <p:nextCondLst>
-                <p:cond evt="onNext" delay="0">
-                  <p:tgtEl>
-                    <p:sldTgt/>
-                  </p:tgtEl>
-                </p:cond>
-              </p:nextCondLst>
-            </p:seq>
-          </p:childTnLst>
-        </p:cTn>
-      </p:par>
-    </p:tnLst>
-    <p:bldLst>
-      <p:bldP spid="175106" grpId="0" uiExpand="1" build="p" autoUpdateAnimBg="0"/>
-    </p:bldLst>
   </p:timing>
 </p:sld>
 </file>
